--- a/docs/zh/09-Claude Code 使用技巧与注意事项-WPS兼容版.pptx
+++ b/docs/zh/09-Claude Code 使用技巧与注意事项-WPS兼容版.pptx
@@ -17,6 +17,7 @@
     <p:sldId id="265" r:id="rId16"/>
     <p:sldId id="266" r:id="rId17"/>
     <p:sldId id="267" r:id="rId18"/>
+    <p:sldId id="268" r:id="rId19"/>
   </p:sldIdLst>
   <p:sldSz cx="12191695" cy="6858000" type="screen4x3"/>
   <p:notesSz cx="6858000" cy="9144000"/>
@@ -3209,7 +3210,7 @@
                 </a:solidFill>
                 <a:latin typeface="Arial"/>
               </a:rPr>
-              <a:t>关注点：怎么提需求、怎么控制行为、怎么避免常见误用</a:t>
+              <a:t>先解释 Claude Code 从工程上是什么，再解释怎样用会更稳</a:t>
             </a:r>
           </a:p>
           <a:p>
@@ -3225,7 +3226,7 @@
                 </a:solidFill>
                 <a:latin typeface="Arial"/>
               </a:rPr>
-              <a:t>每条技巧都给出源码支撑，不只讲经验</a:t>
+              <a:t>每条技巧都附源码支撑，不只讲经验</a:t>
             </a:r>
           </a:p>
         </p:txBody>
@@ -3285,7 +3286,7 @@
                 </a:solidFill>
                 <a:latin typeface="Arial"/>
               </a:rPr>
-              <a:t>技巧 8：高风险动作要显式要求先确认</a:t>
+              <a:t>技巧 6：高风险动作要显式要求先确认</a:t>
             </a:r>
           </a:p>
         </p:txBody>
@@ -3599,7 +3600,7 @@
                 </a:solidFill>
                 <a:latin typeface="Arial"/>
               </a:rPr>
-              <a:t>技巧 9：做方案时，先走 Plan Mode 风格</a:t>
+              <a:t>两个进阶技巧</a:t>
             </a:r>
           </a:p>
         </p:txBody>
@@ -3649,211 +3650,105 @@
       </p:sp>
       <p:sp>
         <p:nvSpPr>
-          <p:cNvPr id="4" name="Rounded Rectangle 3"/>
-          <p:cNvSpPr/>
+          <p:cNvPr id="4" name="TextBox 3"/>
+          <p:cNvSpPr txBox="1"/>
           <p:nvPr/>
         </p:nvSpPr>
         <p:spPr>
           <a:xfrm>
-            <a:off x="731520" y="1508760"/>
-            <a:ext cx="3291840" cy="1828800"/>
-          </a:xfrm>
-          <a:prstGeom prst="roundRect">
+            <a:off x="777240" y="1508760"/>
+            <a:ext cx="10241280" cy="4389120"/>
+          </a:xfrm>
+          <a:prstGeom prst="rect">
             <a:avLst/>
           </a:prstGeom>
-          <a:solidFill>
-            <a:srgbClr val="FFFFFF"/>
-          </a:solidFill>
-          <a:ln>
-            <a:solidFill>
-              <a:srgbClr val="205295"/>
-            </a:solidFill>
-          </a:ln>
-        </p:spPr>
-        <p:style>
-          <a:lnRef idx="1">
-            <a:schemeClr val="accent1"/>
-          </a:lnRef>
-          <a:fillRef idx="3">
-            <a:schemeClr val="accent1"/>
-          </a:fillRef>
-          <a:effectRef idx="2">
-            <a:schemeClr val="accent1"/>
-          </a:effectRef>
-          <a:fontRef idx="minor">
-            <a:schemeClr val="lt1"/>
-          </a:fontRef>
-        </p:style>
-        <p:txBody>
-          <a:bodyPr rtlCol="0" anchor="ctr" wrap="square" lIns="76200" rIns="76200" tIns="50800" bIns="50800"/>
-          <a:lstStyle/>
-          <a:p>
-            <a:pPr algn="ctr"/>
-            <a:r>
-              <a:rPr sz="1600" b="1">
-                <a:solidFill>
-                  <a:srgbClr val="205295"/>
-                </a:solidFill>
-                <a:latin typeface="Arial"/>
-              </a:rPr>
-              <a:t>推荐写法</a:t>
-            </a:r>
-          </a:p>
+          <a:noFill/>
+        </p:spPr>
+        <p:txBody>
+          <a:bodyPr wrap="square" lIns="76200" rIns="76200" tIns="50800" bIns="50800">
+            <a:spAutoFit/>
+          </a:bodyPr>
+          <a:lstStyle/>
           <a:p>
             <a:pPr>
-              <a:spcBef>
-                <a:spcPts val="400"/>
-              </a:spcBef>
+              <a:spcAft>
+                <a:spcPts val="800"/>
+              </a:spcAft>
             </a:pPr>
             <a:r>
-              <a:rPr sz="1300" b="0">
+              <a:rPr sz="1800" b="0">
                 <a:solidFill>
                   <a:srgbClr val="1F2937"/>
                 </a:solidFill>
                 <a:latin typeface="Arial"/>
               </a:rPr>
-              <a:t>先不要实现。先快速读关键文件，给我一个可执行计划；只问代码里无法确定的问题。</a:t>
-            </a:r>
-          </a:p>
-        </p:txBody>
-      </p:sp>
-      <p:sp>
-        <p:nvSpPr>
-          <p:cNvPr id="5" name="Rounded Rectangle 4"/>
-          <p:cNvSpPr/>
+              <a:t>独立查询可以显式允许 parallel（并行）</a:t>
+            </a:r>
+          </a:p>
+          <a:p>
+            <a:pPr>
+              <a:spcAft>
+                <a:spcPts val="800"/>
+              </a:spcAft>
+            </a:pPr>
+            <a:r>
+              <a:rPr sz="1800" b="0">
+                <a:solidFill>
+                  <a:srgbClr val="1F2937"/>
+                </a:solidFill>
+                <a:latin typeface="Arial"/>
+              </a:rPr>
+              <a:t>做方案时，先走 Plan Mode 风格：先 Explore，再写计划，再问代码里无法确定的问题</a:t>
+            </a:r>
+          </a:p>
+          <a:p>
+            <a:pPr>
+              <a:spcAft>
+                <a:spcPts val="800"/>
+              </a:spcAft>
+            </a:pPr>
+            <a:r>
+              <a:rPr sz="1800" b="0">
+                <a:solidFill>
+                  <a:srgbClr val="1F2937"/>
+                </a:solidFill>
+                <a:latin typeface="Arial"/>
+              </a:rPr>
+              <a:t>这两条都不是经验贴，而是源码里明确写出来的工作流偏好</a:t>
+            </a:r>
+          </a:p>
+        </p:txBody>
+      </p:sp>
+      <p:sp>
+        <p:nvSpPr>
+          <p:cNvPr id="5" name="TextBox 4"/>
+          <p:cNvSpPr txBox="1"/>
           <p:nvPr/>
         </p:nvSpPr>
         <p:spPr>
           <a:xfrm>
-            <a:off x="4297680" y="1508760"/>
-            <a:ext cx="3474720" cy="1828800"/>
-          </a:xfrm>
-          <a:prstGeom prst="roundRect">
+            <a:off x="841248" y="5532120"/>
+            <a:ext cx="10058400" cy="502920"/>
+          </a:xfrm>
+          <a:prstGeom prst="rect">
             <a:avLst/>
           </a:prstGeom>
-          <a:solidFill>
-            <a:srgbClr val="FFFFFF"/>
-          </a:solidFill>
-          <a:ln>
-            <a:solidFill>
-              <a:srgbClr val="205295"/>
-            </a:solidFill>
-          </a:ln>
-        </p:spPr>
-        <p:style>
-          <a:lnRef idx="1">
-            <a:schemeClr val="accent1"/>
-          </a:lnRef>
-          <a:fillRef idx="3">
-            <a:schemeClr val="accent1"/>
-          </a:fillRef>
-          <a:effectRef idx="2">
-            <a:schemeClr val="accent1"/>
-          </a:effectRef>
-          <a:fontRef idx="minor">
-            <a:schemeClr val="lt1"/>
-          </a:fontRef>
-        </p:style>
-        <p:txBody>
-          <a:bodyPr rtlCol="0" anchor="ctr" wrap="square" lIns="76200" rIns="76200" tIns="50800" bIns="50800"/>
-          <a:lstStyle/>
-          <a:p>
-            <a:pPr algn="ctr"/>
-            <a:r>
-              <a:rPr sz="1600" b="1">
-                <a:solidFill>
-                  <a:srgbClr val="205295"/>
-                </a:solidFill>
-                <a:latin typeface="Arial"/>
-              </a:rPr>
-              <a:t>为什么有效</a:t>
-            </a:r>
-          </a:p>
-          <a:p>
-            <a:pPr>
-              <a:spcBef>
-                <a:spcPts val="400"/>
-              </a:spcBef>
-            </a:pPr>
+          <a:noFill/>
+        </p:spPr>
+        <p:txBody>
+          <a:bodyPr wrap="square" lIns="76200" rIns="76200" tIns="50800" bIns="50800">
+            <a:spAutoFit/>
+          </a:bodyPr>
+          <a:lstStyle/>
+          <a:p>
             <a:r>
               <a:rPr sz="1300" b="0">
                 <a:solidFill>
-                  <a:srgbClr val="1F2937"/>
-                </a:solidFill>
-                <a:latin typeface="Arial"/>
-              </a:rPr>
-              <a:t>Plan Mode 的原生流程就是先 Explore，再写计划，再只问代码解决不了的问题。</a:t>
-            </a:r>
-          </a:p>
-        </p:txBody>
-      </p:sp>
-      <p:sp>
-        <p:nvSpPr>
-          <p:cNvPr id="6" name="Rounded Rectangle 5"/>
-          <p:cNvSpPr/>
-          <p:nvPr/>
-        </p:nvSpPr>
-        <p:spPr>
-          <a:xfrm>
-            <a:off x="8046720" y="1508760"/>
-            <a:ext cx="3383280" cy="1828800"/>
-          </a:xfrm>
-          <a:prstGeom prst="roundRect">
-            <a:avLst/>
-          </a:prstGeom>
-          <a:solidFill>
-            <a:srgbClr val="FFFFFF"/>
-          </a:solidFill>
-          <a:ln>
-            <a:solidFill>
-              <a:srgbClr val="205295"/>
-            </a:solidFill>
-          </a:ln>
-        </p:spPr>
-        <p:style>
-          <a:lnRef idx="1">
-            <a:schemeClr val="accent1"/>
-          </a:lnRef>
-          <a:fillRef idx="3">
-            <a:schemeClr val="accent1"/>
-          </a:fillRef>
-          <a:effectRef idx="2">
-            <a:schemeClr val="accent1"/>
-          </a:effectRef>
-          <a:fontRef idx="minor">
-            <a:schemeClr val="lt1"/>
-          </a:fontRef>
-        </p:style>
-        <p:txBody>
-          <a:bodyPr rtlCol="0" anchor="ctr" wrap="square" lIns="76200" rIns="76200" tIns="50800" bIns="50800"/>
-          <a:lstStyle/>
-          <a:p>
-            <a:pPr algn="ctr"/>
-            <a:r>
-              <a:rPr sz="1600" b="1">
-                <a:solidFill>
-                  <a:srgbClr val="205295"/>
-                </a:solidFill>
-                <a:latin typeface="Arial"/>
-              </a:rPr>
-              <a:t>源码支撑</a:t>
-            </a:r>
-          </a:p>
-          <a:p>
-            <a:pPr>
-              <a:spcBef>
-                <a:spcPts val="400"/>
-              </a:spcBef>
-            </a:pPr>
-            <a:r>
-              <a:rPr sz="1300" b="0">
-                <a:solidFill>
-                  <a:srgbClr val="1F2937"/>
-                </a:solidFill>
-                <a:latin typeface="Arial"/>
-              </a:rPr>
-              <a:t>messages.ts#L3336
-messages.ts#L3350</a:t>
+                  <a:srgbClr val="475569"/>
+                </a:solidFill>
+                <a:latin typeface="Arial"/>
+              </a:rPr>
+              <a:t>源码依据：prompts.ts#L310、messages.ts#L3336、BashTool prompt#L298。</a:t>
             </a:r>
           </a:p>
         </p:txBody>
@@ -3913,7 +3808,7 @@
                 </a:solidFill>
                 <a:latin typeface="Arial"/>
               </a:rPr>
-              <a:t>最后收成 6 条最该记住的注意事项</a:t>
+              <a:t>常见误区与注意事项</a:t>
             </a:r>
           </a:p>
         </p:txBody>
@@ -3995,7 +3890,7 @@
                 </a:solidFill>
                 <a:latin typeface="Arial"/>
               </a:rPr>
-              <a:t>任务写成：目标 + 范围 + 约束 + 验证</a:t>
+              <a:t>不要把 Claude Code 当自由聊天助手来用</a:t>
             </a:r>
           </a:p>
           <a:p>
@@ -4011,7 +3906,7 @@
                 </a:solidFill>
                 <a:latin typeface="Arial"/>
               </a:rPr>
-              <a:t>明确要求先读代码</a:t>
+              <a:t>不要一上来就让它“大改一遍”</a:t>
             </a:r>
           </a:p>
           <a:p>
@@ -4027,7 +3922,7 @@
                 </a:solidFill>
                 <a:latin typeface="Arial"/>
               </a:rPr>
-              <a:t>强调最小改动、优先复用</a:t>
+              <a:t>不要默认它已经验证过</a:t>
             </a:r>
           </a:p>
           <a:p>
@@ -4043,9 +3938,169 @@
                 </a:solidFill>
                 <a:latin typeface="Arial"/>
               </a:rPr>
-              <a:t>优先 dedicated tools，不要默认走 Bash</a:t>
-            </a:r>
-          </a:p>
+              <a:t>不要把高风险授权写得太模糊</a:t>
+            </a:r>
+          </a:p>
+        </p:txBody>
+      </p:sp>
+      <p:sp>
+        <p:nvSpPr>
+          <p:cNvPr id="5" name="TextBox 4"/>
+          <p:cNvSpPr txBox="1"/>
+          <p:nvPr/>
+        </p:nvSpPr>
+        <p:spPr>
+          <a:xfrm>
+            <a:off x="841248" y="5532120"/>
+            <a:ext cx="10058400" cy="502920"/>
+          </a:xfrm>
+          <a:prstGeom prst="rect">
+            <a:avLst/>
+          </a:prstGeom>
+          <a:noFill/>
+        </p:spPr>
+        <p:txBody>
+          <a:bodyPr wrap="square" lIns="76200" rIns="76200" tIns="50800" bIns="50800">
+            <a:spAutoFit/>
+          </a:bodyPr>
+          <a:lstStyle/>
+          <a:p>
+            <a:r>
+              <a:rPr sz="1300" b="0">
+                <a:solidFill>
+                  <a:srgbClr val="475569"/>
+                </a:solidFill>
+                <a:latin typeface="Arial"/>
+              </a:rPr>
+              <a:t>这些误区都能在 prompts.ts 的默认约束里找到根源。</a:t>
+            </a:r>
+          </a:p>
+        </p:txBody>
+      </p:sp>
+    </p:spTree>
+  </p:cSld>
+  <p:clrMapOvr>
+    <a:masterClrMapping/>
+  </p:clrMapOvr>
+</p:sld>
+</file>
+
+<file path=ppt/slides/slide13.xml><?xml version="1.0" encoding="utf-8"?>
+<p:sld xmlns:a="http://schemas.openxmlformats.org/drawingml/2006/main" xmlns:p="http://schemas.openxmlformats.org/presentationml/2006/main" xmlns:r="http://schemas.openxmlformats.org/officeDocument/2006/relationships">
+  <p:cSld>
+    <p:bg>
+      <p:bgPr>
+        <a:solidFill>
+          <a:srgbClr val="F8FAFC"/>
+        </a:solidFill>
+        <a:effectLst/>
+      </p:bgPr>
+    </p:bg>
+    <p:spTree>
+      <p:nvGrpSpPr>
+        <p:cNvPr id="1" name=""/>
+        <p:cNvGrpSpPr/>
+        <p:nvPr/>
+      </p:nvGrpSpPr>
+      <p:grpSpPr/>
+      <p:sp>
+        <p:nvSpPr>
+          <p:cNvPr id="2" name="TextBox 1"/>
+          <p:cNvSpPr txBox="1"/>
+          <p:nvPr/>
+        </p:nvSpPr>
+        <p:spPr>
+          <a:xfrm>
+            <a:off x="594360" y="384048"/>
+            <a:ext cx="10789920" cy="685800"/>
+          </a:xfrm>
+          <a:prstGeom prst="rect">
+            <a:avLst/>
+          </a:prstGeom>
+          <a:noFill/>
+        </p:spPr>
+        <p:txBody>
+          <a:bodyPr wrap="square" lIns="76200" rIns="76200" tIns="50800" bIns="50800">
+            <a:spAutoFit/>
+          </a:bodyPr>
+          <a:lstStyle/>
+          <a:p>
+            <a:r>
+              <a:rPr sz="2600" b="1">
+                <a:solidFill>
+                  <a:srgbClr val="0B1F44"/>
+                </a:solidFill>
+                <a:latin typeface="Arial"/>
+              </a:rPr>
+              <a:t>最后收成 6 条最小使用清单</a:t>
+            </a:r>
+          </a:p>
+        </p:txBody>
+      </p:sp>
+      <p:sp>
+        <p:nvSpPr>
+          <p:cNvPr id="3" name="Rectangle 2"/>
+          <p:cNvSpPr/>
+          <p:nvPr/>
+        </p:nvSpPr>
+        <p:spPr>
+          <a:xfrm>
+            <a:off x="621792" y="1078992"/>
+            <a:ext cx="2011680" cy="27432"/>
+          </a:xfrm>
+          <a:prstGeom prst="rect">
+            <a:avLst/>
+          </a:prstGeom>
+          <a:solidFill>
+            <a:srgbClr val="DBE4F0"/>
+          </a:solidFill>
+          <a:ln>
+            <a:noFill/>
+          </a:ln>
+        </p:spPr>
+        <p:style>
+          <a:lnRef idx="1">
+            <a:schemeClr val="accent1"/>
+          </a:lnRef>
+          <a:fillRef idx="3">
+            <a:schemeClr val="accent1"/>
+          </a:fillRef>
+          <a:effectRef idx="2">
+            <a:schemeClr val="accent1"/>
+          </a:effectRef>
+          <a:fontRef idx="minor">
+            <a:schemeClr val="lt1"/>
+          </a:fontRef>
+        </p:style>
+        <p:txBody>
+          <a:bodyPr rtlCol="0" anchor="ctr"/>
+          <a:lstStyle/>
+          <a:p>
+            <a:pPr algn="ctr"/>
+          </a:p>
+        </p:txBody>
+      </p:sp>
+      <p:sp>
+        <p:nvSpPr>
+          <p:cNvPr id="4" name="TextBox 3"/>
+          <p:cNvSpPr txBox="1"/>
+          <p:nvPr/>
+        </p:nvSpPr>
+        <p:spPr>
+          <a:xfrm>
+            <a:off x="777240" y="1508760"/>
+            <a:ext cx="10241280" cy="4389120"/>
+          </a:xfrm>
+          <a:prstGeom prst="rect">
+            <a:avLst/>
+          </a:prstGeom>
+          <a:noFill/>
+        </p:spPr>
+        <p:txBody>
+          <a:bodyPr wrap="square" lIns="76200" rIns="76200" tIns="50800" bIns="50800">
+            <a:spAutoFit/>
+          </a:bodyPr>
+          <a:lstStyle/>
           <a:p>
             <a:pPr>
               <a:spcAft>
@@ -4059,7 +4114,7 @@
                 </a:solidFill>
                 <a:latin typeface="Arial"/>
               </a:rPr>
-              <a:t>验证结果要如实汇报</a:t>
+              <a:t>任务写成：目标 + 范围 + 约束 + 验证</a:t>
             </a:r>
           </a:p>
           <a:p>
@@ -4075,6 +4130,70 @@
                 </a:solidFill>
                 <a:latin typeface="Arial"/>
               </a:rPr>
+              <a:t>明确要求先读代码</a:t>
+            </a:r>
+          </a:p>
+          <a:p>
+            <a:pPr>
+              <a:spcAft>
+                <a:spcPts val="800"/>
+              </a:spcAft>
+            </a:pPr>
+            <a:r>
+              <a:rPr sz="1800" b="0">
+                <a:solidFill>
+                  <a:srgbClr val="1F2937"/>
+                </a:solidFill>
+                <a:latin typeface="Arial"/>
+              </a:rPr>
+              <a:t>强调最小改动、优先复用</a:t>
+            </a:r>
+          </a:p>
+          <a:p>
+            <a:pPr>
+              <a:spcAft>
+                <a:spcPts val="800"/>
+              </a:spcAft>
+            </a:pPr>
+            <a:r>
+              <a:rPr sz="1800" b="0">
+                <a:solidFill>
+                  <a:srgbClr val="1F2937"/>
+                </a:solidFill>
+                <a:latin typeface="Arial"/>
+              </a:rPr>
+              <a:t>优先 dedicated tools，不要默认走 Bash</a:t>
+            </a:r>
+          </a:p>
+          <a:p>
+            <a:pPr>
+              <a:spcAft>
+                <a:spcPts val="800"/>
+              </a:spcAft>
+            </a:pPr>
+            <a:r>
+              <a:rPr sz="1800" b="0">
+                <a:solidFill>
+                  <a:srgbClr val="1F2937"/>
+                </a:solidFill>
+                <a:latin typeface="Arial"/>
+              </a:rPr>
+              <a:t>验证结果要如实汇报</a:t>
+            </a:r>
+          </a:p>
+          <a:p>
+            <a:pPr>
+              <a:spcAft>
+                <a:spcPts val="800"/>
+              </a:spcAft>
+            </a:pPr>
+            <a:r>
+              <a:rPr sz="1800" b="0">
+                <a:solidFill>
+                  <a:srgbClr val="1F2937"/>
+                </a:solidFill>
+                <a:latin typeface="Arial"/>
+              </a:rPr>
               <a:t>高风险动作先确认</a:t>
             </a:r>
           </a:p>
@@ -4109,7 +4228,7 @@
                 </a:solidFill>
                 <a:latin typeface="Arial"/>
               </a:rPr>
-              <a:t>这些建议不是经验口号，而是能直接在源码 prompt 和执行约束里找到依据。</a:t>
+              <a:t>这些建议的共同点是：让用户输入尽量贴近 Claude Code 源码里的默认工作方式。</a:t>
             </a:r>
           </a:p>
         </p:txBody>
@@ -4169,7 +4288,7 @@
                 </a:solidFill>
                 <a:latin typeface="Arial"/>
               </a:rPr>
-              <a:t>先给结论</a:t>
+              <a:t>先给结论：Claude Code 不是什么</a:t>
             </a:r>
           </a:p>
         </p:txBody>
@@ -4251,7 +4370,7 @@
                 </a:solidFill>
                 <a:latin typeface="Arial"/>
               </a:rPr>
-              <a:t>Claude Code 默认把用户请求理解成软件工程任务，不是自由聊天</a:t>
+              <a:t>它不是自由聊天助手，也不是“随便说一句就稳定帮你把工程活干好”的黑盒</a:t>
             </a:r>
           </a:p>
           <a:p>
@@ -4267,7 +4386,7 @@
                 </a:solidFill>
                 <a:latin typeface="Arial"/>
               </a:rPr>
-              <a:t>它偏好：先读代码、最小改动、优先复用、专用工具优先、验证后如实汇报</a:t>
+              <a:t>从源码看，它更像 software engineering agent（软件工程代理）</a:t>
             </a:r>
           </a:p>
           <a:p>
@@ -4283,7 +4402,7 @@
                 </a:solidFill>
                 <a:latin typeface="Arial"/>
               </a:rPr>
-              <a:t>所以用户提示词越工程化，它的表现越稳定</a:t>
+              <a:t>所以用户输入越工程化，Claude Code 的表现通常越稳定</a:t>
             </a:r>
           </a:p>
         </p:txBody>
@@ -4317,7 +4436,7 @@
                 </a:solidFill>
                 <a:latin typeface="Arial"/>
               </a:rPr>
-              <a:t>核心依据主要来自 prompts.ts、messages.ts 和 BashTool prompt。</a:t>
+              <a:t>源码依据：prompts.ts 把默认场景定义为 software engineering task。</a:t>
             </a:r>
           </a:p>
         </p:txBody>
@@ -4377,7 +4496,7 @@
                 </a:solidFill>
                 <a:latin typeface="Arial"/>
               </a:rPr>
-              <a:t>技巧 1：任务写成“目标 + 范围 + 约束 + 验证”</a:t>
+              <a:t>从源码看：Claude Code 是什么</a:t>
             </a:r>
           </a:p>
         </p:txBody>
@@ -4427,215 +4546,137 @@
       </p:sp>
       <p:sp>
         <p:nvSpPr>
-          <p:cNvPr id="4" name="Rounded Rectangle 3"/>
-          <p:cNvSpPr/>
+          <p:cNvPr id="4" name="TextBox 3"/>
+          <p:cNvSpPr txBox="1"/>
           <p:nvPr/>
         </p:nvSpPr>
         <p:spPr>
           <a:xfrm>
-            <a:off x="731520" y="1508760"/>
-            <a:ext cx="3291840" cy="1828800"/>
-          </a:xfrm>
-          <a:prstGeom prst="roundRect">
+            <a:off x="777240" y="1508760"/>
+            <a:ext cx="10241280" cy="4389120"/>
+          </a:xfrm>
+          <a:prstGeom prst="rect">
             <a:avLst/>
           </a:prstGeom>
-          <a:solidFill>
-            <a:srgbClr val="FFFFFF"/>
-          </a:solidFill>
-          <a:ln>
-            <a:solidFill>
-              <a:srgbClr val="205295"/>
-            </a:solidFill>
-          </a:ln>
-        </p:spPr>
-        <p:style>
-          <a:lnRef idx="1">
-            <a:schemeClr val="accent1"/>
-          </a:lnRef>
-          <a:fillRef idx="3">
-            <a:schemeClr val="accent1"/>
-          </a:fillRef>
-          <a:effectRef idx="2">
-            <a:schemeClr val="accent1"/>
-          </a:effectRef>
-          <a:fontRef idx="minor">
-            <a:schemeClr val="lt1"/>
-          </a:fontRef>
-        </p:style>
-        <p:txBody>
-          <a:bodyPr rtlCol="0" anchor="ctr" wrap="square" lIns="76200" rIns="76200" tIns="50800" bIns="50800"/>
-          <a:lstStyle/>
-          <a:p>
-            <a:pPr algn="ctr"/>
-            <a:r>
-              <a:rPr sz="1600" b="1">
-                <a:solidFill>
-                  <a:srgbClr val="205295"/>
-                </a:solidFill>
-                <a:latin typeface="Arial"/>
-              </a:rPr>
-              <a:t>推荐写法</a:t>
-            </a:r>
-          </a:p>
+          <a:noFill/>
+        </p:spPr>
+        <p:txBody>
+          <a:bodyPr wrap="square" lIns="76200" rIns="76200" tIns="50800" bIns="50800">
+            <a:spAutoFit/>
+          </a:bodyPr>
+          <a:lstStyle/>
           <a:p>
             <a:pPr>
-              <a:spcBef>
-                <a:spcPts val="400"/>
-              </a:spcBef>
+              <a:spcAft>
+                <a:spcPts val="800"/>
+              </a:spcAft>
             </a:pPr>
             <a:r>
-              <a:rPr sz="1300" b="0">
+              <a:rPr sz="1800" b="0">
                 <a:solidFill>
                   <a:srgbClr val="1F2937"/>
                 </a:solidFill>
                 <a:latin typeface="Arial"/>
               </a:rPr>
-              <a:t>目标：修复/实现……
-范围：只改……
-约束：不要做无关重构
-验证：跑测试并说明结果</a:t>
-            </a:r>
-          </a:p>
-        </p:txBody>
-      </p:sp>
-      <p:sp>
-        <p:nvSpPr>
-          <p:cNvPr id="5" name="Rounded Rectangle 4"/>
-          <p:cNvSpPr/>
+              <a:t>main.tsx：bootstrap / assembly（启动装配）</a:t>
+            </a:r>
+          </a:p>
+          <a:p>
+            <a:pPr>
+              <a:spcAft>
+                <a:spcPts val="800"/>
+              </a:spcAft>
+            </a:pPr>
+            <a:r>
+              <a:rPr sz="1800" b="0">
+                <a:solidFill>
+                  <a:srgbClr val="1F2937"/>
+                </a:solidFill>
+                <a:latin typeface="Arial"/>
+              </a:rPr>
+              <a:t>QueryEngine.ts：conversation host（会话宿主）</a:t>
+            </a:r>
+          </a:p>
+          <a:p>
+            <a:pPr>
+              <a:spcAft>
+                <a:spcPts val="800"/>
+              </a:spcAft>
+            </a:pPr>
+            <a:r>
+              <a:rPr sz="1800" b="0">
+                <a:solidFill>
+                  <a:srgbClr val="1F2937"/>
+                </a:solidFill>
+                <a:latin typeface="Arial"/>
+              </a:rPr>
+              <a:t>query.ts：turn loop / runtime kernel（轮次循环 / 运行时内核）</a:t>
+            </a:r>
+          </a:p>
+          <a:p>
+            <a:pPr>
+              <a:spcAft>
+                <a:spcPts val="800"/>
+              </a:spcAft>
+            </a:pPr>
+            <a:r>
+              <a:rPr sz="1800" b="0">
+                <a:solidFill>
+                  <a:srgbClr val="1F2937"/>
+                </a:solidFill>
+                <a:latin typeface="Arial"/>
+              </a:rPr>
+              <a:t>toolExecution.ts：tool pipeline（工具执行流水线）</a:t>
+            </a:r>
+          </a:p>
+          <a:p>
+            <a:pPr>
+              <a:spcAft>
+                <a:spcPts val="800"/>
+              </a:spcAft>
+            </a:pPr>
+            <a:r>
+              <a:rPr sz="1800" b="0">
+                <a:solidFill>
+                  <a:srgbClr val="1F2937"/>
+                </a:solidFill>
+                <a:latin typeface="Arial"/>
+              </a:rPr>
+              <a:t>settings / auth / prompt / policy：control plane（控制面）</a:t>
+            </a:r>
+          </a:p>
+        </p:txBody>
+      </p:sp>
+      <p:sp>
+        <p:nvSpPr>
+          <p:cNvPr id="5" name="TextBox 4"/>
+          <p:cNvSpPr txBox="1"/>
           <p:nvPr/>
         </p:nvSpPr>
         <p:spPr>
           <a:xfrm>
-            <a:off x="4297680" y="1508760"/>
-            <a:ext cx="3474720" cy="1828800"/>
-          </a:xfrm>
-          <a:prstGeom prst="roundRect">
+            <a:off x="841248" y="5532120"/>
+            <a:ext cx="10058400" cy="502920"/>
+          </a:xfrm>
+          <a:prstGeom prst="rect">
             <a:avLst/>
           </a:prstGeom>
-          <a:solidFill>
-            <a:srgbClr val="FFFFFF"/>
-          </a:solidFill>
-          <a:ln>
-            <a:solidFill>
-              <a:srgbClr val="205295"/>
-            </a:solidFill>
-          </a:ln>
-        </p:spPr>
-        <p:style>
-          <a:lnRef idx="1">
-            <a:schemeClr val="accent1"/>
-          </a:lnRef>
-          <a:fillRef idx="3">
-            <a:schemeClr val="accent1"/>
-          </a:fillRef>
-          <a:effectRef idx="2">
-            <a:schemeClr val="accent1"/>
-          </a:effectRef>
-          <a:fontRef idx="minor">
-            <a:schemeClr val="lt1"/>
-          </a:fontRef>
-        </p:style>
-        <p:txBody>
-          <a:bodyPr rtlCol="0" anchor="ctr" wrap="square" lIns="76200" rIns="76200" tIns="50800" bIns="50800"/>
-          <a:lstStyle/>
-          <a:p>
-            <a:pPr algn="ctr"/>
-            <a:r>
-              <a:rPr sz="1600" b="1">
-                <a:solidFill>
-                  <a:srgbClr val="205295"/>
-                </a:solidFill>
-                <a:latin typeface="Arial"/>
-              </a:rPr>
-              <a:t>为什么有效</a:t>
-            </a:r>
-          </a:p>
-          <a:p>
-            <a:pPr>
-              <a:spcBef>
-                <a:spcPts val="400"/>
-              </a:spcBef>
-            </a:pPr>
+          <a:noFill/>
+        </p:spPr>
+        <p:txBody>
+          <a:bodyPr wrap="square" lIns="76200" rIns="76200" tIns="50800" bIns="50800">
+            <a:spAutoFit/>
+          </a:bodyPr>
+          <a:lstStyle/>
+          <a:p>
             <a:r>
               <a:rPr sz="1300" b="0">
                 <a:solidFill>
-                  <a:srgbClr val="1F2937"/>
-                </a:solidFill>
-                <a:latin typeface="Arial"/>
-              </a:rPr>
-              <a:t>源码把默认场景设成软件工程任务；明确范围和验证能减少分析/实现/顺手优化之间的歧义。</a:t>
-            </a:r>
-          </a:p>
-        </p:txBody>
-      </p:sp>
-      <p:sp>
-        <p:nvSpPr>
-          <p:cNvPr id="6" name="Rounded Rectangle 5"/>
-          <p:cNvSpPr/>
-          <p:nvPr/>
-        </p:nvSpPr>
-        <p:spPr>
-          <a:xfrm>
-            <a:off x="8046720" y="1508760"/>
-            <a:ext cx="3383280" cy="1828800"/>
-          </a:xfrm>
-          <a:prstGeom prst="roundRect">
-            <a:avLst/>
-          </a:prstGeom>
-          <a:solidFill>
-            <a:srgbClr val="FFFFFF"/>
-          </a:solidFill>
-          <a:ln>
-            <a:solidFill>
-              <a:srgbClr val="205295"/>
-            </a:solidFill>
-          </a:ln>
-        </p:spPr>
-        <p:style>
-          <a:lnRef idx="1">
-            <a:schemeClr val="accent1"/>
-          </a:lnRef>
-          <a:fillRef idx="3">
-            <a:schemeClr val="accent1"/>
-          </a:fillRef>
-          <a:effectRef idx="2">
-            <a:schemeClr val="accent1"/>
-          </a:effectRef>
-          <a:fontRef idx="minor">
-            <a:schemeClr val="lt1"/>
-          </a:fontRef>
-        </p:style>
-        <p:txBody>
-          <a:bodyPr rtlCol="0" anchor="ctr" wrap="square" lIns="76200" rIns="76200" tIns="50800" bIns="50800"/>
-          <a:lstStyle/>
-          <a:p>
-            <a:pPr algn="ctr"/>
-            <a:r>
-              <a:rPr sz="1600" b="1">
-                <a:solidFill>
-                  <a:srgbClr val="205295"/>
-                </a:solidFill>
-                <a:latin typeface="Arial"/>
-              </a:rPr>
-              <a:t>源码支撑</a:t>
-            </a:r>
-          </a:p>
-          <a:p>
-            <a:pPr>
-              <a:spcBef>
-                <a:spcPts val="400"/>
-              </a:spcBef>
-            </a:pPr>
-            <a:r>
-              <a:rPr sz="1300" b="0">
-                <a:solidFill>
-                  <a:srgbClr val="1F2937"/>
-                </a:solidFill>
-                <a:latin typeface="Arial"/>
-              </a:rPr>
-              <a:t>prompts.ts#L221
-prompts.ts#L230
-prompts.ts#L240</a:t>
+                  <a:srgbClr val="475569"/>
+                </a:solidFill>
+                <a:latin typeface="Arial"/>
+              </a:rPr>
+              <a:t>这决定了它默认不是把输入当闲聊，而是当软件工程任务。</a:t>
             </a:r>
           </a:p>
         </p:txBody>
@@ -4695,7 +4736,7 @@
                 </a:solidFill>
                 <a:latin typeface="Arial"/>
               </a:rPr>
-              <a:t>技巧 2：明确要求先读代码，再改代码</a:t>
+              <a:t>从源码反推：默认偏好的工作方式</a:t>
             </a:r>
           </a:p>
         </p:txBody>
@@ -4745,211 +4786,137 @@
       </p:sp>
       <p:sp>
         <p:nvSpPr>
-          <p:cNvPr id="4" name="Rounded Rectangle 3"/>
-          <p:cNvSpPr/>
+          <p:cNvPr id="4" name="TextBox 3"/>
+          <p:cNvSpPr txBox="1"/>
           <p:nvPr/>
         </p:nvSpPr>
         <p:spPr>
           <a:xfrm>
-            <a:off x="731520" y="1508760"/>
-            <a:ext cx="3291840" cy="1828800"/>
-          </a:xfrm>
-          <a:prstGeom prst="roundRect">
+            <a:off x="777240" y="1508760"/>
+            <a:ext cx="10241280" cy="4389120"/>
+          </a:xfrm>
+          <a:prstGeom prst="rect">
             <a:avLst/>
           </a:prstGeom>
-          <a:solidFill>
-            <a:srgbClr val="FFFFFF"/>
-          </a:solidFill>
-          <a:ln>
-            <a:solidFill>
-              <a:srgbClr val="205295"/>
-            </a:solidFill>
-          </a:ln>
-        </p:spPr>
-        <p:style>
-          <a:lnRef idx="1">
-            <a:schemeClr val="accent1"/>
-          </a:lnRef>
-          <a:fillRef idx="3">
-            <a:schemeClr val="accent1"/>
-          </a:fillRef>
-          <a:effectRef idx="2">
-            <a:schemeClr val="accent1"/>
-          </a:effectRef>
-          <a:fontRef idx="minor">
-            <a:schemeClr val="lt1"/>
-          </a:fontRef>
-        </p:style>
-        <p:txBody>
-          <a:bodyPr rtlCol="0" anchor="ctr" wrap="square" lIns="76200" rIns="76200" tIns="50800" bIns="50800"/>
-          <a:lstStyle/>
-          <a:p>
-            <a:pPr algn="ctr"/>
-            <a:r>
-              <a:rPr sz="1600" b="1">
-                <a:solidFill>
-                  <a:srgbClr val="205295"/>
-                </a:solidFill>
-                <a:latin typeface="Arial"/>
-              </a:rPr>
-              <a:t>推荐写法</a:t>
-            </a:r>
-          </a:p>
+          <a:noFill/>
+        </p:spPr>
+        <p:txBody>
+          <a:bodyPr wrap="square" lIns="76200" rIns="76200" tIns="50800" bIns="50800">
+            <a:spAutoFit/>
+          </a:bodyPr>
+          <a:lstStyle/>
           <a:p>
             <a:pPr>
-              <a:spcBef>
-                <a:spcPts val="400"/>
-              </a:spcBef>
+              <a:spcAft>
+                <a:spcPts val="800"/>
+              </a:spcAft>
             </a:pPr>
             <a:r>
-              <a:rPr sz="1300" b="0">
+              <a:rPr sz="1800" b="0">
                 <a:solidFill>
                   <a:srgbClr val="1F2937"/>
                 </a:solidFill>
                 <a:latin typeface="Arial"/>
               </a:rPr>
-              <a:t>先看 src/foo.ts 和 src/bar.ts，再决定改法。</a:t>
-            </a:r>
-          </a:p>
-        </p:txBody>
-      </p:sp>
-      <p:sp>
-        <p:nvSpPr>
-          <p:cNvPr id="5" name="Rounded Rectangle 4"/>
-          <p:cNvSpPr/>
+              <a:t>先读代码，再改代码</a:t>
+            </a:r>
+          </a:p>
+          <a:p>
+            <a:pPr>
+              <a:spcAft>
+                <a:spcPts val="800"/>
+              </a:spcAft>
+            </a:pPr>
+            <a:r>
+              <a:rPr sz="1800" b="0">
+                <a:solidFill>
+                  <a:srgbClr val="1F2937"/>
+                </a:solidFill>
+                <a:latin typeface="Arial"/>
+              </a:rPr>
+              <a:t>最小必要改动，优先复用已有实现</a:t>
+            </a:r>
+          </a:p>
+          <a:p>
+            <a:pPr>
+              <a:spcAft>
+                <a:spcPts val="800"/>
+              </a:spcAft>
+            </a:pPr>
+            <a:r>
+              <a:rPr sz="1800" b="0">
+                <a:solidFill>
+                  <a:srgbClr val="1F2937"/>
+                </a:solidFill>
+                <a:latin typeface="Arial"/>
+              </a:rPr>
+              <a:t>优先 dedicated tools，而不是默认 Bash</a:t>
+            </a:r>
+          </a:p>
+          <a:p>
+            <a:pPr>
+              <a:spcAft>
+                <a:spcPts val="800"/>
+              </a:spcAft>
+            </a:pPr>
+            <a:r>
+              <a:rPr sz="1800" b="0">
+                <a:solidFill>
+                  <a:srgbClr val="1F2937"/>
+                </a:solidFill>
+                <a:latin typeface="Arial"/>
+              </a:rPr>
+              <a:t>验证后如实汇报</a:t>
+            </a:r>
+          </a:p>
+          <a:p>
+            <a:pPr>
+              <a:spcAft>
+                <a:spcPts val="800"/>
+              </a:spcAft>
+            </a:pPr>
+            <a:r>
+              <a:rPr sz="1800" b="0">
+                <a:solidFill>
+                  <a:srgbClr val="1F2937"/>
+                </a:solidFill>
+                <a:latin typeface="Arial"/>
+              </a:rPr>
+              <a:t>高风险动作默认先确认</a:t>
+            </a:r>
+          </a:p>
+        </p:txBody>
+      </p:sp>
+      <p:sp>
+        <p:nvSpPr>
+          <p:cNvPr id="5" name="TextBox 4"/>
+          <p:cNvSpPr txBox="1"/>
           <p:nvPr/>
         </p:nvSpPr>
         <p:spPr>
           <a:xfrm>
-            <a:off x="4297680" y="1508760"/>
-            <a:ext cx="3474720" cy="1828800"/>
-          </a:xfrm>
-          <a:prstGeom prst="roundRect">
+            <a:off x="841248" y="5532120"/>
+            <a:ext cx="10058400" cy="502920"/>
+          </a:xfrm>
+          <a:prstGeom prst="rect">
             <a:avLst/>
           </a:prstGeom>
-          <a:solidFill>
-            <a:srgbClr val="FFFFFF"/>
-          </a:solidFill>
-          <a:ln>
-            <a:solidFill>
-              <a:srgbClr val="205295"/>
-            </a:solidFill>
-          </a:ln>
-        </p:spPr>
-        <p:style>
-          <a:lnRef idx="1">
-            <a:schemeClr val="accent1"/>
-          </a:lnRef>
-          <a:fillRef idx="3">
-            <a:schemeClr val="accent1"/>
-          </a:fillRef>
-          <a:effectRef idx="2">
-            <a:schemeClr val="accent1"/>
-          </a:effectRef>
-          <a:fontRef idx="minor">
-            <a:schemeClr val="lt1"/>
-          </a:fontRef>
-        </p:style>
-        <p:txBody>
-          <a:bodyPr rtlCol="0" anchor="ctr" wrap="square" lIns="76200" rIns="76200" tIns="50800" bIns="50800"/>
-          <a:lstStyle/>
-          <a:p>
-            <a:pPr algn="ctr"/>
-            <a:r>
-              <a:rPr sz="1600" b="1">
-                <a:solidFill>
-                  <a:srgbClr val="205295"/>
-                </a:solidFill>
-                <a:latin typeface="Arial"/>
-              </a:rPr>
-              <a:t>为什么有效</a:t>
-            </a:r>
-          </a:p>
-          <a:p>
-            <a:pPr>
-              <a:spcBef>
-                <a:spcPts val="400"/>
-              </a:spcBef>
-            </a:pPr>
+          <a:noFill/>
+        </p:spPr>
+        <p:txBody>
+          <a:bodyPr wrap="square" lIns="76200" rIns="76200" tIns="50800" bIns="50800">
+            <a:spAutoFit/>
+          </a:bodyPr>
+          <a:lstStyle/>
+          <a:p>
             <a:r>
               <a:rPr sz="1300" b="0">
                 <a:solidFill>
-                  <a:srgbClr val="1F2937"/>
-                </a:solidFill>
-                <a:latin typeface="Arial"/>
-              </a:rPr>
-              <a:t>系统提示明确偏好先理解现有实现；点名关键文件能减少无关探索和上下文噪音。</a:t>
-            </a:r>
-          </a:p>
-        </p:txBody>
-      </p:sp>
-      <p:sp>
-        <p:nvSpPr>
-          <p:cNvPr id="6" name="Rounded Rectangle 5"/>
-          <p:cNvSpPr/>
-          <p:nvPr/>
-        </p:nvSpPr>
-        <p:spPr>
-          <a:xfrm>
-            <a:off x="8046720" y="1508760"/>
-            <a:ext cx="3383280" cy="1828800"/>
-          </a:xfrm>
-          <a:prstGeom prst="roundRect">
-            <a:avLst/>
-          </a:prstGeom>
-          <a:solidFill>
-            <a:srgbClr val="FFFFFF"/>
-          </a:solidFill>
-          <a:ln>
-            <a:solidFill>
-              <a:srgbClr val="205295"/>
-            </a:solidFill>
-          </a:ln>
-        </p:spPr>
-        <p:style>
-          <a:lnRef idx="1">
-            <a:schemeClr val="accent1"/>
-          </a:lnRef>
-          <a:fillRef idx="3">
-            <a:schemeClr val="accent1"/>
-          </a:fillRef>
-          <a:effectRef idx="2">
-            <a:schemeClr val="accent1"/>
-          </a:effectRef>
-          <a:fontRef idx="minor">
-            <a:schemeClr val="lt1"/>
-          </a:fontRef>
-        </p:style>
-        <p:txBody>
-          <a:bodyPr rtlCol="0" anchor="ctr" wrap="square" lIns="76200" rIns="76200" tIns="50800" bIns="50800"/>
-          <a:lstStyle/>
-          <a:p>
-            <a:pPr algn="ctr"/>
-            <a:r>
-              <a:rPr sz="1600" b="1">
-                <a:solidFill>
-                  <a:srgbClr val="205295"/>
-                </a:solidFill>
-                <a:latin typeface="Arial"/>
-              </a:rPr>
-              <a:t>源码支撑</a:t>
-            </a:r>
-          </a:p>
-          <a:p>
-            <a:pPr>
-              <a:spcBef>
-                <a:spcPts val="400"/>
-              </a:spcBef>
-            </a:pPr>
-            <a:r>
-              <a:rPr sz="1300" b="0">
-                <a:solidFill>
-                  <a:srgbClr val="1F2937"/>
-                </a:solidFill>
-                <a:latin typeface="Arial"/>
-              </a:rPr>
-              <a:t>prompts.ts#L230
-messages.ts#L3344</a:t>
+                  <a:srgbClr val="475569"/>
+                </a:solidFill>
+                <a:latin typeface="Arial"/>
+              </a:rPr>
+              <a:t>这些偏好主要来自 prompts.ts、messages.ts 和 BashTool prompt。</a:t>
             </a:r>
           </a:p>
         </p:txBody>
@@ -5009,7 +4976,7 @@
                 </a:solidFill>
                 <a:latin typeface="Arial"/>
               </a:rPr>
-              <a:t>技巧 3：强调最小改动、优先复用</a:t>
+              <a:t>技巧 1：任务写成“目标 + 范围 + 约束 + 验证”</a:t>
             </a:r>
           </a:p>
         </p:txBody>
@@ -5122,7 +5089,10 @@
                 </a:solidFill>
                 <a:latin typeface="Arial"/>
               </a:rPr>
-              <a:t>做最小必要改动；优先复用现有函数、工具和模式；不要新造一层抽象。</a:t>
+              <a:t>目标：修复/实现……
+范围：只改……
+约束：不要做无关重构
+验证：跑测试并说明结果</a:t>
             </a:r>
           </a:p>
         </p:txBody>
@@ -5192,7 +5162,7 @@
                 </a:solidFill>
                 <a:latin typeface="Arial"/>
               </a:rPr>
-              <a:t>源码明确反对 one-time helper 和 premature abstraction；这样更容易顺着现有结构修改。</a:t>
+              <a:t>源码把默认场景设成 software engineering task；明确范围和验证能减少分析/实现/顺手优化之间的歧义。</a:t>
             </a:r>
           </a:p>
         </p:txBody>
@@ -5262,9 +5232,9 @@
                 </a:solidFill>
                 <a:latin typeface="Arial"/>
               </a:rPr>
-              <a:t>prompts.ts#L200
-prompts.ts#L203
-messages.ts#L3344</a:t>
+              <a:t>prompts.ts#L221
+prompts.ts#L230
+prompts.ts#L240</a:t>
             </a:r>
           </a:p>
         </p:txBody>
@@ -5324,7 +5294,7 @@
                 </a:solidFill>
                 <a:latin typeface="Arial"/>
               </a:rPr>
-              <a:t>技巧 4：能不新建文件，就不要新建文件</a:t>
+              <a:t>技巧 2：明确要求先读代码，再改代码</a:t>
             </a:r>
           </a:p>
         </p:txBody>
@@ -5437,7 +5407,7 @@
                 </a:solidFill>
                 <a:latin typeface="Arial"/>
               </a:rPr>
-              <a:t>除非绝对必要，不要新建文件，优先修改现有文件。</a:t>
+              <a:t>先看 src/foo.ts 和 src/bar.ts，再决定改法。</a:t>
             </a:r>
           </a:p>
         </p:txBody>
@@ -5507,7 +5477,7 @@
                 </a:solidFill>
                 <a:latin typeface="Arial"/>
               </a:rPr>
-              <a:t>系统把避免 file bloat 设为默认偏好；对小改动尤其能防止多余 helper / temp file。</a:t>
+              <a:t>系统提示明确偏好先理解现有实现；点名关键文件能减少无关探索和上下文噪音。</a:t>
             </a:r>
           </a:p>
         </p:txBody>
@@ -5577,7 +5547,8 @@
                 </a:solidFill>
                 <a:latin typeface="Arial"/>
               </a:rPr>
-              <a:t>prompts.ts#L231</a:t>
+              <a:t>prompts.ts#L230
+messages.ts#L3344</a:t>
             </a:r>
           </a:p>
         </p:txBody>
@@ -5637,7 +5608,7 @@
                 </a:solidFill>
                 <a:latin typeface="Arial"/>
               </a:rPr>
-              <a:t>技巧 5：优先 dedicated tools，不要滥用 Bash</a:t>
+              <a:t>技巧 3：强调最小改动、优先复用</a:t>
             </a:r>
           </a:p>
         </p:txBody>
@@ -5750,7 +5721,7 @@
                 </a:solidFill>
                 <a:latin typeface="Arial"/>
               </a:rPr>
-              <a:t>优先直接读写文件，不要用 Bash 做本可由专用工具完成的事情。</a:t>
+              <a:t>做最小必要改动；优先复用现有函数、工具和模式；不要新造一层抽象。</a:t>
             </a:r>
           </a:p>
         </p:txBody>
@@ -5820,7 +5791,7 @@
                 </a:solidFill>
                 <a:latin typeface="Arial"/>
               </a:rPr>
-              <a:t>Bash 在源码里是 fallback tool，不是首选；专用工具更容易被审查、解释和权限约束。</a:t>
+              <a:t>源码明确反对 one-time helper 和 premature abstraction；这样更容易顺着现有结构修改。</a:t>
             </a:r>
           </a:p>
         </p:txBody>
@@ -5890,9 +5861,9 @@
                 </a:solidFill>
                 <a:latin typeface="Arial"/>
               </a:rPr>
-              <a:t>prompts.ts#L301
-prompts.ts#L305
-BashTool prompt#L297</a:t>
+              <a:t>prompts.ts#L200
+prompts.ts#L203
+messages.ts#L3344</a:t>
             </a:r>
           </a:p>
         </p:txBody>
@@ -5952,7 +5923,7 @@
                 </a:solidFill>
                 <a:latin typeface="Arial"/>
               </a:rPr>
-              <a:t>技巧 6：验证要求要写清楚，而且要如实汇报</a:t>
+              <a:t>技巧 4：优先 dedicated tools，不要默认 Bash</a:t>
             </a:r>
           </a:p>
         </p:txBody>
@@ -6065,7 +6036,7 @@
                 </a:solidFill>
                 <a:latin typeface="Arial"/>
               </a:rPr>
-              <a:t>改完后跑相关测试；如果没跑，请明确说明没有跑。</a:t>
+              <a:t>优先直接读写文件，不要用 Bash 做本可由专用工具完成的事情。</a:t>
             </a:r>
           </a:p>
         </p:txBody>
@@ -6135,7 +6106,7 @@
                 </a:solidFill>
                 <a:latin typeface="Arial"/>
               </a:rPr>
-              <a:t>源码对“未验证却宣称完成”是强约束；这样能减少看似完成、其实没验证的风险。</a:t>
+              <a:t>Bash 在源码里是 fallback tool，不是首选；专用工具更容易被审查、解释和权限约束。</a:t>
             </a:r>
           </a:p>
         </p:txBody>
@@ -6205,8 +6176,9 @@
                 </a:solidFill>
                 <a:latin typeface="Arial"/>
               </a:rPr>
-              <a:t>prompts.ts#L211
-prompts.ts#L240</a:t>
+              <a:t>prompts.ts#L301
+prompts.ts#L305
+BashTool prompt#L297</a:t>
             </a:r>
           </a:p>
         </p:txBody>
@@ -6266,7 +6238,7 @@
                 </a:solidFill>
                 <a:latin typeface="Arial"/>
               </a:rPr>
-              <a:t>技巧 7：独立查询要显式允许 parallel</a:t>
+              <a:t>技巧 5：验证要求要写清楚，而且要如实汇报</a:t>
             </a:r>
           </a:p>
         </p:txBody>
@@ -6379,7 +6351,7 @@
                 </a:solidFill>
                 <a:latin typeface="Arial"/>
               </a:rPr>
-              <a:t>如果这些查询彼此独立，可以并行完成；不要重复做相同搜索。</a:t>
+              <a:t>改完后跑相关测试；如果没跑，请明确说明没有跑。</a:t>
             </a:r>
           </a:p>
         </p:txBody>
@@ -6449,7 +6421,7 @@
                 </a:solidFill>
                 <a:latin typeface="Arial"/>
               </a:rPr>
-              <a:t>系统提示明确鼓励独立工具调用并行化；Bash prompt 和 Plan Mode 也都强调能并行就并行。</a:t>
+              <a:t>源码对“未验证却宣称完成”是强约束；这样能减少看似完成、其实没验证的风险。</a:t>
             </a:r>
           </a:p>
         </p:txBody>
@@ -6519,9 +6491,8 @@
                 </a:solidFill>
                 <a:latin typeface="Arial"/>
               </a:rPr>
-              <a:t>prompts.ts#L310
-prompts.ts#L319
-messages.ts#L3344</a:t>
+              <a:t>prompts.ts#L211
+prompts.ts#L240</a:t>
             </a:r>
           </a:p>
         </p:txBody>

--- a/docs/zh/09-Claude Code 使用技巧与注意事项-WPS兼容版.pptx
+++ b/docs/zh/09-Claude Code 使用技巧与注意事项-WPS兼容版.pptx
@@ -3541,7 +3541,65 @@
         <p:spPr>
           <a:xfrm>
             <a:off x="658368" y="1481328"/>
-            <a:ext cx="10972800" cy="685800"/>
+            <a:ext cx="10972800" cy="658368"/>
+          </a:xfrm>
+          <a:prstGeom prst="roundRect">
+            <a:avLst/>
+          </a:prstGeom>
+          <a:solidFill>
+            <a:srgbClr val="DBEAFE"/>
+          </a:solidFill>
+          <a:ln>
+            <a:solidFill>
+              <a:srgbClr val="2563EB"/>
+            </a:solidFill>
+          </a:ln>
+        </p:spPr>
+        <p:style>
+          <a:lnRef idx="1">
+            <a:schemeClr val="accent1"/>
+          </a:lnRef>
+          <a:fillRef idx="3">
+            <a:schemeClr val="accent1"/>
+          </a:fillRef>
+          <a:effectRef idx="2">
+            <a:schemeClr val="accent1"/>
+          </a:effectRef>
+          <a:fontRef idx="minor">
+            <a:schemeClr val="lt1"/>
+          </a:fontRef>
+        </p:style>
+        <p:txBody>
+          <a:bodyPr rtlCol="0" anchor="t" wrap="square" tIns="50800" bIns="50800" lIns="101600" rIns="101600"/>
+          <a:lstStyle/>
+          <a:p>
+            <a:pPr algn="ctr">
+              <a:spcAft>
+                <a:spcPts val="600"/>
+              </a:spcAft>
+            </a:pPr>
+            <a:r>
+              <a:rPr sz="1600" b="0">
+                <a:solidFill>
+                  <a:srgbClr val="1E293B"/>
+                </a:solidFill>
+                <a:latin typeface="Arial"/>
+              </a:rPr>
+              <a:t>不要默认 Claude Code 已经验证过，验证要求必须显式写出来。</a:t>
+            </a:r>
+          </a:p>
+        </p:txBody>
+      </p:sp>
+      <p:sp>
+        <p:nvSpPr>
+          <p:cNvPr id="5" name="Rounded Rectangle 4"/>
+          <p:cNvSpPr/>
+          <p:nvPr/>
+        </p:nvSpPr>
+        <p:spPr>
+          <a:xfrm>
+            <a:off x="658368" y="2331720"/>
+            <a:ext cx="3246120" cy="1554480"/>
           </a:xfrm>
           <a:prstGeom prst="roundRect">
             <a:avLst/>
@@ -3579,14 +3637,14 @@
       </p:sp>
       <p:sp>
         <p:nvSpPr>
-          <p:cNvPr id="5" name="Rectangle 4"/>
+          <p:cNvPr id="6" name="Rectangle 5"/>
           <p:cNvSpPr/>
           <p:nvPr/>
         </p:nvSpPr>
         <p:spPr>
           <a:xfrm>
-            <a:off x="658368" y="1481328"/>
-            <a:ext cx="10972800" cy="347472"/>
+            <a:off x="658368" y="2331720"/>
+            <a:ext cx="3246120" cy="347472"/>
           </a:xfrm>
           <a:prstGeom prst="rect">
             <a:avLst/>
@@ -3626,21 +3684,21 @@
                 </a:solidFill>
                 <a:latin typeface="Arial"/>
               </a:rPr>
-              <a:t>本页一句话</a:t>
-            </a:r>
-          </a:p>
-        </p:txBody>
-      </p:sp>
-      <p:sp>
-        <p:nvSpPr>
-          <p:cNvPr id="6" name="TextBox 5"/>
+              <a:t>示例提示词</a:t>
+            </a:r>
+          </a:p>
+        </p:txBody>
+      </p:sp>
+      <p:sp>
+        <p:nvSpPr>
+          <p:cNvPr id="7" name="TextBox 6"/>
           <p:cNvSpPr txBox="1"/>
           <p:nvPr/>
         </p:nvSpPr>
         <p:spPr>
           <a:xfrm>
-            <a:off x="731519" y="1883664"/>
-            <a:ext cx="10826496" cy="228600"/>
+            <a:off x="731519" y="2734056"/>
+            <a:ext cx="3099815" cy="1097280"/>
           </a:xfrm>
           <a:prstGeom prst="rect">
             <a:avLst/>
@@ -3665,21 +3723,37 @@
                 </a:solidFill>
                 <a:latin typeface="Arial"/>
               </a:rPr>
-              <a:t>不要默认 Claude Code 已经验证过，验证要求必须显式写出来。</a:t>
-            </a:r>
-          </a:p>
-        </p:txBody>
-      </p:sp>
-      <p:sp>
-        <p:nvSpPr>
-          <p:cNvPr id="7" name="Rounded Rectangle 6"/>
+              <a:t>改完后跑相关测试</a:t>
+            </a:r>
+          </a:p>
+          <a:p>
+            <a:pPr>
+              <a:spcAft>
+                <a:spcPts val="600"/>
+              </a:spcAft>
+            </a:pPr>
+            <a:r>
+              <a:rPr sz="1400" b="0">
+                <a:solidFill>
+                  <a:srgbClr val="1E293B"/>
+                </a:solidFill>
+                <a:latin typeface="Arial"/>
+              </a:rPr>
+              <a:t>如果没跑，请明确说明没有跑</a:t>
+            </a:r>
+          </a:p>
+        </p:txBody>
+      </p:sp>
+      <p:sp>
+        <p:nvSpPr>
+          <p:cNvPr id="8" name="Rounded Rectangle 7"/>
           <p:cNvSpPr/>
           <p:nvPr/>
         </p:nvSpPr>
         <p:spPr>
           <a:xfrm>
-            <a:off x="658368" y="2359152"/>
-            <a:ext cx="3246120" cy="1444752"/>
+            <a:off x="4133087" y="2331720"/>
+            <a:ext cx="3474720" cy="1554480"/>
           </a:xfrm>
           <a:prstGeom prst="roundRect">
             <a:avLst/>
@@ -3717,14 +3791,14 @@
       </p:sp>
       <p:sp>
         <p:nvSpPr>
-          <p:cNvPr id="8" name="Rectangle 7"/>
+          <p:cNvPr id="9" name="Rectangle 8"/>
           <p:cNvSpPr/>
           <p:nvPr/>
         </p:nvSpPr>
         <p:spPr>
           <a:xfrm>
-            <a:off x="658368" y="2359152"/>
-            <a:ext cx="3246120" cy="347472"/>
+            <a:off x="4133087" y="2331720"/>
+            <a:ext cx="3474720" cy="347472"/>
           </a:xfrm>
           <a:prstGeom prst="rect">
             <a:avLst/>
@@ -3764,21 +3838,21 @@
                 </a:solidFill>
                 <a:latin typeface="Arial"/>
               </a:rPr>
-              <a:t>推荐写法</a:t>
-            </a:r>
-          </a:p>
-        </p:txBody>
-      </p:sp>
-      <p:sp>
-        <p:nvSpPr>
-          <p:cNvPr id="9" name="TextBox 8"/>
+              <a:t>源码解释</a:t>
+            </a:r>
+          </a:p>
+        </p:txBody>
+      </p:sp>
+      <p:sp>
+        <p:nvSpPr>
+          <p:cNvPr id="10" name="TextBox 9"/>
           <p:cNvSpPr txBox="1"/>
           <p:nvPr/>
         </p:nvSpPr>
         <p:spPr>
           <a:xfrm>
-            <a:off x="731519" y="2761488"/>
-            <a:ext cx="3099815" cy="987552"/>
+            <a:off x="4206240" y="2734056"/>
+            <a:ext cx="3328415" cy="1097280"/>
           </a:xfrm>
           <a:prstGeom prst="rect">
             <a:avLst/>
@@ -3803,7 +3877,7 @@
                 </a:solidFill>
                 <a:latin typeface="Arial"/>
               </a:rPr>
-              <a:t>改完后跑相关测试</a:t>
+              <a:t>减少“看似完成、其实没验证”的风险</a:t>
             </a:r>
           </a:p>
           <a:p>
@@ -3819,21 +3893,21 @@
                 </a:solidFill>
                 <a:latin typeface="Arial"/>
               </a:rPr>
-              <a:t>如果没跑，请明确说明没有跑</a:t>
-            </a:r>
-          </a:p>
-        </p:txBody>
-      </p:sp>
-      <p:sp>
-        <p:nvSpPr>
-          <p:cNvPr id="10" name="Rounded Rectangle 9"/>
+              <a:t>避免把未验证结果包装成完成状态</a:t>
+            </a:r>
+          </a:p>
+        </p:txBody>
+      </p:sp>
+      <p:sp>
+        <p:nvSpPr>
+          <p:cNvPr id="11" name="Rounded Rectangle 10"/>
           <p:cNvSpPr/>
           <p:nvPr/>
         </p:nvSpPr>
         <p:spPr>
           <a:xfrm>
-            <a:off x="4133087" y="2359152"/>
-            <a:ext cx="3474720" cy="1444752"/>
+            <a:off x="7836408" y="2331720"/>
+            <a:ext cx="3794760" cy="1554480"/>
           </a:xfrm>
           <a:prstGeom prst="roundRect">
             <a:avLst/>
@@ -3871,14 +3945,14 @@
       </p:sp>
       <p:sp>
         <p:nvSpPr>
-          <p:cNvPr id="11" name="Rectangle 10"/>
+          <p:cNvPr id="12" name="Rectangle 11"/>
           <p:cNvSpPr/>
           <p:nvPr/>
         </p:nvSpPr>
         <p:spPr>
           <a:xfrm>
-            <a:off x="4133087" y="2359152"/>
-            <a:ext cx="3474720" cy="347472"/>
+            <a:off x="7836408" y="2331720"/>
+            <a:ext cx="3794760" cy="347472"/>
           </a:xfrm>
           <a:prstGeom prst="rect">
             <a:avLst/>
@@ -3918,21 +3992,21 @@
                 </a:solidFill>
                 <a:latin typeface="Arial"/>
               </a:rPr>
-              <a:t>为什么有效</a:t>
-            </a:r>
-          </a:p>
-        </p:txBody>
-      </p:sp>
-      <p:sp>
-        <p:nvSpPr>
-          <p:cNvPr id="12" name="TextBox 11"/>
+              <a:t>证据链</a:t>
+            </a:r>
+          </a:p>
+        </p:txBody>
+      </p:sp>
+      <p:sp>
+        <p:nvSpPr>
+          <p:cNvPr id="13" name="TextBox 12"/>
           <p:cNvSpPr txBox="1"/>
           <p:nvPr/>
         </p:nvSpPr>
         <p:spPr>
           <a:xfrm>
-            <a:off x="4206240" y="2761488"/>
-            <a:ext cx="3328415" cy="987552"/>
+            <a:off x="7909560" y="2734056"/>
+            <a:ext cx="3648456" cy="1097280"/>
           </a:xfrm>
           <a:prstGeom prst="rect">
             <a:avLst/>
@@ -3957,7 +4031,7 @@
                 </a:solidFill>
                 <a:latin typeface="Arial"/>
               </a:rPr>
-              <a:t>减少“看似完成、其实没验证”的风险</a:t>
+              <a:t>prompt stack（提示词栈）明确要求 verify 和 faithful reporting</a:t>
             </a:r>
           </a:p>
           <a:p>
@@ -3973,298 +4047,21 @@
                 </a:solidFill>
                 <a:latin typeface="Arial"/>
               </a:rPr>
-              <a:t>避免把未验证结果包装成完成状态</a:t>
-            </a:r>
-          </a:p>
-        </p:txBody>
-      </p:sp>
-      <p:sp>
-        <p:nvSpPr>
-          <p:cNvPr id="13" name="Rounded Rectangle 12"/>
+              <a:t>turn loop（轮次循环）不会替用户假设“验证已经完成”</a:t>
+            </a:r>
+          </a:p>
+        </p:txBody>
+      </p:sp>
+      <p:sp>
+        <p:nvSpPr>
+          <p:cNvPr id="14" name="Rounded Rectangle 13"/>
           <p:cNvSpPr/>
           <p:nvPr/>
         </p:nvSpPr>
         <p:spPr>
           <a:xfrm>
-            <a:off x="7836408" y="2359152"/>
-            <a:ext cx="3794760" cy="1444752"/>
-          </a:xfrm>
-          <a:prstGeom prst="roundRect">
-            <a:avLst/>
-          </a:prstGeom>
-          <a:solidFill>
-            <a:srgbClr val="FFFFFF"/>
-          </a:solidFill>
-          <a:ln>
-            <a:solidFill>
-              <a:srgbClr val="2563EB"/>
-            </a:solidFill>
-          </a:ln>
-        </p:spPr>
-        <p:style>
-          <a:lnRef idx="1">
-            <a:schemeClr val="accent1"/>
-          </a:lnRef>
-          <a:fillRef idx="3">
-            <a:schemeClr val="accent1"/>
-          </a:fillRef>
-          <a:effectRef idx="2">
-            <a:schemeClr val="accent1"/>
-          </a:effectRef>
-          <a:fontRef idx="minor">
-            <a:schemeClr val="lt1"/>
-          </a:fontRef>
-        </p:style>
-        <p:txBody>
-          <a:bodyPr rtlCol="0" anchor="ctr"/>
-          <a:lstStyle/>
-          <a:p>
-            <a:pPr algn="ctr"/>
-          </a:p>
-        </p:txBody>
-      </p:sp>
-      <p:sp>
-        <p:nvSpPr>
-          <p:cNvPr id="14" name="Rectangle 13"/>
-          <p:cNvSpPr/>
-          <p:nvPr/>
-        </p:nvSpPr>
-        <p:spPr>
-          <a:xfrm>
-            <a:off x="7836408" y="2359152"/>
-            <a:ext cx="3794760" cy="347472"/>
-          </a:xfrm>
-          <a:prstGeom prst="rect">
-            <a:avLst/>
-          </a:prstGeom>
-          <a:solidFill>
-            <a:srgbClr val="DBEAFE"/>
-          </a:solidFill>
-          <a:ln>
-            <a:solidFill>
-              <a:srgbClr val="DBEAFE"/>
-            </a:solidFill>
-          </a:ln>
-        </p:spPr>
-        <p:style>
-          <a:lnRef idx="1">
-            <a:schemeClr val="accent1"/>
-          </a:lnRef>
-          <a:fillRef idx="3">
-            <a:schemeClr val="accent1"/>
-          </a:fillRef>
-          <a:effectRef idx="2">
-            <a:schemeClr val="accent1"/>
-          </a:effectRef>
-          <a:fontRef idx="minor">
-            <a:schemeClr val="lt1"/>
-          </a:fontRef>
-        </p:style>
-        <p:txBody>
-          <a:bodyPr rtlCol="0" anchor="t" wrap="square" tIns="25400" bIns="25400" lIns="76200" rIns="76200"/>
-          <a:lstStyle/>
-          <a:p>
-            <a:pPr algn="ctr"/>
-            <a:r>
-              <a:rPr sz="1200" b="1">
-                <a:solidFill>
-                  <a:srgbClr val="2563EB"/>
-                </a:solidFill>
-                <a:latin typeface="Arial"/>
-              </a:rPr>
-              <a:t>架构支撑</a:t>
-            </a:r>
-          </a:p>
-        </p:txBody>
-      </p:sp>
-      <p:sp>
-        <p:nvSpPr>
-          <p:cNvPr id="15" name="TextBox 14"/>
-          <p:cNvSpPr txBox="1"/>
-          <p:nvPr/>
-        </p:nvSpPr>
-        <p:spPr>
-          <a:xfrm>
-            <a:off x="7909560" y="2761488"/>
-            <a:ext cx="3648456" cy="987552"/>
-          </a:xfrm>
-          <a:prstGeom prst="rect">
-            <a:avLst/>
-          </a:prstGeom>
-          <a:noFill/>
-        </p:spPr>
-        <p:txBody>
-          <a:bodyPr wrap="square" tIns="50800" bIns="50800" lIns="101600" rIns="101600" anchor="t">
-            <a:spAutoFit/>
-          </a:bodyPr>
-          <a:lstStyle/>
-          <a:p>
-            <a:pPr>
-              <a:spcAft>
-                <a:spcPts val="600"/>
-              </a:spcAft>
-            </a:pPr>
-            <a:r>
-              <a:rPr sz="1400" b="0">
-                <a:solidFill>
-                  <a:srgbClr val="1E293B"/>
-                </a:solidFill>
-                <a:latin typeface="Arial"/>
-              </a:rPr>
-              <a:t>prompt stack（提示词栈）明确要求 verify 和 faithful reporting</a:t>
-            </a:r>
-          </a:p>
-          <a:p>
-            <a:pPr>
-              <a:spcAft>
-                <a:spcPts val="600"/>
-              </a:spcAft>
-            </a:pPr>
-            <a:r>
-              <a:rPr sz="1400" b="0">
-                <a:solidFill>
-                  <a:srgbClr val="1E293B"/>
-                </a:solidFill>
-                <a:latin typeface="Arial"/>
-              </a:rPr>
-              <a:t>turn loop（轮次循环）不会替用户假设“验证已经完成”</a:t>
-            </a:r>
-          </a:p>
-        </p:txBody>
-      </p:sp>
-      <p:sp>
-        <p:nvSpPr>
-          <p:cNvPr id="16" name="Rounded Rectangle 15"/>
-          <p:cNvSpPr/>
-          <p:nvPr/>
-        </p:nvSpPr>
-        <p:spPr>
-          <a:xfrm>
-            <a:off x="658368" y="4069080"/>
-            <a:ext cx="10972800" cy="512064"/>
-          </a:xfrm>
-          <a:prstGeom prst="roundRect">
-            <a:avLst/>
-          </a:prstGeom>
-          <a:solidFill>
-            <a:srgbClr val="FFFFFF"/>
-          </a:solidFill>
-          <a:ln>
-            <a:solidFill>
-              <a:srgbClr val="2563EB"/>
-            </a:solidFill>
-          </a:ln>
-        </p:spPr>
-        <p:style>
-          <a:lnRef idx="1">
-            <a:schemeClr val="accent1"/>
-          </a:lnRef>
-          <a:fillRef idx="3">
-            <a:schemeClr val="accent1"/>
-          </a:fillRef>
-          <a:effectRef idx="2">
-            <a:schemeClr val="accent1"/>
-          </a:effectRef>
-          <a:fontRef idx="minor">
-            <a:schemeClr val="lt1"/>
-          </a:fontRef>
-        </p:style>
-        <p:txBody>
-          <a:bodyPr rtlCol="0" anchor="ctr"/>
-          <a:lstStyle/>
-          <a:p>
-            <a:pPr algn="ctr"/>
-          </a:p>
-        </p:txBody>
-      </p:sp>
-      <p:sp>
-        <p:nvSpPr>
-          <p:cNvPr id="17" name="Rectangle 16"/>
-          <p:cNvSpPr/>
-          <p:nvPr/>
-        </p:nvSpPr>
-        <p:spPr>
-          <a:xfrm>
-            <a:off x="658368" y="4069080"/>
-            <a:ext cx="10972800" cy="347472"/>
-          </a:xfrm>
-          <a:prstGeom prst="rect">
-            <a:avLst/>
-          </a:prstGeom>
-          <a:solidFill>
-            <a:srgbClr val="DBEAFE"/>
-          </a:solidFill>
-          <a:ln>
-            <a:solidFill>
-              <a:srgbClr val="DBEAFE"/>
-            </a:solidFill>
-          </a:ln>
-        </p:spPr>
-        <p:style>
-          <a:lnRef idx="1">
-            <a:schemeClr val="accent1"/>
-          </a:lnRef>
-          <a:fillRef idx="3">
-            <a:schemeClr val="accent1"/>
-          </a:fillRef>
-          <a:effectRef idx="2">
-            <a:schemeClr val="accent1"/>
-          </a:effectRef>
-          <a:fontRef idx="minor">
-            <a:schemeClr val="lt1"/>
-          </a:fontRef>
-        </p:style>
-        <p:txBody>
-          <a:bodyPr rtlCol="0" anchor="t" wrap="square" tIns="25400" bIns="25400" lIns="76200" rIns="76200"/>
-          <a:lstStyle/>
-          <a:p>
-            <a:pPr algn="ctr"/>
-            <a:r>
-              <a:rPr sz="1200" b="1">
-                <a:solidFill>
-                  <a:srgbClr val="2563EB"/>
-                </a:solidFill>
-                <a:latin typeface="Arial"/>
-              </a:rPr>
-              <a:t>关键代码片段</a:t>
-            </a:r>
-          </a:p>
-        </p:txBody>
-      </p:sp>
-      <p:sp>
-        <p:nvSpPr>
-          <p:cNvPr id="18" name="TextBox 17"/>
-          <p:cNvSpPr txBox="1"/>
-          <p:nvPr/>
-        </p:nvSpPr>
-        <p:spPr>
-          <a:xfrm>
-            <a:off x="731519" y="4471416"/>
-            <a:ext cx="10826496" cy="54864"/>
-          </a:xfrm>
-          <a:prstGeom prst="rect">
-            <a:avLst/>
-          </a:prstGeom>
-          <a:noFill/>
-        </p:spPr>
-        <p:txBody>
-          <a:bodyPr wrap="square" tIns="50800" bIns="50800" lIns="101600" rIns="101600" anchor="t">
-            <a:spAutoFit/>
-          </a:bodyPr>
-          <a:lstStyle/>
-          <a:p/>
-        </p:txBody>
-      </p:sp>
-      <p:sp>
-        <p:nvSpPr>
-          <p:cNvPr id="19" name="Rounded Rectangle 18"/>
-          <p:cNvSpPr/>
-          <p:nvPr/>
-        </p:nvSpPr>
-        <p:spPr>
-          <a:xfrm>
-            <a:off x="658368" y="4407408"/>
-            <a:ext cx="10972800" cy="1097280"/>
+            <a:off x="658368" y="4160520"/>
+            <a:ext cx="10972800" cy="1234440"/>
           </a:xfrm>
           <a:prstGeom prst="roundRect">
             <a:avLst/>
@@ -4312,7 +4109,7 @@
       </p:sp>
       <p:sp>
         <p:nvSpPr>
-          <p:cNvPr id="20" name="TextBox 19"/>
+          <p:cNvPr id="15" name="TextBox 14"/>
           <p:cNvSpPr txBox="1"/>
           <p:nvPr/>
         </p:nvSpPr>
@@ -4457,7 +4254,65 @@
         <p:spPr>
           <a:xfrm>
             <a:off x="658368" y="1481328"/>
-            <a:ext cx="10972800" cy="685800"/>
+            <a:ext cx="10972800" cy="658368"/>
+          </a:xfrm>
+          <a:prstGeom prst="roundRect">
+            <a:avLst/>
+          </a:prstGeom>
+          <a:solidFill>
+            <a:srgbClr val="DBEAFE"/>
+          </a:solidFill>
+          <a:ln>
+            <a:solidFill>
+              <a:srgbClr val="2563EB"/>
+            </a:solidFill>
+          </a:ln>
+        </p:spPr>
+        <p:style>
+          <a:lnRef idx="1">
+            <a:schemeClr val="accent1"/>
+          </a:lnRef>
+          <a:fillRef idx="3">
+            <a:schemeClr val="accent1"/>
+          </a:fillRef>
+          <a:effectRef idx="2">
+            <a:schemeClr val="accent1"/>
+          </a:effectRef>
+          <a:fontRef idx="minor">
+            <a:schemeClr val="lt1"/>
+          </a:fontRef>
+        </p:style>
+        <p:txBody>
+          <a:bodyPr rtlCol="0" anchor="t" wrap="square" tIns="50800" bIns="50800" lIns="101600" rIns="101600"/>
+          <a:lstStyle/>
+          <a:p>
+            <a:pPr algn="ctr">
+              <a:spcAft>
+                <a:spcPts val="600"/>
+              </a:spcAft>
+            </a:pPr>
+            <a:r>
+              <a:rPr sz="1600" b="0">
+                <a:solidFill>
+                  <a:srgbClr val="1E293B"/>
+                </a:solidFill>
+                <a:latin typeface="Arial"/>
+              </a:rPr>
+              <a:t>高风险动作先确认，不是额外保守，而是 Claude Code 的默认安全边界。</a:t>
+            </a:r>
+          </a:p>
+        </p:txBody>
+      </p:sp>
+      <p:sp>
+        <p:nvSpPr>
+          <p:cNvPr id="5" name="Rounded Rectangle 4"/>
+          <p:cNvSpPr/>
+          <p:nvPr/>
+        </p:nvSpPr>
+        <p:spPr>
+          <a:xfrm>
+            <a:off x="658368" y="2331720"/>
+            <a:ext cx="3246120" cy="1554480"/>
           </a:xfrm>
           <a:prstGeom prst="roundRect">
             <a:avLst/>
@@ -4495,14 +4350,14 @@
       </p:sp>
       <p:sp>
         <p:nvSpPr>
-          <p:cNvPr id="5" name="Rectangle 4"/>
+          <p:cNvPr id="6" name="Rectangle 5"/>
           <p:cNvSpPr/>
           <p:nvPr/>
         </p:nvSpPr>
         <p:spPr>
           <a:xfrm>
-            <a:off x="658368" y="1481328"/>
-            <a:ext cx="10972800" cy="347472"/>
+            <a:off x="658368" y="2331720"/>
+            <a:ext cx="3246120" cy="347472"/>
           </a:xfrm>
           <a:prstGeom prst="rect">
             <a:avLst/>
@@ -4542,21 +4397,21 @@
                 </a:solidFill>
                 <a:latin typeface="Arial"/>
               </a:rPr>
-              <a:t>本页一句话</a:t>
-            </a:r>
-          </a:p>
-        </p:txBody>
-      </p:sp>
-      <p:sp>
-        <p:nvSpPr>
-          <p:cNvPr id="6" name="TextBox 5"/>
+              <a:t>示例提示词</a:t>
+            </a:r>
+          </a:p>
+        </p:txBody>
+      </p:sp>
+      <p:sp>
+        <p:nvSpPr>
+          <p:cNvPr id="7" name="TextBox 6"/>
           <p:cNvSpPr txBox="1"/>
           <p:nvPr/>
         </p:nvSpPr>
         <p:spPr>
           <a:xfrm>
-            <a:off x="731519" y="1883664"/>
-            <a:ext cx="10826496" cy="228600"/>
+            <a:off x="731519" y="2734056"/>
+            <a:ext cx="3099815" cy="1097280"/>
           </a:xfrm>
           <a:prstGeom prst="rect">
             <a:avLst/>
@@ -4581,21 +4436,37 @@
                 </a:solidFill>
                 <a:latin typeface="Arial"/>
               </a:rPr>
-              <a:t>高风险动作先确认，不是额外保守，而是 Claude Code 的默认安全边界。</a:t>
-            </a:r>
-          </a:p>
-        </p:txBody>
-      </p:sp>
-      <p:sp>
-        <p:nvSpPr>
-          <p:cNvPr id="7" name="Rounded Rectangle 6"/>
+              <a:t>涉及 push、删除、覆盖、外部发送、破坏性 git 操作时</a:t>
+            </a:r>
+          </a:p>
+          <a:p>
+            <a:pPr>
+              <a:spcAft>
+                <a:spcPts val="600"/>
+              </a:spcAft>
+            </a:pPr>
+            <a:r>
+              <a:rPr sz="1400" b="0">
+                <a:solidFill>
+                  <a:srgbClr val="1E293B"/>
+                </a:solidFill>
+                <a:latin typeface="Arial"/>
+              </a:rPr>
+              <a:t>先告诉我并确认</a:t>
+            </a:r>
+          </a:p>
+        </p:txBody>
+      </p:sp>
+      <p:sp>
+        <p:nvSpPr>
+          <p:cNvPr id="8" name="Rounded Rectangle 7"/>
           <p:cNvSpPr/>
           <p:nvPr/>
         </p:nvSpPr>
         <p:spPr>
           <a:xfrm>
-            <a:off x="658368" y="2359152"/>
-            <a:ext cx="3246120" cy="1444752"/>
+            <a:off x="4133087" y="2331720"/>
+            <a:ext cx="3474720" cy="1554480"/>
           </a:xfrm>
           <a:prstGeom prst="roundRect">
             <a:avLst/>
@@ -4633,14 +4504,14 @@
       </p:sp>
       <p:sp>
         <p:nvSpPr>
-          <p:cNvPr id="8" name="Rectangle 7"/>
+          <p:cNvPr id="9" name="Rectangle 8"/>
           <p:cNvSpPr/>
           <p:nvPr/>
         </p:nvSpPr>
         <p:spPr>
           <a:xfrm>
-            <a:off x="658368" y="2359152"/>
-            <a:ext cx="3246120" cy="347472"/>
+            <a:off x="4133087" y="2331720"/>
+            <a:ext cx="3474720" cy="347472"/>
           </a:xfrm>
           <a:prstGeom prst="rect">
             <a:avLst/>
@@ -4680,21 +4551,21 @@
                 </a:solidFill>
                 <a:latin typeface="Arial"/>
               </a:rPr>
-              <a:t>推荐写法</a:t>
-            </a:r>
-          </a:p>
-        </p:txBody>
-      </p:sp>
-      <p:sp>
-        <p:nvSpPr>
-          <p:cNvPr id="9" name="TextBox 8"/>
+              <a:t>源码解释</a:t>
+            </a:r>
+          </a:p>
+        </p:txBody>
+      </p:sp>
+      <p:sp>
+        <p:nvSpPr>
+          <p:cNvPr id="10" name="TextBox 9"/>
           <p:cNvSpPr txBox="1"/>
           <p:nvPr/>
         </p:nvSpPr>
         <p:spPr>
           <a:xfrm>
-            <a:off x="731519" y="2761488"/>
-            <a:ext cx="3099815" cy="987552"/>
+            <a:off x="4206240" y="2734056"/>
+            <a:ext cx="3328415" cy="1097280"/>
           </a:xfrm>
           <a:prstGeom prst="rect">
             <a:avLst/>
@@ -4719,7 +4590,7 @@
                 </a:solidFill>
                 <a:latin typeface="Arial"/>
               </a:rPr>
-              <a:t>涉及 push、删除、覆盖、外部发送、破坏性 git 操作时</a:t>
+              <a:t>难以回滚的动作需要更强边界</a:t>
             </a:r>
           </a:p>
           <a:p>
@@ -4735,21 +4606,21 @@
                 </a:solidFill>
                 <a:latin typeface="Arial"/>
               </a:rPr>
-              <a:t>先告诉我并确认</a:t>
-            </a:r>
-          </a:p>
-        </p:txBody>
-      </p:sp>
-      <p:sp>
-        <p:nvSpPr>
-          <p:cNvPr id="10" name="Rounded Rectangle 9"/>
+              <a:t>能减少误执行带来的 blast radius</a:t>
+            </a:r>
+          </a:p>
+        </p:txBody>
+      </p:sp>
+      <p:sp>
+        <p:nvSpPr>
+          <p:cNvPr id="11" name="Rounded Rectangle 10"/>
           <p:cNvSpPr/>
           <p:nvPr/>
         </p:nvSpPr>
         <p:spPr>
           <a:xfrm>
-            <a:off x="4133087" y="2359152"/>
-            <a:ext cx="3474720" cy="1444752"/>
+            <a:off x="7836408" y="2331720"/>
+            <a:ext cx="3794760" cy="1554480"/>
           </a:xfrm>
           <a:prstGeom prst="roundRect">
             <a:avLst/>
@@ -4787,14 +4658,14 @@
       </p:sp>
       <p:sp>
         <p:nvSpPr>
-          <p:cNvPr id="11" name="Rectangle 10"/>
+          <p:cNvPr id="12" name="Rectangle 11"/>
           <p:cNvSpPr/>
           <p:nvPr/>
         </p:nvSpPr>
         <p:spPr>
           <a:xfrm>
-            <a:off x="4133087" y="2359152"/>
-            <a:ext cx="3474720" cy="347472"/>
+            <a:off x="7836408" y="2331720"/>
+            <a:ext cx="3794760" cy="347472"/>
           </a:xfrm>
           <a:prstGeom prst="rect">
             <a:avLst/>
@@ -4834,21 +4705,21 @@
                 </a:solidFill>
                 <a:latin typeface="Arial"/>
               </a:rPr>
-              <a:t>为什么有效</a:t>
-            </a:r>
-          </a:p>
-        </p:txBody>
-      </p:sp>
-      <p:sp>
-        <p:nvSpPr>
-          <p:cNvPr id="12" name="TextBox 11"/>
+              <a:t>证据链</a:t>
+            </a:r>
+          </a:p>
+        </p:txBody>
+      </p:sp>
+      <p:sp>
+        <p:nvSpPr>
+          <p:cNvPr id="13" name="TextBox 12"/>
           <p:cNvSpPr txBox="1"/>
           <p:nvPr/>
         </p:nvSpPr>
         <p:spPr>
           <a:xfrm>
-            <a:off x="4206240" y="2761488"/>
-            <a:ext cx="3328415" cy="987552"/>
+            <a:off x="7909560" y="2734056"/>
+            <a:ext cx="3648456" cy="1097280"/>
           </a:xfrm>
           <a:prstGeom prst="rect">
             <a:avLst/>
@@ -4873,7 +4744,7 @@
                 </a:solidFill>
                 <a:latin typeface="Arial"/>
               </a:rPr>
-              <a:t>难以回滚的动作需要更强边界</a:t>
+              <a:t>prompt stack（提示词栈）先定义确认边界</a:t>
             </a:r>
           </a:p>
           <a:p>
@@ -4889,298 +4760,21 @@
                 </a:solidFill>
                 <a:latin typeface="Arial"/>
               </a:rPr>
-              <a:t>能减少误执行带来的 blast radius</a:t>
-            </a:r>
-          </a:p>
-        </p:txBody>
-      </p:sp>
-      <p:sp>
-        <p:nvSpPr>
-          <p:cNvPr id="13" name="Rounded Rectangle 12"/>
+              <a:t>tool pipeline（工具执行流水线）和 Bash 约束负责执行面收紧</a:t>
+            </a:r>
+          </a:p>
+        </p:txBody>
+      </p:sp>
+      <p:sp>
+        <p:nvSpPr>
+          <p:cNvPr id="14" name="Rounded Rectangle 13"/>
           <p:cNvSpPr/>
           <p:nvPr/>
         </p:nvSpPr>
         <p:spPr>
           <a:xfrm>
-            <a:off x="7836408" y="2359152"/>
-            <a:ext cx="3794760" cy="1444752"/>
-          </a:xfrm>
-          <a:prstGeom prst="roundRect">
-            <a:avLst/>
-          </a:prstGeom>
-          <a:solidFill>
-            <a:srgbClr val="FFFFFF"/>
-          </a:solidFill>
-          <a:ln>
-            <a:solidFill>
-              <a:srgbClr val="2563EB"/>
-            </a:solidFill>
-          </a:ln>
-        </p:spPr>
-        <p:style>
-          <a:lnRef idx="1">
-            <a:schemeClr val="accent1"/>
-          </a:lnRef>
-          <a:fillRef idx="3">
-            <a:schemeClr val="accent1"/>
-          </a:fillRef>
-          <a:effectRef idx="2">
-            <a:schemeClr val="accent1"/>
-          </a:effectRef>
-          <a:fontRef idx="minor">
-            <a:schemeClr val="lt1"/>
-          </a:fontRef>
-        </p:style>
-        <p:txBody>
-          <a:bodyPr rtlCol="0" anchor="ctr"/>
-          <a:lstStyle/>
-          <a:p>
-            <a:pPr algn="ctr"/>
-          </a:p>
-        </p:txBody>
-      </p:sp>
-      <p:sp>
-        <p:nvSpPr>
-          <p:cNvPr id="14" name="Rectangle 13"/>
-          <p:cNvSpPr/>
-          <p:nvPr/>
-        </p:nvSpPr>
-        <p:spPr>
-          <a:xfrm>
-            <a:off x="7836408" y="2359152"/>
-            <a:ext cx="3794760" cy="347472"/>
-          </a:xfrm>
-          <a:prstGeom prst="rect">
-            <a:avLst/>
-          </a:prstGeom>
-          <a:solidFill>
-            <a:srgbClr val="DBEAFE"/>
-          </a:solidFill>
-          <a:ln>
-            <a:solidFill>
-              <a:srgbClr val="DBEAFE"/>
-            </a:solidFill>
-          </a:ln>
-        </p:spPr>
-        <p:style>
-          <a:lnRef idx="1">
-            <a:schemeClr val="accent1"/>
-          </a:lnRef>
-          <a:fillRef idx="3">
-            <a:schemeClr val="accent1"/>
-          </a:fillRef>
-          <a:effectRef idx="2">
-            <a:schemeClr val="accent1"/>
-          </a:effectRef>
-          <a:fontRef idx="minor">
-            <a:schemeClr val="lt1"/>
-          </a:fontRef>
-        </p:style>
-        <p:txBody>
-          <a:bodyPr rtlCol="0" anchor="t" wrap="square" tIns="25400" bIns="25400" lIns="76200" rIns="76200"/>
-          <a:lstStyle/>
-          <a:p>
-            <a:pPr algn="ctr"/>
-            <a:r>
-              <a:rPr sz="1200" b="1">
-                <a:solidFill>
-                  <a:srgbClr val="2563EB"/>
-                </a:solidFill>
-                <a:latin typeface="Arial"/>
-              </a:rPr>
-              <a:t>架构支撑</a:t>
-            </a:r>
-          </a:p>
-        </p:txBody>
-      </p:sp>
-      <p:sp>
-        <p:nvSpPr>
-          <p:cNvPr id="15" name="TextBox 14"/>
-          <p:cNvSpPr txBox="1"/>
-          <p:nvPr/>
-        </p:nvSpPr>
-        <p:spPr>
-          <a:xfrm>
-            <a:off x="7909560" y="2761488"/>
-            <a:ext cx="3648456" cy="987552"/>
-          </a:xfrm>
-          <a:prstGeom prst="rect">
-            <a:avLst/>
-          </a:prstGeom>
-          <a:noFill/>
-        </p:spPr>
-        <p:txBody>
-          <a:bodyPr wrap="square" tIns="50800" bIns="50800" lIns="101600" rIns="101600" anchor="t">
-            <a:spAutoFit/>
-          </a:bodyPr>
-          <a:lstStyle/>
-          <a:p>
-            <a:pPr>
-              <a:spcAft>
-                <a:spcPts val="600"/>
-              </a:spcAft>
-            </a:pPr>
-            <a:r>
-              <a:rPr sz="1400" b="0">
-                <a:solidFill>
-                  <a:srgbClr val="1E293B"/>
-                </a:solidFill>
-                <a:latin typeface="Arial"/>
-              </a:rPr>
-              <a:t>prompt stack（提示词栈）先定义确认边界</a:t>
-            </a:r>
-          </a:p>
-          <a:p>
-            <a:pPr>
-              <a:spcAft>
-                <a:spcPts val="600"/>
-              </a:spcAft>
-            </a:pPr>
-            <a:r>
-              <a:rPr sz="1400" b="0">
-                <a:solidFill>
-                  <a:srgbClr val="1E293B"/>
-                </a:solidFill>
-                <a:latin typeface="Arial"/>
-              </a:rPr>
-              <a:t>tool pipeline（工具执行流水线）和 Bash 约束负责执行面收紧</a:t>
-            </a:r>
-          </a:p>
-        </p:txBody>
-      </p:sp>
-      <p:sp>
-        <p:nvSpPr>
-          <p:cNvPr id="16" name="Rounded Rectangle 15"/>
-          <p:cNvSpPr/>
-          <p:nvPr/>
-        </p:nvSpPr>
-        <p:spPr>
-          <a:xfrm>
-            <a:off x="658368" y="4069080"/>
-            <a:ext cx="10972800" cy="512064"/>
-          </a:xfrm>
-          <a:prstGeom prst="roundRect">
-            <a:avLst/>
-          </a:prstGeom>
-          <a:solidFill>
-            <a:srgbClr val="FFFFFF"/>
-          </a:solidFill>
-          <a:ln>
-            <a:solidFill>
-              <a:srgbClr val="2563EB"/>
-            </a:solidFill>
-          </a:ln>
-        </p:spPr>
-        <p:style>
-          <a:lnRef idx="1">
-            <a:schemeClr val="accent1"/>
-          </a:lnRef>
-          <a:fillRef idx="3">
-            <a:schemeClr val="accent1"/>
-          </a:fillRef>
-          <a:effectRef idx="2">
-            <a:schemeClr val="accent1"/>
-          </a:effectRef>
-          <a:fontRef idx="minor">
-            <a:schemeClr val="lt1"/>
-          </a:fontRef>
-        </p:style>
-        <p:txBody>
-          <a:bodyPr rtlCol="0" anchor="ctr"/>
-          <a:lstStyle/>
-          <a:p>
-            <a:pPr algn="ctr"/>
-          </a:p>
-        </p:txBody>
-      </p:sp>
-      <p:sp>
-        <p:nvSpPr>
-          <p:cNvPr id="17" name="Rectangle 16"/>
-          <p:cNvSpPr/>
-          <p:nvPr/>
-        </p:nvSpPr>
-        <p:spPr>
-          <a:xfrm>
-            <a:off x="658368" y="4069080"/>
-            <a:ext cx="10972800" cy="347472"/>
-          </a:xfrm>
-          <a:prstGeom prst="rect">
-            <a:avLst/>
-          </a:prstGeom>
-          <a:solidFill>
-            <a:srgbClr val="DBEAFE"/>
-          </a:solidFill>
-          <a:ln>
-            <a:solidFill>
-              <a:srgbClr val="DBEAFE"/>
-            </a:solidFill>
-          </a:ln>
-        </p:spPr>
-        <p:style>
-          <a:lnRef idx="1">
-            <a:schemeClr val="accent1"/>
-          </a:lnRef>
-          <a:fillRef idx="3">
-            <a:schemeClr val="accent1"/>
-          </a:fillRef>
-          <a:effectRef idx="2">
-            <a:schemeClr val="accent1"/>
-          </a:effectRef>
-          <a:fontRef idx="minor">
-            <a:schemeClr val="lt1"/>
-          </a:fontRef>
-        </p:style>
-        <p:txBody>
-          <a:bodyPr rtlCol="0" anchor="t" wrap="square" tIns="25400" bIns="25400" lIns="76200" rIns="76200"/>
-          <a:lstStyle/>
-          <a:p>
-            <a:pPr algn="ctr"/>
-            <a:r>
-              <a:rPr sz="1200" b="1">
-                <a:solidFill>
-                  <a:srgbClr val="2563EB"/>
-                </a:solidFill>
-                <a:latin typeface="Arial"/>
-              </a:rPr>
-              <a:t>关键代码片段</a:t>
-            </a:r>
-          </a:p>
-        </p:txBody>
-      </p:sp>
-      <p:sp>
-        <p:nvSpPr>
-          <p:cNvPr id="18" name="TextBox 17"/>
-          <p:cNvSpPr txBox="1"/>
-          <p:nvPr/>
-        </p:nvSpPr>
-        <p:spPr>
-          <a:xfrm>
-            <a:off x="731519" y="4471416"/>
-            <a:ext cx="10826496" cy="54864"/>
-          </a:xfrm>
-          <a:prstGeom prst="rect">
-            <a:avLst/>
-          </a:prstGeom>
-          <a:noFill/>
-        </p:spPr>
-        <p:txBody>
-          <a:bodyPr wrap="square" tIns="50800" bIns="50800" lIns="101600" rIns="101600" anchor="t">
-            <a:spAutoFit/>
-          </a:bodyPr>
-          <a:lstStyle/>
-          <a:p/>
-        </p:txBody>
-      </p:sp>
-      <p:sp>
-        <p:nvSpPr>
-          <p:cNvPr id="19" name="Rounded Rectangle 18"/>
-          <p:cNvSpPr/>
-          <p:nvPr/>
-        </p:nvSpPr>
-        <p:spPr>
-          <a:xfrm>
-            <a:off x="658368" y="4407408"/>
-            <a:ext cx="10972800" cy="1097280"/>
+            <a:off x="658368" y="4160520"/>
+            <a:ext cx="10972800" cy="1234440"/>
           </a:xfrm>
           <a:prstGeom prst="roundRect">
             <a:avLst/>
@@ -5229,7 +4823,7 @@
       </p:sp>
       <p:sp>
         <p:nvSpPr>
-          <p:cNvPr id="20" name="TextBox 19"/>
+          <p:cNvPr id="15" name="TextBox 14"/>
           <p:cNvSpPr txBox="1"/>
           <p:nvPr/>
         </p:nvSpPr>
@@ -5374,13 +4968,13 @@
         <p:spPr>
           <a:xfrm>
             <a:off x="658368" y="1536192"/>
-            <a:ext cx="10972800" cy="713232"/>
+            <a:ext cx="10972800" cy="658368"/>
           </a:xfrm>
           <a:prstGeom prst="roundRect">
             <a:avLst/>
           </a:prstGeom>
           <a:solidFill>
-            <a:srgbClr val="FFFFFF"/>
+            <a:srgbClr val="DBEAFE"/>
           </a:solidFill>
           <a:ln>
             <a:solidFill>
@@ -5403,96 +4997,16 @@
           </a:fontRef>
         </p:style>
         <p:txBody>
-          <a:bodyPr rtlCol="0" anchor="ctr"/>
-          <a:lstStyle/>
-          <a:p>
-            <a:pPr algn="ctr"/>
-          </a:p>
-        </p:txBody>
-      </p:sp>
-      <p:sp>
-        <p:nvSpPr>
-          <p:cNvPr id="5" name="Rectangle 4"/>
-          <p:cNvSpPr/>
-          <p:nvPr/>
-        </p:nvSpPr>
-        <p:spPr>
-          <a:xfrm>
-            <a:off x="658368" y="1536192"/>
-            <a:ext cx="10972800" cy="347472"/>
-          </a:xfrm>
-          <a:prstGeom prst="rect">
-            <a:avLst/>
-          </a:prstGeom>
-          <a:solidFill>
-            <a:srgbClr val="DBEAFE"/>
-          </a:solidFill>
-          <a:ln>
-            <a:solidFill>
-              <a:srgbClr val="DBEAFE"/>
-            </a:solidFill>
-          </a:ln>
-        </p:spPr>
-        <p:style>
-          <a:lnRef idx="1">
-            <a:schemeClr val="accent1"/>
-          </a:lnRef>
-          <a:fillRef idx="3">
-            <a:schemeClr val="accent1"/>
-          </a:fillRef>
-          <a:effectRef idx="2">
-            <a:schemeClr val="accent1"/>
-          </a:effectRef>
-          <a:fontRef idx="minor">
-            <a:schemeClr val="lt1"/>
-          </a:fontRef>
-        </p:style>
-        <p:txBody>
-          <a:bodyPr rtlCol="0" anchor="t" wrap="square" tIns="25400" bIns="25400" lIns="76200" rIns="76200"/>
-          <a:lstStyle/>
-          <a:p>
-            <a:pPr algn="ctr"/>
-            <a:r>
-              <a:rPr sz="1200" b="1">
-                <a:solidFill>
-                  <a:srgbClr val="2563EB"/>
-                </a:solidFill>
-                <a:latin typeface="Arial"/>
-              </a:rPr>
-              <a:t>本页一句话</a:t>
-            </a:r>
-          </a:p>
-        </p:txBody>
-      </p:sp>
-      <p:sp>
-        <p:nvSpPr>
-          <p:cNvPr id="6" name="TextBox 5"/>
-          <p:cNvSpPr txBox="1"/>
-          <p:nvPr/>
-        </p:nvSpPr>
-        <p:spPr>
-          <a:xfrm>
-            <a:off x="731519" y="1938528"/>
-            <a:ext cx="10826496" cy="256032"/>
-          </a:xfrm>
-          <a:prstGeom prst="rect">
-            <a:avLst/>
-          </a:prstGeom>
-          <a:noFill/>
-        </p:spPr>
-        <p:txBody>
-          <a:bodyPr wrap="square" tIns="50800" bIns="50800" lIns="101600" rIns="101600" anchor="t">
-            <a:spAutoFit/>
-          </a:bodyPr>
-          <a:lstStyle/>
-          <a:p>
-            <a:pPr>
+          <a:bodyPr rtlCol="0" anchor="t" wrap="square" tIns="50800" bIns="50800" lIns="101600" rIns="101600"/>
+          <a:lstStyle/>
+          <a:p>
+            <a:pPr algn="ctr">
               <a:spcAft>
                 <a:spcPts val="600"/>
               </a:spcAft>
             </a:pPr>
             <a:r>
-              <a:rPr sz="1400" b="0">
+              <a:rPr sz="1600" b="0">
                 <a:solidFill>
                   <a:srgbClr val="1E293B"/>
                 </a:solidFill>
@@ -5505,14 +5019,14 @@
       </p:sp>
       <p:sp>
         <p:nvSpPr>
-          <p:cNvPr id="7" name="TextBox 6"/>
+          <p:cNvPr id="5" name="TextBox 4"/>
           <p:cNvSpPr txBox="1"/>
           <p:nvPr/>
         </p:nvSpPr>
         <p:spPr>
           <a:xfrm>
-            <a:off x="749808" y="2487168"/>
-            <a:ext cx="5577840" cy="2926080"/>
+            <a:off x="749808" y="2450592"/>
+            <a:ext cx="5577840" cy="3063240"/>
           </a:xfrm>
           <a:prstGeom prst="rect">
             <a:avLst/>
@@ -5576,137 +5090,14 @@
       </p:sp>
       <p:sp>
         <p:nvSpPr>
-          <p:cNvPr id="8" name="Rounded Rectangle 7"/>
+          <p:cNvPr id="6" name="Rounded Rectangle 5"/>
           <p:cNvSpPr/>
           <p:nvPr/>
         </p:nvSpPr>
         <p:spPr>
           <a:xfrm>
-            <a:off x="6537960" y="2487168"/>
-            <a:ext cx="4800600" cy="548640"/>
-          </a:xfrm>
-          <a:prstGeom prst="roundRect">
-            <a:avLst/>
-          </a:prstGeom>
-          <a:solidFill>
-            <a:srgbClr val="FFFFFF"/>
-          </a:solidFill>
-          <a:ln>
-            <a:solidFill>
-              <a:srgbClr val="2563EB"/>
-            </a:solidFill>
-          </a:ln>
-        </p:spPr>
-        <p:style>
-          <a:lnRef idx="1">
-            <a:schemeClr val="accent1"/>
-          </a:lnRef>
-          <a:fillRef idx="3">
-            <a:schemeClr val="accent1"/>
-          </a:fillRef>
-          <a:effectRef idx="2">
-            <a:schemeClr val="accent1"/>
-          </a:effectRef>
-          <a:fontRef idx="minor">
-            <a:schemeClr val="lt1"/>
-          </a:fontRef>
-        </p:style>
-        <p:txBody>
-          <a:bodyPr rtlCol="0" anchor="ctr"/>
-          <a:lstStyle/>
-          <a:p>
-            <a:pPr algn="ctr"/>
-          </a:p>
-        </p:txBody>
-      </p:sp>
-      <p:sp>
-        <p:nvSpPr>
-          <p:cNvPr id="9" name="Rectangle 8"/>
-          <p:cNvSpPr/>
-          <p:nvPr/>
-        </p:nvSpPr>
-        <p:spPr>
-          <a:xfrm>
-            <a:off x="6537960" y="2487168"/>
-            <a:ext cx="4800600" cy="347472"/>
-          </a:xfrm>
-          <a:prstGeom prst="rect">
-            <a:avLst/>
-          </a:prstGeom>
-          <a:solidFill>
-            <a:srgbClr val="DBEAFE"/>
-          </a:solidFill>
-          <a:ln>
-            <a:solidFill>
-              <a:srgbClr val="DBEAFE"/>
-            </a:solidFill>
-          </a:ln>
-        </p:spPr>
-        <p:style>
-          <a:lnRef idx="1">
-            <a:schemeClr val="accent1"/>
-          </a:lnRef>
-          <a:fillRef idx="3">
-            <a:schemeClr val="accent1"/>
-          </a:fillRef>
-          <a:effectRef idx="2">
-            <a:schemeClr val="accent1"/>
-          </a:effectRef>
-          <a:fontRef idx="minor">
-            <a:schemeClr val="lt1"/>
-          </a:fontRef>
-        </p:style>
-        <p:txBody>
-          <a:bodyPr rtlCol="0" anchor="t" wrap="square" tIns="25400" bIns="25400" lIns="76200" rIns="76200"/>
-          <a:lstStyle/>
-          <a:p>
-            <a:pPr algn="ctr"/>
-            <a:r>
-              <a:rPr sz="1200" b="1">
-                <a:solidFill>
-                  <a:srgbClr val="2563EB"/>
-                </a:solidFill>
-                <a:latin typeface="Arial"/>
-              </a:rPr>
-              <a:t>关键代码片段</a:t>
-            </a:r>
-          </a:p>
-        </p:txBody>
-      </p:sp>
-      <p:sp>
-        <p:nvSpPr>
-          <p:cNvPr id="10" name="TextBox 9"/>
-          <p:cNvSpPr txBox="1"/>
-          <p:nvPr/>
-        </p:nvSpPr>
-        <p:spPr>
-          <a:xfrm>
-            <a:off x="6611112" y="2889504"/>
-            <a:ext cx="4654296" cy="91439"/>
-          </a:xfrm>
-          <a:prstGeom prst="rect">
-            <a:avLst/>
-          </a:prstGeom>
-          <a:noFill/>
-        </p:spPr>
-        <p:txBody>
-          <a:bodyPr wrap="square" tIns="50800" bIns="50800" lIns="101600" rIns="101600" anchor="t">
-            <a:spAutoFit/>
-          </a:bodyPr>
-          <a:lstStyle/>
-          <a:p/>
-        </p:txBody>
-      </p:sp>
-      <p:sp>
-        <p:nvSpPr>
-          <p:cNvPr id="11" name="Rounded Rectangle 10"/>
-          <p:cNvSpPr/>
-          <p:nvPr/>
-        </p:nvSpPr>
-        <p:spPr>
-          <a:xfrm>
-            <a:off x="6537960" y="2788920"/>
-            <a:ext cx="4800600" cy="2103120"/>
+            <a:off x="6537960" y="2468880"/>
+            <a:ext cx="4800600" cy="2468880"/>
           </a:xfrm>
           <a:prstGeom prst="roundRect">
             <a:avLst/>
@@ -5756,7 +5147,7 @@
       </p:sp>
       <p:sp>
         <p:nvSpPr>
-          <p:cNvPr id="12" name="TextBox 11"/>
+          <p:cNvPr id="7" name="TextBox 6"/>
           <p:cNvSpPr txBox="1"/>
           <p:nvPr/>
         </p:nvSpPr>
@@ -5901,13 +5292,13 @@
         <p:spPr>
           <a:xfrm>
             <a:off x="658368" y="1536192"/>
-            <a:ext cx="10972800" cy="713232"/>
+            <a:ext cx="10972800" cy="658368"/>
           </a:xfrm>
           <a:prstGeom prst="roundRect">
             <a:avLst/>
           </a:prstGeom>
           <a:solidFill>
-            <a:srgbClr val="FFFFFF"/>
+            <a:srgbClr val="DBEAFE"/>
           </a:solidFill>
           <a:ln>
             <a:solidFill>
@@ -5930,96 +5321,16 @@
           </a:fontRef>
         </p:style>
         <p:txBody>
-          <a:bodyPr rtlCol="0" anchor="ctr"/>
-          <a:lstStyle/>
-          <a:p>
-            <a:pPr algn="ctr"/>
-          </a:p>
-        </p:txBody>
-      </p:sp>
-      <p:sp>
-        <p:nvSpPr>
-          <p:cNvPr id="5" name="Rectangle 4"/>
-          <p:cNvSpPr/>
-          <p:nvPr/>
-        </p:nvSpPr>
-        <p:spPr>
-          <a:xfrm>
-            <a:off x="658368" y="1536192"/>
-            <a:ext cx="10972800" cy="347472"/>
-          </a:xfrm>
-          <a:prstGeom prst="rect">
-            <a:avLst/>
-          </a:prstGeom>
-          <a:solidFill>
-            <a:srgbClr val="DBEAFE"/>
-          </a:solidFill>
-          <a:ln>
-            <a:solidFill>
-              <a:srgbClr val="DBEAFE"/>
-            </a:solidFill>
-          </a:ln>
-        </p:spPr>
-        <p:style>
-          <a:lnRef idx="1">
-            <a:schemeClr val="accent1"/>
-          </a:lnRef>
-          <a:fillRef idx="3">
-            <a:schemeClr val="accent1"/>
-          </a:fillRef>
-          <a:effectRef idx="2">
-            <a:schemeClr val="accent1"/>
-          </a:effectRef>
-          <a:fontRef idx="minor">
-            <a:schemeClr val="lt1"/>
-          </a:fontRef>
-        </p:style>
-        <p:txBody>
-          <a:bodyPr rtlCol="0" anchor="t" wrap="square" tIns="25400" bIns="25400" lIns="76200" rIns="76200"/>
-          <a:lstStyle/>
-          <a:p>
-            <a:pPr algn="ctr"/>
-            <a:r>
-              <a:rPr sz="1200" b="1">
-                <a:solidFill>
-                  <a:srgbClr val="2563EB"/>
-                </a:solidFill>
-                <a:latin typeface="Arial"/>
-              </a:rPr>
-              <a:t>本页一句话</a:t>
-            </a:r>
-          </a:p>
-        </p:txBody>
-      </p:sp>
-      <p:sp>
-        <p:nvSpPr>
-          <p:cNvPr id="6" name="TextBox 5"/>
-          <p:cNvSpPr txBox="1"/>
-          <p:nvPr/>
-        </p:nvSpPr>
-        <p:spPr>
-          <a:xfrm>
-            <a:off x="731519" y="1938528"/>
-            <a:ext cx="10826496" cy="256032"/>
-          </a:xfrm>
-          <a:prstGeom prst="rect">
-            <a:avLst/>
-          </a:prstGeom>
-          <a:noFill/>
-        </p:spPr>
-        <p:txBody>
-          <a:bodyPr wrap="square" tIns="50800" bIns="50800" lIns="101600" rIns="101600" anchor="t">
-            <a:spAutoFit/>
-          </a:bodyPr>
-          <a:lstStyle/>
-          <a:p>
-            <a:pPr>
+          <a:bodyPr rtlCol="0" anchor="t" wrap="square" tIns="50800" bIns="50800" lIns="101600" rIns="101600"/>
+          <a:lstStyle/>
+          <a:p>
+            <a:pPr algn="ctr">
               <a:spcAft>
                 <a:spcPts val="600"/>
               </a:spcAft>
             </a:pPr>
             <a:r>
-              <a:rPr sz="1400" b="0">
+              <a:rPr sz="1600" b="0">
                 <a:solidFill>
                   <a:srgbClr val="1E293B"/>
                 </a:solidFill>
@@ -6032,14 +5343,14 @@
       </p:sp>
       <p:sp>
         <p:nvSpPr>
-          <p:cNvPr id="7" name="TextBox 6"/>
+          <p:cNvPr id="5" name="TextBox 4"/>
           <p:cNvSpPr txBox="1"/>
           <p:nvPr/>
         </p:nvSpPr>
         <p:spPr>
           <a:xfrm>
-            <a:off x="749808" y="2487168"/>
-            <a:ext cx="5577840" cy="2926080"/>
+            <a:off x="749808" y="2450592"/>
+            <a:ext cx="5577840" cy="3063240"/>
           </a:xfrm>
           <a:prstGeom prst="rect">
             <a:avLst/>
@@ -6119,137 +5430,14 @@
       </p:sp>
       <p:sp>
         <p:nvSpPr>
-          <p:cNvPr id="8" name="Rounded Rectangle 7"/>
+          <p:cNvPr id="6" name="Rounded Rectangle 5"/>
           <p:cNvSpPr/>
           <p:nvPr/>
         </p:nvSpPr>
         <p:spPr>
           <a:xfrm>
-            <a:off x="6537960" y="2487168"/>
-            <a:ext cx="4800600" cy="548640"/>
-          </a:xfrm>
-          <a:prstGeom prst="roundRect">
-            <a:avLst/>
-          </a:prstGeom>
-          <a:solidFill>
-            <a:srgbClr val="FFFFFF"/>
-          </a:solidFill>
-          <a:ln>
-            <a:solidFill>
-              <a:srgbClr val="2563EB"/>
-            </a:solidFill>
-          </a:ln>
-        </p:spPr>
-        <p:style>
-          <a:lnRef idx="1">
-            <a:schemeClr val="accent1"/>
-          </a:lnRef>
-          <a:fillRef idx="3">
-            <a:schemeClr val="accent1"/>
-          </a:fillRef>
-          <a:effectRef idx="2">
-            <a:schemeClr val="accent1"/>
-          </a:effectRef>
-          <a:fontRef idx="minor">
-            <a:schemeClr val="lt1"/>
-          </a:fontRef>
-        </p:style>
-        <p:txBody>
-          <a:bodyPr rtlCol="0" anchor="ctr"/>
-          <a:lstStyle/>
-          <a:p>
-            <a:pPr algn="ctr"/>
-          </a:p>
-        </p:txBody>
-      </p:sp>
-      <p:sp>
-        <p:nvSpPr>
-          <p:cNvPr id="9" name="Rectangle 8"/>
-          <p:cNvSpPr/>
-          <p:nvPr/>
-        </p:nvSpPr>
-        <p:spPr>
-          <a:xfrm>
-            <a:off x="6537960" y="2487168"/>
-            <a:ext cx="4800600" cy="347472"/>
-          </a:xfrm>
-          <a:prstGeom prst="rect">
-            <a:avLst/>
-          </a:prstGeom>
-          <a:solidFill>
-            <a:srgbClr val="DBEAFE"/>
-          </a:solidFill>
-          <a:ln>
-            <a:solidFill>
-              <a:srgbClr val="DBEAFE"/>
-            </a:solidFill>
-          </a:ln>
-        </p:spPr>
-        <p:style>
-          <a:lnRef idx="1">
-            <a:schemeClr val="accent1"/>
-          </a:lnRef>
-          <a:fillRef idx="3">
-            <a:schemeClr val="accent1"/>
-          </a:fillRef>
-          <a:effectRef idx="2">
-            <a:schemeClr val="accent1"/>
-          </a:effectRef>
-          <a:fontRef idx="minor">
-            <a:schemeClr val="lt1"/>
-          </a:fontRef>
-        </p:style>
-        <p:txBody>
-          <a:bodyPr rtlCol="0" anchor="t" wrap="square" tIns="25400" bIns="25400" lIns="76200" rIns="76200"/>
-          <a:lstStyle/>
-          <a:p>
-            <a:pPr algn="ctr"/>
-            <a:r>
-              <a:rPr sz="1200" b="1">
-                <a:solidFill>
-                  <a:srgbClr val="2563EB"/>
-                </a:solidFill>
-                <a:latin typeface="Arial"/>
-              </a:rPr>
-              <a:t>关键代码片段</a:t>
-            </a:r>
-          </a:p>
-        </p:txBody>
-      </p:sp>
-      <p:sp>
-        <p:nvSpPr>
-          <p:cNvPr id="10" name="TextBox 9"/>
-          <p:cNvSpPr txBox="1"/>
-          <p:nvPr/>
-        </p:nvSpPr>
-        <p:spPr>
-          <a:xfrm>
-            <a:off x="6611112" y="2889504"/>
-            <a:ext cx="4654296" cy="91439"/>
-          </a:xfrm>
-          <a:prstGeom prst="rect">
-            <a:avLst/>
-          </a:prstGeom>
-          <a:noFill/>
-        </p:spPr>
-        <p:txBody>
-          <a:bodyPr wrap="square" tIns="50800" bIns="50800" lIns="101600" rIns="101600" anchor="t">
-            <a:spAutoFit/>
-          </a:bodyPr>
-          <a:lstStyle/>
-          <a:p/>
-        </p:txBody>
-      </p:sp>
-      <p:sp>
-        <p:nvSpPr>
-          <p:cNvPr id="11" name="Rounded Rectangle 10"/>
-          <p:cNvSpPr/>
-          <p:nvPr/>
-        </p:nvSpPr>
-        <p:spPr>
-          <a:xfrm>
-            <a:off x="6537960" y="2788920"/>
-            <a:ext cx="4800600" cy="2103120"/>
+            <a:off x="6537960" y="2468880"/>
+            <a:ext cx="4800600" cy="2468880"/>
           </a:xfrm>
           <a:prstGeom prst="roundRect">
             <a:avLst/>
@@ -6298,7 +5486,7 @@
       </p:sp>
       <p:sp>
         <p:nvSpPr>
-          <p:cNvPr id="12" name="TextBox 11"/>
+          <p:cNvPr id="7" name="TextBox 6"/>
           <p:cNvSpPr txBox="1"/>
           <p:nvPr/>
         </p:nvSpPr>
@@ -6443,13 +5631,13 @@
         <p:spPr>
           <a:xfrm>
             <a:off x="658368" y="1536192"/>
-            <a:ext cx="10972800" cy="713232"/>
+            <a:ext cx="10972800" cy="658368"/>
           </a:xfrm>
           <a:prstGeom prst="roundRect">
             <a:avLst/>
           </a:prstGeom>
           <a:solidFill>
-            <a:srgbClr val="FFFFFF"/>
+            <a:srgbClr val="DBEAFE"/>
           </a:solidFill>
           <a:ln>
             <a:solidFill>
@@ -6472,96 +5660,16 @@
           </a:fontRef>
         </p:style>
         <p:txBody>
-          <a:bodyPr rtlCol="0" anchor="ctr"/>
-          <a:lstStyle/>
-          <a:p>
-            <a:pPr algn="ctr"/>
-          </a:p>
-        </p:txBody>
-      </p:sp>
-      <p:sp>
-        <p:nvSpPr>
-          <p:cNvPr id="5" name="Rectangle 4"/>
-          <p:cNvSpPr/>
-          <p:nvPr/>
-        </p:nvSpPr>
-        <p:spPr>
-          <a:xfrm>
-            <a:off x="658368" y="1536192"/>
-            <a:ext cx="10972800" cy="347472"/>
-          </a:xfrm>
-          <a:prstGeom prst="rect">
-            <a:avLst/>
-          </a:prstGeom>
-          <a:solidFill>
-            <a:srgbClr val="DBEAFE"/>
-          </a:solidFill>
-          <a:ln>
-            <a:solidFill>
-              <a:srgbClr val="DBEAFE"/>
-            </a:solidFill>
-          </a:ln>
-        </p:spPr>
-        <p:style>
-          <a:lnRef idx="1">
-            <a:schemeClr val="accent1"/>
-          </a:lnRef>
-          <a:fillRef idx="3">
-            <a:schemeClr val="accent1"/>
-          </a:fillRef>
-          <a:effectRef idx="2">
-            <a:schemeClr val="accent1"/>
-          </a:effectRef>
-          <a:fontRef idx="minor">
-            <a:schemeClr val="lt1"/>
-          </a:fontRef>
-        </p:style>
-        <p:txBody>
-          <a:bodyPr rtlCol="0" anchor="t" wrap="square" tIns="25400" bIns="25400" lIns="76200" rIns="76200"/>
-          <a:lstStyle/>
-          <a:p>
-            <a:pPr algn="ctr"/>
-            <a:r>
-              <a:rPr sz="1200" b="1">
-                <a:solidFill>
-                  <a:srgbClr val="2563EB"/>
-                </a:solidFill>
-                <a:latin typeface="Arial"/>
-              </a:rPr>
-              <a:t>本页一句话</a:t>
-            </a:r>
-          </a:p>
-        </p:txBody>
-      </p:sp>
-      <p:sp>
-        <p:nvSpPr>
-          <p:cNvPr id="6" name="TextBox 5"/>
-          <p:cNvSpPr txBox="1"/>
-          <p:nvPr/>
-        </p:nvSpPr>
-        <p:spPr>
-          <a:xfrm>
-            <a:off x="731519" y="1938528"/>
-            <a:ext cx="10826496" cy="256032"/>
-          </a:xfrm>
-          <a:prstGeom prst="rect">
-            <a:avLst/>
-          </a:prstGeom>
-          <a:noFill/>
-        </p:spPr>
-        <p:txBody>
-          <a:bodyPr wrap="square" tIns="50800" bIns="50800" lIns="101600" rIns="101600" anchor="t">
-            <a:spAutoFit/>
-          </a:bodyPr>
-          <a:lstStyle/>
-          <a:p>
-            <a:pPr>
+          <a:bodyPr rtlCol="0" anchor="t" wrap="square" tIns="50800" bIns="50800" lIns="101600" rIns="101600"/>
+          <a:lstStyle/>
+          <a:p>
+            <a:pPr algn="ctr">
               <a:spcAft>
                 <a:spcPts val="600"/>
               </a:spcAft>
             </a:pPr>
             <a:r>
-              <a:rPr sz="1400" b="0">
+              <a:rPr sz="1600" b="0">
                 <a:solidFill>
                   <a:srgbClr val="1E293B"/>
                 </a:solidFill>
@@ -6574,14 +5682,14 @@
       </p:sp>
       <p:sp>
         <p:nvSpPr>
-          <p:cNvPr id="7" name="TextBox 6"/>
+          <p:cNvPr id="5" name="TextBox 4"/>
           <p:cNvSpPr txBox="1"/>
           <p:nvPr/>
         </p:nvSpPr>
         <p:spPr>
           <a:xfrm>
-            <a:off x="749808" y="2487168"/>
-            <a:ext cx="5577840" cy="2926080"/>
+            <a:off x="749808" y="2450592"/>
+            <a:ext cx="5577840" cy="3063240"/>
           </a:xfrm>
           <a:prstGeom prst="rect">
             <a:avLst/>
@@ -6693,7 +5801,7 @@
       </p:sp>
       <p:sp>
         <p:nvSpPr>
-          <p:cNvPr id="8" name="TextBox 7"/>
+          <p:cNvPr id="6" name="TextBox 5"/>
           <p:cNvSpPr txBox="1"/>
           <p:nvPr/>
         </p:nvSpPr>
@@ -6871,8 +5979,8 @@
         </p:nvSpPr>
         <p:spPr>
           <a:xfrm>
-            <a:off x="640080" y="1645920"/>
-            <a:ext cx="1828800" cy="868680"/>
+            <a:off x="640080" y="1691640"/>
+            <a:ext cx="1691640" cy="914400"/>
           </a:xfrm>
           <a:prstGeom prst="roundRect">
             <a:avLst/>
@@ -6916,8 +6024,8 @@
         </p:nvSpPr>
         <p:spPr>
           <a:xfrm>
-            <a:off x="640080" y="1645920"/>
-            <a:ext cx="1828800" cy="347472"/>
+            <a:off x="640080" y="1691640"/>
+            <a:ext cx="1691640" cy="347472"/>
           </a:xfrm>
           <a:prstGeom prst="rect">
             <a:avLst/>
@@ -6957,7 +6065,7 @@
                 </a:solidFill>
                 <a:latin typeface="Arial"/>
               </a:rPr>
-              <a:t>输入</a:t>
+              <a:t>用户输入</a:t>
             </a:r>
           </a:p>
         </p:txBody>
@@ -6970,8 +6078,8 @@
         </p:nvSpPr>
         <p:spPr>
           <a:xfrm>
-            <a:off x="713231" y="2048256"/>
-            <a:ext cx="1682496" cy="411479"/>
+            <a:off x="713231" y="2093976"/>
+            <a:ext cx="1545336" cy="457200"/>
           </a:xfrm>
           <a:prstGeom prst="rect">
             <a:avLst/>
@@ -7025,8 +6133,8 @@
         </p:nvSpPr>
         <p:spPr>
           <a:xfrm>
-            <a:off x="2697480" y="1645920"/>
-            <a:ext cx="1874519" cy="868680"/>
+            <a:off x="2560320" y="1691640"/>
+            <a:ext cx="1874519" cy="914400"/>
           </a:xfrm>
           <a:prstGeom prst="roundRect">
             <a:avLst/>
@@ -7070,7 +6178,7 @@
         </p:nvSpPr>
         <p:spPr>
           <a:xfrm>
-            <a:off x="2697480" y="1645920"/>
+            <a:off x="2560320" y="1691640"/>
             <a:ext cx="1874519" cy="347472"/>
           </a:xfrm>
           <a:prstGeom prst="rect">
@@ -7111,7 +6219,7 @@
                 </a:solidFill>
                 <a:latin typeface="Arial"/>
               </a:rPr>
-              <a:t>约束层</a:t>
+              <a:t>提示词栈</a:t>
             </a:r>
           </a:p>
         </p:txBody>
@@ -7124,8 +6232,8 @@
         </p:nvSpPr>
         <p:spPr>
           <a:xfrm>
-            <a:off x="2770632" y="2048256"/>
-            <a:ext cx="1728216" cy="411479"/>
+            <a:off x="2633472" y="2093976"/>
+            <a:ext cx="1728216" cy="457200"/>
           </a:xfrm>
           <a:prstGeom prst="rect">
             <a:avLst/>
@@ -7166,7 +6274,7 @@
                 </a:solidFill>
                 <a:latin typeface="Arial"/>
               </a:rPr>
-              <a:t>提示词栈</a:t>
+              <a:t>默认行为约束</a:t>
             </a:r>
           </a:p>
         </p:txBody>
@@ -7179,8 +6287,8 @@
         </p:nvSpPr>
         <p:spPr>
           <a:xfrm>
-            <a:off x="4800600" y="1645920"/>
-            <a:ext cx="2011680" cy="868680"/>
+            <a:off x="4663440" y="1691640"/>
+            <a:ext cx="1965960" cy="914400"/>
           </a:xfrm>
           <a:prstGeom prst="roundRect">
             <a:avLst/>
@@ -7224,8 +6332,8 @@
         </p:nvSpPr>
         <p:spPr>
           <a:xfrm>
-            <a:off x="4800600" y="1645920"/>
-            <a:ext cx="2011680" cy="347472"/>
+            <a:off x="4663440" y="1691640"/>
+            <a:ext cx="1965960" cy="347472"/>
           </a:xfrm>
           <a:prstGeom prst="rect">
             <a:avLst/>
@@ -7265,7 +6373,7 @@
                 </a:solidFill>
                 <a:latin typeface="Arial"/>
               </a:rPr>
-              <a:t>会话层</a:t>
+              <a:t>会话宿主</a:t>
             </a:r>
           </a:p>
         </p:txBody>
@@ -7278,8 +6386,8 @@
         </p:nvSpPr>
         <p:spPr>
           <a:xfrm>
-            <a:off x="4873752" y="2048256"/>
-            <a:ext cx="1865376" cy="411479"/>
+            <a:off x="4736592" y="2093976"/>
+            <a:ext cx="1819656" cy="457200"/>
           </a:xfrm>
           <a:prstGeom prst="rect">
             <a:avLst/>
@@ -7333,8 +6441,8 @@
         </p:nvSpPr>
         <p:spPr>
           <a:xfrm>
-            <a:off x="7086600" y="1645920"/>
-            <a:ext cx="2011680" cy="868680"/>
+            <a:off x="6903720" y="1691640"/>
+            <a:ext cx="1920240" cy="914400"/>
           </a:xfrm>
           <a:prstGeom prst="roundRect">
             <a:avLst/>
@@ -7378,8 +6486,8 @@
         </p:nvSpPr>
         <p:spPr>
           <a:xfrm>
-            <a:off x="7086600" y="1645920"/>
-            <a:ext cx="2011680" cy="347472"/>
+            <a:off x="6903720" y="1691640"/>
+            <a:ext cx="1920240" cy="347472"/>
           </a:xfrm>
           <a:prstGeom prst="rect">
             <a:avLst/>
@@ -7419,7 +6527,7 @@
                 </a:solidFill>
                 <a:latin typeface="Arial"/>
               </a:rPr>
-              <a:t>执行层</a:t>
+              <a:t>轮次循环</a:t>
             </a:r>
           </a:p>
         </p:txBody>
@@ -7432,8 +6540,8 @@
         </p:nvSpPr>
         <p:spPr>
           <a:xfrm>
-            <a:off x="7159752" y="2048256"/>
-            <a:ext cx="1865376" cy="411479"/>
+            <a:off x="6976872" y="2093976"/>
+            <a:ext cx="1773936" cy="457200"/>
           </a:xfrm>
           <a:prstGeom prst="rect">
             <a:avLst/>
@@ -7487,8 +6595,8 @@
         </p:nvSpPr>
         <p:spPr>
           <a:xfrm>
-            <a:off x="9326880" y="1645920"/>
-            <a:ext cx="1965960" cy="868680"/>
+            <a:off x="9098280" y="1691640"/>
+            <a:ext cx="2331720" cy="914400"/>
           </a:xfrm>
           <a:prstGeom prst="roundRect">
             <a:avLst/>
@@ -7532,8 +6640,8 @@
         </p:nvSpPr>
         <p:spPr>
           <a:xfrm>
-            <a:off x="9326880" y="1645920"/>
-            <a:ext cx="1965960" cy="347472"/>
+            <a:off x="9098280" y="1691640"/>
+            <a:ext cx="2331720" cy="347472"/>
           </a:xfrm>
           <a:prstGeom prst="rect">
             <a:avLst/>
@@ -7573,7 +6681,7 @@
                 </a:solidFill>
                 <a:latin typeface="Arial"/>
               </a:rPr>
-              <a:t>工具层</a:t>
+              <a:t>工具执行流水线</a:t>
             </a:r>
           </a:p>
         </p:txBody>
@@ -7586,8 +6694,8 @@
         </p:nvSpPr>
         <p:spPr>
           <a:xfrm>
-            <a:off x="9400032" y="2048256"/>
-            <a:ext cx="1819656" cy="411479"/>
+            <a:off x="9171432" y="2093976"/>
+            <a:ext cx="2185415" cy="457200"/>
           </a:xfrm>
           <a:prstGeom prst="rect">
             <a:avLst/>
@@ -7628,7 +6736,7 @@
                 </a:solidFill>
                 <a:latin typeface="Arial"/>
               </a:rPr>
-              <a:t>工具执行流水线</a:t>
+              <a:t>执行与权限边界</a:t>
             </a:r>
           </a:p>
         </p:txBody>
@@ -7641,8 +6749,8 @@
         </p:nvSpPr>
         <p:spPr>
           <a:xfrm>
-            <a:off x="1920240" y="3154680"/>
-            <a:ext cx="2743200" cy="1051560"/>
+            <a:off x="1417320" y="3246120"/>
+            <a:ext cx="3794760" cy="1097280"/>
           </a:xfrm>
           <a:prstGeom prst="roundRect">
             <a:avLst/>
@@ -7686,8 +6794,8 @@
         </p:nvSpPr>
         <p:spPr>
           <a:xfrm>
-            <a:off x="1920240" y="3154680"/>
-            <a:ext cx="2743200" cy="347472"/>
+            <a:off x="1417320" y="3246120"/>
+            <a:ext cx="3794760" cy="347472"/>
           </a:xfrm>
           <a:prstGeom prst="rect">
             <a:avLst/>
@@ -7727,7 +6835,7 @@
                 </a:solidFill>
                 <a:latin typeface="Arial"/>
               </a:rPr>
-              <a:t>能力面</a:t>
+              <a:t>能力与任务</a:t>
             </a:r>
           </a:p>
         </p:txBody>
@@ -7740,8 +6848,8 @@
         </p:nvSpPr>
         <p:spPr>
           <a:xfrm>
-            <a:off x="1993392" y="3557016"/>
-            <a:ext cx="2596896" cy="594359"/>
+            <a:off x="1490472" y="3648456"/>
+            <a:ext cx="3648456" cy="640080"/>
           </a:xfrm>
           <a:prstGeom prst="rect">
             <a:avLst/>
@@ -7795,8 +6903,8 @@
         </p:nvSpPr>
         <p:spPr>
           <a:xfrm>
-            <a:off x="4892040" y="3154680"/>
-            <a:ext cx="2468880" cy="1051560"/>
+            <a:off x="5440680" y="3246120"/>
+            <a:ext cx="2240280" cy="1097280"/>
           </a:xfrm>
           <a:prstGeom prst="roundRect">
             <a:avLst/>
@@ -7840,8 +6948,8 @@
         </p:nvSpPr>
         <p:spPr>
           <a:xfrm>
-            <a:off x="4892040" y="3154680"/>
-            <a:ext cx="2468880" cy="347472"/>
+            <a:off x="5440680" y="3246120"/>
+            <a:ext cx="2240280" cy="347472"/>
           </a:xfrm>
           <a:prstGeom prst="rect">
             <a:avLst/>
@@ -7894,8 +7002,8 @@
         </p:nvSpPr>
         <p:spPr>
           <a:xfrm>
-            <a:off x="4965192" y="3557016"/>
-            <a:ext cx="2322576" cy="594359"/>
+            <a:off x="5513832" y="3648456"/>
+            <a:ext cx="2093976" cy="640080"/>
           </a:xfrm>
           <a:prstGeom prst="rect">
             <a:avLst/>
@@ -7920,7 +7028,23 @@
                 </a:solidFill>
                 <a:latin typeface="Arial"/>
               </a:rPr>
-              <a:t>Filesystem / Shell / MCP</a:t>
+              <a:t>Filesystem</a:t>
+            </a:r>
+          </a:p>
+          <a:p>
+            <a:pPr>
+              <a:spcAft>
+                <a:spcPts val="600"/>
+              </a:spcAft>
+            </a:pPr>
+            <a:r>
+              <a:rPr sz="1400" b="0">
+                <a:solidFill>
+                  <a:srgbClr val="1E293B"/>
+                </a:solidFill>
+                <a:latin typeface="Arial"/>
+              </a:rPr>
+              <a:t>Shell / MCP</a:t>
             </a:r>
           </a:p>
         </p:txBody>
@@ -7933,8 +7057,8 @@
         </p:nvSpPr>
         <p:spPr>
           <a:xfrm>
-            <a:off x="7589520" y="3154680"/>
-            <a:ext cx="2971800" cy="1051560"/>
+            <a:off x="7955279" y="3246120"/>
+            <a:ext cx="2834640" cy="1097280"/>
           </a:xfrm>
           <a:prstGeom prst="roundRect">
             <a:avLst/>
@@ -7978,8 +7102,8 @@
         </p:nvSpPr>
         <p:spPr>
           <a:xfrm>
-            <a:off x="7589520" y="3154680"/>
-            <a:ext cx="2971800" cy="347472"/>
+            <a:off x="7955279" y="3246120"/>
+            <a:ext cx="2834640" cy="347472"/>
           </a:xfrm>
           <a:prstGeom prst="rect">
             <a:avLst/>
@@ -8019,7 +7143,7 @@
                 </a:solidFill>
                 <a:latin typeface="Arial"/>
               </a:rPr>
-              <a:t>外围控制面</a:t>
+              <a:t>控制面</a:t>
             </a:r>
           </a:p>
         </p:txBody>
@@ -8032,8 +7156,8 @@
         </p:nvSpPr>
         <p:spPr>
           <a:xfrm>
-            <a:off x="7662672" y="3557016"/>
-            <a:ext cx="2825496" cy="594359"/>
+            <a:off x="8028431" y="3648456"/>
+            <a:ext cx="2688336" cy="640080"/>
           </a:xfrm>
           <a:prstGeom prst="rect">
             <a:avLst/>
@@ -8087,8 +7211,8 @@
         </p:nvSpPr>
         <p:spPr>
           <a:xfrm>
-            <a:off x="2880360" y="4572000"/>
-            <a:ext cx="5029200" cy="868680"/>
+            <a:off x="2743200" y="4800600"/>
+            <a:ext cx="5029200" cy="914400"/>
           </a:xfrm>
           <a:prstGeom prst="roundRect">
             <a:avLst/>
@@ -8132,7 +7256,7 @@
         </p:nvSpPr>
         <p:spPr>
           <a:xfrm>
-            <a:off x="2880360" y="4572000"/>
+            <a:off x="2743200" y="4800600"/>
             <a:ext cx="5029200" cy="347472"/>
           </a:xfrm>
           <a:prstGeom prst="rect">
@@ -8186,8 +7310,8 @@
         </p:nvSpPr>
         <p:spPr>
           <a:xfrm>
-            <a:off x="2953512" y="4974336"/>
-            <a:ext cx="4882896" cy="411479"/>
+            <a:off x="2816352" y="5202936"/>
+            <a:ext cx="4882896" cy="457200"/>
           </a:xfrm>
           <a:prstGeom prst="rect">
             <a:avLst/>
@@ -8228,7 +7352,7 @@
                 </a:solidFill>
                 <a:latin typeface="Arial"/>
               </a:rPr>
-              <a:t>可观测性、持久化、恢复</a:t>
+              <a:t>持久化、观测、恢复</a:t>
             </a:r>
           </a:p>
         </p:txBody>
@@ -8241,7 +7365,7 @@
         </p:nvCxnSpPr>
         <p:spPr>
           <a:xfrm>
-            <a:off x="2468880" y="2084831"/>
+            <a:off x="2331720" y="2148840"/>
             <a:ext cx="228600" cy="0"/>
           </a:xfrm>
           <a:prstGeom prst="line">
@@ -8276,7 +7400,7 @@
         </p:nvCxnSpPr>
         <p:spPr>
           <a:xfrm>
-            <a:off x="4572000" y="2084831"/>
+            <a:off x="4434840" y="2148840"/>
             <a:ext cx="228600" cy="0"/>
           </a:xfrm>
           <a:prstGeom prst="line">
@@ -8311,7 +7435,7 @@
         </p:nvCxnSpPr>
         <p:spPr>
           <a:xfrm>
-            <a:off x="6812280" y="2084831"/>
+            <a:off x="6629400" y="2148840"/>
             <a:ext cx="274320" cy="0"/>
           </a:xfrm>
           <a:prstGeom prst="line">
@@ -8346,8 +7470,8 @@
         </p:nvCxnSpPr>
         <p:spPr>
           <a:xfrm>
-            <a:off x="9098280" y="2084831"/>
-            <a:ext cx="228600" cy="0"/>
+            <a:off x="8823960" y="2148840"/>
+            <a:ext cx="274320" cy="0"/>
           </a:xfrm>
           <a:prstGeom prst="line">
             <a:avLst/>
@@ -8380,9 +7504,9 @@
           <p:nvPr/>
         </p:nvCxnSpPr>
         <p:spPr>
-          <a:xfrm>
-            <a:off x="8092440" y="2514600"/>
-            <a:ext cx="0" cy="612648"/>
+          <a:xfrm flipH="1">
+            <a:off x="9372600" y="2606040"/>
+            <a:ext cx="411480" cy="640080"/>
           </a:xfrm>
           <a:prstGeom prst="line">
             <a:avLst/>
@@ -8416,8 +7540,8 @@
         </p:nvCxnSpPr>
         <p:spPr>
           <a:xfrm flipH="1">
-            <a:off x="5486400" y="4187952"/>
-            <a:ext cx="640080" cy="0"/>
+            <a:off x="6355080" y="3794760"/>
+            <a:ext cx="182880" cy="0"/>
           </a:xfrm>
           <a:prstGeom prst="line">
             <a:avLst/>
@@ -8451,8 +7575,8 @@
         </p:nvCxnSpPr>
         <p:spPr>
           <a:xfrm>
-            <a:off x="6126480" y="4187952"/>
-            <a:ext cx="0" cy="384048"/>
+            <a:off x="5257800" y="3794760"/>
+            <a:ext cx="0" cy="1005840"/>
           </a:xfrm>
           <a:prstGeom prst="line">
             <a:avLst/>
@@ -8625,13 +7749,13 @@
         <p:spPr>
           <a:xfrm>
             <a:off x="658368" y="1536192"/>
-            <a:ext cx="10972800" cy="713232"/>
+            <a:ext cx="10972800" cy="658368"/>
           </a:xfrm>
           <a:prstGeom prst="roundRect">
             <a:avLst/>
           </a:prstGeom>
           <a:solidFill>
-            <a:srgbClr val="FFFFFF"/>
+            <a:srgbClr val="DBEAFE"/>
           </a:solidFill>
           <a:ln>
             <a:solidFill>
@@ -8654,96 +7778,16 @@
           </a:fontRef>
         </p:style>
         <p:txBody>
-          <a:bodyPr rtlCol="0" anchor="ctr"/>
-          <a:lstStyle/>
-          <a:p>
-            <a:pPr algn="ctr"/>
-          </a:p>
-        </p:txBody>
-      </p:sp>
-      <p:sp>
-        <p:nvSpPr>
-          <p:cNvPr id="5" name="Rectangle 4"/>
-          <p:cNvSpPr/>
-          <p:nvPr/>
-        </p:nvSpPr>
-        <p:spPr>
-          <a:xfrm>
-            <a:off x="658368" y="1536192"/>
-            <a:ext cx="10972800" cy="347472"/>
-          </a:xfrm>
-          <a:prstGeom prst="rect">
-            <a:avLst/>
-          </a:prstGeom>
-          <a:solidFill>
-            <a:srgbClr val="DBEAFE"/>
-          </a:solidFill>
-          <a:ln>
-            <a:solidFill>
-              <a:srgbClr val="DBEAFE"/>
-            </a:solidFill>
-          </a:ln>
-        </p:spPr>
-        <p:style>
-          <a:lnRef idx="1">
-            <a:schemeClr val="accent1"/>
-          </a:lnRef>
-          <a:fillRef idx="3">
-            <a:schemeClr val="accent1"/>
-          </a:fillRef>
-          <a:effectRef idx="2">
-            <a:schemeClr val="accent1"/>
-          </a:effectRef>
-          <a:fontRef idx="minor">
-            <a:schemeClr val="lt1"/>
-          </a:fontRef>
-        </p:style>
-        <p:txBody>
-          <a:bodyPr rtlCol="0" anchor="t" wrap="square" tIns="25400" bIns="25400" lIns="76200" rIns="76200"/>
-          <a:lstStyle/>
-          <a:p>
-            <a:pPr algn="ctr"/>
-            <a:r>
-              <a:rPr sz="1200" b="1">
-                <a:solidFill>
-                  <a:srgbClr val="2563EB"/>
-                </a:solidFill>
-                <a:latin typeface="Arial"/>
-              </a:rPr>
-              <a:t>本页一句话</a:t>
-            </a:r>
-          </a:p>
-        </p:txBody>
-      </p:sp>
-      <p:sp>
-        <p:nvSpPr>
-          <p:cNvPr id="6" name="TextBox 5"/>
-          <p:cNvSpPr txBox="1"/>
-          <p:nvPr/>
-        </p:nvSpPr>
-        <p:spPr>
-          <a:xfrm>
-            <a:off x="731519" y="1938528"/>
-            <a:ext cx="10826496" cy="256032"/>
-          </a:xfrm>
-          <a:prstGeom prst="rect">
-            <a:avLst/>
-          </a:prstGeom>
-          <a:noFill/>
-        </p:spPr>
-        <p:txBody>
-          <a:bodyPr wrap="square" tIns="50800" bIns="50800" lIns="101600" rIns="101600" anchor="t">
-            <a:spAutoFit/>
-          </a:bodyPr>
-          <a:lstStyle/>
-          <a:p>
-            <a:pPr>
+          <a:bodyPr rtlCol="0" anchor="t" wrap="square" tIns="50800" bIns="50800" lIns="101600" rIns="101600"/>
+          <a:lstStyle/>
+          <a:p>
+            <a:pPr algn="ctr">
               <a:spcAft>
                 <a:spcPts val="600"/>
               </a:spcAft>
             </a:pPr>
             <a:r>
-              <a:rPr sz="1400" b="0">
+              <a:rPr sz="1600" b="0">
                 <a:solidFill>
                   <a:srgbClr val="1E293B"/>
                 </a:solidFill>
@@ -8756,14 +7800,14 @@
       </p:sp>
       <p:sp>
         <p:nvSpPr>
-          <p:cNvPr id="7" name="TextBox 6"/>
+          <p:cNvPr id="5" name="TextBox 4"/>
           <p:cNvSpPr txBox="1"/>
           <p:nvPr/>
         </p:nvSpPr>
         <p:spPr>
           <a:xfrm>
-            <a:off x="749808" y="2487168"/>
-            <a:ext cx="5577840" cy="2926080"/>
+            <a:off x="749808" y="2450592"/>
+            <a:ext cx="5577840" cy="3063240"/>
           </a:xfrm>
           <a:prstGeom prst="rect">
             <a:avLst/>
@@ -8827,137 +7871,14 @@
       </p:sp>
       <p:sp>
         <p:nvSpPr>
-          <p:cNvPr id="8" name="Rounded Rectangle 7"/>
+          <p:cNvPr id="6" name="Rounded Rectangle 5"/>
           <p:cNvSpPr/>
           <p:nvPr/>
         </p:nvSpPr>
         <p:spPr>
           <a:xfrm>
-            <a:off x="6537960" y="2487168"/>
-            <a:ext cx="4800600" cy="548640"/>
-          </a:xfrm>
-          <a:prstGeom prst="roundRect">
-            <a:avLst/>
-          </a:prstGeom>
-          <a:solidFill>
-            <a:srgbClr val="FFFFFF"/>
-          </a:solidFill>
-          <a:ln>
-            <a:solidFill>
-              <a:srgbClr val="2563EB"/>
-            </a:solidFill>
-          </a:ln>
-        </p:spPr>
-        <p:style>
-          <a:lnRef idx="1">
-            <a:schemeClr val="accent1"/>
-          </a:lnRef>
-          <a:fillRef idx="3">
-            <a:schemeClr val="accent1"/>
-          </a:fillRef>
-          <a:effectRef idx="2">
-            <a:schemeClr val="accent1"/>
-          </a:effectRef>
-          <a:fontRef idx="minor">
-            <a:schemeClr val="lt1"/>
-          </a:fontRef>
-        </p:style>
-        <p:txBody>
-          <a:bodyPr rtlCol="0" anchor="ctr"/>
-          <a:lstStyle/>
-          <a:p>
-            <a:pPr algn="ctr"/>
-          </a:p>
-        </p:txBody>
-      </p:sp>
-      <p:sp>
-        <p:nvSpPr>
-          <p:cNvPr id="9" name="Rectangle 8"/>
-          <p:cNvSpPr/>
-          <p:nvPr/>
-        </p:nvSpPr>
-        <p:spPr>
-          <a:xfrm>
-            <a:off x="6537960" y="2487168"/>
-            <a:ext cx="4800600" cy="347472"/>
-          </a:xfrm>
-          <a:prstGeom prst="rect">
-            <a:avLst/>
-          </a:prstGeom>
-          <a:solidFill>
-            <a:srgbClr val="DBEAFE"/>
-          </a:solidFill>
-          <a:ln>
-            <a:solidFill>
-              <a:srgbClr val="DBEAFE"/>
-            </a:solidFill>
-          </a:ln>
-        </p:spPr>
-        <p:style>
-          <a:lnRef idx="1">
-            <a:schemeClr val="accent1"/>
-          </a:lnRef>
-          <a:fillRef idx="3">
-            <a:schemeClr val="accent1"/>
-          </a:fillRef>
-          <a:effectRef idx="2">
-            <a:schemeClr val="accent1"/>
-          </a:effectRef>
-          <a:fontRef idx="minor">
-            <a:schemeClr val="lt1"/>
-          </a:fontRef>
-        </p:style>
-        <p:txBody>
-          <a:bodyPr rtlCol="0" anchor="t" wrap="square" tIns="25400" bIns="25400" lIns="76200" rIns="76200"/>
-          <a:lstStyle/>
-          <a:p>
-            <a:pPr algn="ctr"/>
-            <a:r>
-              <a:rPr sz="1200" b="1">
-                <a:solidFill>
-                  <a:srgbClr val="2563EB"/>
-                </a:solidFill>
-                <a:latin typeface="Arial"/>
-              </a:rPr>
-              <a:t>关键代码片段</a:t>
-            </a:r>
-          </a:p>
-        </p:txBody>
-      </p:sp>
-      <p:sp>
-        <p:nvSpPr>
-          <p:cNvPr id="10" name="TextBox 9"/>
-          <p:cNvSpPr txBox="1"/>
-          <p:nvPr/>
-        </p:nvSpPr>
-        <p:spPr>
-          <a:xfrm>
-            <a:off x="6611112" y="2889504"/>
-            <a:ext cx="4654296" cy="91439"/>
-          </a:xfrm>
-          <a:prstGeom prst="rect">
-            <a:avLst/>
-          </a:prstGeom>
-          <a:noFill/>
-        </p:spPr>
-        <p:txBody>
-          <a:bodyPr wrap="square" tIns="50800" bIns="50800" lIns="101600" rIns="101600" anchor="t">
-            <a:spAutoFit/>
-          </a:bodyPr>
-          <a:lstStyle/>
-          <a:p/>
-        </p:txBody>
-      </p:sp>
-      <p:sp>
-        <p:nvSpPr>
-          <p:cNvPr id="11" name="Rounded Rectangle 10"/>
-          <p:cNvSpPr/>
-          <p:nvPr/>
-        </p:nvSpPr>
-        <p:spPr>
-          <a:xfrm>
-            <a:off x="6537960" y="2788920"/>
-            <a:ext cx="4800600" cy="2103120"/>
+            <a:off x="6537960" y="2468880"/>
+            <a:ext cx="4800600" cy="2468880"/>
           </a:xfrm>
           <a:prstGeom prst="roundRect">
             <a:avLst/>
@@ -9004,7 +7925,7 @@
       </p:sp>
       <p:sp>
         <p:nvSpPr>
-          <p:cNvPr id="12" name="TextBox 11"/>
+          <p:cNvPr id="7" name="TextBox 6"/>
           <p:cNvSpPr txBox="1"/>
           <p:nvPr/>
         </p:nvSpPr>
@@ -9149,13 +8070,13 @@
         <p:spPr>
           <a:xfrm>
             <a:off x="658368" y="1536192"/>
-            <a:ext cx="10972800" cy="713232"/>
+            <a:ext cx="10972800" cy="658368"/>
           </a:xfrm>
           <a:prstGeom prst="roundRect">
             <a:avLst/>
           </a:prstGeom>
           <a:solidFill>
-            <a:srgbClr val="FFFFFF"/>
+            <a:srgbClr val="DBEAFE"/>
           </a:solidFill>
           <a:ln>
             <a:solidFill>
@@ -9178,96 +8099,16 @@
           </a:fontRef>
         </p:style>
         <p:txBody>
-          <a:bodyPr rtlCol="0" anchor="ctr"/>
-          <a:lstStyle/>
-          <a:p>
-            <a:pPr algn="ctr"/>
-          </a:p>
-        </p:txBody>
-      </p:sp>
-      <p:sp>
-        <p:nvSpPr>
-          <p:cNvPr id="5" name="Rectangle 4"/>
-          <p:cNvSpPr/>
-          <p:nvPr/>
-        </p:nvSpPr>
-        <p:spPr>
-          <a:xfrm>
-            <a:off x="658368" y="1536192"/>
-            <a:ext cx="10972800" cy="347472"/>
-          </a:xfrm>
-          <a:prstGeom prst="rect">
-            <a:avLst/>
-          </a:prstGeom>
-          <a:solidFill>
-            <a:srgbClr val="DBEAFE"/>
-          </a:solidFill>
-          <a:ln>
-            <a:solidFill>
-              <a:srgbClr val="DBEAFE"/>
-            </a:solidFill>
-          </a:ln>
-        </p:spPr>
-        <p:style>
-          <a:lnRef idx="1">
-            <a:schemeClr val="accent1"/>
-          </a:lnRef>
-          <a:fillRef idx="3">
-            <a:schemeClr val="accent1"/>
-          </a:fillRef>
-          <a:effectRef idx="2">
-            <a:schemeClr val="accent1"/>
-          </a:effectRef>
-          <a:fontRef idx="minor">
-            <a:schemeClr val="lt1"/>
-          </a:fontRef>
-        </p:style>
-        <p:txBody>
-          <a:bodyPr rtlCol="0" anchor="t" wrap="square" tIns="25400" bIns="25400" lIns="76200" rIns="76200"/>
-          <a:lstStyle/>
-          <a:p>
-            <a:pPr algn="ctr"/>
-            <a:r>
-              <a:rPr sz="1200" b="1">
-                <a:solidFill>
-                  <a:srgbClr val="2563EB"/>
-                </a:solidFill>
-                <a:latin typeface="Arial"/>
-              </a:rPr>
-              <a:t>本页一句话</a:t>
-            </a:r>
-          </a:p>
-        </p:txBody>
-      </p:sp>
-      <p:sp>
-        <p:nvSpPr>
-          <p:cNvPr id="6" name="TextBox 5"/>
-          <p:cNvSpPr txBox="1"/>
-          <p:nvPr/>
-        </p:nvSpPr>
-        <p:spPr>
-          <a:xfrm>
-            <a:off x="731519" y="1938528"/>
-            <a:ext cx="10826496" cy="256032"/>
-          </a:xfrm>
-          <a:prstGeom prst="rect">
-            <a:avLst/>
-          </a:prstGeom>
-          <a:noFill/>
-        </p:spPr>
-        <p:txBody>
-          <a:bodyPr wrap="square" tIns="50800" bIns="50800" lIns="101600" rIns="101600" anchor="t">
-            <a:spAutoFit/>
-          </a:bodyPr>
-          <a:lstStyle/>
-          <a:p>
-            <a:pPr>
+          <a:bodyPr rtlCol="0" anchor="t" wrap="square" tIns="50800" bIns="50800" lIns="101600" rIns="101600"/>
+          <a:lstStyle/>
+          <a:p>
+            <a:pPr algn="ctr">
               <a:spcAft>
                 <a:spcPts val="600"/>
               </a:spcAft>
             </a:pPr>
             <a:r>
-              <a:rPr sz="1400" b="0">
+              <a:rPr sz="1600" b="0">
                 <a:solidFill>
                   <a:srgbClr val="1E293B"/>
                 </a:solidFill>
@@ -9280,14 +8121,14 @@
       </p:sp>
       <p:sp>
         <p:nvSpPr>
-          <p:cNvPr id="7" name="TextBox 6"/>
+          <p:cNvPr id="5" name="TextBox 4"/>
           <p:cNvSpPr txBox="1"/>
           <p:nvPr/>
         </p:nvSpPr>
         <p:spPr>
           <a:xfrm>
-            <a:off x="749808" y="2487168"/>
-            <a:ext cx="5577840" cy="2926080"/>
+            <a:off x="749808" y="2450592"/>
+            <a:ext cx="5577840" cy="3063240"/>
           </a:xfrm>
           <a:prstGeom prst="rect">
             <a:avLst/>
@@ -9383,137 +8224,14 @@
       </p:sp>
       <p:sp>
         <p:nvSpPr>
-          <p:cNvPr id="8" name="Rounded Rectangle 7"/>
+          <p:cNvPr id="6" name="Rounded Rectangle 5"/>
           <p:cNvSpPr/>
           <p:nvPr/>
         </p:nvSpPr>
         <p:spPr>
           <a:xfrm>
-            <a:off x="6537960" y="2487168"/>
-            <a:ext cx="4800600" cy="548640"/>
-          </a:xfrm>
-          <a:prstGeom prst="roundRect">
-            <a:avLst/>
-          </a:prstGeom>
-          <a:solidFill>
-            <a:srgbClr val="FFFFFF"/>
-          </a:solidFill>
-          <a:ln>
-            <a:solidFill>
-              <a:srgbClr val="2563EB"/>
-            </a:solidFill>
-          </a:ln>
-        </p:spPr>
-        <p:style>
-          <a:lnRef idx="1">
-            <a:schemeClr val="accent1"/>
-          </a:lnRef>
-          <a:fillRef idx="3">
-            <a:schemeClr val="accent1"/>
-          </a:fillRef>
-          <a:effectRef idx="2">
-            <a:schemeClr val="accent1"/>
-          </a:effectRef>
-          <a:fontRef idx="minor">
-            <a:schemeClr val="lt1"/>
-          </a:fontRef>
-        </p:style>
-        <p:txBody>
-          <a:bodyPr rtlCol="0" anchor="ctr"/>
-          <a:lstStyle/>
-          <a:p>
-            <a:pPr algn="ctr"/>
-          </a:p>
-        </p:txBody>
-      </p:sp>
-      <p:sp>
-        <p:nvSpPr>
-          <p:cNvPr id="9" name="Rectangle 8"/>
-          <p:cNvSpPr/>
-          <p:nvPr/>
-        </p:nvSpPr>
-        <p:spPr>
-          <a:xfrm>
-            <a:off x="6537960" y="2487168"/>
-            <a:ext cx="4800600" cy="347472"/>
-          </a:xfrm>
-          <a:prstGeom prst="rect">
-            <a:avLst/>
-          </a:prstGeom>
-          <a:solidFill>
-            <a:srgbClr val="DBEAFE"/>
-          </a:solidFill>
-          <a:ln>
-            <a:solidFill>
-              <a:srgbClr val="DBEAFE"/>
-            </a:solidFill>
-          </a:ln>
-        </p:spPr>
-        <p:style>
-          <a:lnRef idx="1">
-            <a:schemeClr val="accent1"/>
-          </a:lnRef>
-          <a:fillRef idx="3">
-            <a:schemeClr val="accent1"/>
-          </a:fillRef>
-          <a:effectRef idx="2">
-            <a:schemeClr val="accent1"/>
-          </a:effectRef>
-          <a:fontRef idx="minor">
-            <a:schemeClr val="lt1"/>
-          </a:fontRef>
-        </p:style>
-        <p:txBody>
-          <a:bodyPr rtlCol="0" anchor="t" wrap="square" tIns="25400" bIns="25400" lIns="76200" rIns="76200"/>
-          <a:lstStyle/>
-          <a:p>
-            <a:pPr algn="ctr"/>
-            <a:r>
-              <a:rPr sz="1200" b="1">
-                <a:solidFill>
-                  <a:srgbClr val="2563EB"/>
-                </a:solidFill>
-                <a:latin typeface="Arial"/>
-              </a:rPr>
-              <a:t>关键代码片段</a:t>
-            </a:r>
-          </a:p>
-        </p:txBody>
-      </p:sp>
-      <p:sp>
-        <p:nvSpPr>
-          <p:cNvPr id="10" name="TextBox 9"/>
-          <p:cNvSpPr txBox="1"/>
-          <p:nvPr/>
-        </p:nvSpPr>
-        <p:spPr>
-          <a:xfrm>
-            <a:off x="6611112" y="2889504"/>
-            <a:ext cx="4654296" cy="91439"/>
-          </a:xfrm>
-          <a:prstGeom prst="rect">
-            <a:avLst/>
-          </a:prstGeom>
-          <a:noFill/>
-        </p:spPr>
-        <p:txBody>
-          <a:bodyPr wrap="square" tIns="50800" bIns="50800" lIns="101600" rIns="101600" anchor="t">
-            <a:spAutoFit/>
-          </a:bodyPr>
-          <a:lstStyle/>
-          <a:p/>
-        </p:txBody>
-      </p:sp>
-      <p:sp>
-        <p:nvSpPr>
-          <p:cNvPr id="11" name="Rounded Rectangle 10"/>
-          <p:cNvSpPr/>
-          <p:nvPr/>
-        </p:nvSpPr>
-        <p:spPr>
-          <a:xfrm>
-            <a:off x="6537960" y="2788920"/>
-            <a:ext cx="4800600" cy="2103120"/>
+            <a:off x="6537960" y="2468880"/>
+            <a:ext cx="4800600" cy="2468880"/>
           </a:xfrm>
           <a:prstGeom prst="roundRect">
             <a:avLst/>
@@ -9570,7 +8288,7 @@
       </p:sp>
       <p:sp>
         <p:nvSpPr>
-          <p:cNvPr id="12" name="TextBox 11"/>
+          <p:cNvPr id="7" name="TextBox 6"/>
           <p:cNvSpPr txBox="1"/>
           <p:nvPr/>
         </p:nvSpPr>
@@ -9715,13 +8433,13 @@
         <p:spPr>
           <a:xfrm>
             <a:off x="658368" y="1536192"/>
-            <a:ext cx="10972800" cy="713232"/>
+            <a:ext cx="10972800" cy="658368"/>
           </a:xfrm>
           <a:prstGeom prst="roundRect">
             <a:avLst/>
           </a:prstGeom>
           <a:solidFill>
-            <a:srgbClr val="FFFFFF"/>
+            <a:srgbClr val="DBEAFE"/>
           </a:solidFill>
           <a:ln>
             <a:solidFill>
@@ -9744,96 +8462,16 @@
           </a:fontRef>
         </p:style>
         <p:txBody>
-          <a:bodyPr rtlCol="0" anchor="ctr"/>
-          <a:lstStyle/>
-          <a:p>
-            <a:pPr algn="ctr"/>
-          </a:p>
-        </p:txBody>
-      </p:sp>
-      <p:sp>
-        <p:nvSpPr>
-          <p:cNvPr id="5" name="Rectangle 4"/>
-          <p:cNvSpPr/>
-          <p:nvPr/>
-        </p:nvSpPr>
-        <p:spPr>
-          <a:xfrm>
-            <a:off x="658368" y="1536192"/>
-            <a:ext cx="10972800" cy="347472"/>
-          </a:xfrm>
-          <a:prstGeom prst="rect">
-            <a:avLst/>
-          </a:prstGeom>
-          <a:solidFill>
-            <a:srgbClr val="DBEAFE"/>
-          </a:solidFill>
-          <a:ln>
-            <a:solidFill>
-              <a:srgbClr val="DBEAFE"/>
-            </a:solidFill>
-          </a:ln>
-        </p:spPr>
-        <p:style>
-          <a:lnRef idx="1">
-            <a:schemeClr val="accent1"/>
-          </a:lnRef>
-          <a:fillRef idx="3">
-            <a:schemeClr val="accent1"/>
-          </a:fillRef>
-          <a:effectRef idx="2">
-            <a:schemeClr val="accent1"/>
-          </a:effectRef>
-          <a:fontRef idx="minor">
-            <a:schemeClr val="lt1"/>
-          </a:fontRef>
-        </p:style>
-        <p:txBody>
-          <a:bodyPr rtlCol="0" anchor="t" wrap="square" tIns="25400" bIns="25400" lIns="76200" rIns="76200"/>
-          <a:lstStyle/>
-          <a:p>
-            <a:pPr algn="ctr"/>
-            <a:r>
-              <a:rPr sz="1200" b="1">
-                <a:solidFill>
-                  <a:srgbClr val="2563EB"/>
-                </a:solidFill>
-                <a:latin typeface="Arial"/>
-              </a:rPr>
-              <a:t>本页一句话</a:t>
-            </a:r>
-          </a:p>
-        </p:txBody>
-      </p:sp>
-      <p:sp>
-        <p:nvSpPr>
-          <p:cNvPr id="6" name="TextBox 5"/>
-          <p:cNvSpPr txBox="1"/>
-          <p:nvPr/>
-        </p:nvSpPr>
-        <p:spPr>
-          <a:xfrm>
-            <a:off x="731519" y="1938528"/>
-            <a:ext cx="10826496" cy="256032"/>
-          </a:xfrm>
-          <a:prstGeom prst="rect">
-            <a:avLst/>
-          </a:prstGeom>
-          <a:noFill/>
-        </p:spPr>
-        <p:txBody>
-          <a:bodyPr wrap="square" tIns="50800" bIns="50800" lIns="101600" rIns="101600" anchor="t">
-            <a:spAutoFit/>
-          </a:bodyPr>
-          <a:lstStyle/>
-          <a:p>
-            <a:pPr>
+          <a:bodyPr rtlCol="0" anchor="t" wrap="square" tIns="50800" bIns="50800" lIns="101600" rIns="101600"/>
+          <a:lstStyle/>
+          <a:p>
+            <a:pPr algn="ctr">
               <a:spcAft>
                 <a:spcPts val="600"/>
               </a:spcAft>
             </a:pPr>
             <a:r>
-              <a:rPr sz="1400" b="0">
+              <a:rPr sz="1600" b="0">
                 <a:solidFill>
                   <a:srgbClr val="1E293B"/>
                 </a:solidFill>
@@ -9846,14 +8484,14 @@
       </p:sp>
       <p:sp>
         <p:nvSpPr>
-          <p:cNvPr id="7" name="TextBox 6"/>
+          <p:cNvPr id="5" name="TextBox 4"/>
           <p:cNvSpPr txBox="1"/>
           <p:nvPr/>
         </p:nvSpPr>
         <p:spPr>
           <a:xfrm>
-            <a:off x="749808" y="2487168"/>
-            <a:ext cx="5577840" cy="2926080"/>
+            <a:off x="749808" y="2450592"/>
+            <a:ext cx="5577840" cy="3063240"/>
           </a:xfrm>
           <a:prstGeom prst="rect">
             <a:avLst/>
@@ -9949,137 +8587,14 @@
       </p:sp>
       <p:sp>
         <p:nvSpPr>
-          <p:cNvPr id="8" name="Rounded Rectangle 7"/>
+          <p:cNvPr id="6" name="Rounded Rectangle 5"/>
           <p:cNvSpPr/>
           <p:nvPr/>
         </p:nvSpPr>
         <p:spPr>
           <a:xfrm>
-            <a:off x="6537960" y="2487168"/>
-            <a:ext cx="4800600" cy="548640"/>
-          </a:xfrm>
-          <a:prstGeom prst="roundRect">
-            <a:avLst/>
-          </a:prstGeom>
-          <a:solidFill>
-            <a:srgbClr val="FFFFFF"/>
-          </a:solidFill>
-          <a:ln>
-            <a:solidFill>
-              <a:srgbClr val="2563EB"/>
-            </a:solidFill>
-          </a:ln>
-        </p:spPr>
-        <p:style>
-          <a:lnRef idx="1">
-            <a:schemeClr val="accent1"/>
-          </a:lnRef>
-          <a:fillRef idx="3">
-            <a:schemeClr val="accent1"/>
-          </a:fillRef>
-          <a:effectRef idx="2">
-            <a:schemeClr val="accent1"/>
-          </a:effectRef>
-          <a:fontRef idx="minor">
-            <a:schemeClr val="lt1"/>
-          </a:fontRef>
-        </p:style>
-        <p:txBody>
-          <a:bodyPr rtlCol="0" anchor="ctr"/>
-          <a:lstStyle/>
-          <a:p>
-            <a:pPr algn="ctr"/>
-          </a:p>
-        </p:txBody>
-      </p:sp>
-      <p:sp>
-        <p:nvSpPr>
-          <p:cNvPr id="9" name="Rectangle 8"/>
-          <p:cNvSpPr/>
-          <p:nvPr/>
-        </p:nvSpPr>
-        <p:spPr>
-          <a:xfrm>
-            <a:off x="6537960" y="2487168"/>
-            <a:ext cx="4800600" cy="347472"/>
-          </a:xfrm>
-          <a:prstGeom prst="rect">
-            <a:avLst/>
-          </a:prstGeom>
-          <a:solidFill>
-            <a:srgbClr val="DBEAFE"/>
-          </a:solidFill>
-          <a:ln>
-            <a:solidFill>
-              <a:srgbClr val="DBEAFE"/>
-            </a:solidFill>
-          </a:ln>
-        </p:spPr>
-        <p:style>
-          <a:lnRef idx="1">
-            <a:schemeClr val="accent1"/>
-          </a:lnRef>
-          <a:fillRef idx="3">
-            <a:schemeClr val="accent1"/>
-          </a:fillRef>
-          <a:effectRef idx="2">
-            <a:schemeClr val="accent1"/>
-          </a:effectRef>
-          <a:fontRef idx="minor">
-            <a:schemeClr val="lt1"/>
-          </a:fontRef>
-        </p:style>
-        <p:txBody>
-          <a:bodyPr rtlCol="0" anchor="t" wrap="square" tIns="25400" bIns="25400" lIns="76200" rIns="76200"/>
-          <a:lstStyle/>
-          <a:p>
-            <a:pPr algn="ctr"/>
-            <a:r>
-              <a:rPr sz="1200" b="1">
-                <a:solidFill>
-                  <a:srgbClr val="2563EB"/>
-                </a:solidFill>
-                <a:latin typeface="Arial"/>
-              </a:rPr>
-              <a:t>关键代码片段</a:t>
-            </a:r>
-          </a:p>
-        </p:txBody>
-      </p:sp>
-      <p:sp>
-        <p:nvSpPr>
-          <p:cNvPr id="10" name="TextBox 9"/>
-          <p:cNvSpPr txBox="1"/>
-          <p:nvPr/>
-        </p:nvSpPr>
-        <p:spPr>
-          <a:xfrm>
-            <a:off x="6611112" y="2889504"/>
-            <a:ext cx="4654296" cy="91439"/>
-          </a:xfrm>
-          <a:prstGeom prst="rect">
-            <a:avLst/>
-          </a:prstGeom>
-          <a:noFill/>
-        </p:spPr>
-        <p:txBody>
-          <a:bodyPr wrap="square" tIns="50800" bIns="50800" lIns="101600" rIns="101600" anchor="t">
-            <a:spAutoFit/>
-          </a:bodyPr>
-          <a:lstStyle/>
-          <a:p/>
-        </p:txBody>
-      </p:sp>
-      <p:sp>
-        <p:nvSpPr>
-          <p:cNvPr id="11" name="Rounded Rectangle 10"/>
-          <p:cNvSpPr/>
-          <p:nvPr/>
-        </p:nvSpPr>
-        <p:spPr>
-          <a:xfrm>
-            <a:off x="6537960" y="2788920"/>
-            <a:ext cx="4800600" cy="2103120"/>
+            <a:off x="6537960" y="2468880"/>
+            <a:ext cx="4800600" cy="2468880"/>
           </a:xfrm>
           <a:prstGeom prst="roundRect">
             <a:avLst/>
@@ -10128,7 +8643,7 @@
       </p:sp>
       <p:sp>
         <p:nvSpPr>
-          <p:cNvPr id="12" name="TextBox 11"/>
+          <p:cNvPr id="7" name="TextBox 6"/>
           <p:cNvSpPr txBox="1"/>
           <p:nvPr/>
         </p:nvSpPr>
@@ -10273,7 +8788,65 @@
         <p:spPr>
           <a:xfrm>
             <a:off x="658368" y="1481328"/>
-            <a:ext cx="10972800" cy="685800"/>
+            <a:ext cx="10972800" cy="658368"/>
+          </a:xfrm>
+          <a:prstGeom prst="roundRect">
+            <a:avLst/>
+          </a:prstGeom>
+          <a:solidFill>
+            <a:srgbClr val="DBEAFE"/>
+          </a:solidFill>
+          <a:ln>
+            <a:solidFill>
+              <a:srgbClr val="2563EB"/>
+            </a:solidFill>
+          </a:ln>
+        </p:spPr>
+        <p:style>
+          <a:lnRef idx="1">
+            <a:schemeClr val="accent1"/>
+          </a:lnRef>
+          <a:fillRef idx="3">
+            <a:schemeClr val="accent1"/>
+          </a:fillRef>
+          <a:effectRef idx="2">
+            <a:schemeClr val="accent1"/>
+          </a:effectRef>
+          <a:fontRef idx="minor">
+            <a:schemeClr val="lt1"/>
+          </a:fontRef>
+        </p:style>
+        <p:txBody>
+          <a:bodyPr rtlCol="0" anchor="t" wrap="square" tIns="50800" bIns="50800" lIns="101600" rIns="101600"/>
+          <a:lstStyle/>
+          <a:p>
+            <a:pPr algn="ctr">
+              <a:spcAft>
+                <a:spcPts val="600"/>
+              </a:spcAft>
+            </a:pPr>
+            <a:r>
+              <a:rPr sz="1600" b="0">
+                <a:solidFill>
+                  <a:srgbClr val="1E293B"/>
+                </a:solidFill>
+                <a:latin typeface="Arial"/>
+              </a:rPr>
+              <a:t>最稳定的输入方式，是把任务写成“目标 + 范围 + 约束 + 验证”。</a:t>
+            </a:r>
+          </a:p>
+        </p:txBody>
+      </p:sp>
+      <p:sp>
+        <p:nvSpPr>
+          <p:cNvPr id="5" name="Rounded Rectangle 4"/>
+          <p:cNvSpPr/>
+          <p:nvPr/>
+        </p:nvSpPr>
+        <p:spPr>
+          <a:xfrm>
+            <a:off x="658368" y="2331720"/>
+            <a:ext cx="3246120" cy="1554480"/>
           </a:xfrm>
           <a:prstGeom prst="roundRect">
             <a:avLst/>
@@ -10311,14 +8884,14 @@
       </p:sp>
       <p:sp>
         <p:nvSpPr>
-          <p:cNvPr id="5" name="Rectangle 4"/>
+          <p:cNvPr id="6" name="Rectangle 5"/>
           <p:cNvSpPr/>
           <p:nvPr/>
         </p:nvSpPr>
         <p:spPr>
           <a:xfrm>
-            <a:off x="658368" y="1481328"/>
-            <a:ext cx="10972800" cy="347472"/>
+            <a:off x="658368" y="2331720"/>
+            <a:ext cx="3246120" cy="347472"/>
           </a:xfrm>
           <a:prstGeom prst="rect">
             <a:avLst/>
@@ -10358,21 +8931,21 @@
                 </a:solidFill>
                 <a:latin typeface="Arial"/>
               </a:rPr>
-              <a:t>本页一句话</a:t>
-            </a:r>
-          </a:p>
-        </p:txBody>
-      </p:sp>
-      <p:sp>
-        <p:nvSpPr>
-          <p:cNvPr id="6" name="TextBox 5"/>
+              <a:t>示例提示词</a:t>
+            </a:r>
+          </a:p>
+        </p:txBody>
+      </p:sp>
+      <p:sp>
+        <p:nvSpPr>
+          <p:cNvPr id="7" name="TextBox 6"/>
           <p:cNvSpPr txBox="1"/>
           <p:nvPr/>
         </p:nvSpPr>
         <p:spPr>
           <a:xfrm>
-            <a:off x="731519" y="1883664"/>
-            <a:ext cx="10826496" cy="228600"/>
+            <a:off x="731519" y="2734056"/>
+            <a:ext cx="3099815" cy="1097280"/>
           </a:xfrm>
           <a:prstGeom prst="rect">
             <a:avLst/>
@@ -10397,21 +8970,69 @@
                 </a:solidFill>
                 <a:latin typeface="Arial"/>
               </a:rPr>
-              <a:t>最稳定的输入方式，是把任务写成“目标 + 范围 + 约束 + 验证”。</a:t>
-            </a:r>
-          </a:p>
-        </p:txBody>
-      </p:sp>
-      <p:sp>
-        <p:nvSpPr>
-          <p:cNvPr id="7" name="Rounded Rectangle 6"/>
+              <a:t>目标：修复/实现……</a:t>
+            </a:r>
+          </a:p>
+          <a:p>
+            <a:pPr>
+              <a:spcAft>
+                <a:spcPts val="600"/>
+              </a:spcAft>
+            </a:pPr>
+            <a:r>
+              <a:rPr sz="1400" b="0">
+                <a:solidFill>
+                  <a:srgbClr val="1E293B"/>
+                </a:solidFill>
+                <a:latin typeface="Arial"/>
+              </a:rPr>
+              <a:t>范围：只改……相关代码</a:t>
+            </a:r>
+          </a:p>
+          <a:p>
+            <a:pPr>
+              <a:spcAft>
+                <a:spcPts val="600"/>
+              </a:spcAft>
+            </a:pPr>
+            <a:r>
+              <a:rPr sz="1400" b="0">
+                <a:solidFill>
+                  <a:srgbClr val="1E293B"/>
+                </a:solidFill>
+                <a:latin typeface="Arial"/>
+              </a:rPr>
+              <a:t>约束：不要做无关重构</a:t>
+            </a:r>
+          </a:p>
+          <a:p>
+            <a:pPr>
+              <a:spcAft>
+                <a:spcPts val="600"/>
+              </a:spcAft>
+            </a:pPr>
+            <a:r>
+              <a:rPr sz="1400" b="0">
+                <a:solidFill>
+                  <a:srgbClr val="1E293B"/>
+                </a:solidFill>
+                <a:latin typeface="Arial"/>
+              </a:rPr>
+              <a:t>验证：跑测试并说明结果</a:t>
+            </a:r>
+          </a:p>
+        </p:txBody>
+      </p:sp>
+      <p:sp>
+        <p:nvSpPr>
+          <p:cNvPr id="8" name="Rounded Rectangle 7"/>
           <p:cNvSpPr/>
           <p:nvPr/>
         </p:nvSpPr>
         <p:spPr>
           <a:xfrm>
-            <a:off x="658368" y="2359152"/>
-            <a:ext cx="3246120" cy="1444752"/>
+            <a:off x="4133087" y="2331720"/>
+            <a:ext cx="3474720" cy="1554480"/>
           </a:xfrm>
           <a:prstGeom prst="roundRect">
             <a:avLst/>
@@ -10449,14 +9070,14 @@
       </p:sp>
       <p:sp>
         <p:nvSpPr>
-          <p:cNvPr id="8" name="Rectangle 7"/>
+          <p:cNvPr id="9" name="Rectangle 8"/>
           <p:cNvSpPr/>
           <p:nvPr/>
         </p:nvSpPr>
         <p:spPr>
           <a:xfrm>
-            <a:off x="658368" y="2359152"/>
-            <a:ext cx="3246120" cy="347472"/>
+            <a:off x="4133087" y="2331720"/>
+            <a:ext cx="3474720" cy="347472"/>
           </a:xfrm>
           <a:prstGeom prst="rect">
             <a:avLst/>
@@ -10496,21 +9117,21 @@
                 </a:solidFill>
                 <a:latin typeface="Arial"/>
               </a:rPr>
-              <a:t>推荐写法</a:t>
-            </a:r>
-          </a:p>
-        </p:txBody>
-      </p:sp>
-      <p:sp>
-        <p:nvSpPr>
-          <p:cNvPr id="9" name="TextBox 8"/>
+              <a:t>源码解释</a:t>
+            </a:r>
+          </a:p>
+        </p:txBody>
+      </p:sp>
+      <p:sp>
+        <p:nvSpPr>
+          <p:cNvPr id="10" name="TextBox 9"/>
           <p:cNvSpPr txBox="1"/>
           <p:nvPr/>
         </p:nvSpPr>
         <p:spPr>
           <a:xfrm>
-            <a:off x="731519" y="2761488"/>
-            <a:ext cx="3099815" cy="987552"/>
+            <a:off x="4206240" y="2734056"/>
+            <a:ext cx="3328415" cy="1097280"/>
           </a:xfrm>
           <a:prstGeom prst="rect">
             <a:avLst/>
@@ -10535,7 +9156,7 @@
                 </a:solidFill>
                 <a:latin typeface="Arial"/>
               </a:rPr>
-              <a:t>目标：修复/实现……</a:t>
+              <a:t>减少分析 / 实现 / 顺手优化之间的歧义</a:t>
             </a:r>
           </a:p>
           <a:p>
@@ -10551,53 +9172,21 @@
                 </a:solidFill>
                 <a:latin typeface="Arial"/>
               </a:rPr>
-              <a:t>范围：只改……相关代码</a:t>
-            </a:r>
-          </a:p>
-          <a:p>
-            <a:pPr>
-              <a:spcAft>
-                <a:spcPts val="600"/>
-              </a:spcAft>
-            </a:pPr>
-            <a:r>
-              <a:rPr sz="1400" b="0">
-                <a:solidFill>
-                  <a:srgbClr val="1E293B"/>
-                </a:solidFill>
-                <a:latin typeface="Arial"/>
-              </a:rPr>
-              <a:t>约束：不要做无关重构</a:t>
-            </a:r>
-          </a:p>
-          <a:p>
-            <a:pPr>
-              <a:spcAft>
-                <a:spcPts val="600"/>
-              </a:spcAft>
-            </a:pPr>
-            <a:r>
-              <a:rPr sz="1400" b="0">
-                <a:solidFill>
-                  <a:srgbClr val="1E293B"/>
-                </a:solidFill>
-                <a:latin typeface="Arial"/>
-              </a:rPr>
-              <a:t>验证：跑测试并说明结果</a:t>
-            </a:r>
-          </a:p>
-        </p:txBody>
-      </p:sp>
-      <p:sp>
-        <p:nvSpPr>
-          <p:cNvPr id="10" name="Rounded Rectangle 9"/>
+              <a:t>让 turn loop（轮次循环）围绕明确目标推进</a:t>
+            </a:r>
+          </a:p>
+        </p:txBody>
+      </p:sp>
+      <p:sp>
+        <p:nvSpPr>
+          <p:cNvPr id="11" name="Rounded Rectangle 10"/>
           <p:cNvSpPr/>
           <p:nvPr/>
         </p:nvSpPr>
         <p:spPr>
           <a:xfrm>
-            <a:off x="4133087" y="2359152"/>
-            <a:ext cx="3474720" cy="1444752"/>
+            <a:off x="7836408" y="2331720"/>
+            <a:ext cx="3794760" cy="1554480"/>
           </a:xfrm>
           <a:prstGeom prst="roundRect">
             <a:avLst/>
@@ -10635,14 +9224,14 @@
       </p:sp>
       <p:sp>
         <p:nvSpPr>
-          <p:cNvPr id="11" name="Rectangle 10"/>
+          <p:cNvPr id="12" name="Rectangle 11"/>
           <p:cNvSpPr/>
           <p:nvPr/>
         </p:nvSpPr>
         <p:spPr>
           <a:xfrm>
-            <a:off x="4133087" y="2359152"/>
-            <a:ext cx="3474720" cy="347472"/>
+            <a:off x="7836408" y="2331720"/>
+            <a:ext cx="3794760" cy="347472"/>
           </a:xfrm>
           <a:prstGeom prst="rect">
             <a:avLst/>
@@ -10682,21 +9271,21 @@
                 </a:solidFill>
                 <a:latin typeface="Arial"/>
               </a:rPr>
-              <a:t>为什么有效</a:t>
-            </a:r>
-          </a:p>
-        </p:txBody>
-      </p:sp>
-      <p:sp>
-        <p:nvSpPr>
-          <p:cNvPr id="12" name="TextBox 11"/>
+              <a:t>证据链</a:t>
+            </a:r>
+          </a:p>
+        </p:txBody>
+      </p:sp>
+      <p:sp>
+        <p:nvSpPr>
+          <p:cNvPr id="13" name="TextBox 12"/>
           <p:cNvSpPr txBox="1"/>
           <p:nvPr/>
         </p:nvSpPr>
         <p:spPr>
           <a:xfrm>
-            <a:off x="4206240" y="2761488"/>
-            <a:ext cx="3328415" cy="987552"/>
+            <a:off x="7909560" y="2734056"/>
+            <a:ext cx="3648456" cy="1097280"/>
           </a:xfrm>
           <a:prstGeom prst="rect">
             <a:avLst/>
@@ -10721,7 +9310,7 @@
                 </a:solidFill>
                 <a:latin typeface="Arial"/>
               </a:rPr>
-              <a:t>减少分析 / 实现 / 顺手优化之间的歧义</a:t>
+              <a:t>prompt stack（提示词栈）默认把请求理解成软件工程任务</a:t>
             </a:r>
           </a:p>
           <a:p>
@@ -10737,298 +9326,21 @@
                 </a:solidFill>
                 <a:latin typeface="Arial"/>
               </a:rPr>
-              <a:t>让 turn loop（轮次循环）围绕明确目标推进</a:t>
-            </a:r>
-          </a:p>
-        </p:txBody>
-      </p:sp>
-      <p:sp>
-        <p:nvSpPr>
-          <p:cNvPr id="13" name="Rounded Rectangle 12"/>
+              <a:t>turn loop（轮次循环）会围绕目标、范围和验证持续推进</a:t>
+            </a:r>
+          </a:p>
+        </p:txBody>
+      </p:sp>
+      <p:sp>
+        <p:nvSpPr>
+          <p:cNvPr id="14" name="Rounded Rectangle 13"/>
           <p:cNvSpPr/>
           <p:nvPr/>
         </p:nvSpPr>
         <p:spPr>
           <a:xfrm>
-            <a:off x="7836408" y="2359152"/>
-            <a:ext cx="3794760" cy="1444752"/>
-          </a:xfrm>
-          <a:prstGeom prst="roundRect">
-            <a:avLst/>
-          </a:prstGeom>
-          <a:solidFill>
-            <a:srgbClr val="FFFFFF"/>
-          </a:solidFill>
-          <a:ln>
-            <a:solidFill>
-              <a:srgbClr val="2563EB"/>
-            </a:solidFill>
-          </a:ln>
-        </p:spPr>
-        <p:style>
-          <a:lnRef idx="1">
-            <a:schemeClr val="accent1"/>
-          </a:lnRef>
-          <a:fillRef idx="3">
-            <a:schemeClr val="accent1"/>
-          </a:fillRef>
-          <a:effectRef idx="2">
-            <a:schemeClr val="accent1"/>
-          </a:effectRef>
-          <a:fontRef idx="minor">
-            <a:schemeClr val="lt1"/>
-          </a:fontRef>
-        </p:style>
-        <p:txBody>
-          <a:bodyPr rtlCol="0" anchor="ctr"/>
-          <a:lstStyle/>
-          <a:p>
-            <a:pPr algn="ctr"/>
-          </a:p>
-        </p:txBody>
-      </p:sp>
-      <p:sp>
-        <p:nvSpPr>
-          <p:cNvPr id="14" name="Rectangle 13"/>
-          <p:cNvSpPr/>
-          <p:nvPr/>
-        </p:nvSpPr>
-        <p:spPr>
-          <a:xfrm>
-            <a:off x="7836408" y="2359152"/>
-            <a:ext cx="3794760" cy="347472"/>
-          </a:xfrm>
-          <a:prstGeom prst="rect">
-            <a:avLst/>
-          </a:prstGeom>
-          <a:solidFill>
-            <a:srgbClr val="DBEAFE"/>
-          </a:solidFill>
-          <a:ln>
-            <a:solidFill>
-              <a:srgbClr val="DBEAFE"/>
-            </a:solidFill>
-          </a:ln>
-        </p:spPr>
-        <p:style>
-          <a:lnRef idx="1">
-            <a:schemeClr val="accent1"/>
-          </a:lnRef>
-          <a:fillRef idx="3">
-            <a:schemeClr val="accent1"/>
-          </a:fillRef>
-          <a:effectRef idx="2">
-            <a:schemeClr val="accent1"/>
-          </a:effectRef>
-          <a:fontRef idx="minor">
-            <a:schemeClr val="lt1"/>
-          </a:fontRef>
-        </p:style>
-        <p:txBody>
-          <a:bodyPr rtlCol="0" anchor="t" wrap="square" tIns="25400" bIns="25400" lIns="76200" rIns="76200"/>
-          <a:lstStyle/>
-          <a:p>
-            <a:pPr algn="ctr"/>
-            <a:r>
-              <a:rPr sz="1200" b="1">
-                <a:solidFill>
-                  <a:srgbClr val="2563EB"/>
-                </a:solidFill>
-                <a:latin typeface="Arial"/>
-              </a:rPr>
-              <a:t>架构支撑</a:t>
-            </a:r>
-          </a:p>
-        </p:txBody>
-      </p:sp>
-      <p:sp>
-        <p:nvSpPr>
-          <p:cNvPr id="15" name="TextBox 14"/>
-          <p:cNvSpPr txBox="1"/>
-          <p:nvPr/>
-        </p:nvSpPr>
-        <p:spPr>
-          <a:xfrm>
-            <a:off x="7909560" y="2761488"/>
-            <a:ext cx="3648456" cy="987552"/>
-          </a:xfrm>
-          <a:prstGeom prst="rect">
-            <a:avLst/>
-          </a:prstGeom>
-          <a:noFill/>
-        </p:spPr>
-        <p:txBody>
-          <a:bodyPr wrap="square" tIns="50800" bIns="50800" lIns="101600" rIns="101600" anchor="t">
-            <a:spAutoFit/>
-          </a:bodyPr>
-          <a:lstStyle/>
-          <a:p>
-            <a:pPr>
-              <a:spcAft>
-                <a:spcPts val="600"/>
-              </a:spcAft>
-            </a:pPr>
-            <a:r>
-              <a:rPr sz="1400" b="0">
-                <a:solidFill>
-                  <a:srgbClr val="1E293B"/>
-                </a:solidFill>
-                <a:latin typeface="Arial"/>
-              </a:rPr>
-              <a:t>prompt stack（提示词栈）默认把请求理解成软件工程任务</a:t>
-            </a:r>
-          </a:p>
-          <a:p>
-            <a:pPr>
-              <a:spcAft>
-                <a:spcPts val="600"/>
-              </a:spcAft>
-            </a:pPr>
-            <a:r>
-              <a:rPr sz="1400" b="0">
-                <a:solidFill>
-                  <a:srgbClr val="1E293B"/>
-                </a:solidFill>
-                <a:latin typeface="Arial"/>
-              </a:rPr>
-              <a:t>turn loop（轮次循环）会围绕目标、范围和验证持续推进</a:t>
-            </a:r>
-          </a:p>
-        </p:txBody>
-      </p:sp>
-      <p:sp>
-        <p:nvSpPr>
-          <p:cNvPr id="16" name="Rounded Rectangle 15"/>
-          <p:cNvSpPr/>
-          <p:nvPr/>
-        </p:nvSpPr>
-        <p:spPr>
-          <a:xfrm>
-            <a:off x="658368" y="4069080"/>
-            <a:ext cx="10972800" cy="512064"/>
-          </a:xfrm>
-          <a:prstGeom prst="roundRect">
-            <a:avLst/>
-          </a:prstGeom>
-          <a:solidFill>
-            <a:srgbClr val="FFFFFF"/>
-          </a:solidFill>
-          <a:ln>
-            <a:solidFill>
-              <a:srgbClr val="2563EB"/>
-            </a:solidFill>
-          </a:ln>
-        </p:spPr>
-        <p:style>
-          <a:lnRef idx="1">
-            <a:schemeClr val="accent1"/>
-          </a:lnRef>
-          <a:fillRef idx="3">
-            <a:schemeClr val="accent1"/>
-          </a:fillRef>
-          <a:effectRef idx="2">
-            <a:schemeClr val="accent1"/>
-          </a:effectRef>
-          <a:fontRef idx="minor">
-            <a:schemeClr val="lt1"/>
-          </a:fontRef>
-        </p:style>
-        <p:txBody>
-          <a:bodyPr rtlCol="0" anchor="ctr"/>
-          <a:lstStyle/>
-          <a:p>
-            <a:pPr algn="ctr"/>
-          </a:p>
-        </p:txBody>
-      </p:sp>
-      <p:sp>
-        <p:nvSpPr>
-          <p:cNvPr id="17" name="Rectangle 16"/>
-          <p:cNvSpPr/>
-          <p:nvPr/>
-        </p:nvSpPr>
-        <p:spPr>
-          <a:xfrm>
-            <a:off x="658368" y="4069080"/>
-            <a:ext cx="10972800" cy="347472"/>
-          </a:xfrm>
-          <a:prstGeom prst="rect">
-            <a:avLst/>
-          </a:prstGeom>
-          <a:solidFill>
-            <a:srgbClr val="DBEAFE"/>
-          </a:solidFill>
-          <a:ln>
-            <a:solidFill>
-              <a:srgbClr val="DBEAFE"/>
-            </a:solidFill>
-          </a:ln>
-        </p:spPr>
-        <p:style>
-          <a:lnRef idx="1">
-            <a:schemeClr val="accent1"/>
-          </a:lnRef>
-          <a:fillRef idx="3">
-            <a:schemeClr val="accent1"/>
-          </a:fillRef>
-          <a:effectRef idx="2">
-            <a:schemeClr val="accent1"/>
-          </a:effectRef>
-          <a:fontRef idx="minor">
-            <a:schemeClr val="lt1"/>
-          </a:fontRef>
-        </p:style>
-        <p:txBody>
-          <a:bodyPr rtlCol="0" anchor="t" wrap="square" tIns="25400" bIns="25400" lIns="76200" rIns="76200"/>
-          <a:lstStyle/>
-          <a:p>
-            <a:pPr algn="ctr"/>
-            <a:r>
-              <a:rPr sz="1200" b="1">
-                <a:solidFill>
-                  <a:srgbClr val="2563EB"/>
-                </a:solidFill>
-                <a:latin typeface="Arial"/>
-              </a:rPr>
-              <a:t>关键代码片段</a:t>
-            </a:r>
-          </a:p>
-        </p:txBody>
-      </p:sp>
-      <p:sp>
-        <p:nvSpPr>
-          <p:cNvPr id="18" name="TextBox 17"/>
-          <p:cNvSpPr txBox="1"/>
-          <p:nvPr/>
-        </p:nvSpPr>
-        <p:spPr>
-          <a:xfrm>
-            <a:off x="731519" y="4471416"/>
-            <a:ext cx="10826496" cy="54864"/>
-          </a:xfrm>
-          <a:prstGeom prst="rect">
-            <a:avLst/>
-          </a:prstGeom>
-          <a:noFill/>
-        </p:spPr>
-        <p:txBody>
-          <a:bodyPr wrap="square" tIns="50800" bIns="50800" lIns="101600" rIns="101600" anchor="t">
-            <a:spAutoFit/>
-          </a:bodyPr>
-          <a:lstStyle/>
-          <a:p/>
-        </p:txBody>
-      </p:sp>
-      <p:sp>
-        <p:nvSpPr>
-          <p:cNvPr id="19" name="Rounded Rectangle 18"/>
-          <p:cNvSpPr/>
-          <p:nvPr/>
-        </p:nvSpPr>
-        <p:spPr>
-          <a:xfrm>
-            <a:off x="658368" y="4407408"/>
-            <a:ext cx="10972800" cy="1097280"/>
+            <a:off x="658368" y="4160520"/>
+            <a:ext cx="10972800" cy="1234440"/>
           </a:xfrm>
           <a:prstGeom prst="roundRect">
             <a:avLst/>
@@ -11077,7 +9389,7 @@
       </p:sp>
       <p:sp>
         <p:nvSpPr>
-          <p:cNvPr id="20" name="TextBox 19"/>
+          <p:cNvPr id="15" name="TextBox 14"/>
           <p:cNvSpPr txBox="1"/>
           <p:nvPr/>
         </p:nvSpPr>
@@ -11222,7 +9534,65 @@
         <p:spPr>
           <a:xfrm>
             <a:off x="658368" y="1481328"/>
-            <a:ext cx="10972800" cy="685800"/>
+            <a:ext cx="10972800" cy="658368"/>
+          </a:xfrm>
+          <a:prstGeom prst="roundRect">
+            <a:avLst/>
+          </a:prstGeom>
+          <a:solidFill>
+            <a:srgbClr val="DBEAFE"/>
+          </a:solidFill>
+          <a:ln>
+            <a:solidFill>
+              <a:srgbClr val="2563EB"/>
+            </a:solidFill>
+          </a:ln>
+        </p:spPr>
+        <p:style>
+          <a:lnRef idx="1">
+            <a:schemeClr val="accent1"/>
+          </a:lnRef>
+          <a:fillRef idx="3">
+            <a:schemeClr val="accent1"/>
+          </a:fillRef>
+          <a:effectRef idx="2">
+            <a:schemeClr val="accent1"/>
+          </a:effectRef>
+          <a:fontRef idx="minor">
+            <a:schemeClr val="lt1"/>
+          </a:fontRef>
+        </p:style>
+        <p:txBody>
+          <a:bodyPr rtlCol="0" anchor="t" wrap="square" tIns="50800" bIns="50800" lIns="101600" rIns="101600"/>
+          <a:lstStyle/>
+          <a:p>
+            <a:pPr algn="ctr">
+              <a:spcAft>
+                <a:spcPts val="600"/>
+              </a:spcAft>
+            </a:pPr>
+            <a:r>
+              <a:rPr sz="1600" b="0">
+                <a:solidFill>
+                  <a:srgbClr val="1E293B"/>
+                </a:solidFill>
+                <a:latin typeface="Arial"/>
+              </a:rPr>
+              <a:t>“先读代码，再改代码”不是建议项，而是源码里的默认工作顺序。</a:t>
+            </a:r>
+          </a:p>
+        </p:txBody>
+      </p:sp>
+      <p:sp>
+        <p:nvSpPr>
+          <p:cNvPr id="5" name="Rounded Rectangle 4"/>
+          <p:cNvSpPr/>
+          <p:nvPr/>
+        </p:nvSpPr>
+        <p:spPr>
+          <a:xfrm>
+            <a:off x="658368" y="2331720"/>
+            <a:ext cx="3246120" cy="1554480"/>
           </a:xfrm>
           <a:prstGeom prst="roundRect">
             <a:avLst/>
@@ -11260,14 +9630,14 @@
       </p:sp>
       <p:sp>
         <p:nvSpPr>
-          <p:cNvPr id="5" name="Rectangle 4"/>
+          <p:cNvPr id="6" name="Rectangle 5"/>
           <p:cNvSpPr/>
           <p:nvPr/>
         </p:nvSpPr>
         <p:spPr>
           <a:xfrm>
-            <a:off x="658368" y="1481328"/>
-            <a:ext cx="10972800" cy="347472"/>
+            <a:off x="658368" y="2331720"/>
+            <a:ext cx="3246120" cy="347472"/>
           </a:xfrm>
           <a:prstGeom prst="rect">
             <a:avLst/>
@@ -11307,21 +9677,21 @@
                 </a:solidFill>
                 <a:latin typeface="Arial"/>
               </a:rPr>
-              <a:t>本页一句话</a:t>
-            </a:r>
-          </a:p>
-        </p:txBody>
-      </p:sp>
-      <p:sp>
-        <p:nvSpPr>
-          <p:cNvPr id="6" name="TextBox 5"/>
+              <a:t>示例提示词</a:t>
+            </a:r>
+          </a:p>
+        </p:txBody>
+      </p:sp>
+      <p:sp>
+        <p:nvSpPr>
+          <p:cNvPr id="7" name="TextBox 6"/>
           <p:cNvSpPr txBox="1"/>
           <p:nvPr/>
         </p:nvSpPr>
         <p:spPr>
           <a:xfrm>
-            <a:off x="731519" y="1883664"/>
-            <a:ext cx="10826496" cy="228600"/>
+            <a:off x="731519" y="2734056"/>
+            <a:ext cx="3099815" cy="1097280"/>
           </a:xfrm>
           <a:prstGeom prst="rect">
             <a:avLst/>
@@ -11346,21 +9716,37 @@
                 </a:solidFill>
                 <a:latin typeface="Arial"/>
               </a:rPr>
-              <a:t>“先读代码，再改代码”不是建议项，而是源码里的默认工作顺序。</a:t>
-            </a:r>
-          </a:p>
-        </p:txBody>
-      </p:sp>
-      <p:sp>
-        <p:nvSpPr>
-          <p:cNvPr id="7" name="Rounded Rectangle 6"/>
+              <a:t>先看 src/foo.ts 和 src/bar.ts</a:t>
+            </a:r>
+          </a:p>
+          <a:p>
+            <a:pPr>
+              <a:spcAft>
+                <a:spcPts val="600"/>
+              </a:spcAft>
+            </a:pPr>
+            <a:r>
+              <a:rPr sz="1400" b="0">
+                <a:solidFill>
+                  <a:srgbClr val="1E293B"/>
+                </a:solidFill>
+                <a:latin typeface="Arial"/>
+              </a:rPr>
+              <a:t>再决定改法</a:t>
+            </a:r>
+          </a:p>
+        </p:txBody>
+      </p:sp>
+      <p:sp>
+        <p:nvSpPr>
+          <p:cNvPr id="8" name="Rounded Rectangle 7"/>
           <p:cNvSpPr/>
           <p:nvPr/>
         </p:nvSpPr>
         <p:spPr>
           <a:xfrm>
-            <a:off x="658368" y="2359152"/>
-            <a:ext cx="3246120" cy="1444752"/>
+            <a:off x="4133087" y="2331720"/>
+            <a:ext cx="3474720" cy="1554480"/>
           </a:xfrm>
           <a:prstGeom prst="roundRect">
             <a:avLst/>
@@ -11398,14 +9784,14 @@
       </p:sp>
       <p:sp>
         <p:nvSpPr>
-          <p:cNvPr id="8" name="Rectangle 7"/>
+          <p:cNvPr id="9" name="Rectangle 8"/>
           <p:cNvSpPr/>
           <p:nvPr/>
         </p:nvSpPr>
         <p:spPr>
           <a:xfrm>
-            <a:off x="658368" y="2359152"/>
-            <a:ext cx="3246120" cy="347472"/>
+            <a:off x="4133087" y="2331720"/>
+            <a:ext cx="3474720" cy="347472"/>
           </a:xfrm>
           <a:prstGeom prst="rect">
             <a:avLst/>
@@ -11445,21 +9831,21 @@
                 </a:solidFill>
                 <a:latin typeface="Arial"/>
               </a:rPr>
-              <a:t>推荐写法</a:t>
-            </a:r>
-          </a:p>
-        </p:txBody>
-      </p:sp>
-      <p:sp>
-        <p:nvSpPr>
-          <p:cNvPr id="9" name="TextBox 8"/>
+              <a:t>源码解释</a:t>
+            </a:r>
+          </a:p>
+        </p:txBody>
+      </p:sp>
+      <p:sp>
+        <p:nvSpPr>
+          <p:cNvPr id="10" name="TextBox 9"/>
           <p:cNvSpPr txBox="1"/>
           <p:nvPr/>
         </p:nvSpPr>
         <p:spPr>
           <a:xfrm>
-            <a:off x="731519" y="2761488"/>
-            <a:ext cx="3099815" cy="987552"/>
+            <a:off x="4206240" y="2734056"/>
+            <a:ext cx="3328415" cy="1097280"/>
           </a:xfrm>
           <a:prstGeom prst="rect">
             <a:avLst/>
@@ -11484,7 +9870,7 @@
                 </a:solidFill>
                 <a:latin typeface="Arial"/>
               </a:rPr>
-              <a:t>先看 src/foo.ts 和 src/bar.ts</a:t>
+              <a:t>减少无关探索和上下文噪音</a:t>
             </a:r>
           </a:p>
           <a:p>
@@ -11500,21 +9886,21 @@
                 </a:solidFill>
                 <a:latin typeface="Arial"/>
               </a:rPr>
-              <a:t>再决定改法</a:t>
-            </a:r>
-          </a:p>
-        </p:txBody>
-      </p:sp>
-      <p:sp>
-        <p:nvSpPr>
-          <p:cNvPr id="10" name="Rounded Rectangle 9"/>
+              <a:t>更容易沿用现有实现</a:t>
+            </a:r>
+          </a:p>
+        </p:txBody>
+      </p:sp>
+      <p:sp>
+        <p:nvSpPr>
+          <p:cNvPr id="11" name="Rounded Rectangle 10"/>
           <p:cNvSpPr/>
           <p:nvPr/>
         </p:nvSpPr>
         <p:spPr>
           <a:xfrm>
-            <a:off x="4133087" y="2359152"/>
-            <a:ext cx="3474720" cy="1444752"/>
+            <a:off x="7836408" y="2331720"/>
+            <a:ext cx="3794760" cy="1554480"/>
           </a:xfrm>
           <a:prstGeom prst="roundRect">
             <a:avLst/>
@@ -11552,14 +9938,14 @@
       </p:sp>
       <p:sp>
         <p:nvSpPr>
-          <p:cNvPr id="11" name="Rectangle 10"/>
+          <p:cNvPr id="12" name="Rectangle 11"/>
           <p:cNvSpPr/>
           <p:nvPr/>
         </p:nvSpPr>
         <p:spPr>
           <a:xfrm>
-            <a:off x="4133087" y="2359152"/>
-            <a:ext cx="3474720" cy="347472"/>
+            <a:off x="7836408" y="2331720"/>
+            <a:ext cx="3794760" cy="347472"/>
           </a:xfrm>
           <a:prstGeom prst="rect">
             <a:avLst/>
@@ -11599,21 +9985,21 @@
                 </a:solidFill>
                 <a:latin typeface="Arial"/>
               </a:rPr>
-              <a:t>为什么有效</a:t>
-            </a:r>
-          </a:p>
-        </p:txBody>
-      </p:sp>
-      <p:sp>
-        <p:nvSpPr>
-          <p:cNvPr id="12" name="TextBox 11"/>
+              <a:t>证据链</a:t>
+            </a:r>
+          </a:p>
+        </p:txBody>
+      </p:sp>
+      <p:sp>
+        <p:nvSpPr>
+          <p:cNvPr id="13" name="TextBox 12"/>
           <p:cNvSpPr txBox="1"/>
           <p:nvPr/>
         </p:nvSpPr>
         <p:spPr>
           <a:xfrm>
-            <a:off x="4206240" y="2761488"/>
-            <a:ext cx="3328415" cy="987552"/>
+            <a:off x="7909560" y="2734056"/>
+            <a:ext cx="3648456" cy="1097280"/>
           </a:xfrm>
           <a:prstGeom prst="rect">
             <a:avLst/>
@@ -11638,7 +10024,7 @@
                 </a:solidFill>
                 <a:latin typeface="Arial"/>
               </a:rPr>
-              <a:t>减少无关探索和上下文噪音</a:t>
+              <a:t>prompt stack（提示词栈）明确要求先读代码</a:t>
             </a:r>
           </a:p>
           <a:p>
@@ -11654,298 +10040,21 @@
                 </a:solidFill>
                 <a:latin typeface="Arial"/>
               </a:rPr>
-              <a:t>更容易沿用现有实现</a:t>
-            </a:r>
-          </a:p>
-        </p:txBody>
-      </p:sp>
-      <p:sp>
-        <p:nvSpPr>
-          <p:cNvPr id="13" name="Rounded Rectangle 12"/>
+              <a:t>Plan Mode workflow（规划模式工作流）先 Explore 再规划</a:t>
+            </a:r>
+          </a:p>
+        </p:txBody>
+      </p:sp>
+      <p:sp>
+        <p:nvSpPr>
+          <p:cNvPr id="14" name="Rounded Rectangle 13"/>
           <p:cNvSpPr/>
           <p:nvPr/>
         </p:nvSpPr>
         <p:spPr>
           <a:xfrm>
-            <a:off x="7836408" y="2359152"/>
-            <a:ext cx="3794760" cy="1444752"/>
-          </a:xfrm>
-          <a:prstGeom prst="roundRect">
-            <a:avLst/>
-          </a:prstGeom>
-          <a:solidFill>
-            <a:srgbClr val="FFFFFF"/>
-          </a:solidFill>
-          <a:ln>
-            <a:solidFill>
-              <a:srgbClr val="2563EB"/>
-            </a:solidFill>
-          </a:ln>
-        </p:spPr>
-        <p:style>
-          <a:lnRef idx="1">
-            <a:schemeClr val="accent1"/>
-          </a:lnRef>
-          <a:fillRef idx="3">
-            <a:schemeClr val="accent1"/>
-          </a:fillRef>
-          <a:effectRef idx="2">
-            <a:schemeClr val="accent1"/>
-          </a:effectRef>
-          <a:fontRef idx="minor">
-            <a:schemeClr val="lt1"/>
-          </a:fontRef>
-        </p:style>
-        <p:txBody>
-          <a:bodyPr rtlCol="0" anchor="ctr"/>
-          <a:lstStyle/>
-          <a:p>
-            <a:pPr algn="ctr"/>
-          </a:p>
-        </p:txBody>
-      </p:sp>
-      <p:sp>
-        <p:nvSpPr>
-          <p:cNvPr id="14" name="Rectangle 13"/>
-          <p:cNvSpPr/>
-          <p:nvPr/>
-        </p:nvSpPr>
-        <p:spPr>
-          <a:xfrm>
-            <a:off x="7836408" y="2359152"/>
-            <a:ext cx="3794760" cy="347472"/>
-          </a:xfrm>
-          <a:prstGeom prst="rect">
-            <a:avLst/>
-          </a:prstGeom>
-          <a:solidFill>
-            <a:srgbClr val="DBEAFE"/>
-          </a:solidFill>
-          <a:ln>
-            <a:solidFill>
-              <a:srgbClr val="DBEAFE"/>
-            </a:solidFill>
-          </a:ln>
-        </p:spPr>
-        <p:style>
-          <a:lnRef idx="1">
-            <a:schemeClr val="accent1"/>
-          </a:lnRef>
-          <a:fillRef idx="3">
-            <a:schemeClr val="accent1"/>
-          </a:fillRef>
-          <a:effectRef idx="2">
-            <a:schemeClr val="accent1"/>
-          </a:effectRef>
-          <a:fontRef idx="minor">
-            <a:schemeClr val="lt1"/>
-          </a:fontRef>
-        </p:style>
-        <p:txBody>
-          <a:bodyPr rtlCol="0" anchor="t" wrap="square" tIns="25400" bIns="25400" lIns="76200" rIns="76200"/>
-          <a:lstStyle/>
-          <a:p>
-            <a:pPr algn="ctr"/>
-            <a:r>
-              <a:rPr sz="1200" b="1">
-                <a:solidFill>
-                  <a:srgbClr val="2563EB"/>
-                </a:solidFill>
-                <a:latin typeface="Arial"/>
-              </a:rPr>
-              <a:t>架构支撑</a:t>
-            </a:r>
-          </a:p>
-        </p:txBody>
-      </p:sp>
-      <p:sp>
-        <p:nvSpPr>
-          <p:cNvPr id="15" name="TextBox 14"/>
-          <p:cNvSpPr txBox="1"/>
-          <p:nvPr/>
-        </p:nvSpPr>
-        <p:spPr>
-          <a:xfrm>
-            <a:off x="7909560" y="2761488"/>
-            <a:ext cx="3648456" cy="987552"/>
-          </a:xfrm>
-          <a:prstGeom prst="rect">
-            <a:avLst/>
-          </a:prstGeom>
-          <a:noFill/>
-        </p:spPr>
-        <p:txBody>
-          <a:bodyPr wrap="square" tIns="50800" bIns="50800" lIns="101600" rIns="101600" anchor="t">
-            <a:spAutoFit/>
-          </a:bodyPr>
-          <a:lstStyle/>
-          <a:p>
-            <a:pPr>
-              <a:spcAft>
-                <a:spcPts val="600"/>
-              </a:spcAft>
-            </a:pPr>
-            <a:r>
-              <a:rPr sz="1400" b="0">
-                <a:solidFill>
-                  <a:srgbClr val="1E293B"/>
-                </a:solidFill>
-                <a:latin typeface="Arial"/>
-              </a:rPr>
-              <a:t>prompt stack（提示词栈）明确要求先读代码</a:t>
-            </a:r>
-          </a:p>
-          <a:p>
-            <a:pPr>
-              <a:spcAft>
-                <a:spcPts val="600"/>
-              </a:spcAft>
-            </a:pPr>
-            <a:r>
-              <a:rPr sz="1400" b="0">
-                <a:solidFill>
-                  <a:srgbClr val="1E293B"/>
-                </a:solidFill>
-                <a:latin typeface="Arial"/>
-              </a:rPr>
-              <a:t>Plan Mode workflow（规划模式工作流）先 Explore 再规划</a:t>
-            </a:r>
-          </a:p>
-        </p:txBody>
-      </p:sp>
-      <p:sp>
-        <p:nvSpPr>
-          <p:cNvPr id="16" name="Rounded Rectangle 15"/>
-          <p:cNvSpPr/>
-          <p:nvPr/>
-        </p:nvSpPr>
-        <p:spPr>
-          <a:xfrm>
-            <a:off x="658368" y="4069080"/>
-            <a:ext cx="10972800" cy="512064"/>
-          </a:xfrm>
-          <a:prstGeom prst="roundRect">
-            <a:avLst/>
-          </a:prstGeom>
-          <a:solidFill>
-            <a:srgbClr val="FFFFFF"/>
-          </a:solidFill>
-          <a:ln>
-            <a:solidFill>
-              <a:srgbClr val="2563EB"/>
-            </a:solidFill>
-          </a:ln>
-        </p:spPr>
-        <p:style>
-          <a:lnRef idx="1">
-            <a:schemeClr val="accent1"/>
-          </a:lnRef>
-          <a:fillRef idx="3">
-            <a:schemeClr val="accent1"/>
-          </a:fillRef>
-          <a:effectRef idx="2">
-            <a:schemeClr val="accent1"/>
-          </a:effectRef>
-          <a:fontRef idx="minor">
-            <a:schemeClr val="lt1"/>
-          </a:fontRef>
-        </p:style>
-        <p:txBody>
-          <a:bodyPr rtlCol="0" anchor="ctr"/>
-          <a:lstStyle/>
-          <a:p>
-            <a:pPr algn="ctr"/>
-          </a:p>
-        </p:txBody>
-      </p:sp>
-      <p:sp>
-        <p:nvSpPr>
-          <p:cNvPr id="17" name="Rectangle 16"/>
-          <p:cNvSpPr/>
-          <p:nvPr/>
-        </p:nvSpPr>
-        <p:spPr>
-          <a:xfrm>
-            <a:off x="658368" y="4069080"/>
-            <a:ext cx="10972800" cy="347472"/>
-          </a:xfrm>
-          <a:prstGeom prst="rect">
-            <a:avLst/>
-          </a:prstGeom>
-          <a:solidFill>
-            <a:srgbClr val="DBEAFE"/>
-          </a:solidFill>
-          <a:ln>
-            <a:solidFill>
-              <a:srgbClr val="DBEAFE"/>
-            </a:solidFill>
-          </a:ln>
-        </p:spPr>
-        <p:style>
-          <a:lnRef idx="1">
-            <a:schemeClr val="accent1"/>
-          </a:lnRef>
-          <a:fillRef idx="3">
-            <a:schemeClr val="accent1"/>
-          </a:fillRef>
-          <a:effectRef idx="2">
-            <a:schemeClr val="accent1"/>
-          </a:effectRef>
-          <a:fontRef idx="minor">
-            <a:schemeClr val="lt1"/>
-          </a:fontRef>
-        </p:style>
-        <p:txBody>
-          <a:bodyPr rtlCol="0" anchor="t" wrap="square" tIns="25400" bIns="25400" lIns="76200" rIns="76200"/>
-          <a:lstStyle/>
-          <a:p>
-            <a:pPr algn="ctr"/>
-            <a:r>
-              <a:rPr sz="1200" b="1">
-                <a:solidFill>
-                  <a:srgbClr val="2563EB"/>
-                </a:solidFill>
-                <a:latin typeface="Arial"/>
-              </a:rPr>
-              <a:t>关键代码片段</a:t>
-            </a:r>
-          </a:p>
-        </p:txBody>
-      </p:sp>
-      <p:sp>
-        <p:nvSpPr>
-          <p:cNvPr id="18" name="TextBox 17"/>
-          <p:cNvSpPr txBox="1"/>
-          <p:nvPr/>
-        </p:nvSpPr>
-        <p:spPr>
-          <a:xfrm>
-            <a:off x="731519" y="4471416"/>
-            <a:ext cx="10826496" cy="54864"/>
-          </a:xfrm>
-          <a:prstGeom prst="rect">
-            <a:avLst/>
-          </a:prstGeom>
-          <a:noFill/>
-        </p:spPr>
-        <p:txBody>
-          <a:bodyPr wrap="square" tIns="50800" bIns="50800" lIns="101600" rIns="101600" anchor="t">
-            <a:spAutoFit/>
-          </a:bodyPr>
-          <a:lstStyle/>
-          <a:p/>
-        </p:txBody>
-      </p:sp>
-      <p:sp>
-        <p:nvSpPr>
-          <p:cNvPr id="19" name="Rounded Rectangle 18"/>
-          <p:cNvSpPr/>
-          <p:nvPr/>
-        </p:nvSpPr>
-        <p:spPr>
-          <a:xfrm>
-            <a:off x="658368" y="4407408"/>
-            <a:ext cx="10972800" cy="1097280"/>
+            <a:off x="658368" y="4160520"/>
+            <a:ext cx="10972800" cy="1234440"/>
           </a:xfrm>
           <a:prstGeom prst="roundRect">
             <a:avLst/>
@@ -11995,7 +10104,7 @@
       </p:sp>
       <p:sp>
         <p:nvSpPr>
-          <p:cNvPr id="20" name="TextBox 19"/>
+          <p:cNvPr id="15" name="TextBox 14"/>
           <p:cNvSpPr txBox="1"/>
           <p:nvPr/>
         </p:nvSpPr>
@@ -12140,7 +10249,65 @@
         <p:spPr>
           <a:xfrm>
             <a:off x="658368" y="1481328"/>
-            <a:ext cx="10972800" cy="685800"/>
+            <a:ext cx="10972800" cy="658368"/>
+          </a:xfrm>
+          <a:prstGeom prst="roundRect">
+            <a:avLst/>
+          </a:prstGeom>
+          <a:solidFill>
+            <a:srgbClr val="DBEAFE"/>
+          </a:solidFill>
+          <a:ln>
+            <a:solidFill>
+              <a:srgbClr val="2563EB"/>
+            </a:solidFill>
+          </a:ln>
+        </p:spPr>
+        <p:style>
+          <a:lnRef idx="1">
+            <a:schemeClr val="accent1"/>
+          </a:lnRef>
+          <a:fillRef idx="3">
+            <a:schemeClr val="accent1"/>
+          </a:fillRef>
+          <a:effectRef idx="2">
+            <a:schemeClr val="accent1"/>
+          </a:effectRef>
+          <a:fontRef idx="minor">
+            <a:schemeClr val="lt1"/>
+          </a:fontRef>
+        </p:style>
+        <p:txBody>
+          <a:bodyPr rtlCol="0" anchor="t" wrap="square" tIns="50800" bIns="50800" lIns="101600" rIns="101600"/>
+          <a:lstStyle/>
+          <a:p>
+            <a:pPr algn="ctr">
+              <a:spcAft>
+                <a:spcPts val="600"/>
+              </a:spcAft>
+            </a:pPr>
+            <a:r>
+              <a:rPr sz="1600" b="0">
+                <a:solidFill>
+                  <a:srgbClr val="1E293B"/>
+                </a:solidFill>
+                <a:latin typeface="Arial"/>
+              </a:rPr>
+              <a:t>把“最小改动、优先复用”写出来，能明显降低顺手重构和过早抽象。</a:t>
+            </a:r>
+          </a:p>
+        </p:txBody>
+      </p:sp>
+      <p:sp>
+        <p:nvSpPr>
+          <p:cNvPr id="5" name="Rounded Rectangle 4"/>
+          <p:cNvSpPr/>
+          <p:nvPr/>
+        </p:nvSpPr>
+        <p:spPr>
+          <a:xfrm>
+            <a:off x="658368" y="2331720"/>
+            <a:ext cx="3246120" cy="1554480"/>
           </a:xfrm>
           <a:prstGeom prst="roundRect">
             <a:avLst/>
@@ -12178,14 +10345,14 @@
       </p:sp>
       <p:sp>
         <p:nvSpPr>
-          <p:cNvPr id="5" name="Rectangle 4"/>
+          <p:cNvPr id="6" name="Rectangle 5"/>
           <p:cNvSpPr/>
           <p:nvPr/>
         </p:nvSpPr>
         <p:spPr>
           <a:xfrm>
-            <a:off x="658368" y="1481328"/>
-            <a:ext cx="10972800" cy="347472"/>
+            <a:off x="658368" y="2331720"/>
+            <a:ext cx="3246120" cy="347472"/>
           </a:xfrm>
           <a:prstGeom prst="rect">
             <a:avLst/>
@@ -12225,21 +10392,21 @@
                 </a:solidFill>
                 <a:latin typeface="Arial"/>
               </a:rPr>
-              <a:t>本页一句话</a:t>
-            </a:r>
-          </a:p>
-        </p:txBody>
-      </p:sp>
-      <p:sp>
-        <p:nvSpPr>
-          <p:cNvPr id="6" name="TextBox 5"/>
+              <a:t>示例提示词</a:t>
+            </a:r>
+          </a:p>
+        </p:txBody>
+      </p:sp>
+      <p:sp>
+        <p:nvSpPr>
+          <p:cNvPr id="7" name="TextBox 6"/>
           <p:cNvSpPr txBox="1"/>
           <p:nvPr/>
         </p:nvSpPr>
         <p:spPr>
           <a:xfrm>
-            <a:off x="731519" y="1883664"/>
-            <a:ext cx="10826496" cy="228600"/>
+            <a:off x="731519" y="2734056"/>
+            <a:ext cx="3099815" cy="1097280"/>
           </a:xfrm>
           <a:prstGeom prst="rect">
             <a:avLst/>
@@ -12264,21 +10431,53 @@
                 </a:solidFill>
                 <a:latin typeface="Arial"/>
               </a:rPr>
-              <a:t>把“最小改动、优先复用”写出来，能明显降低顺手重构和过早抽象。</a:t>
-            </a:r>
-          </a:p>
-        </p:txBody>
-      </p:sp>
-      <p:sp>
-        <p:nvSpPr>
-          <p:cNvPr id="7" name="Rounded Rectangle 6"/>
+              <a:t>做最小必要改动</a:t>
+            </a:r>
+          </a:p>
+          <a:p>
+            <a:pPr>
+              <a:spcAft>
+                <a:spcPts val="600"/>
+              </a:spcAft>
+            </a:pPr>
+            <a:r>
+              <a:rPr sz="1400" b="0">
+                <a:solidFill>
+                  <a:srgbClr val="1E293B"/>
+                </a:solidFill>
+                <a:latin typeface="Arial"/>
+              </a:rPr>
+              <a:t>优先复用现有函数、工具和模式</a:t>
+            </a:r>
+          </a:p>
+          <a:p>
+            <a:pPr>
+              <a:spcAft>
+                <a:spcPts val="600"/>
+              </a:spcAft>
+            </a:pPr>
+            <a:r>
+              <a:rPr sz="1400" b="0">
+                <a:solidFill>
+                  <a:srgbClr val="1E293B"/>
+                </a:solidFill>
+                <a:latin typeface="Arial"/>
+              </a:rPr>
+              <a:t>不要新造一层抽象</a:t>
+            </a:r>
+          </a:p>
+        </p:txBody>
+      </p:sp>
+      <p:sp>
+        <p:nvSpPr>
+          <p:cNvPr id="8" name="Rounded Rectangle 7"/>
           <p:cNvSpPr/>
           <p:nvPr/>
         </p:nvSpPr>
         <p:spPr>
           <a:xfrm>
-            <a:off x="658368" y="2359152"/>
-            <a:ext cx="3246120" cy="1444752"/>
+            <a:off x="4133087" y="2331720"/>
+            <a:ext cx="3474720" cy="1554480"/>
           </a:xfrm>
           <a:prstGeom prst="roundRect">
             <a:avLst/>
@@ -12316,14 +10515,14 @@
       </p:sp>
       <p:sp>
         <p:nvSpPr>
-          <p:cNvPr id="8" name="Rectangle 7"/>
+          <p:cNvPr id="9" name="Rectangle 8"/>
           <p:cNvSpPr/>
           <p:nvPr/>
         </p:nvSpPr>
         <p:spPr>
           <a:xfrm>
-            <a:off x="658368" y="2359152"/>
-            <a:ext cx="3246120" cy="347472"/>
+            <a:off x="4133087" y="2331720"/>
+            <a:ext cx="3474720" cy="347472"/>
           </a:xfrm>
           <a:prstGeom prst="rect">
             <a:avLst/>
@@ -12363,21 +10562,21 @@
                 </a:solidFill>
                 <a:latin typeface="Arial"/>
               </a:rPr>
-              <a:t>推荐写法</a:t>
-            </a:r>
-          </a:p>
-        </p:txBody>
-      </p:sp>
-      <p:sp>
-        <p:nvSpPr>
-          <p:cNvPr id="9" name="TextBox 8"/>
+              <a:t>源码解释</a:t>
+            </a:r>
+          </a:p>
+        </p:txBody>
+      </p:sp>
+      <p:sp>
+        <p:nvSpPr>
+          <p:cNvPr id="10" name="TextBox 9"/>
           <p:cNvSpPr txBox="1"/>
           <p:nvPr/>
         </p:nvSpPr>
         <p:spPr>
           <a:xfrm>
-            <a:off x="731519" y="2761488"/>
-            <a:ext cx="3099815" cy="987552"/>
+            <a:off x="4206240" y="2734056"/>
+            <a:ext cx="3328415" cy="1097280"/>
           </a:xfrm>
           <a:prstGeom prst="rect">
             <a:avLst/>
@@ -12402,7 +10601,7 @@
                 </a:solidFill>
                 <a:latin typeface="Arial"/>
               </a:rPr>
-              <a:t>做最小必要改动</a:t>
+              <a:t>抑制范围漂移</a:t>
             </a:r>
           </a:p>
           <a:p>
@@ -12418,37 +10617,21 @@
                 </a:solidFill>
                 <a:latin typeface="Arial"/>
               </a:rPr>
-              <a:t>优先复用现有函数、工具和模式</a:t>
-            </a:r>
-          </a:p>
-          <a:p>
-            <a:pPr>
-              <a:spcAft>
-                <a:spcPts val="600"/>
-              </a:spcAft>
-            </a:pPr>
-            <a:r>
-              <a:rPr sz="1400" b="0">
-                <a:solidFill>
-                  <a:srgbClr val="1E293B"/>
-                </a:solidFill>
-                <a:latin typeface="Arial"/>
-              </a:rPr>
-              <a:t>不要新造一层抽象</a:t>
-            </a:r>
-          </a:p>
-        </p:txBody>
-      </p:sp>
-      <p:sp>
-        <p:nvSpPr>
-          <p:cNvPr id="10" name="Rounded Rectangle 9"/>
+              <a:t>避免 one-time helper 和过早抽象</a:t>
+            </a:r>
+          </a:p>
+        </p:txBody>
+      </p:sp>
+      <p:sp>
+        <p:nvSpPr>
+          <p:cNvPr id="11" name="Rounded Rectangle 10"/>
           <p:cNvSpPr/>
           <p:nvPr/>
         </p:nvSpPr>
         <p:spPr>
           <a:xfrm>
-            <a:off x="4133087" y="2359152"/>
-            <a:ext cx="3474720" cy="1444752"/>
+            <a:off x="7836408" y="2331720"/>
+            <a:ext cx="3794760" cy="1554480"/>
           </a:xfrm>
           <a:prstGeom prst="roundRect">
             <a:avLst/>
@@ -12486,14 +10669,14 @@
       </p:sp>
       <p:sp>
         <p:nvSpPr>
-          <p:cNvPr id="11" name="Rectangle 10"/>
+          <p:cNvPr id="12" name="Rectangle 11"/>
           <p:cNvSpPr/>
           <p:nvPr/>
         </p:nvSpPr>
         <p:spPr>
           <a:xfrm>
-            <a:off x="4133087" y="2359152"/>
-            <a:ext cx="3474720" cy="347472"/>
+            <a:off x="7836408" y="2331720"/>
+            <a:ext cx="3794760" cy="347472"/>
           </a:xfrm>
           <a:prstGeom prst="rect">
             <a:avLst/>
@@ -12533,21 +10716,21 @@
                 </a:solidFill>
                 <a:latin typeface="Arial"/>
               </a:rPr>
-              <a:t>为什么有效</a:t>
-            </a:r>
-          </a:p>
-        </p:txBody>
-      </p:sp>
-      <p:sp>
-        <p:nvSpPr>
-          <p:cNvPr id="12" name="TextBox 11"/>
+              <a:t>证据链</a:t>
+            </a:r>
+          </a:p>
+        </p:txBody>
+      </p:sp>
+      <p:sp>
+        <p:nvSpPr>
+          <p:cNvPr id="13" name="TextBox 12"/>
           <p:cNvSpPr txBox="1"/>
           <p:nvPr/>
         </p:nvSpPr>
         <p:spPr>
           <a:xfrm>
-            <a:off x="4206240" y="2761488"/>
-            <a:ext cx="3328415" cy="987552"/>
+            <a:off x="7909560" y="2734056"/>
+            <a:ext cx="3648456" cy="1097280"/>
           </a:xfrm>
           <a:prstGeom prst="rect">
             <a:avLst/>
@@ -12572,7 +10755,7 @@
                 </a:solidFill>
                 <a:latin typeface="Arial"/>
               </a:rPr>
-              <a:t>抑制范围漂移</a:t>
+              <a:t>prompt stack（提示词栈）本身就在压制不必要改动</a:t>
             </a:r>
           </a:p>
           <a:p>
@@ -12588,298 +10771,21 @@
                 </a:solidFill>
                 <a:latin typeface="Arial"/>
               </a:rPr>
-              <a:t>避免 one-time helper 和过早抽象</a:t>
-            </a:r>
-          </a:p>
-        </p:txBody>
-      </p:sp>
-      <p:sp>
-        <p:nvSpPr>
-          <p:cNvPr id="13" name="Rounded Rectangle 12"/>
+              <a:t>tool pipeline（工具执行流水线）更适合局部、清晰、可验证的改动</a:t>
+            </a:r>
+          </a:p>
+        </p:txBody>
+      </p:sp>
+      <p:sp>
+        <p:nvSpPr>
+          <p:cNvPr id="14" name="Rounded Rectangle 13"/>
           <p:cNvSpPr/>
           <p:nvPr/>
         </p:nvSpPr>
         <p:spPr>
           <a:xfrm>
-            <a:off x="7836408" y="2359152"/>
-            <a:ext cx="3794760" cy="1444752"/>
-          </a:xfrm>
-          <a:prstGeom prst="roundRect">
-            <a:avLst/>
-          </a:prstGeom>
-          <a:solidFill>
-            <a:srgbClr val="FFFFFF"/>
-          </a:solidFill>
-          <a:ln>
-            <a:solidFill>
-              <a:srgbClr val="2563EB"/>
-            </a:solidFill>
-          </a:ln>
-        </p:spPr>
-        <p:style>
-          <a:lnRef idx="1">
-            <a:schemeClr val="accent1"/>
-          </a:lnRef>
-          <a:fillRef idx="3">
-            <a:schemeClr val="accent1"/>
-          </a:fillRef>
-          <a:effectRef idx="2">
-            <a:schemeClr val="accent1"/>
-          </a:effectRef>
-          <a:fontRef idx="minor">
-            <a:schemeClr val="lt1"/>
-          </a:fontRef>
-        </p:style>
-        <p:txBody>
-          <a:bodyPr rtlCol="0" anchor="ctr"/>
-          <a:lstStyle/>
-          <a:p>
-            <a:pPr algn="ctr"/>
-          </a:p>
-        </p:txBody>
-      </p:sp>
-      <p:sp>
-        <p:nvSpPr>
-          <p:cNvPr id="14" name="Rectangle 13"/>
-          <p:cNvSpPr/>
-          <p:nvPr/>
-        </p:nvSpPr>
-        <p:spPr>
-          <a:xfrm>
-            <a:off x="7836408" y="2359152"/>
-            <a:ext cx="3794760" cy="347472"/>
-          </a:xfrm>
-          <a:prstGeom prst="rect">
-            <a:avLst/>
-          </a:prstGeom>
-          <a:solidFill>
-            <a:srgbClr val="DBEAFE"/>
-          </a:solidFill>
-          <a:ln>
-            <a:solidFill>
-              <a:srgbClr val="DBEAFE"/>
-            </a:solidFill>
-          </a:ln>
-        </p:spPr>
-        <p:style>
-          <a:lnRef idx="1">
-            <a:schemeClr val="accent1"/>
-          </a:lnRef>
-          <a:fillRef idx="3">
-            <a:schemeClr val="accent1"/>
-          </a:fillRef>
-          <a:effectRef idx="2">
-            <a:schemeClr val="accent1"/>
-          </a:effectRef>
-          <a:fontRef idx="minor">
-            <a:schemeClr val="lt1"/>
-          </a:fontRef>
-        </p:style>
-        <p:txBody>
-          <a:bodyPr rtlCol="0" anchor="t" wrap="square" tIns="25400" bIns="25400" lIns="76200" rIns="76200"/>
-          <a:lstStyle/>
-          <a:p>
-            <a:pPr algn="ctr"/>
-            <a:r>
-              <a:rPr sz="1200" b="1">
-                <a:solidFill>
-                  <a:srgbClr val="2563EB"/>
-                </a:solidFill>
-                <a:latin typeface="Arial"/>
-              </a:rPr>
-              <a:t>架构支撑</a:t>
-            </a:r>
-          </a:p>
-        </p:txBody>
-      </p:sp>
-      <p:sp>
-        <p:nvSpPr>
-          <p:cNvPr id="15" name="TextBox 14"/>
-          <p:cNvSpPr txBox="1"/>
-          <p:nvPr/>
-        </p:nvSpPr>
-        <p:spPr>
-          <a:xfrm>
-            <a:off x="7909560" y="2761488"/>
-            <a:ext cx="3648456" cy="987552"/>
-          </a:xfrm>
-          <a:prstGeom prst="rect">
-            <a:avLst/>
-          </a:prstGeom>
-          <a:noFill/>
-        </p:spPr>
-        <p:txBody>
-          <a:bodyPr wrap="square" tIns="50800" bIns="50800" lIns="101600" rIns="101600" anchor="t">
-            <a:spAutoFit/>
-          </a:bodyPr>
-          <a:lstStyle/>
-          <a:p>
-            <a:pPr>
-              <a:spcAft>
-                <a:spcPts val="600"/>
-              </a:spcAft>
-            </a:pPr>
-            <a:r>
-              <a:rPr sz="1400" b="0">
-                <a:solidFill>
-                  <a:srgbClr val="1E293B"/>
-                </a:solidFill>
-                <a:latin typeface="Arial"/>
-              </a:rPr>
-              <a:t>prompt stack（提示词栈）本身就在压制不必要改动</a:t>
-            </a:r>
-          </a:p>
-          <a:p>
-            <a:pPr>
-              <a:spcAft>
-                <a:spcPts val="600"/>
-              </a:spcAft>
-            </a:pPr>
-            <a:r>
-              <a:rPr sz="1400" b="0">
-                <a:solidFill>
-                  <a:srgbClr val="1E293B"/>
-                </a:solidFill>
-                <a:latin typeface="Arial"/>
-              </a:rPr>
-              <a:t>tool pipeline（工具执行流水线）更适合局部、清晰、可验证的改动</a:t>
-            </a:r>
-          </a:p>
-        </p:txBody>
-      </p:sp>
-      <p:sp>
-        <p:nvSpPr>
-          <p:cNvPr id="16" name="Rounded Rectangle 15"/>
-          <p:cNvSpPr/>
-          <p:nvPr/>
-        </p:nvSpPr>
-        <p:spPr>
-          <a:xfrm>
-            <a:off x="658368" y="4069080"/>
-            <a:ext cx="10972800" cy="512064"/>
-          </a:xfrm>
-          <a:prstGeom prst="roundRect">
-            <a:avLst/>
-          </a:prstGeom>
-          <a:solidFill>
-            <a:srgbClr val="FFFFFF"/>
-          </a:solidFill>
-          <a:ln>
-            <a:solidFill>
-              <a:srgbClr val="2563EB"/>
-            </a:solidFill>
-          </a:ln>
-        </p:spPr>
-        <p:style>
-          <a:lnRef idx="1">
-            <a:schemeClr val="accent1"/>
-          </a:lnRef>
-          <a:fillRef idx="3">
-            <a:schemeClr val="accent1"/>
-          </a:fillRef>
-          <a:effectRef idx="2">
-            <a:schemeClr val="accent1"/>
-          </a:effectRef>
-          <a:fontRef idx="minor">
-            <a:schemeClr val="lt1"/>
-          </a:fontRef>
-        </p:style>
-        <p:txBody>
-          <a:bodyPr rtlCol="0" anchor="ctr"/>
-          <a:lstStyle/>
-          <a:p>
-            <a:pPr algn="ctr"/>
-          </a:p>
-        </p:txBody>
-      </p:sp>
-      <p:sp>
-        <p:nvSpPr>
-          <p:cNvPr id="17" name="Rectangle 16"/>
-          <p:cNvSpPr/>
-          <p:nvPr/>
-        </p:nvSpPr>
-        <p:spPr>
-          <a:xfrm>
-            <a:off x="658368" y="4069080"/>
-            <a:ext cx="10972800" cy="347472"/>
-          </a:xfrm>
-          <a:prstGeom prst="rect">
-            <a:avLst/>
-          </a:prstGeom>
-          <a:solidFill>
-            <a:srgbClr val="DBEAFE"/>
-          </a:solidFill>
-          <a:ln>
-            <a:solidFill>
-              <a:srgbClr val="DBEAFE"/>
-            </a:solidFill>
-          </a:ln>
-        </p:spPr>
-        <p:style>
-          <a:lnRef idx="1">
-            <a:schemeClr val="accent1"/>
-          </a:lnRef>
-          <a:fillRef idx="3">
-            <a:schemeClr val="accent1"/>
-          </a:fillRef>
-          <a:effectRef idx="2">
-            <a:schemeClr val="accent1"/>
-          </a:effectRef>
-          <a:fontRef idx="minor">
-            <a:schemeClr val="lt1"/>
-          </a:fontRef>
-        </p:style>
-        <p:txBody>
-          <a:bodyPr rtlCol="0" anchor="t" wrap="square" tIns="25400" bIns="25400" lIns="76200" rIns="76200"/>
-          <a:lstStyle/>
-          <a:p>
-            <a:pPr algn="ctr"/>
-            <a:r>
-              <a:rPr sz="1200" b="1">
-                <a:solidFill>
-                  <a:srgbClr val="2563EB"/>
-                </a:solidFill>
-                <a:latin typeface="Arial"/>
-              </a:rPr>
-              <a:t>关键代码片段</a:t>
-            </a:r>
-          </a:p>
-        </p:txBody>
-      </p:sp>
-      <p:sp>
-        <p:nvSpPr>
-          <p:cNvPr id="18" name="TextBox 17"/>
-          <p:cNvSpPr txBox="1"/>
-          <p:nvPr/>
-        </p:nvSpPr>
-        <p:spPr>
-          <a:xfrm>
-            <a:off x="731519" y="4471416"/>
-            <a:ext cx="10826496" cy="54864"/>
-          </a:xfrm>
-          <a:prstGeom prst="rect">
-            <a:avLst/>
-          </a:prstGeom>
-          <a:noFill/>
-        </p:spPr>
-        <p:txBody>
-          <a:bodyPr wrap="square" tIns="50800" bIns="50800" lIns="101600" rIns="101600" anchor="t">
-            <a:spAutoFit/>
-          </a:bodyPr>
-          <a:lstStyle/>
-          <a:p/>
-        </p:txBody>
-      </p:sp>
-      <p:sp>
-        <p:nvSpPr>
-          <p:cNvPr id="19" name="Rounded Rectangle 18"/>
-          <p:cNvSpPr/>
-          <p:nvPr/>
-        </p:nvSpPr>
-        <p:spPr>
-          <a:xfrm>
-            <a:off x="658368" y="4407408"/>
-            <a:ext cx="10972800" cy="1097280"/>
+            <a:off x="658368" y="4160520"/>
+            <a:ext cx="10972800" cy="1234440"/>
           </a:xfrm>
           <a:prstGeom prst="roundRect">
             <a:avLst/>
@@ -12927,7 +10833,7 @@
       </p:sp>
       <p:sp>
         <p:nvSpPr>
-          <p:cNvPr id="20" name="TextBox 19"/>
+          <p:cNvPr id="15" name="TextBox 14"/>
           <p:cNvSpPr txBox="1"/>
           <p:nvPr/>
         </p:nvSpPr>
@@ -13072,7 +10978,65 @@
         <p:spPr>
           <a:xfrm>
             <a:off x="658368" y="1481328"/>
-            <a:ext cx="10972800" cy="685800"/>
+            <a:ext cx="10972800" cy="658368"/>
+          </a:xfrm>
+          <a:prstGeom prst="roundRect">
+            <a:avLst/>
+          </a:prstGeom>
+          <a:solidFill>
+            <a:srgbClr val="DBEAFE"/>
+          </a:solidFill>
+          <a:ln>
+            <a:solidFill>
+              <a:srgbClr val="2563EB"/>
+            </a:solidFill>
+          </a:ln>
+        </p:spPr>
+        <p:style>
+          <a:lnRef idx="1">
+            <a:schemeClr val="accent1"/>
+          </a:lnRef>
+          <a:fillRef idx="3">
+            <a:schemeClr val="accent1"/>
+          </a:fillRef>
+          <a:effectRef idx="2">
+            <a:schemeClr val="accent1"/>
+          </a:effectRef>
+          <a:fontRef idx="minor">
+            <a:schemeClr val="lt1"/>
+          </a:fontRef>
+        </p:style>
+        <p:txBody>
+          <a:bodyPr rtlCol="0" anchor="t" wrap="square" tIns="50800" bIns="50800" lIns="101600" rIns="101600"/>
+          <a:lstStyle/>
+          <a:p>
+            <a:pPr algn="ctr">
+              <a:spcAft>
+                <a:spcPts val="600"/>
+              </a:spcAft>
+            </a:pPr>
+            <a:r>
+              <a:rPr sz="1600" b="0">
+                <a:solidFill>
+                  <a:srgbClr val="1E293B"/>
+                </a:solidFill>
+                <a:latin typeface="Arial"/>
+              </a:rPr>
+              <a:t>Claude Code 更偏好 dedicated tools（专用工具），Bash 在源码里是 fallback，不是首选。</a:t>
+            </a:r>
+          </a:p>
+        </p:txBody>
+      </p:sp>
+      <p:sp>
+        <p:nvSpPr>
+          <p:cNvPr id="5" name="Rounded Rectangle 4"/>
+          <p:cNvSpPr/>
+          <p:nvPr/>
+        </p:nvSpPr>
+        <p:spPr>
+          <a:xfrm>
+            <a:off x="658368" y="2331720"/>
+            <a:ext cx="3246120" cy="1554480"/>
           </a:xfrm>
           <a:prstGeom prst="roundRect">
             <a:avLst/>
@@ -13110,14 +11074,14 @@
       </p:sp>
       <p:sp>
         <p:nvSpPr>
-          <p:cNvPr id="5" name="Rectangle 4"/>
+          <p:cNvPr id="6" name="Rectangle 5"/>
           <p:cNvSpPr/>
           <p:nvPr/>
         </p:nvSpPr>
         <p:spPr>
           <a:xfrm>
-            <a:off x="658368" y="1481328"/>
-            <a:ext cx="10972800" cy="347472"/>
+            <a:off x="658368" y="2331720"/>
+            <a:ext cx="3246120" cy="347472"/>
           </a:xfrm>
           <a:prstGeom prst="rect">
             <a:avLst/>
@@ -13157,21 +11121,21 @@
                 </a:solidFill>
                 <a:latin typeface="Arial"/>
               </a:rPr>
-              <a:t>本页一句话</a:t>
-            </a:r>
-          </a:p>
-        </p:txBody>
-      </p:sp>
-      <p:sp>
-        <p:nvSpPr>
-          <p:cNvPr id="6" name="TextBox 5"/>
+              <a:t>示例提示词</a:t>
+            </a:r>
+          </a:p>
+        </p:txBody>
+      </p:sp>
+      <p:sp>
+        <p:nvSpPr>
+          <p:cNvPr id="7" name="TextBox 6"/>
           <p:cNvSpPr txBox="1"/>
           <p:nvPr/>
         </p:nvSpPr>
         <p:spPr>
           <a:xfrm>
-            <a:off x="731519" y="1883664"/>
-            <a:ext cx="10826496" cy="228600"/>
+            <a:off x="731519" y="2734056"/>
+            <a:ext cx="3099815" cy="1097280"/>
           </a:xfrm>
           <a:prstGeom prst="rect">
             <a:avLst/>
@@ -13196,21 +11160,37 @@
                 </a:solidFill>
                 <a:latin typeface="Arial"/>
               </a:rPr>
-              <a:t>Claude Code 更偏好 dedicated tools（专用工具），Bash 在源码里是 fallback，不是首选。</a:t>
-            </a:r>
-          </a:p>
-        </p:txBody>
-      </p:sp>
-      <p:sp>
-        <p:nvSpPr>
-          <p:cNvPr id="7" name="Rounded Rectangle 6"/>
+              <a:t>优先直接读写文件</a:t>
+            </a:r>
+          </a:p>
+          <a:p>
+            <a:pPr>
+              <a:spcAft>
+                <a:spcPts val="600"/>
+              </a:spcAft>
+            </a:pPr>
+            <a:r>
+              <a:rPr sz="1400" b="0">
+                <a:solidFill>
+                  <a:srgbClr val="1E293B"/>
+                </a:solidFill>
+                <a:latin typeface="Arial"/>
+              </a:rPr>
+              <a:t>不要用 Bash 做本可由专用工具完成的事情</a:t>
+            </a:r>
+          </a:p>
+        </p:txBody>
+      </p:sp>
+      <p:sp>
+        <p:nvSpPr>
+          <p:cNvPr id="8" name="Rounded Rectangle 7"/>
           <p:cNvSpPr/>
           <p:nvPr/>
         </p:nvSpPr>
         <p:spPr>
           <a:xfrm>
-            <a:off x="658368" y="2359152"/>
-            <a:ext cx="3246120" cy="1444752"/>
+            <a:off x="4133087" y="2331720"/>
+            <a:ext cx="3474720" cy="1554480"/>
           </a:xfrm>
           <a:prstGeom prst="roundRect">
             <a:avLst/>
@@ -13248,14 +11228,14 @@
       </p:sp>
       <p:sp>
         <p:nvSpPr>
-          <p:cNvPr id="8" name="Rectangle 7"/>
+          <p:cNvPr id="9" name="Rectangle 8"/>
           <p:cNvSpPr/>
           <p:nvPr/>
         </p:nvSpPr>
         <p:spPr>
           <a:xfrm>
-            <a:off x="658368" y="2359152"/>
-            <a:ext cx="3246120" cy="347472"/>
+            <a:off x="4133087" y="2331720"/>
+            <a:ext cx="3474720" cy="347472"/>
           </a:xfrm>
           <a:prstGeom prst="rect">
             <a:avLst/>
@@ -13295,21 +11275,21 @@
                 </a:solidFill>
                 <a:latin typeface="Arial"/>
               </a:rPr>
-              <a:t>推荐写法</a:t>
-            </a:r>
-          </a:p>
-        </p:txBody>
-      </p:sp>
-      <p:sp>
-        <p:nvSpPr>
-          <p:cNvPr id="9" name="TextBox 8"/>
+              <a:t>源码解释</a:t>
+            </a:r>
+          </a:p>
+        </p:txBody>
+      </p:sp>
+      <p:sp>
+        <p:nvSpPr>
+          <p:cNvPr id="10" name="TextBox 9"/>
           <p:cNvSpPr txBox="1"/>
           <p:nvPr/>
         </p:nvSpPr>
         <p:spPr>
           <a:xfrm>
-            <a:off x="731519" y="2761488"/>
-            <a:ext cx="3099815" cy="987552"/>
+            <a:off x="4206240" y="2734056"/>
+            <a:ext cx="3328415" cy="1097280"/>
           </a:xfrm>
           <a:prstGeom prst="rect">
             <a:avLst/>
@@ -13334,7 +11314,7 @@
                 </a:solidFill>
                 <a:latin typeface="Arial"/>
               </a:rPr>
-              <a:t>优先直接读写文件</a:t>
+              <a:t>专用工具更容易被解释和审查</a:t>
             </a:r>
           </a:p>
           <a:p>
@@ -13350,21 +11330,21 @@
                 </a:solidFill>
                 <a:latin typeface="Arial"/>
               </a:rPr>
-              <a:t>不要用 Bash 做本可由专用工具完成的事情</a:t>
-            </a:r>
-          </a:p>
-        </p:txBody>
-      </p:sp>
-      <p:sp>
-        <p:nvSpPr>
-          <p:cNvPr id="10" name="Rounded Rectangle 9"/>
+              <a:t>也更容易受权限和执行链约束</a:t>
+            </a:r>
+          </a:p>
+        </p:txBody>
+      </p:sp>
+      <p:sp>
+        <p:nvSpPr>
+          <p:cNvPr id="11" name="Rounded Rectangle 10"/>
           <p:cNvSpPr/>
           <p:nvPr/>
         </p:nvSpPr>
         <p:spPr>
           <a:xfrm>
-            <a:off x="4133087" y="2359152"/>
-            <a:ext cx="3474720" cy="1444752"/>
+            <a:off x="7836408" y="2331720"/>
+            <a:ext cx="3794760" cy="1554480"/>
           </a:xfrm>
           <a:prstGeom prst="roundRect">
             <a:avLst/>
@@ -13402,14 +11382,14 @@
       </p:sp>
       <p:sp>
         <p:nvSpPr>
-          <p:cNvPr id="11" name="Rectangle 10"/>
+          <p:cNvPr id="12" name="Rectangle 11"/>
           <p:cNvSpPr/>
           <p:nvPr/>
         </p:nvSpPr>
         <p:spPr>
           <a:xfrm>
-            <a:off x="4133087" y="2359152"/>
-            <a:ext cx="3474720" cy="347472"/>
+            <a:off x="7836408" y="2331720"/>
+            <a:ext cx="3794760" cy="347472"/>
           </a:xfrm>
           <a:prstGeom prst="rect">
             <a:avLst/>
@@ -13449,21 +11429,21 @@
                 </a:solidFill>
                 <a:latin typeface="Arial"/>
               </a:rPr>
-              <a:t>为什么有效</a:t>
-            </a:r>
-          </a:p>
-        </p:txBody>
-      </p:sp>
-      <p:sp>
-        <p:nvSpPr>
-          <p:cNvPr id="12" name="TextBox 11"/>
+              <a:t>证据链</a:t>
+            </a:r>
+          </a:p>
+        </p:txBody>
+      </p:sp>
+      <p:sp>
+        <p:nvSpPr>
+          <p:cNvPr id="13" name="TextBox 12"/>
           <p:cNvSpPr txBox="1"/>
           <p:nvPr/>
         </p:nvSpPr>
         <p:spPr>
           <a:xfrm>
-            <a:off x="4206240" y="2761488"/>
-            <a:ext cx="3328415" cy="987552"/>
+            <a:off x="7909560" y="2734056"/>
+            <a:ext cx="3648456" cy="1097280"/>
           </a:xfrm>
           <a:prstGeom prst="rect">
             <a:avLst/>
@@ -13488,7 +11468,7 @@
                 </a:solidFill>
                 <a:latin typeface="Arial"/>
               </a:rPr>
-              <a:t>专用工具更容易被解释和审查</a:t>
+              <a:t>tool pipeline（工具执行流水线）里，dedicated tools 是一等能力面</a:t>
             </a:r>
           </a:p>
           <a:p>
@@ -13504,298 +11484,21 @@
                 </a:solidFill>
                 <a:latin typeface="Arial"/>
               </a:rPr>
-              <a:t>也更容易受权限和执行链约束</a:t>
-            </a:r>
-          </a:p>
-        </p:txBody>
-      </p:sp>
-      <p:sp>
-        <p:nvSpPr>
-          <p:cNvPr id="13" name="Rounded Rectangle 12"/>
+              <a:t>Bash 是更自由也更高风险的 fallback</a:t>
+            </a:r>
+          </a:p>
+        </p:txBody>
+      </p:sp>
+      <p:sp>
+        <p:nvSpPr>
+          <p:cNvPr id="14" name="Rounded Rectangle 13"/>
           <p:cNvSpPr/>
           <p:nvPr/>
         </p:nvSpPr>
         <p:spPr>
           <a:xfrm>
-            <a:off x="7836408" y="2359152"/>
-            <a:ext cx="3794760" cy="1444752"/>
-          </a:xfrm>
-          <a:prstGeom prst="roundRect">
-            <a:avLst/>
-          </a:prstGeom>
-          <a:solidFill>
-            <a:srgbClr val="FFFFFF"/>
-          </a:solidFill>
-          <a:ln>
-            <a:solidFill>
-              <a:srgbClr val="2563EB"/>
-            </a:solidFill>
-          </a:ln>
-        </p:spPr>
-        <p:style>
-          <a:lnRef idx="1">
-            <a:schemeClr val="accent1"/>
-          </a:lnRef>
-          <a:fillRef idx="3">
-            <a:schemeClr val="accent1"/>
-          </a:fillRef>
-          <a:effectRef idx="2">
-            <a:schemeClr val="accent1"/>
-          </a:effectRef>
-          <a:fontRef idx="minor">
-            <a:schemeClr val="lt1"/>
-          </a:fontRef>
-        </p:style>
-        <p:txBody>
-          <a:bodyPr rtlCol="0" anchor="ctr"/>
-          <a:lstStyle/>
-          <a:p>
-            <a:pPr algn="ctr"/>
-          </a:p>
-        </p:txBody>
-      </p:sp>
-      <p:sp>
-        <p:nvSpPr>
-          <p:cNvPr id="14" name="Rectangle 13"/>
-          <p:cNvSpPr/>
-          <p:nvPr/>
-        </p:nvSpPr>
-        <p:spPr>
-          <a:xfrm>
-            <a:off x="7836408" y="2359152"/>
-            <a:ext cx="3794760" cy="347472"/>
-          </a:xfrm>
-          <a:prstGeom prst="rect">
-            <a:avLst/>
-          </a:prstGeom>
-          <a:solidFill>
-            <a:srgbClr val="DBEAFE"/>
-          </a:solidFill>
-          <a:ln>
-            <a:solidFill>
-              <a:srgbClr val="DBEAFE"/>
-            </a:solidFill>
-          </a:ln>
-        </p:spPr>
-        <p:style>
-          <a:lnRef idx="1">
-            <a:schemeClr val="accent1"/>
-          </a:lnRef>
-          <a:fillRef idx="3">
-            <a:schemeClr val="accent1"/>
-          </a:fillRef>
-          <a:effectRef idx="2">
-            <a:schemeClr val="accent1"/>
-          </a:effectRef>
-          <a:fontRef idx="minor">
-            <a:schemeClr val="lt1"/>
-          </a:fontRef>
-        </p:style>
-        <p:txBody>
-          <a:bodyPr rtlCol="0" anchor="t" wrap="square" tIns="25400" bIns="25400" lIns="76200" rIns="76200"/>
-          <a:lstStyle/>
-          <a:p>
-            <a:pPr algn="ctr"/>
-            <a:r>
-              <a:rPr sz="1200" b="1">
-                <a:solidFill>
-                  <a:srgbClr val="2563EB"/>
-                </a:solidFill>
-                <a:latin typeface="Arial"/>
-              </a:rPr>
-              <a:t>架构支撑</a:t>
-            </a:r>
-          </a:p>
-        </p:txBody>
-      </p:sp>
-      <p:sp>
-        <p:nvSpPr>
-          <p:cNvPr id="15" name="TextBox 14"/>
-          <p:cNvSpPr txBox="1"/>
-          <p:nvPr/>
-        </p:nvSpPr>
-        <p:spPr>
-          <a:xfrm>
-            <a:off x="7909560" y="2761488"/>
-            <a:ext cx="3648456" cy="987552"/>
-          </a:xfrm>
-          <a:prstGeom prst="rect">
-            <a:avLst/>
-          </a:prstGeom>
-          <a:noFill/>
-        </p:spPr>
-        <p:txBody>
-          <a:bodyPr wrap="square" tIns="50800" bIns="50800" lIns="101600" rIns="101600" anchor="t">
-            <a:spAutoFit/>
-          </a:bodyPr>
-          <a:lstStyle/>
-          <a:p>
-            <a:pPr>
-              <a:spcAft>
-                <a:spcPts val="600"/>
-              </a:spcAft>
-            </a:pPr>
-            <a:r>
-              <a:rPr sz="1400" b="0">
-                <a:solidFill>
-                  <a:srgbClr val="1E293B"/>
-                </a:solidFill>
-                <a:latin typeface="Arial"/>
-              </a:rPr>
-              <a:t>tool pipeline（工具执行流水线）里，dedicated tools 是一等能力面</a:t>
-            </a:r>
-          </a:p>
-          <a:p>
-            <a:pPr>
-              <a:spcAft>
-                <a:spcPts val="600"/>
-              </a:spcAft>
-            </a:pPr>
-            <a:r>
-              <a:rPr sz="1400" b="0">
-                <a:solidFill>
-                  <a:srgbClr val="1E293B"/>
-                </a:solidFill>
-                <a:latin typeface="Arial"/>
-              </a:rPr>
-              <a:t>Bash 是更自由也更高风险的 fallback</a:t>
-            </a:r>
-          </a:p>
-        </p:txBody>
-      </p:sp>
-      <p:sp>
-        <p:nvSpPr>
-          <p:cNvPr id="16" name="Rounded Rectangle 15"/>
-          <p:cNvSpPr/>
-          <p:nvPr/>
-        </p:nvSpPr>
-        <p:spPr>
-          <a:xfrm>
-            <a:off x="658368" y="4069080"/>
-            <a:ext cx="10972800" cy="512064"/>
-          </a:xfrm>
-          <a:prstGeom prst="roundRect">
-            <a:avLst/>
-          </a:prstGeom>
-          <a:solidFill>
-            <a:srgbClr val="FFFFFF"/>
-          </a:solidFill>
-          <a:ln>
-            <a:solidFill>
-              <a:srgbClr val="2563EB"/>
-            </a:solidFill>
-          </a:ln>
-        </p:spPr>
-        <p:style>
-          <a:lnRef idx="1">
-            <a:schemeClr val="accent1"/>
-          </a:lnRef>
-          <a:fillRef idx="3">
-            <a:schemeClr val="accent1"/>
-          </a:fillRef>
-          <a:effectRef idx="2">
-            <a:schemeClr val="accent1"/>
-          </a:effectRef>
-          <a:fontRef idx="minor">
-            <a:schemeClr val="lt1"/>
-          </a:fontRef>
-        </p:style>
-        <p:txBody>
-          <a:bodyPr rtlCol="0" anchor="ctr"/>
-          <a:lstStyle/>
-          <a:p>
-            <a:pPr algn="ctr"/>
-          </a:p>
-        </p:txBody>
-      </p:sp>
-      <p:sp>
-        <p:nvSpPr>
-          <p:cNvPr id="17" name="Rectangle 16"/>
-          <p:cNvSpPr/>
-          <p:nvPr/>
-        </p:nvSpPr>
-        <p:spPr>
-          <a:xfrm>
-            <a:off x="658368" y="4069080"/>
-            <a:ext cx="10972800" cy="347472"/>
-          </a:xfrm>
-          <a:prstGeom prst="rect">
-            <a:avLst/>
-          </a:prstGeom>
-          <a:solidFill>
-            <a:srgbClr val="DBEAFE"/>
-          </a:solidFill>
-          <a:ln>
-            <a:solidFill>
-              <a:srgbClr val="DBEAFE"/>
-            </a:solidFill>
-          </a:ln>
-        </p:spPr>
-        <p:style>
-          <a:lnRef idx="1">
-            <a:schemeClr val="accent1"/>
-          </a:lnRef>
-          <a:fillRef idx="3">
-            <a:schemeClr val="accent1"/>
-          </a:fillRef>
-          <a:effectRef idx="2">
-            <a:schemeClr val="accent1"/>
-          </a:effectRef>
-          <a:fontRef idx="minor">
-            <a:schemeClr val="lt1"/>
-          </a:fontRef>
-        </p:style>
-        <p:txBody>
-          <a:bodyPr rtlCol="0" anchor="t" wrap="square" tIns="25400" bIns="25400" lIns="76200" rIns="76200"/>
-          <a:lstStyle/>
-          <a:p>
-            <a:pPr algn="ctr"/>
-            <a:r>
-              <a:rPr sz="1200" b="1">
-                <a:solidFill>
-                  <a:srgbClr val="2563EB"/>
-                </a:solidFill>
-                <a:latin typeface="Arial"/>
-              </a:rPr>
-              <a:t>关键代码片段</a:t>
-            </a:r>
-          </a:p>
-        </p:txBody>
-      </p:sp>
-      <p:sp>
-        <p:nvSpPr>
-          <p:cNvPr id="18" name="TextBox 17"/>
-          <p:cNvSpPr txBox="1"/>
-          <p:nvPr/>
-        </p:nvSpPr>
-        <p:spPr>
-          <a:xfrm>
-            <a:off x="731519" y="4471416"/>
-            <a:ext cx="10826496" cy="54864"/>
-          </a:xfrm>
-          <a:prstGeom prst="rect">
-            <a:avLst/>
-          </a:prstGeom>
-          <a:noFill/>
-        </p:spPr>
-        <p:txBody>
-          <a:bodyPr wrap="square" tIns="50800" bIns="50800" lIns="101600" rIns="101600" anchor="t">
-            <a:spAutoFit/>
-          </a:bodyPr>
-          <a:lstStyle/>
-          <a:p/>
-        </p:txBody>
-      </p:sp>
-      <p:sp>
-        <p:nvSpPr>
-          <p:cNvPr id="19" name="Rounded Rectangle 18"/>
-          <p:cNvSpPr/>
-          <p:nvPr/>
-        </p:nvSpPr>
-        <p:spPr>
-          <a:xfrm>
-            <a:off x="658368" y="4407408"/>
-            <a:ext cx="10972800" cy="1097280"/>
+            <a:off x="658368" y="4160520"/>
+            <a:ext cx="10972800" cy="1234440"/>
           </a:xfrm>
           <a:prstGeom prst="roundRect">
             <a:avLst/>
@@ -13843,7 +11546,7 @@
       </p:sp>
       <p:sp>
         <p:nvSpPr>
-          <p:cNvPr id="20" name="TextBox 19"/>
+          <p:cNvPr id="15" name="TextBox 14"/>
           <p:cNvSpPr txBox="1"/>
           <p:nvPr/>
         </p:nvSpPr>

--- a/docs/zh/09-Claude Code 使用技巧与注意事项-WPS兼容版.pptx
+++ b/docs/zh/09-Claude Code 使用技巧与注意事项-WPS兼容版.pptx
@@ -3247,11 +3247,11 @@
             <a:avLst/>
           </a:prstGeom>
           <a:solidFill>
-            <a:srgbClr val="DBEAFE"/>
+            <a:srgbClr val="0F172A"/>
           </a:solidFill>
           <a:ln>
             <a:solidFill>
-              <a:srgbClr val="DBEAFE"/>
+              <a:srgbClr val="22D3EE"/>
             </a:solidFill>
           </a:ln>
         </p:spPr>
@@ -3277,7 +3277,7 @@
             <a:r>
               <a:rPr sz="1100" b="1">
                 <a:solidFill>
-                  <a:srgbClr val="2563EB"/>
+                  <a:srgbClr val="22D3EE"/>
                 </a:solidFill>
                 <a:latin typeface="Arial"/>
               </a:rPr>
@@ -3301,11 +3301,11 @@
             <a:avLst/>
           </a:prstGeom>
           <a:solidFill>
-            <a:srgbClr val="DBEAFE"/>
+            <a:srgbClr val="0F172A"/>
           </a:solidFill>
           <a:ln>
             <a:solidFill>
-              <a:srgbClr val="DBEAFE"/>
+              <a:srgbClr val="22D3EE"/>
             </a:solidFill>
           </a:ln>
         </p:spPr>
@@ -3331,7 +3331,7 @@
             <a:r>
               <a:rPr sz="1100" b="1">
                 <a:solidFill>
-                  <a:srgbClr val="2563EB"/>
+                  <a:srgbClr val="22D3EE"/>
                 </a:solidFill>
                 <a:latin typeface="Arial"/>
               </a:rPr>
@@ -3355,11 +3355,11 @@
             <a:avLst/>
           </a:prstGeom>
           <a:solidFill>
-            <a:srgbClr val="DBEAFE"/>
+            <a:srgbClr val="0F172A"/>
           </a:solidFill>
           <a:ln>
             <a:solidFill>
-              <a:srgbClr val="DBEAFE"/>
+              <a:srgbClr val="22D3EE"/>
             </a:solidFill>
           </a:ln>
         </p:spPr>
@@ -3385,7 +3385,7 @@
             <a:r>
               <a:rPr sz="1100" b="1">
                 <a:solidFill>
-                  <a:srgbClr val="2563EB"/>
+                  <a:srgbClr val="22D3EE"/>
                 </a:solidFill>
                 <a:latin typeface="Arial"/>
               </a:rPr>
@@ -3420,7 +3420,7 @@
             <a:r>
               <a:rPr sz="1100" b="0">
                 <a:solidFill>
-                  <a:srgbClr val="475569"/>
+                  <a:srgbClr val="94A3B8"/>
                 </a:solidFill>
                 <a:latin typeface="Arial"/>
               </a:rPr>
@@ -3443,7 +3443,7 @@
     <p:bg>
       <p:bgPr>
         <a:solidFill>
-          <a:srgbClr val="F8FAFC"/>
+          <a:srgbClr val="020617"/>
         </a:solidFill>
         <a:effectLst/>
       </p:bgPr>
@@ -3480,7 +3480,7 @@
             <a:r>
               <a:rPr sz="2400" b="1">
                 <a:solidFill>
-                  <a:srgbClr val="0F172A"/>
+                  <a:srgbClr val="F1F5F9"/>
                 </a:solidFill>
                 <a:latin typeface="Arial"/>
               </a:rPr>
@@ -3504,7 +3504,7 @@
             <a:avLst/>
           </a:prstGeom>
           <a:solidFill>
-            <a:srgbClr val="CBD5E1"/>
+            <a:srgbClr val="22D3EE"/>
           </a:solidFill>
           <a:ln>
             <a:noFill/>
@@ -3547,11 +3547,11 @@
             <a:avLst/>
           </a:prstGeom>
           <a:solidFill>
-            <a:srgbClr val="DBEAFE"/>
+            <a:srgbClr val="0F172A"/>
           </a:solidFill>
           <a:ln>
             <a:solidFill>
-              <a:srgbClr val="2563EB"/>
+              <a:srgbClr val="22D3EE"/>
             </a:solidFill>
           </a:ln>
         </p:spPr>
@@ -3581,7 +3581,7 @@
             <a:r>
               <a:rPr sz="1600" b="0">
                 <a:solidFill>
-                  <a:srgbClr val="1E293B"/>
+                  <a:srgbClr val="E2E8F0"/>
                 </a:solidFill>
                 <a:latin typeface="Arial"/>
               </a:rPr>
@@ -3605,11 +3605,11 @@
             <a:avLst/>
           </a:prstGeom>
           <a:solidFill>
-            <a:srgbClr val="FFFFFF"/>
+            <a:srgbClr val="0A1224"/>
           </a:solidFill>
           <a:ln>
             <a:solidFill>
-              <a:srgbClr val="2563EB"/>
+              <a:srgbClr val="22D3EE"/>
             </a:solidFill>
           </a:ln>
         </p:spPr>
@@ -3650,11 +3650,11 @@
             <a:avLst/>
           </a:prstGeom>
           <a:solidFill>
-            <a:srgbClr val="DBEAFE"/>
+            <a:srgbClr val="0F172A"/>
           </a:solidFill>
           <a:ln>
             <a:solidFill>
-              <a:srgbClr val="DBEAFE"/>
+              <a:srgbClr val="0F172A"/>
             </a:solidFill>
           </a:ln>
         </p:spPr>
@@ -3680,7 +3680,7 @@
             <a:r>
               <a:rPr sz="1200" b="1">
                 <a:solidFill>
-                  <a:srgbClr val="2563EB"/>
+                  <a:srgbClr val="22D3EE"/>
                 </a:solidFill>
                 <a:latin typeface="Arial"/>
               </a:rPr>
@@ -3719,7 +3719,7 @@
             <a:r>
               <a:rPr sz="1400" b="0">
                 <a:solidFill>
-                  <a:srgbClr val="1E293B"/>
+                  <a:srgbClr val="E2E8F0"/>
                 </a:solidFill>
                 <a:latin typeface="Arial"/>
               </a:rPr>
@@ -3735,7 +3735,7 @@
             <a:r>
               <a:rPr sz="1400" b="0">
                 <a:solidFill>
-                  <a:srgbClr val="1E293B"/>
+                  <a:srgbClr val="E2E8F0"/>
                 </a:solidFill>
                 <a:latin typeface="Arial"/>
               </a:rPr>
@@ -3759,11 +3759,11 @@
             <a:avLst/>
           </a:prstGeom>
           <a:solidFill>
-            <a:srgbClr val="FFFFFF"/>
+            <a:srgbClr val="0A1224"/>
           </a:solidFill>
           <a:ln>
             <a:solidFill>
-              <a:srgbClr val="2563EB"/>
+              <a:srgbClr val="22D3EE"/>
             </a:solidFill>
           </a:ln>
         </p:spPr>
@@ -3804,11 +3804,11 @@
             <a:avLst/>
           </a:prstGeom>
           <a:solidFill>
-            <a:srgbClr val="DBEAFE"/>
+            <a:srgbClr val="0F172A"/>
           </a:solidFill>
           <a:ln>
             <a:solidFill>
-              <a:srgbClr val="DBEAFE"/>
+              <a:srgbClr val="0F172A"/>
             </a:solidFill>
           </a:ln>
         </p:spPr>
@@ -3834,7 +3834,7 @@
             <a:r>
               <a:rPr sz="1200" b="1">
                 <a:solidFill>
-                  <a:srgbClr val="2563EB"/>
+                  <a:srgbClr val="22D3EE"/>
                 </a:solidFill>
                 <a:latin typeface="Arial"/>
               </a:rPr>
@@ -3873,7 +3873,7 @@
             <a:r>
               <a:rPr sz="1400" b="0">
                 <a:solidFill>
-                  <a:srgbClr val="1E293B"/>
+                  <a:srgbClr val="E2E8F0"/>
                 </a:solidFill>
                 <a:latin typeface="Arial"/>
               </a:rPr>
@@ -3889,7 +3889,7 @@
             <a:r>
               <a:rPr sz="1400" b="0">
                 <a:solidFill>
-                  <a:srgbClr val="1E293B"/>
+                  <a:srgbClr val="E2E8F0"/>
                 </a:solidFill>
                 <a:latin typeface="Arial"/>
               </a:rPr>
@@ -3913,11 +3913,11 @@
             <a:avLst/>
           </a:prstGeom>
           <a:solidFill>
-            <a:srgbClr val="FFFFFF"/>
+            <a:srgbClr val="0A1224"/>
           </a:solidFill>
           <a:ln>
             <a:solidFill>
-              <a:srgbClr val="2563EB"/>
+              <a:srgbClr val="22D3EE"/>
             </a:solidFill>
           </a:ln>
         </p:spPr>
@@ -3958,11 +3958,11 @@
             <a:avLst/>
           </a:prstGeom>
           <a:solidFill>
-            <a:srgbClr val="DBEAFE"/>
+            <a:srgbClr val="0F172A"/>
           </a:solidFill>
           <a:ln>
             <a:solidFill>
-              <a:srgbClr val="DBEAFE"/>
+              <a:srgbClr val="0F172A"/>
             </a:solidFill>
           </a:ln>
         </p:spPr>
@@ -3988,7 +3988,7 @@
             <a:r>
               <a:rPr sz="1200" b="1">
                 <a:solidFill>
-                  <a:srgbClr val="2563EB"/>
+                  <a:srgbClr val="22D3EE"/>
                 </a:solidFill>
                 <a:latin typeface="Arial"/>
               </a:rPr>
@@ -4027,7 +4027,7 @@
             <a:r>
               <a:rPr sz="1400" b="0">
                 <a:solidFill>
-                  <a:srgbClr val="1E293B"/>
+                  <a:srgbClr val="E2E8F0"/>
                 </a:solidFill>
                 <a:latin typeface="Arial"/>
               </a:rPr>
@@ -4043,7 +4043,7 @@
             <a:r>
               <a:rPr sz="1400" b="0">
                 <a:solidFill>
-                  <a:srgbClr val="1E293B"/>
+                  <a:srgbClr val="E2E8F0"/>
                 </a:solidFill>
                 <a:latin typeface="Arial"/>
               </a:rPr>
@@ -4067,11 +4067,11 @@
             <a:avLst/>
           </a:prstGeom>
           <a:solidFill>
-            <a:srgbClr val="F1F5F9"/>
+            <a:srgbClr val="030712"/>
           </a:solidFill>
           <a:ln>
             <a:solidFill>
-              <a:srgbClr val="CBD5E1"/>
+              <a:srgbClr val="22D3EE"/>
             </a:solidFill>
           </a:ln>
         </p:spPr>
@@ -4090,14 +4090,14 @@
           </a:fontRef>
         </p:style>
         <p:txBody>
-          <a:bodyPr rtlCol="0" anchor="t" wrap="square" tIns="76200" bIns="76200" lIns="101600" rIns="101600"/>
+          <a:bodyPr rtlCol="0" anchor="t" wrap="square" tIns="203200" bIns="76200" lIns="127000" rIns="127000"/>
           <a:lstStyle/>
           <a:p>
             <a:pPr algn="ctr"/>
             <a:r>
-              <a:rPr sz="1300" b="0">
-                <a:solidFill>
-                  <a:srgbClr val="1E293B"/>
+              <a:rPr sz="1250" b="0">
+                <a:solidFill>
+                  <a:srgbClr val="C4FFEC"/>
                 </a:solidFill>
                 <a:latin typeface="Courier New"/>
               </a:rPr>
@@ -4109,7 +4109,61 @@
       </p:sp>
       <p:sp>
         <p:nvSpPr>
-          <p:cNvPr id="15" name="TextBox 14"/>
+          <p:cNvPr id="15" name="Rectangle 14"/>
+          <p:cNvSpPr/>
+          <p:nvPr/>
+        </p:nvSpPr>
+        <p:spPr>
+          <a:xfrm>
+            <a:off x="658368" y="4160520"/>
+            <a:ext cx="10972800" cy="256032"/>
+          </a:xfrm>
+          <a:prstGeom prst="rect">
+            <a:avLst/>
+          </a:prstGeom>
+          <a:solidFill>
+            <a:srgbClr val="0D1426"/>
+          </a:solidFill>
+          <a:ln>
+            <a:solidFill>
+              <a:srgbClr val="0D1426"/>
+            </a:solidFill>
+          </a:ln>
+        </p:spPr>
+        <p:style>
+          <a:lnRef idx="1">
+            <a:schemeClr val="accent1"/>
+          </a:lnRef>
+          <a:fillRef idx="3">
+            <a:schemeClr val="accent1"/>
+          </a:fillRef>
+          <a:effectRef idx="2">
+            <a:schemeClr val="accent1"/>
+          </a:effectRef>
+          <a:fontRef idx="minor">
+            <a:schemeClr val="lt1"/>
+          </a:fontRef>
+        </p:style>
+        <p:txBody>
+          <a:bodyPr rtlCol="0" anchor="t" wrap="square" tIns="12700" bIns="12700" lIns="76200" rIns="76200"/>
+          <a:lstStyle/>
+          <a:p>
+            <a:pPr algn="ctr"/>
+            <a:r>
+              <a:rPr sz="1000" b="1">
+                <a:solidFill>
+                  <a:srgbClr val="22D3EE"/>
+                </a:solidFill>
+                <a:latin typeface="Courier New"/>
+              </a:rPr>
+              <a:t>code</a:t>
+            </a:r>
+          </a:p>
+        </p:txBody>
+      </p:sp>
+      <p:sp>
+        <p:nvSpPr>
+          <p:cNvPr id="16" name="TextBox 15"/>
           <p:cNvSpPr txBox="1"/>
           <p:nvPr/>
         </p:nvSpPr>
@@ -4133,7 +4187,7 @@
             <a:r>
               <a:rPr sz="1100" b="0">
                 <a:solidFill>
-                  <a:srgbClr val="475569"/>
+                  <a:srgbClr val="94A3B8"/>
                 </a:solidFill>
                 <a:latin typeface="Arial"/>
               </a:rPr>
@@ -4156,7 +4210,7 @@
     <p:bg>
       <p:bgPr>
         <a:solidFill>
-          <a:srgbClr val="F8FAFC"/>
+          <a:srgbClr val="020617"/>
         </a:solidFill>
         <a:effectLst/>
       </p:bgPr>
@@ -4193,7 +4247,7 @@
             <a:r>
               <a:rPr sz="2400" b="1">
                 <a:solidFill>
-                  <a:srgbClr val="0F172A"/>
+                  <a:srgbClr val="F1F5F9"/>
                 </a:solidFill>
                 <a:latin typeface="Arial"/>
               </a:rPr>
@@ -4217,7 +4271,7 @@
             <a:avLst/>
           </a:prstGeom>
           <a:solidFill>
-            <a:srgbClr val="CBD5E1"/>
+            <a:srgbClr val="22D3EE"/>
           </a:solidFill>
           <a:ln>
             <a:noFill/>
@@ -4260,11 +4314,11 @@
             <a:avLst/>
           </a:prstGeom>
           <a:solidFill>
-            <a:srgbClr val="DBEAFE"/>
+            <a:srgbClr val="0F172A"/>
           </a:solidFill>
           <a:ln>
             <a:solidFill>
-              <a:srgbClr val="2563EB"/>
+              <a:srgbClr val="22D3EE"/>
             </a:solidFill>
           </a:ln>
         </p:spPr>
@@ -4294,7 +4348,7 @@
             <a:r>
               <a:rPr sz="1600" b="0">
                 <a:solidFill>
-                  <a:srgbClr val="1E293B"/>
+                  <a:srgbClr val="E2E8F0"/>
                 </a:solidFill>
                 <a:latin typeface="Arial"/>
               </a:rPr>
@@ -4318,11 +4372,11 @@
             <a:avLst/>
           </a:prstGeom>
           <a:solidFill>
-            <a:srgbClr val="FFFFFF"/>
+            <a:srgbClr val="0A1224"/>
           </a:solidFill>
           <a:ln>
             <a:solidFill>
-              <a:srgbClr val="2563EB"/>
+              <a:srgbClr val="22D3EE"/>
             </a:solidFill>
           </a:ln>
         </p:spPr>
@@ -4363,11 +4417,11 @@
             <a:avLst/>
           </a:prstGeom>
           <a:solidFill>
-            <a:srgbClr val="DBEAFE"/>
+            <a:srgbClr val="0F172A"/>
           </a:solidFill>
           <a:ln>
             <a:solidFill>
-              <a:srgbClr val="DBEAFE"/>
+              <a:srgbClr val="0F172A"/>
             </a:solidFill>
           </a:ln>
         </p:spPr>
@@ -4393,7 +4447,7 @@
             <a:r>
               <a:rPr sz="1200" b="1">
                 <a:solidFill>
-                  <a:srgbClr val="2563EB"/>
+                  <a:srgbClr val="22D3EE"/>
                 </a:solidFill>
                 <a:latin typeface="Arial"/>
               </a:rPr>
@@ -4432,7 +4486,7 @@
             <a:r>
               <a:rPr sz="1400" b="0">
                 <a:solidFill>
-                  <a:srgbClr val="1E293B"/>
+                  <a:srgbClr val="E2E8F0"/>
                 </a:solidFill>
                 <a:latin typeface="Arial"/>
               </a:rPr>
@@ -4448,7 +4502,7 @@
             <a:r>
               <a:rPr sz="1400" b="0">
                 <a:solidFill>
-                  <a:srgbClr val="1E293B"/>
+                  <a:srgbClr val="E2E8F0"/>
                 </a:solidFill>
                 <a:latin typeface="Arial"/>
               </a:rPr>
@@ -4472,11 +4526,11 @@
             <a:avLst/>
           </a:prstGeom>
           <a:solidFill>
-            <a:srgbClr val="FFFFFF"/>
+            <a:srgbClr val="0A1224"/>
           </a:solidFill>
           <a:ln>
             <a:solidFill>
-              <a:srgbClr val="2563EB"/>
+              <a:srgbClr val="22D3EE"/>
             </a:solidFill>
           </a:ln>
         </p:spPr>
@@ -4517,11 +4571,11 @@
             <a:avLst/>
           </a:prstGeom>
           <a:solidFill>
-            <a:srgbClr val="DBEAFE"/>
+            <a:srgbClr val="0F172A"/>
           </a:solidFill>
           <a:ln>
             <a:solidFill>
-              <a:srgbClr val="DBEAFE"/>
+              <a:srgbClr val="0F172A"/>
             </a:solidFill>
           </a:ln>
         </p:spPr>
@@ -4547,7 +4601,7 @@
             <a:r>
               <a:rPr sz="1200" b="1">
                 <a:solidFill>
-                  <a:srgbClr val="2563EB"/>
+                  <a:srgbClr val="22D3EE"/>
                 </a:solidFill>
                 <a:latin typeface="Arial"/>
               </a:rPr>
@@ -4586,7 +4640,7 @@
             <a:r>
               <a:rPr sz="1400" b="0">
                 <a:solidFill>
-                  <a:srgbClr val="1E293B"/>
+                  <a:srgbClr val="E2E8F0"/>
                 </a:solidFill>
                 <a:latin typeface="Arial"/>
               </a:rPr>
@@ -4602,7 +4656,7 @@
             <a:r>
               <a:rPr sz="1400" b="0">
                 <a:solidFill>
-                  <a:srgbClr val="1E293B"/>
+                  <a:srgbClr val="E2E8F0"/>
                 </a:solidFill>
                 <a:latin typeface="Arial"/>
               </a:rPr>
@@ -4626,11 +4680,11 @@
             <a:avLst/>
           </a:prstGeom>
           <a:solidFill>
-            <a:srgbClr val="FFFFFF"/>
+            <a:srgbClr val="0A1224"/>
           </a:solidFill>
           <a:ln>
             <a:solidFill>
-              <a:srgbClr val="2563EB"/>
+              <a:srgbClr val="22D3EE"/>
             </a:solidFill>
           </a:ln>
         </p:spPr>
@@ -4671,11 +4725,11 @@
             <a:avLst/>
           </a:prstGeom>
           <a:solidFill>
-            <a:srgbClr val="DBEAFE"/>
+            <a:srgbClr val="0F172A"/>
           </a:solidFill>
           <a:ln>
             <a:solidFill>
-              <a:srgbClr val="DBEAFE"/>
+              <a:srgbClr val="0F172A"/>
             </a:solidFill>
           </a:ln>
         </p:spPr>
@@ -4701,7 +4755,7 @@
             <a:r>
               <a:rPr sz="1200" b="1">
                 <a:solidFill>
-                  <a:srgbClr val="2563EB"/>
+                  <a:srgbClr val="22D3EE"/>
                 </a:solidFill>
                 <a:latin typeface="Arial"/>
               </a:rPr>
@@ -4740,7 +4794,7 @@
             <a:r>
               <a:rPr sz="1400" b="0">
                 <a:solidFill>
-                  <a:srgbClr val="1E293B"/>
+                  <a:srgbClr val="E2E8F0"/>
                 </a:solidFill>
                 <a:latin typeface="Arial"/>
               </a:rPr>
@@ -4756,7 +4810,7 @@
             <a:r>
               <a:rPr sz="1400" b="0">
                 <a:solidFill>
-                  <a:srgbClr val="1E293B"/>
+                  <a:srgbClr val="E2E8F0"/>
                 </a:solidFill>
                 <a:latin typeface="Arial"/>
               </a:rPr>
@@ -4780,11 +4834,11 @@
             <a:avLst/>
           </a:prstGeom>
           <a:solidFill>
-            <a:srgbClr val="F1F5F9"/>
+            <a:srgbClr val="030712"/>
           </a:solidFill>
           <a:ln>
             <a:solidFill>
-              <a:srgbClr val="CBD5E1"/>
+              <a:srgbClr val="22D3EE"/>
             </a:solidFill>
           </a:ln>
         </p:spPr>
@@ -4803,14 +4857,14 @@
           </a:fontRef>
         </p:style>
         <p:txBody>
-          <a:bodyPr rtlCol="0" anchor="t" wrap="square" tIns="76200" bIns="76200" lIns="101600" rIns="101600"/>
+          <a:bodyPr rtlCol="0" anchor="t" wrap="square" tIns="203200" bIns="76200" lIns="127000" rIns="127000"/>
           <a:lstStyle/>
           <a:p>
             <a:pPr algn="ctr"/>
             <a:r>
-              <a:rPr sz="1300" b="0">
-                <a:solidFill>
-                  <a:srgbClr val="1E293B"/>
+              <a:rPr sz="1250" b="0">
+                <a:solidFill>
+                  <a:srgbClr val="C4FFEC"/>
                 </a:solidFill>
                 <a:latin typeface="Courier New"/>
               </a:rPr>
@@ -4823,7 +4877,61 @@
       </p:sp>
       <p:sp>
         <p:nvSpPr>
-          <p:cNvPr id="15" name="TextBox 14"/>
+          <p:cNvPr id="15" name="Rectangle 14"/>
+          <p:cNvSpPr/>
+          <p:nvPr/>
+        </p:nvSpPr>
+        <p:spPr>
+          <a:xfrm>
+            <a:off x="658368" y="4160520"/>
+            <a:ext cx="10972800" cy="256032"/>
+          </a:xfrm>
+          <a:prstGeom prst="rect">
+            <a:avLst/>
+          </a:prstGeom>
+          <a:solidFill>
+            <a:srgbClr val="0D1426"/>
+          </a:solidFill>
+          <a:ln>
+            <a:solidFill>
+              <a:srgbClr val="0D1426"/>
+            </a:solidFill>
+          </a:ln>
+        </p:spPr>
+        <p:style>
+          <a:lnRef idx="1">
+            <a:schemeClr val="accent1"/>
+          </a:lnRef>
+          <a:fillRef idx="3">
+            <a:schemeClr val="accent1"/>
+          </a:fillRef>
+          <a:effectRef idx="2">
+            <a:schemeClr val="accent1"/>
+          </a:effectRef>
+          <a:fontRef idx="minor">
+            <a:schemeClr val="lt1"/>
+          </a:fontRef>
+        </p:style>
+        <p:txBody>
+          <a:bodyPr rtlCol="0" anchor="t" wrap="square" tIns="12700" bIns="12700" lIns="76200" rIns="76200"/>
+          <a:lstStyle/>
+          <a:p>
+            <a:pPr algn="ctr"/>
+            <a:r>
+              <a:rPr sz="1000" b="1">
+                <a:solidFill>
+                  <a:srgbClr val="22D3EE"/>
+                </a:solidFill>
+                <a:latin typeface="Courier New"/>
+              </a:rPr>
+              <a:t>code</a:t>
+            </a:r>
+          </a:p>
+        </p:txBody>
+      </p:sp>
+      <p:sp>
+        <p:nvSpPr>
+          <p:cNvPr id="16" name="TextBox 15"/>
           <p:cNvSpPr txBox="1"/>
           <p:nvPr/>
         </p:nvSpPr>
@@ -4847,7 +4955,7 @@
             <a:r>
               <a:rPr sz="1100" b="0">
                 <a:solidFill>
-                  <a:srgbClr val="475569"/>
+                  <a:srgbClr val="94A3B8"/>
                 </a:solidFill>
                 <a:latin typeface="Arial"/>
               </a:rPr>
@@ -4870,7 +4978,7 @@
     <p:bg>
       <p:bgPr>
         <a:solidFill>
-          <a:srgbClr val="F8FAFC"/>
+          <a:srgbClr val="020617"/>
         </a:solidFill>
         <a:effectLst/>
       </p:bgPr>
@@ -4907,7 +5015,7 @@
             <a:r>
               <a:rPr sz="2400" b="1">
                 <a:solidFill>
-                  <a:srgbClr val="0F172A"/>
+                  <a:srgbClr val="F1F5F9"/>
                 </a:solidFill>
                 <a:latin typeface="Arial"/>
               </a:rPr>
@@ -4931,7 +5039,7 @@
             <a:avLst/>
           </a:prstGeom>
           <a:solidFill>
-            <a:srgbClr val="CBD5E1"/>
+            <a:srgbClr val="22D3EE"/>
           </a:solidFill>
           <a:ln>
             <a:noFill/>
@@ -4974,11 +5082,11 @@
             <a:avLst/>
           </a:prstGeom>
           <a:solidFill>
-            <a:srgbClr val="DBEAFE"/>
+            <a:srgbClr val="0F172A"/>
           </a:solidFill>
           <a:ln>
             <a:solidFill>
-              <a:srgbClr val="2563EB"/>
+              <a:srgbClr val="22D3EE"/>
             </a:solidFill>
           </a:ln>
         </p:spPr>
@@ -5008,7 +5116,7 @@
             <a:r>
               <a:rPr sz="1600" b="0">
                 <a:solidFill>
-                  <a:srgbClr val="1E293B"/>
+                  <a:srgbClr val="E2E8F0"/>
                 </a:solidFill>
                 <a:latin typeface="Arial"/>
               </a:rPr>
@@ -5047,7 +5155,7 @@
             <a:r>
               <a:rPr sz="1700" b="0">
                 <a:solidFill>
-                  <a:srgbClr val="1E293B"/>
+                  <a:srgbClr val="E2E8F0"/>
                 </a:solidFill>
                 <a:latin typeface="Arial"/>
               </a:rPr>
@@ -5063,7 +5171,7 @@
             <a:r>
               <a:rPr sz="1700" b="0">
                 <a:solidFill>
-                  <a:srgbClr val="1E293B"/>
+                  <a:srgbClr val="E2E8F0"/>
                 </a:solidFill>
                 <a:latin typeface="Arial"/>
               </a:rPr>
@@ -5079,7 +5187,7 @@
             <a:r>
               <a:rPr sz="1700" b="0">
                 <a:solidFill>
-                  <a:srgbClr val="1E293B"/>
+                  <a:srgbClr val="E2E8F0"/>
                 </a:solidFill>
                 <a:latin typeface="Arial"/>
               </a:rPr>
@@ -5103,11 +5211,11 @@
             <a:avLst/>
           </a:prstGeom>
           <a:solidFill>
-            <a:srgbClr val="F1F5F9"/>
+            <a:srgbClr val="030712"/>
           </a:solidFill>
           <a:ln>
             <a:solidFill>
-              <a:srgbClr val="CBD5E1"/>
+              <a:srgbClr val="22D3EE"/>
             </a:solidFill>
           </a:ln>
         </p:spPr>
@@ -5126,14 +5234,14 @@
           </a:fontRef>
         </p:style>
         <p:txBody>
-          <a:bodyPr rtlCol="0" anchor="t" wrap="square" tIns="76200" bIns="76200" lIns="101600" rIns="101600"/>
+          <a:bodyPr rtlCol="0" anchor="t" wrap="square" tIns="203200" bIns="76200" lIns="127000" rIns="127000"/>
           <a:lstStyle/>
           <a:p>
             <a:pPr algn="ctr"/>
             <a:r>
-              <a:rPr sz="1300" b="0">
-                <a:solidFill>
-                  <a:srgbClr val="1E293B"/>
+              <a:rPr sz="1250" b="0">
+                <a:solidFill>
+                  <a:srgbClr val="C4FFEC"/>
                 </a:solidFill>
                 <a:latin typeface="Courier New"/>
               </a:rPr>
@@ -5147,7 +5255,61 @@
       </p:sp>
       <p:sp>
         <p:nvSpPr>
-          <p:cNvPr id="7" name="TextBox 6"/>
+          <p:cNvPr id="7" name="Rectangle 6"/>
+          <p:cNvSpPr/>
+          <p:nvPr/>
+        </p:nvSpPr>
+        <p:spPr>
+          <a:xfrm>
+            <a:off x="6537960" y="2468880"/>
+            <a:ext cx="4800600" cy="256032"/>
+          </a:xfrm>
+          <a:prstGeom prst="rect">
+            <a:avLst/>
+          </a:prstGeom>
+          <a:solidFill>
+            <a:srgbClr val="0D1426"/>
+          </a:solidFill>
+          <a:ln>
+            <a:solidFill>
+              <a:srgbClr val="0D1426"/>
+            </a:solidFill>
+          </a:ln>
+        </p:spPr>
+        <p:style>
+          <a:lnRef idx="1">
+            <a:schemeClr val="accent1"/>
+          </a:lnRef>
+          <a:fillRef idx="3">
+            <a:schemeClr val="accent1"/>
+          </a:fillRef>
+          <a:effectRef idx="2">
+            <a:schemeClr val="accent1"/>
+          </a:effectRef>
+          <a:fontRef idx="minor">
+            <a:schemeClr val="lt1"/>
+          </a:fontRef>
+        </p:style>
+        <p:txBody>
+          <a:bodyPr rtlCol="0" anchor="t" wrap="square" tIns="12700" bIns="12700" lIns="76200" rIns="76200"/>
+          <a:lstStyle/>
+          <a:p>
+            <a:pPr algn="ctr"/>
+            <a:r>
+              <a:rPr sz="1000" b="1">
+                <a:solidFill>
+                  <a:srgbClr val="22D3EE"/>
+                </a:solidFill>
+                <a:latin typeface="Courier New"/>
+              </a:rPr>
+              <a:t>code</a:t>
+            </a:r>
+          </a:p>
+        </p:txBody>
+      </p:sp>
+      <p:sp>
+        <p:nvSpPr>
+          <p:cNvPr id="8" name="TextBox 7"/>
           <p:cNvSpPr txBox="1"/>
           <p:nvPr/>
         </p:nvSpPr>
@@ -5171,7 +5333,7 @@
             <a:r>
               <a:rPr sz="1100" b="0">
                 <a:solidFill>
-                  <a:srgbClr val="475569"/>
+                  <a:srgbClr val="94A3B8"/>
                 </a:solidFill>
                 <a:latin typeface="Arial"/>
               </a:rPr>
@@ -5194,7 +5356,7 @@
     <p:bg>
       <p:bgPr>
         <a:solidFill>
-          <a:srgbClr val="F8FAFC"/>
+          <a:srgbClr val="020617"/>
         </a:solidFill>
         <a:effectLst/>
       </p:bgPr>
@@ -5231,7 +5393,7 @@
             <a:r>
               <a:rPr sz="2400" b="1">
                 <a:solidFill>
-                  <a:srgbClr val="0F172A"/>
+                  <a:srgbClr val="F1F5F9"/>
                 </a:solidFill>
                 <a:latin typeface="Arial"/>
               </a:rPr>
@@ -5255,7 +5417,7 @@
             <a:avLst/>
           </a:prstGeom>
           <a:solidFill>
-            <a:srgbClr val="CBD5E1"/>
+            <a:srgbClr val="22D3EE"/>
           </a:solidFill>
           <a:ln>
             <a:noFill/>
@@ -5298,11 +5460,11 @@
             <a:avLst/>
           </a:prstGeom>
           <a:solidFill>
-            <a:srgbClr val="DBEAFE"/>
+            <a:srgbClr val="0F172A"/>
           </a:solidFill>
           <a:ln>
             <a:solidFill>
-              <a:srgbClr val="2563EB"/>
+              <a:srgbClr val="22D3EE"/>
             </a:solidFill>
           </a:ln>
         </p:spPr>
@@ -5332,7 +5494,7 @@
             <a:r>
               <a:rPr sz="1600" b="0">
                 <a:solidFill>
-                  <a:srgbClr val="1E293B"/>
+                  <a:srgbClr val="E2E8F0"/>
                 </a:solidFill>
                 <a:latin typeface="Arial"/>
               </a:rPr>
@@ -5371,7 +5533,7 @@
             <a:r>
               <a:rPr sz="1700" b="0">
                 <a:solidFill>
-                  <a:srgbClr val="1E293B"/>
+                  <a:srgbClr val="E2E8F0"/>
                 </a:solidFill>
                 <a:latin typeface="Arial"/>
               </a:rPr>
@@ -5387,7 +5549,7 @@
             <a:r>
               <a:rPr sz="1700" b="0">
                 <a:solidFill>
-                  <a:srgbClr val="1E293B"/>
+                  <a:srgbClr val="E2E8F0"/>
                 </a:solidFill>
                 <a:latin typeface="Arial"/>
               </a:rPr>
@@ -5403,7 +5565,7 @@
             <a:r>
               <a:rPr sz="1700" b="0">
                 <a:solidFill>
-                  <a:srgbClr val="1E293B"/>
+                  <a:srgbClr val="E2E8F0"/>
                 </a:solidFill>
                 <a:latin typeface="Arial"/>
               </a:rPr>
@@ -5419,7 +5581,7 @@
             <a:r>
               <a:rPr sz="1700" b="0">
                 <a:solidFill>
-                  <a:srgbClr val="1E293B"/>
+                  <a:srgbClr val="E2E8F0"/>
                 </a:solidFill>
                 <a:latin typeface="Arial"/>
               </a:rPr>
@@ -5443,11 +5605,11 @@
             <a:avLst/>
           </a:prstGeom>
           <a:solidFill>
-            <a:srgbClr val="F1F5F9"/>
+            <a:srgbClr val="030712"/>
           </a:solidFill>
           <a:ln>
             <a:solidFill>
-              <a:srgbClr val="CBD5E1"/>
+              <a:srgbClr val="22D3EE"/>
             </a:solidFill>
           </a:ln>
         </p:spPr>
@@ -5466,14 +5628,14 @@
           </a:fontRef>
         </p:style>
         <p:txBody>
-          <a:bodyPr rtlCol="0" anchor="t" wrap="square" tIns="76200" bIns="76200" lIns="101600" rIns="101600"/>
+          <a:bodyPr rtlCol="0" anchor="t" wrap="square" tIns="203200" bIns="76200" lIns="127000" rIns="127000"/>
           <a:lstStyle/>
           <a:p>
             <a:pPr algn="ctr"/>
             <a:r>
-              <a:rPr sz="1300" b="0">
-                <a:solidFill>
-                  <a:srgbClr val="1E293B"/>
+              <a:rPr sz="1250" b="0">
+                <a:solidFill>
+                  <a:srgbClr val="C4FFEC"/>
                 </a:solidFill>
                 <a:latin typeface="Courier New"/>
               </a:rPr>
@@ -5486,7 +5648,61 @@
       </p:sp>
       <p:sp>
         <p:nvSpPr>
-          <p:cNvPr id="7" name="TextBox 6"/>
+          <p:cNvPr id="7" name="Rectangle 6"/>
+          <p:cNvSpPr/>
+          <p:nvPr/>
+        </p:nvSpPr>
+        <p:spPr>
+          <a:xfrm>
+            <a:off x="6537960" y="2468880"/>
+            <a:ext cx="4800600" cy="256032"/>
+          </a:xfrm>
+          <a:prstGeom prst="rect">
+            <a:avLst/>
+          </a:prstGeom>
+          <a:solidFill>
+            <a:srgbClr val="0D1426"/>
+          </a:solidFill>
+          <a:ln>
+            <a:solidFill>
+              <a:srgbClr val="0D1426"/>
+            </a:solidFill>
+          </a:ln>
+        </p:spPr>
+        <p:style>
+          <a:lnRef idx="1">
+            <a:schemeClr val="accent1"/>
+          </a:lnRef>
+          <a:fillRef idx="3">
+            <a:schemeClr val="accent1"/>
+          </a:fillRef>
+          <a:effectRef idx="2">
+            <a:schemeClr val="accent1"/>
+          </a:effectRef>
+          <a:fontRef idx="minor">
+            <a:schemeClr val="lt1"/>
+          </a:fontRef>
+        </p:style>
+        <p:txBody>
+          <a:bodyPr rtlCol="0" anchor="t" wrap="square" tIns="12700" bIns="12700" lIns="76200" rIns="76200"/>
+          <a:lstStyle/>
+          <a:p>
+            <a:pPr algn="ctr"/>
+            <a:r>
+              <a:rPr sz="1000" b="1">
+                <a:solidFill>
+                  <a:srgbClr val="22D3EE"/>
+                </a:solidFill>
+                <a:latin typeface="Courier New"/>
+              </a:rPr>
+              <a:t>code</a:t>
+            </a:r>
+          </a:p>
+        </p:txBody>
+      </p:sp>
+      <p:sp>
+        <p:nvSpPr>
+          <p:cNvPr id="8" name="TextBox 7"/>
           <p:cNvSpPr txBox="1"/>
           <p:nvPr/>
         </p:nvSpPr>
@@ -5510,7 +5726,7 @@
             <a:r>
               <a:rPr sz="1100" b="0">
                 <a:solidFill>
-                  <a:srgbClr val="475569"/>
+                  <a:srgbClr val="94A3B8"/>
                 </a:solidFill>
                 <a:latin typeface="Arial"/>
               </a:rPr>
@@ -5533,7 +5749,7 @@
     <p:bg>
       <p:bgPr>
         <a:solidFill>
-          <a:srgbClr val="F8FAFC"/>
+          <a:srgbClr val="020617"/>
         </a:solidFill>
         <a:effectLst/>
       </p:bgPr>
@@ -5570,7 +5786,7 @@
             <a:r>
               <a:rPr sz="2400" b="1">
                 <a:solidFill>
-                  <a:srgbClr val="0F172A"/>
+                  <a:srgbClr val="F1F5F9"/>
                 </a:solidFill>
                 <a:latin typeface="Arial"/>
               </a:rPr>
@@ -5594,7 +5810,7 @@
             <a:avLst/>
           </a:prstGeom>
           <a:solidFill>
-            <a:srgbClr val="CBD5E1"/>
+            <a:srgbClr val="22D3EE"/>
           </a:solidFill>
           <a:ln>
             <a:noFill/>
@@ -5637,11 +5853,11 @@
             <a:avLst/>
           </a:prstGeom>
           <a:solidFill>
-            <a:srgbClr val="DBEAFE"/>
+            <a:srgbClr val="0F172A"/>
           </a:solidFill>
           <a:ln>
             <a:solidFill>
-              <a:srgbClr val="2563EB"/>
+              <a:srgbClr val="22D3EE"/>
             </a:solidFill>
           </a:ln>
         </p:spPr>
@@ -5671,7 +5887,7 @@
             <a:r>
               <a:rPr sz="1600" b="0">
                 <a:solidFill>
-                  <a:srgbClr val="1E293B"/>
+                  <a:srgbClr val="E2E8F0"/>
                 </a:solidFill>
                 <a:latin typeface="Arial"/>
               </a:rPr>
@@ -5710,7 +5926,7 @@
             <a:r>
               <a:rPr sz="1700" b="0">
                 <a:solidFill>
-                  <a:srgbClr val="1E293B"/>
+                  <a:srgbClr val="E2E8F0"/>
                 </a:solidFill>
                 <a:latin typeface="Arial"/>
               </a:rPr>
@@ -5726,7 +5942,7 @@
             <a:r>
               <a:rPr sz="1700" b="0">
                 <a:solidFill>
-                  <a:srgbClr val="1E293B"/>
+                  <a:srgbClr val="E2E8F0"/>
                 </a:solidFill>
                 <a:latin typeface="Arial"/>
               </a:rPr>
@@ -5742,7 +5958,7 @@
             <a:r>
               <a:rPr sz="1700" b="0">
                 <a:solidFill>
-                  <a:srgbClr val="1E293B"/>
+                  <a:srgbClr val="E2E8F0"/>
                 </a:solidFill>
                 <a:latin typeface="Arial"/>
               </a:rPr>
@@ -5758,7 +5974,7 @@
             <a:r>
               <a:rPr sz="1700" b="0">
                 <a:solidFill>
-                  <a:srgbClr val="1E293B"/>
+                  <a:srgbClr val="E2E8F0"/>
                 </a:solidFill>
                 <a:latin typeface="Arial"/>
               </a:rPr>
@@ -5774,7 +5990,7 @@
             <a:r>
               <a:rPr sz="1700" b="0">
                 <a:solidFill>
-                  <a:srgbClr val="1E293B"/>
+                  <a:srgbClr val="E2E8F0"/>
                 </a:solidFill>
                 <a:latin typeface="Arial"/>
               </a:rPr>
@@ -5790,7 +6006,7 @@
             <a:r>
               <a:rPr sz="1700" b="0">
                 <a:solidFill>
-                  <a:srgbClr val="1E293B"/>
+                  <a:srgbClr val="E2E8F0"/>
                 </a:solidFill>
                 <a:latin typeface="Arial"/>
               </a:rPr>
@@ -5825,7 +6041,7 @@
             <a:r>
               <a:rPr sz="1100" b="0">
                 <a:solidFill>
-                  <a:srgbClr val="475569"/>
+                  <a:srgbClr val="94A3B8"/>
                 </a:solidFill>
                 <a:latin typeface="Arial"/>
               </a:rPr>
@@ -5848,7 +6064,7 @@
     <p:bg>
       <p:bgPr>
         <a:solidFill>
-          <a:srgbClr val="F8FAFC"/>
+          <a:srgbClr val="020617"/>
         </a:solidFill>
         <a:effectLst/>
       </p:bgPr>
@@ -5885,7 +6101,7 @@
             <a:r>
               <a:rPr sz="2400" b="1">
                 <a:solidFill>
-                  <a:srgbClr val="0F172A"/>
+                  <a:srgbClr val="F1F5F9"/>
                 </a:solidFill>
                 <a:latin typeface="Arial"/>
               </a:rPr>
@@ -5919,7 +6135,7 @@
             <a:r>
               <a:rPr sz="1400" b="0">
                 <a:solidFill>
-                  <a:srgbClr val="475569"/>
+                  <a:srgbClr val="94A3B8"/>
                 </a:solidFill>
                 <a:latin typeface="Arial"/>
               </a:rPr>
@@ -5943,7 +6159,7 @@
             <a:avLst/>
           </a:prstGeom>
           <a:solidFill>
-            <a:srgbClr val="CBD5E1"/>
+            <a:srgbClr val="22D3EE"/>
           </a:solidFill>
           <a:ln>
             <a:noFill/>
@@ -5986,11 +6202,11 @@
             <a:avLst/>
           </a:prstGeom>
           <a:solidFill>
-            <a:srgbClr val="FFFFFF"/>
+            <a:srgbClr val="0A1224"/>
           </a:solidFill>
           <a:ln>
             <a:solidFill>
-              <a:srgbClr val="2563EB"/>
+              <a:srgbClr val="22D3EE"/>
             </a:solidFill>
           </a:ln>
         </p:spPr>
@@ -6031,11 +6247,11 @@
             <a:avLst/>
           </a:prstGeom>
           <a:solidFill>
-            <a:srgbClr val="DBEAFE"/>
+            <a:srgbClr val="0C1E38"/>
           </a:solidFill>
           <a:ln>
             <a:solidFill>
-              <a:srgbClr val="DBEAFE"/>
+              <a:srgbClr val="0C1E38"/>
             </a:solidFill>
           </a:ln>
         </p:spPr>
@@ -6061,7 +6277,7 @@
             <a:r>
               <a:rPr sz="1200" b="1">
                 <a:solidFill>
-                  <a:srgbClr val="2563EB"/>
+                  <a:srgbClr val="22D3EE"/>
                 </a:solidFill>
                 <a:latin typeface="Arial"/>
               </a:rPr>
@@ -6100,7 +6316,7 @@
             <a:r>
               <a:rPr sz="1400" b="0">
                 <a:solidFill>
-                  <a:srgbClr val="1E293B"/>
+                  <a:srgbClr val="E2E8F0"/>
                 </a:solidFill>
                 <a:latin typeface="Arial"/>
               </a:rPr>
@@ -6116,7 +6332,7 @@
             <a:r>
               <a:rPr sz="1400" b="0">
                 <a:solidFill>
-                  <a:srgbClr val="1E293B"/>
+                  <a:srgbClr val="E2E8F0"/>
                 </a:solidFill>
                 <a:latin typeface="Arial"/>
               </a:rPr>
@@ -6140,11 +6356,11 @@
             <a:avLst/>
           </a:prstGeom>
           <a:solidFill>
-            <a:srgbClr val="FFFFFF"/>
+            <a:srgbClr val="0A1224"/>
           </a:solidFill>
           <a:ln>
             <a:solidFill>
-              <a:srgbClr val="2563EB"/>
+              <a:srgbClr val="22D3EE"/>
             </a:solidFill>
           </a:ln>
         </p:spPr>
@@ -6185,11 +6401,11 @@
             <a:avLst/>
           </a:prstGeom>
           <a:solidFill>
-            <a:srgbClr val="DBEAFE"/>
+            <a:srgbClr val="0C1E38"/>
           </a:solidFill>
           <a:ln>
             <a:solidFill>
-              <a:srgbClr val="DBEAFE"/>
+              <a:srgbClr val="0C1E38"/>
             </a:solidFill>
           </a:ln>
         </p:spPr>
@@ -6215,7 +6431,7 @@
             <a:r>
               <a:rPr sz="1200" b="1">
                 <a:solidFill>
-                  <a:srgbClr val="2563EB"/>
+                  <a:srgbClr val="22D3EE"/>
                 </a:solidFill>
                 <a:latin typeface="Arial"/>
               </a:rPr>
@@ -6254,7 +6470,7 @@
             <a:r>
               <a:rPr sz="1400" b="0">
                 <a:solidFill>
-                  <a:srgbClr val="1E293B"/>
+                  <a:srgbClr val="E2E8F0"/>
                 </a:solidFill>
                 <a:latin typeface="Arial"/>
               </a:rPr>
@@ -6270,7 +6486,7 @@
             <a:r>
               <a:rPr sz="1400" b="0">
                 <a:solidFill>
-                  <a:srgbClr val="1E293B"/>
+                  <a:srgbClr val="E2E8F0"/>
                 </a:solidFill>
                 <a:latin typeface="Arial"/>
               </a:rPr>
@@ -6294,11 +6510,11 @@
             <a:avLst/>
           </a:prstGeom>
           <a:solidFill>
-            <a:srgbClr val="FFFFFF"/>
+            <a:srgbClr val="0A1224"/>
           </a:solidFill>
           <a:ln>
             <a:solidFill>
-              <a:srgbClr val="2563EB"/>
+              <a:srgbClr val="22D3EE"/>
             </a:solidFill>
           </a:ln>
         </p:spPr>
@@ -6339,11 +6555,11 @@
             <a:avLst/>
           </a:prstGeom>
           <a:solidFill>
-            <a:srgbClr val="DBEAFE"/>
+            <a:srgbClr val="0C1E38"/>
           </a:solidFill>
           <a:ln>
             <a:solidFill>
-              <a:srgbClr val="DBEAFE"/>
+              <a:srgbClr val="0C1E38"/>
             </a:solidFill>
           </a:ln>
         </p:spPr>
@@ -6369,7 +6585,7 @@
             <a:r>
               <a:rPr sz="1200" b="1">
                 <a:solidFill>
-                  <a:srgbClr val="2563EB"/>
+                  <a:srgbClr val="22D3EE"/>
                 </a:solidFill>
                 <a:latin typeface="Arial"/>
               </a:rPr>
@@ -6408,7 +6624,7 @@
             <a:r>
               <a:rPr sz="1400" b="0">
                 <a:solidFill>
-                  <a:srgbClr val="1E293B"/>
+                  <a:srgbClr val="E2E8F0"/>
                 </a:solidFill>
                 <a:latin typeface="Arial"/>
               </a:rPr>
@@ -6424,7 +6640,7 @@
             <a:r>
               <a:rPr sz="1400" b="0">
                 <a:solidFill>
-                  <a:srgbClr val="1E293B"/>
+                  <a:srgbClr val="E2E8F0"/>
                 </a:solidFill>
                 <a:latin typeface="Arial"/>
               </a:rPr>
@@ -6448,11 +6664,11 @@
             <a:avLst/>
           </a:prstGeom>
           <a:solidFill>
-            <a:srgbClr val="FFFFFF"/>
+            <a:srgbClr val="0A1224"/>
           </a:solidFill>
           <a:ln>
             <a:solidFill>
-              <a:srgbClr val="2563EB"/>
+              <a:srgbClr val="22D3EE"/>
             </a:solidFill>
           </a:ln>
         </p:spPr>
@@ -6493,11 +6709,11 @@
             <a:avLst/>
           </a:prstGeom>
           <a:solidFill>
-            <a:srgbClr val="DBEAFE"/>
+            <a:srgbClr val="0C1E38"/>
           </a:solidFill>
           <a:ln>
             <a:solidFill>
-              <a:srgbClr val="DBEAFE"/>
+              <a:srgbClr val="0C1E38"/>
             </a:solidFill>
           </a:ln>
         </p:spPr>
@@ -6523,7 +6739,7 @@
             <a:r>
               <a:rPr sz="1200" b="1">
                 <a:solidFill>
-                  <a:srgbClr val="2563EB"/>
+                  <a:srgbClr val="22D3EE"/>
                 </a:solidFill>
                 <a:latin typeface="Arial"/>
               </a:rPr>
@@ -6562,7 +6778,7 @@
             <a:r>
               <a:rPr sz="1400" b="0">
                 <a:solidFill>
-                  <a:srgbClr val="1E293B"/>
+                  <a:srgbClr val="E2E8F0"/>
                 </a:solidFill>
                 <a:latin typeface="Arial"/>
               </a:rPr>
@@ -6578,7 +6794,7 @@
             <a:r>
               <a:rPr sz="1400" b="0">
                 <a:solidFill>
-                  <a:srgbClr val="1E293B"/>
+                  <a:srgbClr val="E2E8F0"/>
                 </a:solidFill>
                 <a:latin typeface="Arial"/>
               </a:rPr>
@@ -6602,11 +6818,11 @@
             <a:avLst/>
           </a:prstGeom>
           <a:solidFill>
-            <a:srgbClr val="FFFFFF"/>
+            <a:srgbClr val="0A1224"/>
           </a:solidFill>
           <a:ln>
             <a:solidFill>
-              <a:srgbClr val="2563EB"/>
+              <a:srgbClr val="22D3EE"/>
             </a:solidFill>
           </a:ln>
         </p:spPr>
@@ -6647,11 +6863,11 @@
             <a:avLst/>
           </a:prstGeom>
           <a:solidFill>
-            <a:srgbClr val="DBEAFE"/>
+            <a:srgbClr val="0C1E38"/>
           </a:solidFill>
           <a:ln>
             <a:solidFill>
-              <a:srgbClr val="DBEAFE"/>
+              <a:srgbClr val="0C1E38"/>
             </a:solidFill>
           </a:ln>
         </p:spPr>
@@ -6677,7 +6893,7 @@
             <a:r>
               <a:rPr sz="1200" b="1">
                 <a:solidFill>
-                  <a:srgbClr val="2563EB"/>
+                  <a:srgbClr val="22D3EE"/>
                 </a:solidFill>
                 <a:latin typeface="Arial"/>
               </a:rPr>
@@ -6716,7 +6932,7 @@
             <a:r>
               <a:rPr sz="1400" b="0">
                 <a:solidFill>
-                  <a:srgbClr val="1E293B"/>
+                  <a:srgbClr val="E2E8F0"/>
                 </a:solidFill>
                 <a:latin typeface="Arial"/>
               </a:rPr>
@@ -6732,7 +6948,7 @@
             <a:r>
               <a:rPr sz="1400" b="0">
                 <a:solidFill>
-                  <a:srgbClr val="1E293B"/>
+                  <a:srgbClr val="E2E8F0"/>
                 </a:solidFill>
                 <a:latin typeface="Arial"/>
               </a:rPr>
@@ -6756,11 +6972,11 @@
             <a:avLst/>
           </a:prstGeom>
           <a:solidFill>
-            <a:srgbClr val="FFFFFF"/>
+            <a:srgbClr val="0A1224"/>
           </a:solidFill>
           <a:ln>
             <a:solidFill>
-              <a:srgbClr val="2563EB"/>
+              <a:srgbClr val="22D3EE"/>
             </a:solidFill>
           </a:ln>
         </p:spPr>
@@ -6801,11 +7017,11 @@
             <a:avLst/>
           </a:prstGeom>
           <a:solidFill>
-            <a:srgbClr val="DBEAFE"/>
+            <a:srgbClr val="0C1E38"/>
           </a:solidFill>
           <a:ln>
             <a:solidFill>
-              <a:srgbClr val="DBEAFE"/>
+              <a:srgbClr val="0C1E38"/>
             </a:solidFill>
           </a:ln>
         </p:spPr>
@@ -6831,7 +7047,7 @@
             <a:r>
               <a:rPr sz="1200" b="1">
                 <a:solidFill>
-                  <a:srgbClr val="2563EB"/>
+                  <a:srgbClr val="22D3EE"/>
                 </a:solidFill>
                 <a:latin typeface="Arial"/>
               </a:rPr>
@@ -6870,7 +7086,7 @@
             <a:r>
               <a:rPr sz="1400" b="0">
                 <a:solidFill>
-                  <a:srgbClr val="1E293B"/>
+                  <a:srgbClr val="E2E8F0"/>
                 </a:solidFill>
                 <a:latin typeface="Arial"/>
               </a:rPr>
@@ -6886,7 +7102,7 @@
             <a:r>
               <a:rPr sz="1400" b="0">
                 <a:solidFill>
-                  <a:srgbClr val="1E293B"/>
+                  <a:srgbClr val="E2E8F0"/>
                 </a:solidFill>
                 <a:latin typeface="Arial"/>
               </a:rPr>
@@ -6910,11 +7126,11 @@
             <a:avLst/>
           </a:prstGeom>
           <a:solidFill>
-            <a:srgbClr val="FFFFFF"/>
+            <a:srgbClr val="0A1224"/>
           </a:solidFill>
           <a:ln>
             <a:solidFill>
-              <a:srgbClr val="2563EB"/>
+              <a:srgbClr val="22D3EE"/>
             </a:solidFill>
           </a:ln>
         </p:spPr>
@@ -6955,11 +7171,11 @@
             <a:avLst/>
           </a:prstGeom>
           <a:solidFill>
-            <a:srgbClr val="DBEAFE"/>
+            <a:srgbClr val="0C1E38"/>
           </a:solidFill>
           <a:ln>
             <a:solidFill>
-              <a:srgbClr val="DBEAFE"/>
+              <a:srgbClr val="0C1E38"/>
             </a:solidFill>
           </a:ln>
         </p:spPr>
@@ -6985,7 +7201,7 @@
             <a:r>
               <a:rPr sz="1200" b="1">
                 <a:solidFill>
-                  <a:srgbClr val="2563EB"/>
+                  <a:srgbClr val="22D3EE"/>
                 </a:solidFill>
                 <a:latin typeface="Arial"/>
               </a:rPr>
@@ -7024,7 +7240,7 @@
             <a:r>
               <a:rPr sz="1400" b="0">
                 <a:solidFill>
-                  <a:srgbClr val="1E293B"/>
+                  <a:srgbClr val="E2E8F0"/>
                 </a:solidFill>
                 <a:latin typeface="Arial"/>
               </a:rPr>
@@ -7040,7 +7256,7 @@
             <a:r>
               <a:rPr sz="1400" b="0">
                 <a:solidFill>
-                  <a:srgbClr val="1E293B"/>
+                  <a:srgbClr val="E2E8F0"/>
                 </a:solidFill>
                 <a:latin typeface="Arial"/>
               </a:rPr>
@@ -7064,11 +7280,11 @@
             <a:avLst/>
           </a:prstGeom>
           <a:solidFill>
-            <a:srgbClr val="FFFFFF"/>
+            <a:srgbClr val="0A1224"/>
           </a:solidFill>
           <a:ln>
             <a:solidFill>
-              <a:srgbClr val="2563EB"/>
+              <a:srgbClr val="22D3EE"/>
             </a:solidFill>
           </a:ln>
         </p:spPr>
@@ -7109,11 +7325,11 @@
             <a:avLst/>
           </a:prstGeom>
           <a:solidFill>
-            <a:srgbClr val="DBEAFE"/>
+            <a:srgbClr val="0C1E38"/>
           </a:solidFill>
           <a:ln>
             <a:solidFill>
-              <a:srgbClr val="DBEAFE"/>
+              <a:srgbClr val="0C1E38"/>
             </a:solidFill>
           </a:ln>
         </p:spPr>
@@ -7139,7 +7355,7 @@
             <a:r>
               <a:rPr sz="1200" b="1">
                 <a:solidFill>
-                  <a:srgbClr val="2563EB"/>
+                  <a:srgbClr val="22D3EE"/>
                 </a:solidFill>
                 <a:latin typeface="Arial"/>
               </a:rPr>
@@ -7178,7 +7394,7 @@
             <a:r>
               <a:rPr sz="1400" b="0">
                 <a:solidFill>
-                  <a:srgbClr val="1E293B"/>
+                  <a:srgbClr val="E2E8F0"/>
                 </a:solidFill>
                 <a:latin typeface="Arial"/>
               </a:rPr>
@@ -7194,7 +7410,7 @@
             <a:r>
               <a:rPr sz="1400" b="0">
                 <a:solidFill>
-                  <a:srgbClr val="1E293B"/>
+                  <a:srgbClr val="E2E8F0"/>
                 </a:solidFill>
                 <a:latin typeface="Arial"/>
               </a:rPr>
@@ -7218,11 +7434,11 @@
             <a:avLst/>
           </a:prstGeom>
           <a:solidFill>
-            <a:srgbClr val="FFFFFF"/>
+            <a:srgbClr val="0A1224"/>
           </a:solidFill>
           <a:ln>
             <a:solidFill>
-              <a:srgbClr val="2563EB"/>
+              <a:srgbClr val="22D3EE"/>
             </a:solidFill>
           </a:ln>
         </p:spPr>
@@ -7263,11 +7479,11 @@
             <a:avLst/>
           </a:prstGeom>
           <a:solidFill>
-            <a:srgbClr val="DBEAFE"/>
+            <a:srgbClr val="0C1E38"/>
           </a:solidFill>
           <a:ln>
             <a:solidFill>
-              <a:srgbClr val="DBEAFE"/>
+              <a:srgbClr val="0C1E38"/>
             </a:solidFill>
           </a:ln>
         </p:spPr>
@@ -7293,7 +7509,7 @@
             <a:r>
               <a:rPr sz="1200" b="1">
                 <a:solidFill>
-                  <a:srgbClr val="2563EB"/>
+                  <a:srgbClr val="22D3EE"/>
                 </a:solidFill>
                 <a:latin typeface="Arial"/>
               </a:rPr>
@@ -7332,7 +7548,7 @@
             <a:r>
               <a:rPr sz="1400" b="0">
                 <a:solidFill>
-                  <a:srgbClr val="1E293B"/>
+                  <a:srgbClr val="E2E8F0"/>
                 </a:solidFill>
                 <a:latin typeface="Arial"/>
               </a:rPr>
@@ -7348,7 +7564,7 @@
             <a:r>
               <a:rPr sz="1400" b="0">
                 <a:solidFill>
-                  <a:srgbClr val="1E293B"/>
+                  <a:srgbClr val="E2E8F0"/>
                 </a:solidFill>
                 <a:latin typeface="Arial"/>
               </a:rPr>
@@ -7373,7 +7589,7 @@
           </a:prstGeom>
           <a:ln w="15875">
             <a:solidFill>
-              <a:srgbClr val="2563EB"/>
+              <a:srgbClr val="22D3EE"/>
             </a:solidFill>
           </a:ln>
         </p:spPr>
@@ -7408,7 +7624,7 @@
           </a:prstGeom>
           <a:ln w="15875">
             <a:solidFill>
-              <a:srgbClr val="2563EB"/>
+              <a:srgbClr val="22D3EE"/>
             </a:solidFill>
           </a:ln>
         </p:spPr>
@@ -7443,7 +7659,7 @@
           </a:prstGeom>
           <a:ln w="15875">
             <a:solidFill>
-              <a:srgbClr val="2563EB"/>
+              <a:srgbClr val="22D3EE"/>
             </a:solidFill>
           </a:ln>
         </p:spPr>
@@ -7478,7 +7694,7 @@
           </a:prstGeom>
           <a:ln w="15875">
             <a:solidFill>
-              <a:srgbClr val="2563EB"/>
+              <a:srgbClr val="22D3EE"/>
             </a:solidFill>
           </a:ln>
         </p:spPr>
@@ -7513,7 +7729,7 @@
           </a:prstGeom>
           <a:ln w="15875">
             <a:solidFill>
-              <a:srgbClr val="2563EB"/>
+              <a:srgbClr val="22D3EE"/>
             </a:solidFill>
           </a:ln>
         </p:spPr>
@@ -7548,7 +7764,7 @@
           </a:prstGeom>
           <a:ln w="15875">
             <a:solidFill>
-              <a:srgbClr val="2563EB"/>
+              <a:srgbClr val="22D3EE"/>
             </a:solidFill>
           </a:ln>
         </p:spPr>
@@ -7583,7 +7799,7 @@
           </a:prstGeom>
           <a:ln w="15875">
             <a:solidFill>
-              <a:srgbClr val="2563EB"/>
+              <a:srgbClr val="22D3EE"/>
             </a:solidFill>
           </a:ln>
         </p:spPr>
@@ -7628,7 +7844,7 @@
             <a:r>
               <a:rPr sz="1100" b="0">
                 <a:solidFill>
-                  <a:srgbClr val="475569"/>
+                  <a:srgbClr val="94A3B8"/>
                 </a:solidFill>
                 <a:latin typeface="Arial"/>
               </a:rPr>
@@ -7651,7 +7867,7 @@
     <p:bg>
       <p:bgPr>
         <a:solidFill>
-          <a:srgbClr val="F8FAFC"/>
+          <a:srgbClr val="020617"/>
         </a:solidFill>
         <a:effectLst/>
       </p:bgPr>
@@ -7688,7 +7904,7 @@
             <a:r>
               <a:rPr sz="2400" b="1">
                 <a:solidFill>
-                  <a:srgbClr val="0F172A"/>
+                  <a:srgbClr val="F1F5F9"/>
                 </a:solidFill>
                 <a:latin typeface="Arial"/>
               </a:rPr>
@@ -7712,7 +7928,7 @@
             <a:avLst/>
           </a:prstGeom>
           <a:solidFill>
-            <a:srgbClr val="CBD5E1"/>
+            <a:srgbClr val="22D3EE"/>
           </a:solidFill>
           <a:ln>
             <a:noFill/>
@@ -7755,11 +7971,11 @@
             <a:avLst/>
           </a:prstGeom>
           <a:solidFill>
-            <a:srgbClr val="DBEAFE"/>
+            <a:srgbClr val="0F172A"/>
           </a:solidFill>
           <a:ln>
             <a:solidFill>
-              <a:srgbClr val="2563EB"/>
+              <a:srgbClr val="22D3EE"/>
             </a:solidFill>
           </a:ln>
         </p:spPr>
@@ -7789,7 +8005,7 @@
             <a:r>
               <a:rPr sz="1600" b="0">
                 <a:solidFill>
-                  <a:srgbClr val="1E293B"/>
+                  <a:srgbClr val="E2E8F0"/>
                 </a:solidFill>
                 <a:latin typeface="Arial"/>
               </a:rPr>
@@ -7828,7 +8044,7 @@
             <a:r>
               <a:rPr sz="1700" b="0">
                 <a:solidFill>
-                  <a:srgbClr val="1E293B"/>
+                  <a:srgbClr val="E2E8F0"/>
                 </a:solidFill>
                 <a:latin typeface="Arial"/>
               </a:rPr>
@@ -7844,7 +8060,7 @@
             <a:r>
               <a:rPr sz="1700" b="0">
                 <a:solidFill>
-                  <a:srgbClr val="1E293B"/>
+                  <a:srgbClr val="E2E8F0"/>
                 </a:solidFill>
                 <a:latin typeface="Arial"/>
               </a:rPr>
@@ -7860,7 +8076,7 @@
             <a:r>
               <a:rPr sz="1700" b="0">
                 <a:solidFill>
-                  <a:srgbClr val="1E293B"/>
+                  <a:srgbClr val="E2E8F0"/>
                 </a:solidFill>
                 <a:latin typeface="Arial"/>
               </a:rPr>
@@ -7884,11 +8100,11 @@
             <a:avLst/>
           </a:prstGeom>
           <a:solidFill>
-            <a:srgbClr val="F1F5F9"/>
+            <a:srgbClr val="030712"/>
           </a:solidFill>
           <a:ln>
             <a:solidFill>
-              <a:srgbClr val="CBD5E1"/>
+              <a:srgbClr val="22D3EE"/>
             </a:solidFill>
           </a:ln>
         </p:spPr>
@@ -7907,14 +8123,14 @@
           </a:fontRef>
         </p:style>
         <p:txBody>
-          <a:bodyPr rtlCol="0" anchor="t" wrap="square" tIns="76200" bIns="76200" lIns="101600" rIns="101600"/>
+          <a:bodyPr rtlCol="0" anchor="t" wrap="square" tIns="203200" bIns="76200" lIns="127000" rIns="127000"/>
           <a:lstStyle/>
           <a:p>
             <a:pPr algn="ctr"/>
             <a:r>
-              <a:rPr sz="1300" b="0">
-                <a:solidFill>
-                  <a:srgbClr val="1E293B"/>
+              <a:rPr sz="1250" b="0">
+                <a:solidFill>
+                  <a:srgbClr val="C4FFEC"/>
                 </a:solidFill>
                 <a:latin typeface="Courier New"/>
               </a:rPr>
@@ -7925,7 +8141,61 @@
       </p:sp>
       <p:sp>
         <p:nvSpPr>
-          <p:cNvPr id="7" name="TextBox 6"/>
+          <p:cNvPr id="7" name="Rectangle 6"/>
+          <p:cNvSpPr/>
+          <p:nvPr/>
+        </p:nvSpPr>
+        <p:spPr>
+          <a:xfrm>
+            <a:off x="6537960" y="2468880"/>
+            <a:ext cx="4800600" cy="256032"/>
+          </a:xfrm>
+          <a:prstGeom prst="rect">
+            <a:avLst/>
+          </a:prstGeom>
+          <a:solidFill>
+            <a:srgbClr val="0D1426"/>
+          </a:solidFill>
+          <a:ln>
+            <a:solidFill>
+              <a:srgbClr val="0D1426"/>
+            </a:solidFill>
+          </a:ln>
+        </p:spPr>
+        <p:style>
+          <a:lnRef idx="1">
+            <a:schemeClr val="accent1"/>
+          </a:lnRef>
+          <a:fillRef idx="3">
+            <a:schemeClr val="accent1"/>
+          </a:fillRef>
+          <a:effectRef idx="2">
+            <a:schemeClr val="accent1"/>
+          </a:effectRef>
+          <a:fontRef idx="minor">
+            <a:schemeClr val="lt1"/>
+          </a:fontRef>
+        </p:style>
+        <p:txBody>
+          <a:bodyPr rtlCol="0" anchor="t" wrap="square" tIns="12700" bIns="12700" lIns="76200" rIns="76200"/>
+          <a:lstStyle/>
+          <a:p>
+            <a:pPr algn="ctr"/>
+            <a:r>
+              <a:rPr sz="1000" b="1">
+                <a:solidFill>
+                  <a:srgbClr val="22D3EE"/>
+                </a:solidFill>
+                <a:latin typeface="Courier New"/>
+              </a:rPr>
+              <a:t>code</a:t>
+            </a:r>
+          </a:p>
+        </p:txBody>
+      </p:sp>
+      <p:sp>
+        <p:nvSpPr>
+          <p:cNvPr id="8" name="TextBox 7"/>
           <p:cNvSpPr txBox="1"/>
           <p:nvPr/>
         </p:nvSpPr>
@@ -7949,7 +8219,7 @@
             <a:r>
               <a:rPr sz="1100" b="0">
                 <a:solidFill>
-                  <a:srgbClr val="475569"/>
+                  <a:srgbClr val="94A3B8"/>
                 </a:solidFill>
                 <a:latin typeface="Arial"/>
               </a:rPr>
@@ -7972,7 +8242,7 @@
     <p:bg>
       <p:bgPr>
         <a:solidFill>
-          <a:srgbClr val="F8FAFC"/>
+          <a:srgbClr val="020617"/>
         </a:solidFill>
         <a:effectLst/>
       </p:bgPr>
@@ -8009,7 +8279,7 @@
             <a:r>
               <a:rPr sz="2400" b="1">
                 <a:solidFill>
-                  <a:srgbClr val="0F172A"/>
+                  <a:srgbClr val="F1F5F9"/>
                 </a:solidFill>
                 <a:latin typeface="Arial"/>
               </a:rPr>
@@ -8020,7 +8290,41 @@
       </p:sp>
       <p:sp>
         <p:nvSpPr>
-          <p:cNvPr id="3" name="Rectangle 2"/>
+          <p:cNvPr id="3" name="TextBox 2"/>
+          <p:cNvSpPr txBox="1"/>
+          <p:nvPr/>
+        </p:nvSpPr>
+        <p:spPr>
+          <a:xfrm>
+            <a:off x="585216" y="1005840"/>
+            <a:ext cx="10789920" cy="411480"/>
+          </a:xfrm>
+          <a:prstGeom prst="rect">
+            <a:avLst/>
+          </a:prstGeom>
+          <a:noFill/>
+        </p:spPr>
+        <p:txBody>
+          <a:bodyPr wrap="square" tIns="25400" bIns="25400" lIns="25400" rIns="25400" anchor="t">
+            <a:spAutoFit/>
+          </a:bodyPr>
+          <a:lstStyle/>
+          <a:p>
+            <a:r>
+              <a:rPr sz="1400" b="0">
+                <a:solidFill>
+                  <a:srgbClr val="94A3B8"/>
+                </a:solidFill>
+                <a:latin typeface="Arial"/>
+              </a:rPr>
+              <a:t>一个 terminal agent runtime（终端代理运行时）的最小架构图</a:t>
+            </a:r>
+          </a:p>
+        </p:txBody>
+      </p:sp>
+      <p:sp>
+        <p:nvSpPr>
+          <p:cNvPr id="4" name="Rectangle 3"/>
           <p:cNvSpPr/>
           <p:nvPr/>
         </p:nvSpPr>
@@ -8033,7 +8337,7 @@
             <a:avLst/>
           </a:prstGeom>
           <a:solidFill>
-            <a:srgbClr val="CBD5E1"/>
+            <a:srgbClr val="22D3EE"/>
           </a:solidFill>
           <a:ln>
             <a:noFill/>
@@ -8063,24 +8367,24 @@
       </p:sp>
       <p:sp>
         <p:nvSpPr>
-          <p:cNvPr id="4" name="Rounded Rectangle 3"/>
+          <p:cNvPr id="5" name="Rounded Rectangle 4"/>
           <p:cNvSpPr/>
           <p:nvPr/>
         </p:nvSpPr>
         <p:spPr>
           <a:xfrm>
-            <a:off x="658368" y="1536192"/>
-            <a:ext cx="10972800" cy="658368"/>
+            <a:off x="777240" y="1691640"/>
+            <a:ext cx="2011680" cy="914400"/>
           </a:xfrm>
           <a:prstGeom prst="roundRect">
             <a:avLst/>
           </a:prstGeom>
           <a:solidFill>
-            <a:srgbClr val="DBEAFE"/>
+            <a:srgbClr val="0A1224"/>
           </a:solidFill>
           <a:ln>
             <a:solidFill>
-              <a:srgbClr val="2563EB"/>
+              <a:srgbClr val="22D3EE"/>
             </a:solidFill>
           </a:ln>
         </p:spPr>
@@ -8099,6 +8403,1294 @@
           </a:fontRef>
         </p:style>
         <p:txBody>
+          <a:bodyPr rtlCol="0" anchor="ctr"/>
+          <a:lstStyle/>
+          <a:p>
+            <a:pPr algn="ctr"/>
+          </a:p>
+        </p:txBody>
+      </p:sp>
+      <p:sp>
+        <p:nvSpPr>
+          <p:cNvPr id="6" name="Rectangle 5"/>
+          <p:cNvSpPr/>
+          <p:nvPr/>
+        </p:nvSpPr>
+        <p:spPr>
+          <a:xfrm>
+            <a:off x="777240" y="1691640"/>
+            <a:ext cx="2011680" cy="347472"/>
+          </a:xfrm>
+          <a:prstGeom prst="rect">
+            <a:avLst/>
+          </a:prstGeom>
+          <a:solidFill>
+            <a:srgbClr val="0C1E38"/>
+          </a:solidFill>
+          <a:ln>
+            <a:solidFill>
+              <a:srgbClr val="0C1E38"/>
+            </a:solidFill>
+          </a:ln>
+        </p:spPr>
+        <p:style>
+          <a:lnRef idx="1">
+            <a:schemeClr val="accent1"/>
+          </a:lnRef>
+          <a:fillRef idx="3">
+            <a:schemeClr val="accent1"/>
+          </a:fillRef>
+          <a:effectRef idx="2">
+            <a:schemeClr val="accent1"/>
+          </a:effectRef>
+          <a:fontRef idx="minor">
+            <a:schemeClr val="lt1"/>
+          </a:fontRef>
+        </p:style>
+        <p:txBody>
+          <a:bodyPr rtlCol="0" anchor="t" wrap="square" tIns="25400" bIns="25400" lIns="76200" rIns="76200"/>
+          <a:lstStyle/>
+          <a:p>
+            <a:pPr algn="ctr"/>
+            <a:r>
+              <a:rPr sz="1200" b="1">
+                <a:solidFill>
+                  <a:srgbClr val="22D3EE"/>
+                </a:solidFill>
+                <a:latin typeface="Arial"/>
+              </a:rPr>
+              <a:t>入口层</a:t>
+            </a:r>
+          </a:p>
+        </p:txBody>
+      </p:sp>
+      <p:sp>
+        <p:nvSpPr>
+          <p:cNvPr id="7" name="TextBox 6"/>
+          <p:cNvSpPr txBox="1"/>
+          <p:nvPr/>
+        </p:nvSpPr>
+        <p:spPr>
+          <a:xfrm>
+            <a:off x="850392" y="2093976"/>
+            <a:ext cx="1865376" cy="457200"/>
+          </a:xfrm>
+          <a:prstGeom prst="rect">
+            <a:avLst/>
+          </a:prstGeom>
+          <a:noFill/>
+        </p:spPr>
+        <p:txBody>
+          <a:bodyPr wrap="square" tIns="50800" bIns="50800" lIns="101600" rIns="101600" anchor="t">
+            <a:spAutoFit/>
+          </a:bodyPr>
+          <a:lstStyle/>
+          <a:p>
+            <a:pPr>
+              <a:spcAft>
+                <a:spcPts val="600"/>
+              </a:spcAft>
+            </a:pPr>
+            <a:r>
+              <a:rPr sz="1400" b="0">
+                <a:solidFill>
+                  <a:srgbClr val="E2E8F0"/>
+                </a:solidFill>
+                <a:latin typeface="Arial"/>
+              </a:rPr>
+              <a:t>main.tsx</a:t>
+            </a:r>
+          </a:p>
+          <a:p>
+            <a:pPr>
+              <a:spcAft>
+                <a:spcPts val="600"/>
+              </a:spcAft>
+            </a:pPr>
+            <a:r>
+              <a:rPr sz="1400" b="0">
+                <a:solidFill>
+                  <a:srgbClr val="E2E8F0"/>
+                </a:solidFill>
+                <a:latin typeface="Arial"/>
+              </a:rPr>
+              <a:t>bootstrap / assembly</a:t>
+            </a:r>
+          </a:p>
+        </p:txBody>
+      </p:sp>
+      <p:sp>
+        <p:nvSpPr>
+          <p:cNvPr id="8" name="Rounded Rectangle 7"/>
+          <p:cNvSpPr/>
+          <p:nvPr/>
+        </p:nvSpPr>
+        <p:spPr>
+          <a:xfrm>
+            <a:off x="3154680" y="1691640"/>
+            <a:ext cx="2194560" cy="914400"/>
+          </a:xfrm>
+          <a:prstGeom prst="roundRect">
+            <a:avLst/>
+          </a:prstGeom>
+          <a:solidFill>
+            <a:srgbClr val="0A1224"/>
+          </a:solidFill>
+          <a:ln>
+            <a:solidFill>
+              <a:srgbClr val="22D3EE"/>
+            </a:solidFill>
+          </a:ln>
+        </p:spPr>
+        <p:style>
+          <a:lnRef idx="1">
+            <a:schemeClr val="accent1"/>
+          </a:lnRef>
+          <a:fillRef idx="3">
+            <a:schemeClr val="accent1"/>
+          </a:fillRef>
+          <a:effectRef idx="2">
+            <a:schemeClr val="accent1"/>
+          </a:effectRef>
+          <a:fontRef idx="minor">
+            <a:schemeClr val="lt1"/>
+          </a:fontRef>
+        </p:style>
+        <p:txBody>
+          <a:bodyPr rtlCol="0" anchor="ctr"/>
+          <a:lstStyle/>
+          <a:p>
+            <a:pPr algn="ctr"/>
+          </a:p>
+        </p:txBody>
+      </p:sp>
+      <p:sp>
+        <p:nvSpPr>
+          <p:cNvPr id="9" name="Rectangle 8"/>
+          <p:cNvSpPr/>
+          <p:nvPr/>
+        </p:nvSpPr>
+        <p:spPr>
+          <a:xfrm>
+            <a:off x="3154680" y="1691640"/>
+            <a:ext cx="2194560" cy="347472"/>
+          </a:xfrm>
+          <a:prstGeom prst="rect">
+            <a:avLst/>
+          </a:prstGeom>
+          <a:solidFill>
+            <a:srgbClr val="0C1E38"/>
+          </a:solidFill>
+          <a:ln>
+            <a:solidFill>
+              <a:srgbClr val="0C1E38"/>
+            </a:solidFill>
+          </a:ln>
+        </p:spPr>
+        <p:style>
+          <a:lnRef idx="1">
+            <a:schemeClr val="accent1"/>
+          </a:lnRef>
+          <a:fillRef idx="3">
+            <a:schemeClr val="accent1"/>
+          </a:fillRef>
+          <a:effectRef idx="2">
+            <a:schemeClr val="accent1"/>
+          </a:effectRef>
+          <a:fontRef idx="minor">
+            <a:schemeClr val="lt1"/>
+          </a:fontRef>
+        </p:style>
+        <p:txBody>
+          <a:bodyPr rtlCol="0" anchor="t" wrap="square" tIns="25400" bIns="25400" lIns="76200" rIns="76200"/>
+          <a:lstStyle/>
+          <a:p>
+            <a:pPr algn="ctr"/>
+            <a:r>
+              <a:rPr sz="1200" b="1">
+                <a:solidFill>
+                  <a:srgbClr val="22D3EE"/>
+                </a:solidFill>
+                <a:latin typeface="Arial"/>
+              </a:rPr>
+              <a:t>会话层</a:t>
+            </a:r>
+          </a:p>
+        </p:txBody>
+      </p:sp>
+      <p:sp>
+        <p:nvSpPr>
+          <p:cNvPr id="10" name="TextBox 9"/>
+          <p:cNvSpPr txBox="1"/>
+          <p:nvPr/>
+        </p:nvSpPr>
+        <p:spPr>
+          <a:xfrm>
+            <a:off x="3227832" y="2093976"/>
+            <a:ext cx="2048255" cy="457200"/>
+          </a:xfrm>
+          <a:prstGeom prst="rect">
+            <a:avLst/>
+          </a:prstGeom>
+          <a:noFill/>
+        </p:spPr>
+        <p:txBody>
+          <a:bodyPr wrap="square" tIns="50800" bIns="50800" lIns="101600" rIns="101600" anchor="t">
+            <a:spAutoFit/>
+          </a:bodyPr>
+          <a:lstStyle/>
+          <a:p>
+            <a:pPr>
+              <a:spcAft>
+                <a:spcPts val="600"/>
+              </a:spcAft>
+            </a:pPr>
+            <a:r>
+              <a:rPr sz="1400" b="0">
+                <a:solidFill>
+                  <a:srgbClr val="E2E8F0"/>
+                </a:solidFill>
+                <a:latin typeface="Arial"/>
+              </a:rPr>
+              <a:t>QueryEngine.ts</a:t>
+            </a:r>
+          </a:p>
+          <a:p>
+            <a:pPr>
+              <a:spcAft>
+                <a:spcPts val="600"/>
+              </a:spcAft>
+            </a:pPr>
+            <a:r>
+              <a:rPr sz="1400" b="0">
+                <a:solidFill>
+                  <a:srgbClr val="E2E8F0"/>
+                </a:solidFill>
+                <a:latin typeface="Arial"/>
+              </a:rPr>
+              <a:t>conversation host</a:t>
+            </a:r>
+          </a:p>
+        </p:txBody>
+      </p:sp>
+      <p:sp>
+        <p:nvSpPr>
+          <p:cNvPr id="11" name="Rounded Rectangle 10"/>
+          <p:cNvSpPr/>
+          <p:nvPr/>
+        </p:nvSpPr>
+        <p:spPr>
+          <a:xfrm>
+            <a:off x="5715000" y="1691640"/>
+            <a:ext cx="2194560" cy="914400"/>
+          </a:xfrm>
+          <a:prstGeom prst="roundRect">
+            <a:avLst/>
+          </a:prstGeom>
+          <a:solidFill>
+            <a:srgbClr val="0A1224"/>
+          </a:solidFill>
+          <a:ln>
+            <a:solidFill>
+              <a:srgbClr val="22D3EE"/>
+            </a:solidFill>
+          </a:ln>
+        </p:spPr>
+        <p:style>
+          <a:lnRef idx="1">
+            <a:schemeClr val="accent1"/>
+          </a:lnRef>
+          <a:fillRef idx="3">
+            <a:schemeClr val="accent1"/>
+          </a:fillRef>
+          <a:effectRef idx="2">
+            <a:schemeClr val="accent1"/>
+          </a:effectRef>
+          <a:fontRef idx="minor">
+            <a:schemeClr val="lt1"/>
+          </a:fontRef>
+        </p:style>
+        <p:txBody>
+          <a:bodyPr rtlCol="0" anchor="ctr"/>
+          <a:lstStyle/>
+          <a:p>
+            <a:pPr algn="ctr"/>
+          </a:p>
+        </p:txBody>
+      </p:sp>
+      <p:sp>
+        <p:nvSpPr>
+          <p:cNvPr id="12" name="Rectangle 11"/>
+          <p:cNvSpPr/>
+          <p:nvPr/>
+        </p:nvSpPr>
+        <p:spPr>
+          <a:xfrm>
+            <a:off x="5715000" y="1691640"/>
+            <a:ext cx="2194560" cy="347472"/>
+          </a:xfrm>
+          <a:prstGeom prst="rect">
+            <a:avLst/>
+          </a:prstGeom>
+          <a:solidFill>
+            <a:srgbClr val="0C1E38"/>
+          </a:solidFill>
+          <a:ln>
+            <a:solidFill>
+              <a:srgbClr val="0C1E38"/>
+            </a:solidFill>
+          </a:ln>
+        </p:spPr>
+        <p:style>
+          <a:lnRef idx="1">
+            <a:schemeClr val="accent1"/>
+          </a:lnRef>
+          <a:fillRef idx="3">
+            <a:schemeClr val="accent1"/>
+          </a:fillRef>
+          <a:effectRef idx="2">
+            <a:schemeClr val="accent1"/>
+          </a:effectRef>
+          <a:fontRef idx="minor">
+            <a:schemeClr val="lt1"/>
+          </a:fontRef>
+        </p:style>
+        <p:txBody>
+          <a:bodyPr rtlCol="0" anchor="t" wrap="square" tIns="25400" bIns="25400" lIns="76200" rIns="76200"/>
+          <a:lstStyle/>
+          <a:p>
+            <a:pPr algn="ctr"/>
+            <a:r>
+              <a:rPr sz="1200" b="1">
+                <a:solidFill>
+                  <a:srgbClr val="22D3EE"/>
+                </a:solidFill>
+                <a:latin typeface="Arial"/>
+              </a:rPr>
+              <a:t>执行层</a:t>
+            </a:r>
+          </a:p>
+        </p:txBody>
+      </p:sp>
+      <p:sp>
+        <p:nvSpPr>
+          <p:cNvPr id="13" name="TextBox 12"/>
+          <p:cNvSpPr txBox="1"/>
+          <p:nvPr/>
+        </p:nvSpPr>
+        <p:spPr>
+          <a:xfrm>
+            <a:off x="5788152" y="2093976"/>
+            <a:ext cx="2048255" cy="457200"/>
+          </a:xfrm>
+          <a:prstGeom prst="rect">
+            <a:avLst/>
+          </a:prstGeom>
+          <a:noFill/>
+        </p:spPr>
+        <p:txBody>
+          <a:bodyPr wrap="square" tIns="50800" bIns="50800" lIns="101600" rIns="101600" anchor="t">
+            <a:spAutoFit/>
+          </a:bodyPr>
+          <a:lstStyle/>
+          <a:p>
+            <a:pPr>
+              <a:spcAft>
+                <a:spcPts val="600"/>
+              </a:spcAft>
+            </a:pPr>
+            <a:r>
+              <a:rPr sz="1400" b="0">
+                <a:solidFill>
+                  <a:srgbClr val="E2E8F0"/>
+                </a:solidFill>
+                <a:latin typeface="Arial"/>
+              </a:rPr>
+              <a:t>query.ts</a:t>
+            </a:r>
+          </a:p>
+          <a:p>
+            <a:pPr>
+              <a:spcAft>
+                <a:spcPts val="600"/>
+              </a:spcAft>
+            </a:pPr>
+            <a:r>
+              <a:rPr sz="1400" b="0">
+                <a:solidFill>
+                  <a:srgbClr val="E2E8F0"/>
+                </a:solidFill>
+                <a:latin typeface="Arial"/>
+              </a:rPr>
+              <a:t>turn loop / runtime kernel</a:t>
+            </a:r>
+          </a:p>
+        </p:txBody>
+      </p:sp>
+      <p:sp>
+        <p:nvSpPr>
+          <p:cNvPr id="14" name="Rounded Rectangle 13"/>
+          <p:cNvSpPr/>
+          <p:nvPr/>
+        </p:nvSpPr>
+        <p:spPr>
+          <a:xfrm>
+            <a:off x="8275320" y="1691640"/>
+            <a:ext cx="2834640" cy="914400"/>
+          </a:xfrm>
+          <a:prstGeom prst="roundRect">
+            <a:avLst/>
+          </a:prstGeom>
+          <a:solidFill>
+            <a:srgbClr val="0A1224"/>
+          </a:solidFill>
+          <a:ln>
+            <a:solidFill>
+              <a:srgbClr val="22D3EE"/>
+            </a:solidFill>
+          </a:ln>
+        </p:spPr>
+        <p:style>
+          <a:lnRef idx="1">
+            <a:schemeClr val="accent1"/>
+          </a:lnRef>
+          <a:fillRef idx="3">
+            <a:schemeClr val="accent1"/>
+          </a:fillRef>
+          <a:effectRef idx="2">
+            <a:schemeClr val="accent1"/>
+          </a:effectRef>
+          <a:fontRef idx="minor">
+            <a:schemeClr val="lt1"/>
+          </a:fontRef>
+        </p:style>
+        <p:txBody>
+          <a:bodyPr rtlCol="0" anchor="ctr"/>
+          <a:lstStyle/>
+          <a:p>
+            <a:pPr algn="ctr"/>
+          </a:p>
+        </p:txBody>
+      </p:sp>
+      <p:sp>
+        <p:nvSpPr>
+          <p:cNvPr id="15" name="Rectangle 14"/>
+          <p:cNvSpPr/>
+          <p:nvPr/>
+        </p:nvSpPr>
+        <p:spPr>
+          <a:xfrm>
+            <a:off x="8275320" y="1691640"/>
+            <a:ext cx="2834640" cy="347472"/>
+          </a:xfrm>
+          <a:prstGeom prst="rect">
+            <a:avLst/>
+          </a:prstGeom>
+          <a:solidFill>
+            <a:srgbClr val="0C1E38"/>
+          </a:solidFill>
+          <a:ln>
+            <a:solidFill>
+              <a:srgbClr val="0C1E38"/>
+            </a:solidFill>
+          </a:ln>
+        </p:spPr>
+        <p:style>
+          <a:lnRef idx="1">
+            <a:schemeClr val="accent1"/>
+          </a:lnRef>
+          <a:fillRef idx="3">
+            <a:schemeClr val="accent1"/>
+          </a:fillRef>
+          <a:effectRef idx="2">
+            <a:schemeClr val="accent1"/>
+          </a:effectRef>
+          <a:fontRef idx="minor">
+            <a:schemeClr val="lt1"/>
+          </a:fontRef>
+        </p:style>
+        <p:txBody>
+          <a:bodyPr rtlCol="0" anchor="t" wrap="square" tIns="25400" bIns="25400" lIns="76200" rIns="76200"/>
+          <a:lstStyle/>
+          <a:p>
+            <a:pPr algn="ctr"/>
+            <a:r>
+              <a:rPr sz="1200" b="1">
+                <a:solidFill>
+                  <a:srgbClr val="22D3EE"/>
+                </a:solidFill>
+                <a:latin typeface="Arial"/>
+              </a:rPr>
+              <a:t>工具执行层</a:t>
+            </a:r>
+          </a:p>
+        </p:txBody>
+      </p:sp>
+      <p:sp>
+        <p:nvSpPr>
+          <p:cNvPr id="16" name="TextBox 15"/>
+          <p:cNvSpPr txBox="1"/>
+          <p:nvPr/>
+        </p:nvSpPr>
+        <p:spPr>
+          <a:xfrm>
+            <a:off x="8348472" y="2093976"/>
+            <a:ext cx="2688336" cy="457200"/>
+          </a:xfrm>
+          <a:prstGeom prst="rect">
+            <a:avLst/>
+          </a:prstGeom>
+          <a:noFill/>
+        </p:spPr>
+        <p:txBody>
+          <a:bodyPr wrap="square" tIns="50800" bIns="50800" lIns="101600" rIns="101600" anchor="t">
+            <a:spAutoFit/>
+          </a:bodyPr>
+          <a:lstStyle/>
+          <a:p>
+            <a:pPr>
+              <a:spcAft>
+                <a:spcPts val="600"/>
+              </a:spcAft>
+            </a:pPr>
+            <a:r>
+              <a:rPr sz="1400" b="0">
+                <a:solidFill>
+                  <a:srgbClr val="E2E8F0"/>
+                </a:solidFill>
+                <a:latin typeface="Arial"/>
+              </a:rPr>
+              <a:t>toolExecution.ts</a:t>
+            </a:r>
+          </a:p>
+          <a:p>
+            <a:pPr>
+              <a:spcAft>
+                <a:spcPts val="600"/>
+              </a:spcAft>
+            </a:pPr>
+            <a:r>
+              <a:rPr sz="1400" b="0">
+                <a:solidFill>
+                  <a:srgbClr val="E2E8F0"/>
+                </a:solidFill>
+                <a:latin typeface="Arial"/>
+              </a:rPr>
+              <a:t>tool pipeline</a:t>
+            </a:r>
+          </a:p>
+        </p:txBody>
+      </p:sp>
+      <p:sp>
+        <p:nvSpPr>
+          <p:cNvPr id="17" name="Rounded Rectangle 16"/>
+          <p:cNvSpPr/>
+          <p:nvPr/>
+        </p:nvSpPr>
+        <p:spPr>
+          <a:xfrm>
+            <a:off x="1554480" y="3337560"/>
+            <a:ext cx="2926080" cy="1051560"/>
+          </a:xfrm>
+          <a:prstGeom prst="roundRect">
+            <a:avLst/>
+          </a:prstGeom>
+          <a:solidFill>
+            <a:srgbClr val="0A1224"/>
+          </a:solidFill>
+          <a:ln>
+            <a:solidFill>
+              <a:srgbClr val="22D3EE"/>
+            </a:solidFill>
+          </a:ln>
+        </p:spPr>
+        <p:style>
+          <a:lnRef idx="1">
+            <a:schemeClr val="accent1"/>
+          </a:lnRef>
+          <a:fillRef idx="3">
+            <a:schemeClr val="accent1"/>
+          </a:fillRef>
+          <a:effectRef idx="2">
+            <a:schemeClr val="accent1"/>
+          </a:effectRef>
+          <a:fontRef idx="minor">
+            <a:schemeClr val="lt1"/>
+          </a:fontRef>
+        </p:style>
+        <p:txBody>
+          <a:bodyPr rtlCol="0" anchor="ctr"/>
+          <a:lstStyle/>
+          <a:p>
+            <a:pPr algn="ctr"/>
+          </a:p>
+        </p:txBody>
+      </p:sp>
+      <p:sp>
+        <p:nvSpPr>
+          <p:cNvPr id="18" name="Rectangle 17"/>
+          <p:cNvSpPr/>
+          <p:nvPr/>
+        </p:nvSpPr>
+        <p:spPr>
+          <a:xfrm>
+            <a:off x="1554480" y="3337560"/>
+            <a:ext cx="2926080" cy="347472"/>
+          </a:xfrm>
+          <a:prstGeom prst="rect">
+            <a:avLst/>
+          </a:prstGeom>
+          <a:solidFill>
+            <a:srgbClr val="0C1E38"/>
+          </a:solidFill>
+          <a:ln>
+            <a:solidFill>
+              <a:srgbClr val="0C1E38"/>
+            </a:solidFill>
+          </a:ln>
+        </p:spPr>
+        <p:style>
+          <a:lnRef idx="1">
+            <a:schemeClr val="accent1"/>
+          </a:lnRef>
+          <a:fillRef idx="3">
+            <a:schemeClr val="accent1"/>
+          </a:fillRef>
+          <a:effectRef idx="2">
+            <a:schemeClr val="accent1"/>
+          </a:effectRef>
+          <a:fontRef idx="minor">
+            <a:schemeClr val="lt1"/>
+          </a:fontRef>
+        </p:style>
+        <p:txBody>
+          <a:bodyPr rtlCol="0" anchor="t" wrap="square" tIns="25400" bIns="25400" lIns="76200" rIns="76200"/>
+          <a:lstStyle/>
+          <a:p>
+            <a:pPr algn="ctr"/>
+            <a:r>
+              <a:rPr sz="1200" b="1">
+                <a:solidFill>
+                  <a:srgbClr val="22D3EE"/>
+                </a:solidFill>
+                <a:latin typeface="Arial"/>
+              </a:rPr>
+              <a:t>能力面</a:t>
+            </a:r>
+          </a:p>
+        </p:txBody>
+      </p:sp>
+      <p:sp>
+        <p:nvSpPr>
+          <p:cNvPr id="19" name="TextBox 18"/>
+          <p:cNvSpPr txBox="1"/>
+          <p:nvPr/>
+        </p:nvSpPr>
+        <p:spPr>
+          <a:xfrm>
+            <a:off x="1627632" y="3739896"/>
+            <a:ext cx="2779776" cy="594359"/>
+          </a:xfrm>
+          <a:prstGeom prst="rect">
+            <a:avLst/>
+          </a:prstGeom>
+          <a:noFill/>
+        </p:spPr>
+        <p:txBody>
+          <a:bodyPr wrap="square" tIns="50800" bIns="50800" lIns="101600" rIns="101600" anchor="t">
+            <a:spAutoFit/>
+          </a:bodyPr>
+          <a:lstStyle/>
+          <a:p>
+            <a:pPr>
+              <a:spcAft>
+                <a:spcPts val="600"/>
+              </a:spcAft>
+            </a:pPr>
+            <a:r>
+              <a:rPr sz="1400" b="0">
+                <a:solidFill>
+                  <a:srgbClr val="E2E8F0"/>
+                </a:solidFill>
+                <a:latin typeface="Arial"/>
+              </a:rPr>
+              <a:t>Tools / Bash / Read / Edit</a:t>
+            </a:r>
+          </a:p>
+          <a:p>
+            <a:pPr>
+              <a:spcAft>
+                <a:spcPts val="600"/>
+              </a:spcAft>
+            </a:pPr>
+            <a:r>
+              <a:rPr sz="1400" b="0">
+                <a:solidFill>
+                  <a:srgbClr val="E2E8F0"/>
+                </a:solidFill>
+                <a:latin typeface="Arial"/>
+              </a:rPr>
+              <a:t>Tasks / Subagents / Mailbox</a:t>
+            </a:r>
+          </a:p>
+        </p:txBody>
+      </p:sp>
+      <p:sp>
+        <p:nvSpPr>
+          <p:cNvPr id="20" name="Rounded Rectangle 19"/>
+          <p:cNvSpPr/>
+          <p:nvPr/>
+        </p:nvSpPr>
+        <p:spPr>
+          <a:xfrm>
+            <a:off x="4892040" y="3337560"/>
+            <a:ext cx="2240280" cy="1051560"/>
+          </a:xfrm>
+          <a:prstGeom prst="roundRect">
+            <a:avLst/>
+          </a:prstGeom>
+          <a:solidFill>
+            <a:srgbClr val="0A1224"/>
+          </a:solidFill>
+          <a:ln>
+            <a:solidFill>
+              <a:srgbClr val="22D3EE"/>
+            </a:solidFill>
+          </a:ln>
+        </p:spPr>
+        <p:style>
+          <a:lnRef idx="1">
+            <a:schemeClr val="accent1"/>
+          </a:lnRef>
+          <a:fillRef idx="3">
+            <a:schemeClr val="accent1"/>
+          </a:fillRef>
+          <a:effectRef idx="2">
+            <a:schemeClr val="accent1"/>
+          </a:effectRef>
+          <a:fontRef idx="minor">
+            <a:schemeClr val="lt1"/>
+          </a:fontRef>
+        </p:style>
+        <p:txBody>
+          <a:bodyPr rtlCol="0" anchor="ctr"/>
+          <a:lstStyle/>
+          <a:p>
+            <a:pPr algn="ctr"/>
+          </a:p>
+        </p:txBody>
+      </p:sp>
+      <p:sp>
+        <p:nvSpPr>
+          <p:cNvPr id="21" name="Rectangle 20"/>
+          <p:cNvSpPr/>
+          <p:nvPr/>
+        </p:nvSpPr>
+        <p:spPr>
+          <a:xfrm>
+            <a:off x="4892040" y="3337560"/>
+            <a:ext cx="2240280" cy="347472"/>
+          </a:xfrm>
+          <a:prstGeom prst="rect">
+            <a:avLst/>
+          </a:prstGeom>
+          <a:solidFill>
+            <a:srgbClr val="0C1E38"/>
+          </a:solidFill>
+          <a:ln>
+            <a:solidFill>
+              <a:srgbClr val="0C1E38"/>
+            </a:solidFill>
+          </a:ln>
+        </p:spPr>
+        <p:style>
+          <a:lnRef idx="1">
+            <a:schemeClr val="accent1"/>
+          </a:lnRef>
+          <a:fillRef idx="3">
+            <a:schemeClr val="accent1"/>
+          </a:fillRef>
+          <a:effectRef idx="2">
+            <a:schemeClr val="accent1"/>
+          </a:effectRef>
+          <a:fontRef idx="minor">
+            <a:schemeClr val="lt1"/>
+          </a:fontRef>
+        </p:style>
+        <p:txBody>
+          <a:bodyPr rtlCol="0" anchor="t" wrap="square" tIns="25400" bIns="25400" lIns="76200" rIns="76200"/>
+          <a:lstStyle/>
+          <a:p>
+            <a:pPr algn="ctr"/>
+            <a:r>
+              <a:rPr sz="1200" b="1">
+                <a:solidFill>
+                  <a:srgbClr val="22D3EE"/>
+                </a:solidFill>
+                <a:latin typeface="Arial"/>
+              </a:rPr>
+              <a:t>执行环境</a:t>
+            </a:r>
+          </a:p>
+        </p:txBody>
+      </p:sp>
+      <p:sp>
+        <p:nvSpPr>
+          <p:cNvPr id="22" name="TextBox 21"/>
+          <p:cNvSpPr txBox="1"/>
+          <p:nvPr/>
+        </p:nvSpPr>
+        <p:spPr>
+          <a:xfrm>
+            <a:off x="4965192" y="3739896"/>
+            <a:ext cx="2093976" cy="594359"/>
+          </a:xfrm>
+          <a:prstGeom prst="rect">
+            <a:avLst/>
+          </a:prstGeom>
+          <a:noFill/>
+        </p:spPr>
+        <p:txBody>
+          <a:bodyPr wrap="square" tIns="50800" bIns="50800" lIns="101600" rIns="101600" anchor="t">
+            <a:spAutoFit/>
+          </a:bodyPr>
+          <a:lstStyle/>
+          <a:p>
+            <a:pPr>
+              <a:spcAft>
+                <a:spcPts val="600"/>
+              </a:spcAft>
+            </a:pPr>
+            <a:r>
+              <a:rPr sz="1400" b="0">
+                <a:solidFill>
+                  <a:srgbClr val="E2E8F0"/>
+                </a:solidFill>
+                <a:latin typeface="Arial"/>
+              </a:rPr>
+              <a:t>Filesystem / Shell</a:t>
+            </a:r>
+          </a:p>
+          <a:p>
+            <a:pPr>
+              <a:spcAft>
+                <a:spcPts val="600"/>
+              </a:spcAft>
+            </a:pPr>
+            <a:r>
+              <a:rPr sz="1400" b="0">
+                <a:solidFill>
+                  <a:srgbClr val="E2E8F0"/>
+                </a:solidFill>
+                <a:latin typeface="Arial"/>
+              </a:rPr>
+              <a:t>MCP</a:t>
+            </a:r>
+          </a:p>
+        </p:txBody>
+      </p:sp>
+      <p:sp>
+        <p:nvSpPr>
+          <p:cNvPr id="23" name="Rounded Rectangle 22"/>
+          <p:cNvSpPr/>
+          <p:nvPr/>
+        </p:nvSpPr>
+        <p:spPr>
+          <a:xfrm>
+            <a:off x="7452360" y="3337560"/>
+            <a:ext cx="2926080" cy="1051560"/>
+          </a:xfrm>
+          <a:prstGeom prst="roundRect">
+            <a:avLst/>
+          </a:prstGeom>
+          <a:solidFill>
+            <a:srgbClr val="0A1224"/>
+          </a:solidFill>
+          <a:ln>
+            <a:solidFill>
+              <a:srgbClr val="22D3EE"/>
+            </a:solidFill>
+          </a:ln>
+        </p:spPr>
+        <p:style>
+          <a:lnRef idx="1">
+            <a:schemeClr val="accent1"/>
+          </a:lnRef>
+          <a:fillRef idx="3">
+            <a:schemeClr val="accent1"/>
+          </a:fillRef>
+          <a:effectRef idx="2">
+            <a:schemeClr val="accent1"/>
+          </a:effectRef>
+          <a:fontRef idx="minor">
+            <a:schemeClr val="lt1"/>
+          </a:fontRef>
+        </p:style>
+        <p:txBody>
+          <a:bodyPr rtlCol="0" anchor="ctr"/>
+          <a:lstStyle/>
+          <a:p>
+            <a:pPr algn="ctr"/>
+          </a:p>
+        </p:txBody>
+      </p:sp>
+      <p:sp>
+        <p:nvSpPr>
+          <p:cNvPr id="24" name="Rectangle 23"/>
+          <p:cNvSpPr/>
+          <p:nvPr/>
+        </p:nvSpPr>
+        <p:spPr>
+          <a:xfrm>
+            <a:off x="7452360" y="3337560"/>
+            <a:ext cx="2926080" cy="347472"/>
+          </a:xfrm>
+          <a:prstGeom prst="rect">
+            <a:avLst/>
+          </a:prstGeom>
+          <a:solidFill>
+            <a:srgbClr val="0C1E38"/>
+          </a:solidFill>
+          <a:ln>
+            <a:solidFill>
+              <a:srgbClr val="0C1E38"/>
+            </a:solidFill>
+          </a:ln>
+        </p:spPr>
+        <p:style>
+          <a:lnRef idx="1">
+            <a:schemeClr val="accent1"/>
+          </a:lnRef>
+          <a:fillRef idx="3">
+            <a:schemeClr val="accent1"/>
+          </a:fillRef>
+          <a:effectRef idx="2">
+            <a:schemeClr val="accent1"/>
+          </a:effectRef>
+          <a:fontRef idx="minor">
+            <a:schemeClr val="lt1"/>
+          </a:fontRef>
+        </p:style>
+        <p:txBody>
+          <a:bodyPr rtlCol="0" anchor="t" wrap="square" tIns="25400" bIns="25400" lIns="76200" rIns="76200"/>
+          <a:lstStyle/>
+          <a:p>
+            <a:pPr algn="ctr"/>
+            <a:r>
+              <a:rPr sz="1200" b="1">
+                <a:solidFill>
+                  <a:srgbClr val="22D3EE"/>
+                </a:solidFill>
+                <a:latin typeface="Arial"/>
+              </a:rPr>
+              <a:t>控制面</a:t>
+            </a:r>
+          </a:p>
+        </p:txBody>
+      </p:sp>
+      <p:sp>
+        <p:nvSpPr>
+          <p:cNvPr id="25" name="TextBox 24"/>
+          <p:cNvSpPr txBox="1"/>
+          <p:nvPr/>
+        </p:nvSpPr>
+        <p:spPr>
+          <a:xfrm>
+            <a:off x="7525512" y="3739896"/>
+            <a:ext cx="2779776" cy="594359"/>
+          </a:xfrm>
+          <a:prstGeom prst="rect">
+            <a:avLst/>
+          </a:prstGeom>
+          <a:noFill/>
+        </p:spPr>
+        <p:txBody>
+          <a:bodyPr wrap="square" tIns="50800" bIns="50800" lIns="101600" rIns="101600" anchor="t">
+            <a:spAutoFit/>
+          </a:bodyPr>
+          <a:lstStyle/>
+          <a:p>
+            <a:pPr>
+              <a:spcAft>
+                <a:spcPts val="600"/>
+              </a:spcAft>
+            </a:pPr>
+            <a:r>
+              <a:rPr sz="1400" b="0">
+                <a:solidFill>
+                  <a:srgbClr val="E2E8F0"/>
+                </a:solidFill>
+                <a:latin typeface="Arial"/>
+              </a:rPr>
+              <a:t>Settings / Auth / Policy</a:t>
+            </a:r>
+          </a:p>
+          <a:p>
+            <a:pPr>
+              <a:spcAft>
+                <a:spcPts val="600"/>
+              </a:spcAft>
+            </a:pPr>
+            <a:r>
+              <a:rPr sz="1400" b="0">
+                <a:solidFill>
+                  <a:srgbClr val="E2E8F0"/>
+                </a:solidFill>
+                <a:latin typeface="Arial"/>
+              </a:rPr>
+              <a:t>Prompt / Permissions</a:t>
+            </a:r>
+          </a:p>
+        </p:txBody>
+      </p:sp>
+      <p:cxnSp>
+        <p:nvCxnSpPr>
+          <p:cNvPr id="26" name="Connector 25"/>
+          <p:cNvCxnSpPr/>
+          <p:nvPr/>
+        </p:nvCxnSpPr>
+        <p:spPr>
+          <a:xfrm>
+            <a:off x="2788920" y="2148840"/>
+            <a:ext cx="365760" cy="0"/>
+          </a:xfrm>
+          <a:prstGeom prst="line">
+            <a:avLst/>
+          </a:prstGeom>
+          <a:ln w="15875">
+            <a:solidFill>
+              <a:srgbClr val="22D3EE"/>
+            </a:solidFill>
+          </a:ln>
+        </p:spPr>
+        <p:style>
+          <a:lnRef idx="2">
+            <a:schemeClr val="accent1"/>
+          </a:lnRef>
+          <a:fillRef idx="0">
+            <a:schemeClr val="accent1"/>
+          </a:fillRef>
+          <a:effectRef idx="1">
+            <a:schemeClr val="accent1"/>
+          </a:effectRef>
+          <a:fontRef idx="minor">
+            <a:schemeClr val="tx1"/>
+          </a:fontRef>
+        </p:style>
+      </p:cxnSp>
+      <p:cxnSp>
+        <p:nvCxnSpPr>
+          <p:cNvPr id="27" name="Connector 26"/>
+          <p:cNvCxnSpPr/>
+          <p:nvPr/>
+        </p:nvCxnSpPr>
+        <p:spPr>
+          <a:xfrm>
+            <a:off x="5349240" y="2148840"/>
+            <a:ext cx="365760" cy="0"/>
+          </a:xfrm>
+          <a:prstGeom prst="line">
+            <a:avLst/>
+          </a:prstGeom>
+          <a:ln w="15875">
+            <a:solidFill>
+              <a:srgbClr val="22D3EE"/>
+            </a:solidFill>
+          </a:ln>
+        </p:spPr>
+        <p:style>
+          <a:lnRef idx="2">
+            <a:schemeClr val="accent1"/>
+          </a:lnRef>
+          <a:fillRef idx="0">
+            <a:schemeClr val="accent1"/>
+          </a:fillRef>
+          <a:effectRef idx="1">
+            <a:schemeClr val="accent1"/>
+          </a:effectRef>
+          <a:fontRef idx="minor">
+            <a:schemeClr val="tx1"/>
+          </a:fontRef>
+        </p:style>
+      </p:cxnSp>
+      <p:cxnSp>
+        <p:nvCxnSpPr>
+          <p:cNvPr id="28" name="Connector 27"/>
+          <p:cNvCxnSpPr/>
+          <p:nvPr/>
+        </p:nvCxnSpPr>
+        <p:spPr>
+          <a:xfrm>
+            <a:off x="7909560" y="2148840"/>
+            <a:ext cx="365760" cy="0"/>
+          </a:xfrm>
+          <a:prstGeom prst="line">
+            <a:avLst/>
+          </a:prstGeom>
+          <a:ln w="15875">
+            <a:solidFill>
+              <a:srgbClr val="22D3EE"/>
+            </a:solidFill>
+          </a:ln>
+        </p:spPr>
+        <p:style>
+          <a:lnRef idx="2">
+            <a:schemeClr val="accent1"/>
+          </a:lnRef>
+          <a:fillRef idx="0">
+            <a:schemeClr val="accent1"/>
+          </a:fillRef>
+          <a:effectRef idx="1">
+            <a:schemeClr val="accent1"/>
+          </a:effectRef>
+          <a:fontRef idx="minor">
+            <a:schemeClr val="tx1"/>
+          </a:fontRef>
+        </p:style>
+      </p:cxnSp>
+      <p:cxnSp>
+        <p:nvCxnSpPr>
+          <p:cNvPr id="29" name="Connector 28"/>
+          <p:cNvCxnSpPr/>
+          <p:nvPr/>
+        </p:nvCxnSpPr>
+        <p:spPr>
+          <a:xfrm flipH="1">
+            <a:off x="8915400" y="2606040"/>
+            <a:ext cx="777240" cy="731520"/>
+          </a:xfrm>
+          <a:prstGeom prst="line">
+            <a:avLst/>
+          </a:prstGeom>
+          <a:ln w="15875">
+            <a:solidFill>
+              <a:srgbClr val="22D3EE"/>
+            </a:solidFill>
+          </a:ln>
+        </p:spPr>
+        <p:style>
+          <a:lnRef idx="2">
+            <a:schemeClr val="accent1"/>
+          </a:lnRef>
+          <a:fillRef idx="0">
+            <a:schemeClr val="accent1"/>
+          </a:fillRef>
+          <a:effectRef idx="1">
+            <a:schemeClr val="accent1"/>
+          </a:effectRef>
+          <a:fontRef idx="minor">
+            <a:schemeClr val="tx1"/>
+          </a:fontRef>
+        </p:style>
+      </p:cxnSp>
+      <p:cxnSp>
+        <p:nvCxnSpPr>
+          <p:cNvPr id="30" name="Connector 29"/>
+          <p:cNvCxnSpPr/>
+          <p:nvPr/>
+        </p:nvCxnSpPr>
+        <p:spPr>
+          <a:xfrm>
+            <a:off x="7132320" y="3858768"/>
+            <a:ext cx="320040" cy="0"/>
+          </a:xfrm>
+          <a:prstGeom prst="line">
+            <a:avLst/>
+          </a:prstGeom>
+          <a:ln w="15875">
+            <a:solidFill>
+              <a:srgbClr val="22D3EE"/>
+            </a:solidFill>
+          </a:ln>
+        </p:spPr>
+        <p:style>
+          <a:lnRef idx="2">
+            <a:schemeClr val="accent1"/>
+          </a:lnRef>
+          <a:fillRef idx="0">
+            <a:schemeClr val="accent1"/>
+          </a:fillRef>
+          <a:effectRef idx="1">
+            <a:schemeClr val="accent1"/>
+          </a:effectRef>
+          <a:fontRef idx="minor">
+            <a:schemeClr val="tx1"/>
+          </a:fontRef>
+        </p:style>
+      </p:cxnSp>
+      <p:cxnSp>
+        <p:nvCxnSpPr>
+          <p:cNvPr id="31" name="Connector 30"/>
+          <p:cNvCxnSpPr/>
+          <p:nvPr/>
+        </p:nvCxnSpPr>
+        <p:spPr>
+          <a:xfrm>
+            <a:off x="4480560" y="3858768"/>
+            <a:ext cx="411480" cy="0"/>
+          </a:xfrm>
+          <a:prstGeom prst="line">
+            <a:avLst/>
+          </a:prstGeom>
+          <a:ln w="15875">
+            <a:solidFill>
+              <a:srgbClr val="22D3EE"/>
+            </a:solidFill>
+          </a:ln>
+        </p:spPr>
+        <p:style>
+          <a:lnRef idx="2">
+            <a:schemeClr val="accent1"/>
+          </a:lnRef>
+          <a:fillRef idx="0">
+            <a:schemeClr val="accent1"/>
+          </a:fillRef>
+          <a:effectRef idx="1">
+            <a:schemeClr val="accent1"/>
+          </a:effectRef>
+          <a:fontRef idx="minor">
+            <a:schemeClr val="tx1"/>
+          </a:fontRef>
+        </p:style>
+      </p:cxnSp>
+      <p:sp>
+        <p:nvSpPr>
+          <p:cNvPr id="32" name="Rounded Rectangle 31"/>
+          <p:cNvSpPr/>
+          <p:nvPr/>
+        </p:nvSpPr>
+        <p:spPr>
+          <a:xfrm>
+            <a:off x="1234440" y="4892040"/>
+            <a:ext cx="9738360" cy="685800"/>
+          </a:xfrm>
+          <a:prstGeom prst="roundRect">
+            <a:avLst/>
+          </a:prstGeom>
+          <a:solidFill>
+            <a:srgbClr val="0F172A"/>
+          </a:solidFill>
+          <a:ln>
+            <a:solidFill>
+              <a:srgbClr val="22D3EE"/>
+            </a:solidFill>
+          </a:ln>
+        </p:spPr>
+        <p:style>
+          <a:lnRef idx="1">
+            <a:schemeClr val="accent1"/>
+          </a:lnRef>
+          <a:fillRef idx="3">
+            <a:schemeClr val="accent1"/>
+          </a:fillRef>
+          <a:effectRef idx="2">
+            <a:schemeClr val="accent1"/>
+          </a:effectRef>
+          <a:fontRef idx="minor">
+            <a:schemeClr val="lt1"/>
+          </a:fontRef>
+        </p:style>
+        <p:txBody>
           <a:bodyPr rtlCol="0" anchor="t" wrap="square" tIns="50800" bIns="50800" lIns="101600" rIns="101600"/>
           <a:lstStyle/>
           <a:p>
@@ -8108,187 +9700,20 @@
               </a:spcAft>
             </a:pPr>
             <a:r>
-              <a:rPr sz="1600" b="0">
-                <a:solidFill>
-                  <a:srgbClr val="1E293B"/>
-                </a:solidFill>
-                <a:latin typeface="Arial"/>
-              </a:rPr>
-              <a:t>Claude Code 是 terminal agent runtime（终端代理运行时），不是只包了一层模型 API 的 CLI。</a:t>
-            </a:r>
-          </a:p>
-        </p:txBody>
-      </p:sp>
-      <p:sp>
-        <p:nvSpPr>
-          <p:cNvPr id="5" name="TextBox 4"/>
-          <p:cNvSpPr txBox="1"/>
-          <p:nvPr/>
-        </p:nvSpPr>
-        <p:spPr>
-          <a:xfrm>
-            <a:off x="749808" y="2450592"/>
-            <a:ext cx="5577840" cy="3063240"/>
-          </a:xfrm>
-          <a:prstGeom prst="rect">
-            <a:avLst/>
-          </a:prstGeom>
-          <a:noFill/>
-        </p:spPr>
-        <p:txBody>
-          <a:bodyPr wrap="square" tIns="50800" bIns="50800" lIns="101600" rIns="101600" anchor="t">
-            <a:spAutoFit/>
-          </a:bodyPr>
-          <a:lstStyle/>
-          <a:p>
-            <a:pPr>
-              <a:spcAft>
-                <a:spcPts val="800"/>
-              </a:spcAft>
-            </a:pPr>
-            <a:r>
-              <a:rPr sz="1700" b="0">
-                <a:solidFill>
-                  <a:srgbClr val="1E293B"/>
-                </a:solidFill>
-                <a:latin typeface="Arial"/>
-              </a:rPr>
-              <a:t>main.tsx：bootstrap / assembly（启动 / 装配）</a:t>
-            </a:r>
-          </a:p>
-          <a:p>
-            <a:pPr>
-              <a:spcAft>
-                <a:spcPts val="800"/>
-              </a:spcAft>
-            </a:pPr>
-            <a:r>
-              <a:rPr sz="1700" b="0">
-                <a:solidFill>
-                  <a:srgbClr val="1E293B"/>
-                </a:solidFill>
-                <a:latin typeface="Arial"/>
-              </a:rPr>
-              <a:t>QueryEngine.ts：conversation host（会话宿主）</a:t>
-            </a:r>
-          </a:p>
-          <a:p>
-            <a:pPr>
-              <a:spcAft>
-                <a:spcPts val="800"/>
-              </a:spcAft>
-            </a:pPr>
-            <a:r>
-              <a:rPr sz="1700" b="0">
-                <a:solidFill>
-                  <a:srgbClr val="1E293B"/>
-                </a:solidFill>
-                <a:latin typeface="Arial"/>
-              </a:rPr>
-              <a:t>query.ts：turn loop / runtime kernel（轮次循环 / 运行时内核）</a:t>
-            </a:r>
-          </a:p>
-          <a:p>
-            <a:pPr>
-              <a:spcAft>
-                <a:spcPts val="800"/>
-              </a:spcAft>
-            </a:pPr>
-            <a:r>
-              <a:rPr sz="1700" b="0">
-                <a:solidFill>
-                  <a:srgbClr val="1E293B"/>
-                </a:solidFill>
-                <a:latin typeface="Arial"/>
-              </a:rPr>
-              <a:t>toolExecution.ts：tool pipeline（工具执行流水线）</a:t>
-            </a:r>
-          </a:p>
-          <a:p>
-            <a:pPr>
-              <a:spcAft>
-                <a:spcPts val="800"/>
-              </a:spcAft>
-            </a:pPr>
-            <a:r>
-              <a:rPr sz="1700" b="0">
-                <a:solidFill>
-                  <a:srgbClr val="1E293B"/>
-                </a:solidFill>
-                <a:latin typeface="Arial"/>
-              </a:rPr>
-              <a:t>settings / auth / policy：control plane（控制面）</a:t>
-            </a:r>
-          </a:p>
-        </p:txBody>
-      </p:sp>
-      <p:sp>
-        <p:nvSpPr>
-          <p:cNvPr id="6" name="Rounded Rectangle 5"/>
-          <p:cNvSpPr/>
-          <p:nvPr/>
-        </p:nvSpPr>
-        <p:spPr>
-          <a:xfrm>
-            <a:off x="6537960" y="2468880"/>
-            <a:ext cx="4800600" cy="2468880"/>
-          </a:xfrm>
-          <a:prstGeom prst="roundRect">
-            <a:avLst/>
-          </a:prstGeom>
-          <a:solidFill>
-            <a:srgbClr val="F1F5F9"/>
-          </a:solidFill>
-          <a:ln>
-            <a:solidFill>
-              <a:srgbClr val="CBD5E1"/>
-            </a:solidFill>
-          </a:ln>
-        </p:spPr>
-        <p:style>
-          <a:lnRef idx="1">
-            <a:schemeClr val="accent1"/>
-          </a:lnRef>
-          <a:fillRef idx="3">
-            <a:schemeClr val="accent1"/>
-          </a:fillRef>
-          <a:effectRef idx="2">
-            <a:schemeClr val="accent1"/>
-          </a:effectRef>
-          <a:fontRef idx="minor">
-            <a:schemeClr val="lt1"/>
-          </a:fontRef>
-        </p:style>
-        <p:txBody>
-          <a:bodyPr rtlCol="0" anchor="t" wrap="square" tIns="76200" bIns="76200" lIns="101600" rIns="101600"/>
-          <a:lstStyle/>
-          <a:p>
-            <a:pPr algn="ctr"/>
-            <a:r>
-              <a:rPr sz="1300" b="0">
-                <a:solidFill>
-                  <a:srgbClr val="1E293B"/>
-                </a:solidFill>
-                <a:latin typeface="Courier New"/>
-              </a:rPr>
-              <a:t>export class QueryEngine {
-  private mutableMessages: Message[]
-  private totalUsage: NonNullableUsage
-  private readFileState: FileStateCache
-}
-type State = {
-  messages: Message[]
-  toolUseContext: ToolUseContext
-  turnCount: number
-  transition: Continue | undefined
-}</a:t>
-            </a:r>
-          </a:p>
-        </p:txBody>
-      </p:sp>
-      <p:sp>
-        <p:nvSpPr>
-          <p:cNvPr id="7" name="TextBox 6"/>
+              <a:rPr sz="1500" b="0">
+                <a:solidFill>
+                  <a:srgbClr val="E2E8F0"/>
+                </a:solidFill>
+                <a:latin typeface="Arial"/>
+              </a:rPr>
+              <a:t>一句话：Claude Code 不是“模型 API + 终端壳”，而是由会话层、轮次循环、工具执行层和控制面组成的本地代理运行时。</a:t>
+            </a:r>
+          </a:p>
+        </p:txBody>
+      </p:sp>
+      <p:sp>
+        <p:nvSpPr>
+          <p:cNvPr id="33" name="TextBox 32"/>
           <p:cNvSpPr txBox="1"/>
           <p:nvPr/>
         </p:nvSpPr>
@@ -8312,11 +9737,11 @@
             <a:r>
               <a:rPr sz="1100" b="0">
                 <a:solidFill>
-                  <a:srgbClr val="475569"/>
-                </a:solidFill>
-                <a:latin typeface="Arial"/>
-              </a:rPr>
-              <a:t>源码依据：QueryEngine.ts、query.ts、toolExecution.ts</a:t>
+                  <a:srgbClr val="94A3B8"/>
+                </a:solidFill>
+                <a:latin typeface="Arial"/>
+              </a:rPr>
+              <a:t>代码锚点：main.tsx / QueryEngine.ts / query.ts / toolExecution.ts</a:t>
             </a:r>
           </a:p>
         </p:txBody>
@@ -8335,7 +9760,7 @@
     <p:bg>
       <p:bgPr>
         <a:solidFill>
-          <a:srgbClr val="F8FAFC"/>
+          <a:srgbClr val="020617"/>
         </a:solidFill>
         <a:effectLst/>
       </p:bgPr>
@@ -8372,7 +9797,7 @@
             <a:r>
               <a:rPr sz="2400" b="1">
                 <a:solidFill>
-                  <a:srgbClr val="0F172A"/>
+                  <a:srgbClr val="F1F5F9"/>
                 </a:solidFill>
                 <a:latin typeface="Arial"/>
               </a:rPr>
@@ -8396,7 +9821,7 @@
             <a:avLst/>
           </a:prstGeom>
           <a:solidFill>
-            <a:srgbClr val="CBD5E1"/>
+            <a:srgbClr val="22D3EE"/>
           </a:solidFill>
           <a:ln>
             <a:noFill/>
@@ -8439,11 +9864,11 @@
             <a:avLst/>
           </a:prstGeom>
           <a:solidFill>
-            <a:srgbClr val="DBEAFE"/>
+            <a:srgbClr val="0F172A"/>
           </a:solidFill>
           <a:ln>
             <a:solidFill>
-              <a:srgbClr val="2563EB"/>
+              <a:srgbClr val="22D3EE"/>
             </a:solidFill>
           </a:ln>
         </p:spPr>
@@ -8473,7 +9898,7 @@
             <a:r>
               <a:rPr sz="1600" b="0">
                 <a:solidFill>
-                  <a:srgbClr val="1E293B"/>
+                  <a:srgbClr val="E2E8F0"/>
                 </a:solidFill>
                 <a:latin typeface="Arial"/>
               </a:rPr>
@@ -8512,7 +9937,7 @@
             <a:r>
               <a:rPr sz="1700" b="0">
                 <a:solidFill>
-                  <a:srgbClr val="1E293B"/>
+                  <a:srgbClr val="E2E8F0"/>
                 </a:solidFill>
                 <a:latin typeface="Arial"/>
               </a:rPr>
@@ -8528,7 +9953,7 @@
             <a:r>
               <a:rPr sz="1700" b="0">
                 <a:solidFill>
-                  <a:srgbClr val="1E293B"/>
+                  <a:srgbClr val="E2E8F0"/>
                 </a:solidFill>
                 <a:latin typeface="Arial"/>
               </a:rPr>
@@ -8544,7 +9969,7 @@
             <a:r>
               <a:rPr sz="1700" b="0">
                 <a:solidFill>
-                  <a:srgbClr val="1E293B"/>
+                  <a:srgbClr val="E2E8F0"/>
                 </a:solidFill>
                 <a:latin typeface="Arial"/>
               </a:rPr>
@@ -8560,7 +9985,7 @@
             <a:r>
               <a:rPr sz="1700" b="0">
                 <a:solidFill>
-                  <a:srgbClr val="1E293B"/>
+                  <a:srgbClr val="E2E8F0"/>
                 </a:solidFill>
                 <a:latin typeface="Arial"/>
               </a:rPr>
@@ -8576,7 +10001,7 @@
             <a:r>
               <a:rPr sz="1700" b="0">
                 <a:solidFill>
-                  <a:srgbClr val="1E293B"/>
+                  <a:srgbClr val="E2E8F0"/>
                 </a:solidFill>
                 <a:latin typeface="Arial"/>
               </a:rPr>
@@ -8600,11 +10025,11 @@
             <a:avLst/>
           </a:prstGeom>
           <a:solidFill>
-            <a:srgbClr val="F1F5F9"/>
+            <a:srgbClr val="030712"/>
           </a:solidFill>
           <a:ln>
             <a:solidFill>
-              <a:srgbClr val="CBD5E1"/>
+              <a:srgbClr val="22D3EE"/>
             </a:solidFill>
           </a:ln>
         </p:spPr>
@@ -8623,14 +10048,14 @@
           </a:fontRef>
         </p:style>
         <p:txBody>
-          <a:bodyPr rtlCol="0" anchor="t" wrap="square" tIns="76200" bIns="76200" lIns="101600" rIns="101600"/>
+          <a:bodyPr rtlCol="0" anchor="t" wrap="square" tIns="203200" bIns="76200" lIns="127000" rIns="127000"/>
           <a:lstStyle/>
           <a:p>
             <a:pPr algn="ctr"/>
             <a:r>
-              <a:rPr sz="1300" b="0">
-                <a:solidFill>
-                  <a:srgbClr val="1E293B"/>
+              <a:rPr sz="1250" b="0">
+                <a:solidFill>
+                  <a:srgbClr val="C4FFEC"/>
                 </a:solidFill>
                 <a:latin typeface="Courier New"/>
               </a:rPr>
@@ -8643,7 +10068,61 @@
       </p:sp>
       <p:sp>
         <p:nvSpPr>
-          <p:cNvPr id="7" name="TextBox 6"/>
+          <p:cNvPr id="7" name="Rectangle 6"/>
+          <p:cNvSpPr/>
+          <p:nvPr/>
+        </p:nvSpPr>
+        <p:spPr>
+          <a:xfrm>
+            <a:off x="6537960" y="2468880"/>
+            <a:ext cx="4800600" cy="256032"/>
+          </a:xfrm>
+          <a:prstGeom prst="rect">
+            <a:avLst/>
+          </a:prstGeom>
+          <a:solidFill>
+            <a:srgbClr val="0D1426"/>
+          </a:solidFill>
+          <a:ln>
+            <a:solidFill>
+              <a:srgbClr val="0D1426"/>
+            </a:solidFill>
+          </a:ln>
+        </p:spPr>
+        <p:style>
+          <a:lnRef idx="1">
+            <a:schemeClr val="accent1"/>
+          </a:lnRef>
+          <a:fillRef idx="3">
+            <a:schemeClr val="accent1"/>
+          </a:fillRef>
+          <a:effectRef idx="2">
+            <a:schemeClr val="accent1"/>
+          </a:effectRef>
+          <a:fontRef idx="minor">
+            <a:schemeClr val="lt1"/>
+          </a:fontRef>
+        </p:style>
+        <p:txBody>
+          <a:bodyPr rtlCol="0" anchor="t" wrap="square" tIns="12700" bIns="12700" lIns="76200" rIns="76200"/>
+          <a:lstStyle/>
+          <a:p>
+            <a:pPr algn="ctr"/>
+            <a:r>
+              <a:rPr sz="1000" b="1">
+                <a:solidFill>
+                  <a:srgbClr val="22D3EE"/>
+                </a:solidFill>
+                <a:latin typeface="Courier New"/>
+              </a:rPr>
+              <a:t>code</a:t>
+            </a:r>
+          </a:p>
+        </p:txBody>
+      </p:sp>
+      <p:sp>
+        <p:nvSpPr>
+          <p:cNvPr id="8" name="TextBox 7"/>
           <p:cNvSpPr txBox="1"/>
           <p:nvPr/>
         </p:nvSpPr>
@@ -8667,7 +10146,7 @@
             <a:r>
               <a:rPr sz="1100" b="0">
                 <a:solidFill>
-                  <a:srgbClr val="475569"/>
+                  <a:srgbClr val="94A3B8"/>
                 </a:solidFill>
                 <a:latin typeface="Arial"/>
               </a:rPr>
@@ -8690,7 +10169,7 @@
     <p:bg>
       <p:bgPr>
         <a:solidFill>
-          <a:srgbClr val="F8FAFC"/>
+          <a:srgbClr val="020617"/>
         </a:solidFill>
         <a:effectLst/>
       </p:bgPr>
@@ -8727,7 +10206,7 @@
             <a:r>
               <a:rPr sz="2400" b="1">
                 <a:solidFill>
-                  <a:srgbClr val="0F172A"/>
+                  <a:srgbClr val="F1F5F9"/>
                 </a:solidFill>
                 <a:latin typeface="Arial"/>
               </a:rPr>
@@ -8751,7 +10230,7 @@
             <a:avLst/>
           </a:prstGeom>
           <a:solidFill>
-            <a:srgbClr val="CBD5E1"/>
+            <a:srgbClr val="22D3EE"/>
           </a:solidFill>
           <a:ln>
             <a:noFill/>
@@ -8794,11 +10273,11 @@
             <a:avLst/>
           </a:prstGeom>
           <a:solidFill>
-            <a:srgbClr val="DBEAFE"/>
+            <a:srgbClr val="0F172A"/>
           </a:solidFill>
           <a:ln>
             <a:solidFill>
-              <a:srgbClr val="2563EB"/>
+              <a:srgbClr val="22D3EE"/>
             </a:solidFill>
           </a:ln>
         </p:spPr>
@@ -8828,7 +10307,7 @@
             <a:r>
               <a:rPr sz="1600" b="0">
                 <a:solidFill>
-                  <a:srgbClr val="1E293B"/>
+                  <a:srgbClr val="E2E8F0"/>
                 </a:solidFill>
                 <a:latin typeface="Arial"/>
               </a:rPr>
@@ -8852,11 +10331,11 @@
             <a:avLst/>
           </a:prstGeom>
           <a:solidFill>
-            <a:srgbClr val="FFFFFF"/>
+            <a:srgbClr val="0A1224"/>
           </a:solidFill>
           <a:ln>
             <a:solidFill>
-              <a:srgbClr val="2563EB"/>
+              <a:srgbClr val="22D3EE"/>
             </a:solidFill>
           </a:ln>
         </p:spPr>
@@ -8897,11 +10376,11 @@
             <a:avLst/>
           </a:prstGeom>
           <a:solidFill>
-            <a:srgbClr val="DBEAFE"/>
+            <a:srgbClr val="0F172A"/>
           </a:solidFill>
           <a:ln>
             <a:solidFill>
-              <a:srgbClr val="DBEAFE"/>
+              <a:srgbClr val="0F172A"/>
             </a:solidFill>
           </a:ln>
         </p:spPr>
@@ -8927,7 +10406,7 @@
             <a:r>
               <a:rPr sz="1200" b="1">
                 <a:solidFill>
-                  <a:srgbClr val="2563EB"/>
+                  <a:srgbClr val="22D3EE"/>
                 </a:solidFill>
                 <a:latin typeface="Arial"/>
               </a:rPr>
@@ -8966,7 +10445,7 @@
             <a:r>
               <a:rPr sz="1400" b="0">
                 <a:solidFill>
-                  <a:srgbClr val="1E293B"/>
+                  <a:srgbClr val="E2E8F0"/>
                 </a:solidFill>
                 <a:latin typeface="Arial"/>
               </a:rPr>
@@ -8982,7 +10461,7 @@
             <a:r>
               <a:rPr sz="1400" b="0">
                 <a:solidFill>
-                  <a:srgbClr val="1E293B"/>
+                  <a:srgbClr val="E2E8F0"/>
                 </a:solidFill>
                 <a:latin typeface="Arial"/>
               </a:rPr>
@@ -8998,7 +10477,7 @@
             <a:r>
               <a:rPr sz="1400" b="0">
                 <a:solidFill>
-                  <a:srgbClr val="1E293B"/>
+                  <a:srgbClr val="E2E8F0"/>
                 </a:solidFill>
                 <a:latin typeface="Arial"/>
               </a:rPr>
@@ -9014,7 +10493,7 @@
             <a:r>
               <a:rPr sz="1400" b="0">
                 <a:solidFill>
-                  <a:srgbClr val="1E293B"/>
+                  <a:srgbClr val="E2E8F0"/>
                 </a:solidFill>
                 <a:latin typeface="Arial"/>
               </a:rPr>
@@ -9038,11 +10517,11 @@
             <a:avLst/>
           </a:prstGeom>
           <a:solidFill>
-            <a:srgbClr val="FFFFFF"/>
+            <a:srgbClr val="0A1224"/>
           </a:solidFill>
           <a:ln>
             <a:solidFill>
-              <a:srgbClr val="2563EB"/>
+              <a:srgbClr val="22D3EE"/>
             </a:solidFill>
           </a:ln>
         </p:spPr>
@@ -9083,11 +10562,11 @@
             <a:avLst/>
           </a:prstGeom>
           <a:solidFill>
-            <a:srgbClr val="DBEAFE"/>
+            <a:srgbClr val="0F172A"/>
           </a:solidFill>
           <a:ln>
             <a:solidFill>
-              <a:srgbClr val="DBEAFE"/>
+              <a:srgbClr val="0F172A"/>
             </a:solidFill>
           </a:ln>
         </p:spPr>
@@ -9113,7 +10592,7 @@
             <a:r>
               <a:rPr sz="1200" b="1">
                 <a:solidFill>
-                  <a:srgbClr val="2563EB"/>
+                  <a:srgbClr val="22D3EE"/>
                 </a:solidFill>
                 <a:latin typeface="Arial"/>
               </a:rPr>
@@ -9152,7 +10631,7 @@
             <a:r>
               <a:rPr sz="1400" b="0">
                 <a:solidFill>
-                  <a:srgbClr val="1E293B"/>
+                  <a:srgbClr val="E2E8F0"/>
                 </a:solidFill>
                 <a:latin typeface="Arial"/>
               </a:rPr>
@@ -9168,7 +10647,7 @@
             <a:r>
               <a:rPr sz="1400" b="0">
                 <a:solidFill>
-                  <a:srgbClr val="1E293B"/>
+                  <a:srgbClr val="E2E8F0"/>
                 </a:solidFill>
                 <a:latin typeface="Arial"/>
               </a:rPr>
@@ -9192,11 +10671,11 @@
             <a:avLst/>
           </a:prstGeom>
           <a:solidFill>
-            <a:srgbClr val="FFFFFF"/>
+            <a:srgbClr val="0A1224"/>
           </a:solidFill>
           <a:ln>
             <a:solidFill>
-              <a:srgbClr val="2563EB"/>
+              <a:srgbClr val="22D3EE"/>
             </a:solidFill>
           </a:ln>
         </p:spPr>
@@ -9237,11 +10716,11 @@
             <a:avLst/>
           </a:prstGeom>
           <a:solidFill>
-            <a:srgbClr val="DBEAFE"/>
+            <a:srgbClr val="0F172A"/>
           </a:solidFill>
           <a:ln>
             <a:solidFill>
-              <a:srgbClr val="DBEAFE"/>
+              <a:srgbClr val="0F172A"/>
             </a:solidFill>
           </a:ln>
         </p:spPr>
@@ -9267,7 +10746,7 @@
             <a:r>
               <a:rPr sz="1200" b="1">
                 <a:solidFill>
-                  <a:srgbClr val="2563EB"/>
+                  <a:srgbClr val="22D3EE"/>
                 </a:solidFill>
                 <a:latin typeface="Arial"/>
               </a:rPr>
@@ -9306,7 +10785,7 @@
             <a:r>
               <a:rPr sz="1400" b="0">
                 <a:solidFill>
-                  <a:srgbClr val="1E293B"/>
+                  <a:srgbClr val="E2E8F0"/>
                 </a:solidFill>
                 <a:latin typeface="Arial"/>
               </a:rPr>
@@ -9322,7 +10801,7 @@
             <a:r>
               <a:rPr sz="1400" b="0">
                 <a:solidFill>
-                  <a:srgbClr val="1E293B"/>
+                  <a:srgbClr val="E2E8F0"/>
                 </a:solidFill>
                 <a:latin typeface="Arial"/>
               </a:rPr>
@@ -9346,11 +10825,11 @@
             <a:avLst/>
           </a:prstGeom>
           <a:solidFill>
-            <a:srgbClr val="F1F5F9"/>
+            <a:srgbClr val="030712"/>
           </a:solidFill>
           <a:ln>
             <a:solidFill>
-              <a:srgbClr val="CBD5E1"/>
+              <a:srgbClr val="22D3EE"/>
             </a:solidFill>
           </a:ln>
         </p:spPr>
@@ -9369,14 +10848,14 @@
           </a:fontRef>
         </p:style>
         <p:txBody>
-          <a:bodyPr rtlCol="0" anchor="t" wrap="square" tIns="76200" bIns="76200" lIns="101600" rIns="101600"/>
+          <a:bodyPr rtlCol="0" anchor="t" wrap="square" tIns="203200" bIns="76200" lIns="127000" rIns="127000"/>
           <a:lstStyle/>
           <a:p>
             <a:pPr algn="ctr"/>
             <a:r>
-              <a:rPr sz="1300" b="0">
-                <a:solidFill>
-                  <a:srgbClr val="1E293B"/>
+              <a:rPr sz="1250" b="0">
+                <a:solidFill>
+                  <a:srgbClr val="C4FFEC"/>
                 </a:solidFill>
                 <a:latin typeface="Courier New"/>
               </a:rPr>
@@ -9389,7 +10868,61 @@
       </p:sp>
       <p:sp>
         <p:nvSpPr>
-          <p:cNvPr id="15" name="TextBox 14"/>
+          <p:cNvPr id="15" name="Rectangle 14"/>
+          <p:cNvSpPr/>
+          <p:nvPr/>
+        </p:nvSpPr>
+        <p:spPr>
+          <a:xfrm>
+            <a:off x="658368" y="4160520"/>
+            <a:ext cx="10972800" cy="256032"/>
+          </a:xfrm>
+          <a:prstGeom prst="rect">
+            <a:avLst/>
+          </a:prstGeom>
+          <a:solidFill>
+            <a:srgbClr val="0D1426"/>
+          </a:solidFill>
+          <a:ln>
+            <a:solidFill>
+              <a:srgbClr val="0D1426"/>
+            </a:solidFill>
+          </a:ln>
+        </p:spPr>
+        <p:style>
+          <a:lnRef idx="1">
+            <a:schemeClr val="accent1"/>
+          </a:lnRef>
+          <a:fillRef idx="3">
+            <a:schemeClr val="accent1"/>
+          </a:fillRef>
+          <a:effectRef idx="2">
+            <a:schemeClr val="accent1"/>
+          </a:effectRef>
+          <a:fontRef idx="minor">
+            <a:schemeClr val="lt1"/>
+          </a:fontRef>
+        </p:style>
+        <p:txBody>
+          <a:bodyPr rtlCol="0" anchor="t" wrap="square" tIns="12700" bIns="12700" lIns="76200" rIns="76200"/>
+          <a:lstStyle/>
+          <a:p>
+            <a:pPr algn="ctr"/>
+            <a:r>
+              <a:rPr sz="1000" b="1">
+                <a:solidFill>
+                  <a:srgbClr val="22D3EE"/>
+                </a:solidFill>
+                <a:latin typeface="Courier New"/>
+              </a:rPr>
+              <a:t>code</a:t>
+            </a:r>
+          </a:p>
+        </p:txBody>
+      </p:sp>
+      <p:sp>
+        <p:nvSpPr>
+          <p:cNvPr id="16" name="TextBox 15"/>
           <p:cNvSpPr txBox="1"/>
           <p:nvPr/>
         </p:nvSpPr>
@@ -9413,7 +10946,7 @@
             <a:r>
               <a:rPr sz="1100" b="0">
                 <a:solidFill>
-                  <a:srgbClr val="475569"/>
+                  <a:srgbClr val="94A3B8"/>
                 </a:solidFill>
                 <a:latin typeface="Arial"/>
               </a:rPr>
@@ -9436,7 +10969,7 @@
     <p:bg>
       <p:bgPr>
         <a:solidFill>
-          <a:srgbClr val="F8FAFC"/>
+          <a:srgbClr val="020617"/>
         </a:solidFill>
         <a:effectLst/>
       </p:bgPr>
@@ -9473,7 +11006,7 @@
             <a:r>
               <a:rPr sz="2400" b="1">
                 <a:solidFill>
-                  <a:srgbClr val="0F172A"/>
+                  <a:srgbClr val="F1F5F9"/>
                 </a:solidFill>
                 <a:latin typeface="Arial"/>
               </a:rPr>
@@ -9497,7 +11030,7 @@
             <a:avLst/>
           </a:prstGeom>
           <a:solidFill>
-            <a:srgbClr val="CBD5E1"/>
+            <a:srgbClr val="22D3EE"/>
           </a:solidFill>
           <a:ln>
             <a:noFill/>
@@ -9540,11 +11073,11 @@
             <a:avLst/>
           </a:prstGeom>
           <a:solidFill>
-            <a:srgbClr val="DBEAFE"/>
+            <a:srgbClr val="0F172A"/>
           </a:solidFill>
           <a:ln>
             <a:solidFill>
-              <a:srgbClr val="2563EB"/>
+              <a:srgbClr val="22D3EE"/>
             </a:solidFill>
           </a:ln>
         </p:spPr>
@@ -9574,7 +11107,7 @@
             <a:r>
               <a:rPr sz="1600" b="0">
                 <a:solidFill>
-                  <a:srgbClr val="1E293B"/>
+                  <a:srgbClr val="E2E8F0"/>
                 </a:solidFill>
                 <a:latin typeface="Arial"/>
               </a:rPr>
@@ -9598,11 +11131,11 @@
             <a:avLst/>
           </a:prstGeom>
           <a:solidFill>
-            <a:srgbClr val="FFFFFF"/>
+            <a:srgbClr val="0A1224"/>
           </a:solidFill>
           <a:ln>
             <a:solidFill>
-              <a:srgbClr val="2563EB"/>
+              <a:srgbClr val="22D3EE"/>
             </a:solidFill>
           </a:ln>
         </p:spPr>
@@ -9643,11 +11176,11 @@
             <a:avLst/>
           </a:prstGeom>
           <a:solidFill>
-            <a:srgbClr val="DBEAFE"/>
+            <a:srgbClr val="0F172A"/>
           </a:solidFill>
           <a:ln>
             <a:solidFill>
-              <a:srgbClr val="DBEAFE"/>
+              <a:srgbClr val="0F172A"/>
             </a:solidFill>
           </a:ln>
         </p:spPr>
@@ -9673,7 +11206,7 @@
             <a:r>
               <a:rPr sz="1200" b="1">
                 <a:solidFill>
-                  <a:srgbClr val="2563EB"/>
+                  <a:srgbClr val="22D3EE"/>
                 </a:solidFill>
                 <a:latin typeface="Arial"/>
               </a:rPr>
@@ -9712,7 +11245,7 @@
             <a:r>
               <a:rPr sz="1400" b="0">
                 <a:solidFill>
-                  <a:srgbClr val="1E293B"/>
+                  <a:srgbClr val="E2E8F0"/>
                 </a:solidFill>
                 <a:latin typeface="Arial"/>
               </a:rPr>
@@ -9728,7 +11261,7 @@
             <a:r>
               <a:rPr sz="1400" b="0">
                 <a:solidFill>
-                  <a:srgbClr val="1E293B"/>
+                  <a:srgbClr val="E2E8F0"/>
                 </a:solidFill>
                 <a:latin typeface="Arial"/>
               </a:rPr>
@@ -9752,11 +11285,11 @@
             <a:avLst/>
           </a:prstGeom>
           <a:solidFill>
-            <a:srgbClr val="FFFFFF"/>
+            <a:srgbClr val="0A1224"/>
           </a:solidFill>
           <a:ln>
             <a:solidFill>
-              <a:srgbClr val="2563EB"/>
+              <a:srgbClr val="22D3EE"/>
             </a:solidFill>
           </a:ln>
         </p:spPr>
@@ -9797,11 +11330,11 @@
             <a:avLst/>
           </a:prstGeom>
           <a:solidFill>
-            <a:srgbClr val="DBEAFE"/>
+            <a:srgbClr val="0F172A"/>
           </a:solidFill>
           <a:ln>
             <a:solidFill>
-              <a:srgbClr val="DBEAFE"/>
+              <a:srgbClr val="0F172A"/>
             </a:solidFill>
           </a:ln>
         </p:spPr>
@@ -9827,7 +11360,7 @@
             <a:r>
               <a:rPr sz="1200" b="1">
                 <a:solidFill>
-                  <a:srgbClr val="2563EB"/>
+                  <a:srgbClr val="22D3EE"/>
                 </a:solidFill>
                 <a:latin typeface="Arial"/>
               </a:rPr>
@@ -9866,7 +11399,7 @@
             <a:r>
               <a:rPr sz="1400" b="0">
                 <a:solidFill>
-                  <a:srgbClr val="1E293B"/>
+                  <a:srgbClr val="E2E8F0"/>
                 </a:solidFill>
                 <a:latin typeface="Arial"/>
               </a:rPr>
@@ -9882,7 +11415,7 @@
             <a:r>
               <a:rPr sz="1400" b="0">
                 <a:solidFill>
-                  <a:srgbClr val="1E293B"/>
+                  <a:srgbClr val="E2E8F0"/>
                 </a:solidFill>
                 <a:latin typeface="Arial"/>
               </a:rPr>
@@ -9906,11 +11439,11 @@
             <a:avLst/>
           </a:prstGeom>
           <a:solidFill>
-            <a:srgbClr val="FFFFFF"/>
+            <a:srgbClr val="0A1224"/>
           </a:solidFill>
           <a:ln>
             <a:solidFill>
-              <a:srgbClr val="2563EB"/>
+              <a:srgbClr val="22D3EE"/>
             </a:solidFill>
           </a:ln>
         </p:spPr>
@@ -9951,11 +11484,11 @@
             <a:avLst/>
           </a:prstGeom>
           <a:solidFill>
-            <a:srgbClr val="DBEAFE"/>
+            <a:srgbClr val="0F172A"/>
           </a:solidFill>
           <a:ln>
             <a:solidFill>
-              <a:srgbClr val="DBEAFE"/>
+              <a:srgbClr val="0F172A"/>
             </a:solidFill>
           </a:ln>
         </p:spPr>
@@ -9981,7 +11514,7 @@
             <a:r>
               <a:rPr sz="1200" b="1">
                 <a:solidFill>
-                  <a:srgbClr val="2563EB"/>
+                  <a:srgbClr val="22D3EE"/>
                 </a:solidFill>
                 <a:latin typeface="Arial"/>
               </a:rPr>
@@ -10020,7 +11553,7 @@
             <a:r>
               <a:rPr sz="1400" b="0">
                 <a:solidFill>
-                  <a:srgbClr val="1E293B"/>
+                  <a:srgbClr val="E2E8F0"/>
                 </a:solidFill>
                 <a:latin typeface="Arial"/>
               </a:rPr>
@@ -10036,7 +11569,7 @@
             <a:r>
               <a:rPr sz="1400" b="0">
                 <a:solidFill>
-                  <a:srgbClr val="1E293B"/>
+                  <a:srgbClr val="E2E8F0"/>
                 </a:solidFill>
                 <a:latin typeface="Arial"/>
               </a:rPr>
@@ -10060,11 +11593,11 @@
             <a:avLst/>
           </a:prstGeom>
           <a:solidFill>
-            <a:srgbClr val="F1F5F9"/>
+            <a:srgbClr val="030712"/>
           </a:solidFill>
           <a:ln>
             <a:solidFill>
-              <a:srgbClr val="CBD5E1"/>
+              <a:srgbClr val="22D3EE"/>
             </a:solidFill>
           </a:ln>
         </p:spPr>
@@ -10083,14 +11616,14 @@
           </a:fontRef>
         </p:style>
         <p:txBody>
-          <a:bodyPr rtlCol="0" anchor="t" wrap="square" tIns="76200" bIns="76200" lIns="101600" rIns="101600"/>
+          <a:bodyPr rtlCol="0" anchor="t" wrap="square" tIns="203200" bIns="76200" lIns="127000" rIns="127000"/>
           <a:lstStyle/>
           <a:p>
             <a:pPr algn="ctr"/>
             <a:r>
-              <a:rPr sz="1300" b="0">
-                <a:solidFill>
-                  <a:srgbClr val="1E293B"/>
+              <a:rPr sz="1250" b="0">
+                <a:solidFill>
+                  <a:srgbClr val="C4FFEC"/>
                 </a:solidFill>
                 <a:latin typeface="Courier New"/>
               </a:rPr>
@@ -10104,7 +11637,61 @@
       </p:sp>
       <p:sp>
         <p:nvSpPr>
-          <p:cNvPr id="15" name="TextBox 14"/>
+          <p:cNvPr id="15" name="Rectangle 14"/>
+          <p:cNvSpPr/>
+          <p:nvPr/>
+        </p:nvSpPr>
+        <p:spPr>
+          <a:xfrm>
+            <a:off x="658368" y="4160520"/>
+            <a:ext cx="10972800" cy="256032"/>
+          </a:xfrm>
+          <a:prstGeom prst="rect">
+            <a:avLst/>
+          </a:prstGeom>
+          <a:solidFill>
+            <a:srgbClr val="0D1426"/>
+          </a:solidFill>
+          <a:ln>
+            <a:solidFill>
+              <a:srgbClr val="0D1426"/>
+            </a:solidFill>
+          </a:ln>
+        </p:spPr>
+        <p:style>
+          <a:lnRef idx="1">
+            <a:schemeClr val="accent1"/>
+          </a:lnRef>
+          <a:fillRef idx="3">
+            <a:schemeClr val="accent1"/>
+          </a:fillRef>
+          <a:effectRef idx="2">
+            <a:schemeClr val="accent1"/>
+          </a:effectRef>
+          <a:fontRef idx="minor">
+            <a:schemeClr val="lt1"/>
+          </a:fontRef>
+        </p:style>
+        <p:txBody>
+          <a:bodyPr rtlCol="0" anchor="t" wrap="square" tIns="12700" bIns="12700" lIns="76200" rIns="76200"/>
+          <a:lstStyle/>
+          <a:p>
+            <a:pPr algn="ctr"/>
+            <a:r>
+              <a:rPr sz="1000" b="1">
+                <a:solidFill>
+                  <a:srgbClr val="22D3EE"/>
+                </a:solidFill>
+                <a:latin typeface="Courier New"/>
+              </a:rPr>
+              <a:t>code</a:t>
+            </a:r>
+          </a:p>
+        </p:txBody>
+      </p:sp>
+      <p:sp>
+        <p:nvSpPr>
+          <p:cNvPr id="16" name="TextBox 15"/>
           <p:cNvSpPr txBox="1"/>
           <p:nvPr/>
         </p:nvSpPr>
@@ -10128,7 +11715,7 @@
             <a:r>
               <a:rPr sz="1100" b="0">
                 <a:solidFill>
-                  <a:srgbClr val="475569"/>
+                  <a:srgbClr val="94A3B8"/>
                 </a:solidFill>
                 <a:latin typeface="Arial"/>
               </a:rPr>
@@ -10151,7 +11738,7 @@
     <p:bg>
       <p:bgPr>
         <a:solidFill>
-          <a:srgbClr val="F8FAFC"/>
+          <a:srgbClr val="020617"/>
         </a:solidFill>
         <a:effectLst/>
       </p:bgPr>
@@ -10188,7 +11775,7 @@
             <a:r>
               <a:rPr sz="2400" b="1">
                 <a:solidFill>
-                  <a:srgbClr val="0F172A"/>
+                  <a:srgbClr val="F1F5F9"/>
                 </a:solidFill>
                 <a:latin typeface="Arial"/>
               </a:rPr>
@@ -10212,7 +11799,7 @@
             <a:avLst/>
           </a:prstGeom>
           <a:solidFill>
-            <a:srgbClr val="CBD5E1"/>
+            <a:srgbClr val="22D3EE"/>
           </a:solidFill>
           <a:ln>
             <a:noFill/>
@@ -10255,11 +11842,11 @@
             <a:avLst/>
           </a:prstGeom>
           <a:solidFill>
-            <a:srgbClr val="DBEAFE"/>
+            <a:srgbClr val="0F172A"/>
           </a:solidFill>
           <a:ln>
             <a:solidFill>
-              <a:srgbClr val="2563EB"/>
+              <a:srgbClr val="22D3EE"/>
             </a:solidFill>
           </a:ln>
         </p:spPr>
@@ -10289,7 +11876,7 @@
             <a:r>
               <a:rPr sz="1600" b="0">
                 <a:solidFill>
-                  <a:srgbClr val="1E293B"/>
+                  <a:srgbClr val="E2E8F0"/>
                 </a:solidFill>
                 <a:latin typeface="Arial"/>
               </a:rPr>
@@ -10313,11 +11900,11 @@
             <a:avLst/>
           </a:prstGeom>
           <a:solidFill>
-            <a:srgbClr val="FFFFFF"/>
+            <a:srgbClr val="0A1224"/>
           </a:solidFill>
           <a:ln>
             <a:solidFill>
-              <a:srgbClr val="2563EB"/>
+              <a:srgbClr val="22D3EE"/>
             </a:solidFill>
           </a:ln>
         </p:spPr>
@@ -10358,11 +11945,11 @@
             <a:avLst/>
           </a:prstGeom>
           <a:solidFill>
-            <a:srgbClr val="DBEAFE"/>
+            <a:srgbClr val="0F172A"/>
           </a:solidFill>
           <a:ln>
             <a:solidFill>
-              <a:srgbClr val="DBEAFE"/>
+              <a:srgbClr val="0F172A"/>
             </a:solidFill>
           </a:ln>
         </p:spPr>
@@ -10388,7 +11975,7 @@
             <a:r>
               <a:rPr sz="1200" b="1">
                 <a:solidFill>
-                  <a:srgbClr val="2563EB"/>
+                  <a:srgbClr val="22D3EE"/>
                 </a:solidFill>
                 <a:latin typeface="Arial"/>
               </a:rPr>
@@ -10427,7 +12014,7 @@
             <a:r>
               <a:rPr sz="1400" b="0">
                 <a:solidFill>
-                  <a:srgbClr val="1E293B"/>
+                  <a:srgbClr val="E2E8F0"/>
                 </a:solidFill>
                 <a:latin typeface="Arial"/>
               </a:rPr>
@@ -10443,7 +12030,7 @@
             <a:r>
               <a:rPr sz="1400" b="0">
                 <a:solidFill>
-                  <a:srgbClr val="1E293B"/>
+                  <a:srgbClr val="E2E8F0"/>
                 </a:solidFill>
                 <a:latin typeface="Arial"/>
               </a:rPr>
@@ -10459,7 +12046,7 @@
             <a:r>
               <a:rPr sz="1400" b="0">
                 <a:solidFill>
-                  <a:srgbClr val="1E293B"/>
+                  <a:srgbClr val="E2E8F0"/>
                 </a:solidFill>
                 <a:latin typeface="Arial"/>
               </a:rPr>
@@ -10483,11 +12070,11 @@
             <a:avLst/>
           </a:prstGeom>
           <a:solidFill>
-            <a:srgbClr val="FFFFFF"/>
+            <a:srgbClr val="0A1224"/>
           </a:solidFill>
           <a:ln>
             <a:solidFill>
-              <a:srgbClr val="2563EB"/>
+              <a:srgbClr val="22D3EE"/>
             </a:solidFill>
           </a:ln>
         </p:spPr>
@@ -10528,11 +12115,11 @@
             <a:avLst/>
           </a:prstGeom>
           <a:solidFill>
-            <a:srgbClr val="DBEAFE"/>
+            <a:srgbClr val="0F172A"/>
           </a:solidFill>
           <a:ln>
             <a:solidFill>
-              <a:srgbClr val="DBEAFE"/>
+              <a:srgbClr val="0F172A"/>
             </a:solidFill>
           </a:ln>
         </p:spPr>
@@ -10558,7 +12145,7 @@
             <a:r>
               <a:rPr sz="1200" b="1">
                 <a:solidFill>
-                  <a:srgbClr val="2563EB"/>
+                  <a:srgbClr val="22D3EE"/>
                 </a:solidFill>
                 <a:latin typeface="Arial"/>
               </a:rPr>
@@ -10597,7 +12184,7 @@
             <a:r>
               <a:rPr sz="1400" b="0">
                 <a:solidFill>
-                  <a:srgbClr val="1E293B"/>
+                  <a:srgbClr val="E2E8F0"/>
                 </a:solidFill>
                 <a:latin typeface="Arial"/>
               </a:rPr>
@@ -10613,7 +12200,7 @@
             <a:r>
               <a:rPr sz="1400" b="0">
                 <a:solidFill>
-                  <a:srgbClr val="1E293B"/>
+                  <a:srgbClr val="E2E8F0"/>
                 </a:solidFill>
                 <a:latin typeface="Arial"/>
               </a:rPr>
@@ -10637,11 +12224,11 @@
             <a:avLst/>
           </a:prstGeom>
           <a:solidFill>
-            <a:srgbClr val="FFFFFF"/>
+            <a:srgbClr val="0A1224"/>
           </a:solidFill>
           <a:ln>
             <a:solidFill>
-              <a:srgbClr val="2563EB"/>
+              <a:srgbClr val="22D3EE"/>
             </a:solidFill>
           </a:ln>
         </p:spPr>
@@ -10682,11 +12269,11 @@
             <a:avLst/>
           </a:prstGeom>
           <a:solidFill>
-            <a:srgbClr val="DBEAFE"/>
+            <a:srgbClr val="0F172A"/>
           </a:solidFill>
           <a:ln>
             <a:solidFill>
-              <a:srgbClr val="DBEAFE"/>
+              <a:srgbClr val="0F172A"/>
             </a:solidFill>
           </a:ln>
         </p:spPr>
@@ -10712,7 +12299,7 @@
             <a:r>
               <a:rPr sz="1200" b="1">
                 <a:solidFill>
-                  <a:srgbClr val="2563EB"/>
+                  <a:srgbClr val="22D3EE"/>
                 </a:solidFill>
                 <a:latin typeface="Arial"/>
               </a:rPr>
@@ -10751,7 +12338,7 @@
             <a:r>
               <a:rPr sz="1400" b="0">
                 <a:solidFill>
-                  <a:srgbClr val="1E293B"/>
+                  <a:srgbClr val="E2E8F0"/>
                 </a:solidFill>
                 <a:latin typeface="Arial"/>
               </a:rPr>
@@ -10767,7 +12354,7 @@
             <a:r>
               <a:rPr sz="1400" b="0">
                 <a:solidFill>
-                  <a:srgbClr val="1E293B"/>
+                  <a:srgbClr val="E2E8F0"/>
                 </a:solidFill>
                 <a:latin typeface="Arial"/>
               </a:rPr>
@@ -10791,11 +12378,11 @@
             <a:avLst/>
           </a:prstGeom>
           <a:solidFill>
-            <a:srgbClr val="F1F5F9"/>
+            <a:srgbClr val="030712"/>
           </a:solidFill>
           <a:ln>
             <a:solidFill>
-              <a:srgbClr val="CBD5E1"/>
+              <a:srgbClr val="22D3EE"/>
             </a:solidFill>
           </a:ln>
         </p:spPr>
@@ -10814,14 +12401,14 @@
           </a:fontRef>
         </p:style>
         <p:txBody>
-          <a:bodyPr rtlCol="0" anchor="t" wrap="square" tIns="76200" bIns="76200" lIns="101600" rIns="101600"/>
+          <a:bodyPr rtlCol="0" anchor="t" wrap="square" tIns="203200" bIns="76200" lIns="127000" rIns="127000"/>
           <a:lstStyle/>
           <a:p>
             <a:pPr algn="ctr"/>
             <a:r>
-              <a:rPr sz="1300" b="0">
-                <a:solidFill>
-                  <a:srgbClr val="1E293B"/>
+              <a:rPr sz="1250" b="0">
+                <a:solidFill>
+                  <a:srgbClr val="C4FFEC"/>
                 </a:solidFill>
                 <a:latin typeface="Courier New"/>
               </a:rPr>
@@ -10833,7 +12420,61 @@
       </p:sp>
       <p:sp>
         <p:nvSpPr>
-          <p:cNvPr id="15" name="TextBox 14"/>
+          <p:cNvPr id="15" name="Rectangle 14"/>
+          <p:cNvSpPr/>
+          <p:nvPr/>
+        </p:nvSpPr>
+        <p:spPr>
+          <a:xfrm>
+            <a:off x="658368" y="4160520"/>
+            <a:ext cx="10972800" cy="256032"/>
+          </a:xfrm>
+          <a:prstGeom prst="rect">
+            <a:avLst/>
+          </a:prstGeom>
+          <a:solidFill>
+            <a:srgbClr val="0D1426"/>
+          </a:solidFill>
+          <a:ln>
+            <a:solidFill>
+              <a:srgbClr val="0D1426"/>
+            </a:solidFill>
+          </a:ln>
+        </p:spPr>
+        <p:style>
+          <a:lnRef idx="1">
+            <a:schemeClr val="accent1"/>
+          </a:lnRef>
+          <a:fillRef idx="3">
+            <a:schemeClr val="accent1"/>
+          </a:fillRef>
+          <a:effectRef idx="2">
+            <a:schemeClr val="accent1"/>
+          </a:effectRef>
+          <a:fontRef idx="minor">
+            <a:schemeClr val="lt1"/>
+          </a:fontRef>
+        </p:style>
+        <p:txBody>
+          <a:bodyPr rtlCol="0" anchor="t" wrap="square" tIns="12700" bIns="12700" lIns="76200" rIns="76200"/>
+          <a:lstStyle/>
+          <a:p>
+            <a:pPr algn="ctr"/>
+            <a:r>
+              <a:rPr sz="1000" b="1">
+                <a:solidFill>
+                  <a:srgbClr val="22D3EE"/>
+                </a:solidFill>
+                <a:latin typeface="Courier New"/>
+              </a:rPr>
+              <a:t>code</a:t>
+            </a:r>
+          </a:p>
+        </p:txBody>
+      </p:sp>
+      <p:sp>
+        <p:nvSpPr>
+          <p:cNvPr id="16" name="TextBox 15"/>
           <p:cNvSpPr txBox="1"/>
           <p:nvPr/>
         </p:nvSpPr>
@@ -10857,7 +12498,7 @@
             <a:r>
               <a:rPr sz="1100" b="0">
                 <a:solidFill>
-                  <a:srgbClr val="475569"/>
+                  <a:srgbClr val="94A3B8"/>
                 </a:solidFill>
                 <a:latin typeface="Arial"/>
               </a:rPr>
@@ -10880,7 +12521,7 @@
     <p:bg>
       <p:bgPr>
         <a:solidFill>
-          <a:srgbClr val="F8FAFC"/>
+          <a:srgbClr val="020617"/>
         </a:solidFill>
         <a:effectLst/>
       </p:bgPr>
@@ -10917,7 +12558,7 @@
             <a:r>
               <a:rPr sz="2400" b="1">
                 <a:solidFill>
-                  <a:srgbClr val="0F172A"/>
+                  <a:srgbClr val="F1F5F9"/>
                 </a:solidFill>
                 <a:latin typeface="Arial"/>
               </a:rPr>
@@ -10941,7 +12582,7 @@
             <a:avLst/>
           </a:prstGeom>
           <a:solidFill>
-            <a:srgbClr val="CBD5E1"/>
+            <a:srgbClr val="22D3EE"/>
           </a:solidFill>
           <a:ln>
             <a:noFill/>
@@ -10984,11 +12625,11 @@
             <a:avLst/>
           </a:prstGeom>
           <a:solidFill>
-            <a:srgbClr val="DBEAFE"/>
+            <a:srgbClr val="0F172A"/>
           </a:solidFill>
           <a:ln>
             <a:solidFill>
-              <a:srgbClr val="2563EB"/>
+              <a:srgbClr val="22D3EE"/>
             </a:solidFill>
           </a:ln>
         </p:spPr>
@@ -11018,7 +12659,7 @@
             <a:r>
               <a:rPr sz="1600" b="0">
                 <a:solidFill>
-                  <a:srgbClr val="1E293B"/>
+                  <a:srgbClr val="E2E8F0"/>
                 </a:solidFill>
                 <a:latin typeface="Arial"/>
               </a:rPr>
@@ -11042,11 +12683,11 @@
             <a:avLst/>
           </a:prstGeom>
           <a:solidFill>
-            <a:srgbClr val="FFFFFF"/>
+            <a:srgbClr val="0A1224"/>
           </a:solidFill>
           <a:ln>
             <a:solidFill>
-              <a:srgbClr val="2563EB"/>
+              <a:srgbClr val="22D3EE"/>
             </a:solidFill>
           </a:ln>
         </p:spPr>
@@ -11087,11 +12728,11 @@
             <a:avLst/>
           </a:prstGeom>
           <a:solidFill>
-            <a:srgbClr val="DBEAFE"/>
+            <a:srgbClr val="0F172A"/>
           </a:solidFill>
           <a:ln>
             <a:solidFill>
-              <a:srgbClr val="DBEAFE"/>
+              <a:srgbClr val="0F172A"/>
             </a:solidFill>
           </a:ln>
         </p:spPr>
@@ -11117,7 +12758,7 @@
             <a:r>
               <a:rPr sz="1200" b="1">
                 <a:solidFill>
-                  <a:srgbClr val="2563EB"/>
+                  <a:srgbClr val="22D3EE"/>
                 </a:solidFill>
                 <a:latin typeface="Arial"/>
               </a:rPr>
@@ -11156,7 +12797,7 @@
             <a:r>
               <a:rPr sz="1400" b="0">
                 <a:solidFill>
-                  <a:srgbClr val="1E293B"/>
+                  <a:srgbClr val="E2E8F0"/>
                 </a:solidFill>
                 <a:latin typeface="Arial"/>
               </a:rPr>
@@ -11172,7 +12813,7 @@
             <a:r>
               <a:rPr sz="1400" b="0">
                 <a:solidFill>
-                  <a:srgbClr val="1E293B"/>
+                  <a:srgbClr val="E2E8F0"/>
                 </a:solidFill>
                 <a:latin typeface="Arial"/>
               </a:rPr>
@@ -11196,11 +12837,11 @@
             <a:avLst/>
           </a:prstGeom>
           <a:solidFill>
-            <a:srgbClr val="FFFFFF"/>
+            <a:srgbClr val="0A1224"/>
           </a:solidFill>
           <a:ln>
             <a:solidFill>
-              <a:srgbClr val="2563EB"/>
+              <a:srgbClr val="22D3EE"/>
             </a:solidFill>
           </a:ln>
         </p:spPr>
@@ -11241,11 +12882,11 @@
             <a:avLst/>
           </a:prstGeom>
           <a:solidFill>
-            <a:srgbClr val="DBEAFE"/>
+            <a:srgbClr val="0F172A"/>
           </a:solidFill>
           <a:ln>
             <a:solidFill>
-              <a:srgbClr val="DBEAFE"/>
+              <a:srgbClr val="0F172A"/>
             </a:solidFill>
           </a:ln>
         </p:spPr>
@@ -11271,7 +12912,7 @@
             <a:r>
               <a:rPr sz="1200" b="1">
                 <a:solidFill>
-                  <a:srgbClr val="2563EB"/>
+                  <a:srgbClr val="22D3EE"/>
                 </a:solidFill>
                 <a:latin typeface="Arial"/>
               </a:rPr>
@@ -11310,7 +12951,7 @@
             <a:r>
               <a:rPr sz="1400" b="0">
                 <a:solidFill>
-                  <a:srgbClr val="1E293B"/>
+                  <a:srgbClr val="E2E8F0"/>
                 </a:solidFill>
                 <a:latin typeface="Arial"/>
               </a:rPr>
@@ -11326,7 +12967,7 @@
             <a:r>
               <a:rPr sz="1400" b="0">
                 <a:solidFill>
-                  <a:srgbClr val="1E293B"/>
+                  <a:srgbClr val="E2E8F0"/>
                 </a:solidFill>
                 <a:latin typeface="Arial"/>
               </a:rPr>
@@ -11350,11 +12991,11 @@
             <a:avLst/>
           </a:prstGeom>
           <a:solidFill>
-            <a:srgbClr val="FFFFFF"/>
+            <a:srgbClr val="0A1224"/>
           </a:solidFill>
           <a:ln>
             <a:solidFill>
-              <a:srgbClr val="2563EB"/>
+              <a:srgbClr val="22D3EE"/>
             </a:solidFill>
           </a:ln>
         </p:spPr>
@@ -11395,11 +13036,11 @@
             <a:avLst/>
           </a:prstGeom>
           <a:solidFill>
-            <a:srgbClr val="DBEAFE"/>
+            <a:srgbClr val="0F172A"/>
           </a:solidFill>
           <a:ln>
             <a:solidFill>
-              <a:srgbClr val="DBEAFE"/>
+              <a:srgbClr val="0F172A"/>
             </a:solidFill>
           </a:ln>
         </p:spPr>
@@ -11425,7 +13066,7 @@
             <a:r>
               <a:rPr sz="1200" b="1">
                 <a:solidFill>
-                  <a:srgbClr val="2563EB"/>
+                  <a:srgbClr val="22D3EE"/>
                 </a:solidFill>
                 <a:latin typeface="Arial"/>
               </a:rPr>
@@ -11464,7 +13105,7 @@
             <a:r>
               <a:rPr sz="1400" b="0">
                 <a:solidFill>
-                  <a:srgbClr val="1E293B"/>
+                  <a:srgbClr val="E2E8F0"/>
                 </a:solidFill>
                 <a:latin typeface="Arial"/>
               </a:rPr>
@@ -11480,7 +13121,7 @@
             <a:r>
               <a:rPr sz="1400" b="0">
                 <a:solidFill>
-                  <a:srgbClr val="1E293B"/>
+                  <a:srgbClr val="E2E8F0"/>
                 </a:solidFill>
                 <a:latin typeface="Arial"/>
               </a:rPr>
@@ -11504,11 +13145,11 @@
             <a:avLst/>
           </a:prstGeom>
           <a:solidFill>
-            <a:srgbClr val="F1F5F9"/>
+            <a:srgbClr val="030712"/>
           </a:solidFill>
           <a:ln>
             <a:solidFill>
-              <a:srgbClr val="CBD5E1"/>
+              <a:srgbClr val="22D3EE"/>
             </a:solidFill>
           </a:ln>
         </p:spPr>
@@ -11527,14 +13168,14 @@
           </a:fontRef>
         </p:style>
         <p:txBody>
-          <a:bodyPr rtlCol="0" anchor="t" wrap="square" tIns="76200" bIns="76200" lIns="101600" rIns="101600"/>
+          <a:bodyPr rtlCol="0" anchor="t" wrap="square" tIns="203200" bIns="76200" lIns="127000" rIns="127000"/>
           <a:lstStyle/>
           <a:p>
             <a:pPr algn="ctr"/>
             <a:r>
-              <a:rPr sz="1300" b="0">
-                <a:solidFill>
-                  <a:srgbClr val="1E293B"/>
+              <a:rPr sz="1250" b="0">
+                <a:solidFill>
+                  <a:srgbClr val="C4FFEC"/>
                 </a:solidFill>
                 <a:latin typeface="Courier New"/>
               </a:rPr>
@@ -11546,7 +13187,61 @@
       </p:sp>
       <p:sp>
         <p:nvSpPr>
-          <p:cNvPr id="15" name="TextBox 14"/>
+          <p:cNvPr id="15" name="Rectangle 14"/>
+          <p:cNvSpPr/>
+          <p:nvPr/>
+        </p:nvSpPr>
+        <p:spPr>
+          <a:xfrm>
+            <a:off x="658368" y="4160520"/>
+            <a:ext cx="10972800" cy="256032"/>
+          </a:xfrm>
+          <a:prstGeom prst="rect">
+            <a:avLst/>
+          </a:prstGeom>
+          <a:solidFill>
+            <a:srgbClr val="0D1426"/>
+          </a:solidFill>
+          <a:ln>
+            <a:solidFill>
+              <a:srgbClr val="0D1426"/>
+            </a:solidFill>
+          </a:ln>
+        </p:spPr>
+        <p:style>
+          <a:lnRef idx="1">
+            <a:schemeClr val="accent1"/>
+          </a:lnRef>
+          <a:fillRef idx="3">
+            <a:schemeClr val="accent1"/>
+          </a:fillRef>
+          <a:effectRef idx="2">
+            <a:schemeClr val="accent1"/>
+          </a:effectRef>
+          <a:fontRef idx="minor">
+            <a:schemeClr val="lt1"/>
+          </a:fontRef>
+        </p:style>
+        <p:txBody>
+          <a:bodyPr rtlCol="0" anchor="t" wrap="square" tIns="12700" bIns="12700" lIns="76200" rIns="76200"/>
+          <a:lstStyle/>
+          <a:p>
+            <a:pPr algn="ctr"/>
+            <a:r>
+              <a:rPr sz="1000" b="1">
+                <a:solidFill>
+                  <a:srgbClr val="22D3EE"/>
+                </a:solidFill>
+                <a:latin typeface="Courier New"/>
+              </a:rPr>
+              <a:t>code</a:t>
+            </a:r>
+          </a:p>
+        </p:txBody>
+      </p:sp>
+      <p:sp>
+        <p:nvSpPr>
+          <p:cNvPr id="16" name="TextBox 15"/>
           <p:cNvSpPr txBox="1"/>
           <p:nvPr/>
         </p:nvSpPr>
@@ -11570,7 +13265,7 @@
             <a:r>
               <a:rPr sz="1100" b="0">
                 <a:solidFill>
-                  <a:srgbClr val="475569"/>
+                  <a:srgbClr val="94A3B8"/>
                 </a:solidFill>
                 <a:latin typeface="Arial"/>
               </a:rPr>

--- a/docs/zh/09-Claude Code 使用技巧与注意事项-WPS兼容版.pptx
+++ b/docs/zh/09-Claude Code 使用技巧与注意事项-WPS兼容版.pptx
@@ -19,6 +19,7 @@
     <p:sldId id="267" r:id="rId18"/>
     <p:sldId id="268" r:id="rId19"/>
     <p:sldId id="269" r:id="rId20"/>
+    <p:sldId id="270" r:id="rId21"/>
   </p:sldIdLst>
   <p:sldSz cx="12191695" cy="6858000" type="screen4x3"/>
   <p:notesSz cx="6858000" cy="9144000"/>
@@ -3484,7 +3485,7 @@
                 </a:solidFill>
                 <a:latin typeface="Arial"/>
               </a:rPr>
-              <a:t>技巧 5：验证要求要写清楚</a:t>
+              <a:t>技巧 4：优先 dedicated tools（专用工具）</a:t>
             </a:r>
           </a:p>
         </p:txBody>
@@ -3585,7 +3586,7 @@
                 </a:solidFill>
                 <a:latin typeface="Arial"/>
               </a:rPr>
-              <a:t>不要默认 Claude Code 已经验证过，验证要求必须显式写出来。</a:t>
+              <a:t>Claude Code 更偏好 dedicated tools（专用工具），Bash 在源码里是 fallback，不是首选。</a:t>
             </a:r>
           </a:p>
         </p:txBody>
@@ -3723,7 +3724,7 @@
                 </a:solidFill>
                 <a:latin typeface="Arial"/>
               </a:rPr>
-              <a:t>改完后跑相关测试</a:t>
+              <a:t>优先直接读写文件</a:t>
             </a:r>
           </a:p>
           <a:p>
@@ -3739,7 +3740,7 @@
                 </a:solidFill>
                 <a:latin typeface="Arial"/>
               </a:rPr>
-              <a:t>如果没跑，请明确说明没有跑</a:t>
+              <a:t>不要用 Bash 做本可由专用工具完成的事情</a:t>
             </a:r>
           </a:p>
         </p:txBody>
@@ -3877,7 +3878,7 @@
                 </a:solidFill>
                 <a:latin typeface="Arial"/>
               </a:rPr>
-              <a:t>减少“看似完成、其实没验证”的风险</a:t>
+              <a:t>专用工具更容易被解释和审查</a:t>
             </a:r>
           </a:p>
           <a:p>
@@ -3893,7 +3894,7 @@
                 </a:solidFill>
                 <a:latin typeface="Arial"/>
               </a:rPr>
-              <a:t>避免把未验证结果包装成完成状态</a:t>
+              <a:t>也更容易受权限和执行链约束</a:t>
             </a:r>
           </a:p>
         </p:txBody>
@@ -4031,7 +4032,7 @@
                 </a:solidFill>
                 <a:latin typeface="Arial"/>
               </a:rPr>
-              <a:t>prompt stack（提示词栈）明确要求 verify 和 faithful reporting</a:t>
+              <a:t>tool pipeline（工具执行流水线）里，dedicated tools 是一等能力面</a:t>
             </a:r>
           </a:p>
           <a:p>
@@ -4047,7 +4048,7 @@
                 </a:solidFill>
                 <a:latin typeface="Arial"/>
               </a:rPr>
-              <a:t>turn loop（轮次循环）不会替用户假设“验证已经完成”</a:t>
+              <a:t>Bash 是更自由也更高风险的 fallback</a:t>
             </a:r>
           </a:p>
         </p:txBody>
@@ -4101,8 +4102,8 @@
                 </a:solidFill>
                 <a:latin typeface="Courier New"/>
               </a:rPr>
-              <a:t>Before reporting a task complete, verify it actually works.
-Never claim "all tests pass" when output shows failures.</a:t>
+              <a:t>default to using the dedicated tool and only fallback on using the Bash tool ...
+Do NOT use the Bash tool to run commands when a relevant dedicated tool is provided.</a:t>
             </a:r>
           </a:p>
         </p:txBody>
@@ -4191,7 +4192,7 @@
                 </a:solidFill>
                 <a:latin typeface="Arial"/>
               </a:rPr>
-              <a:t>源码依据：prompts.ts#L211 / #L240</a:t>
+              <a:t>源码依据：prompts.ts#L301 / #L305，BashTool prompt#L297</a:t>
             </a:r>
           </a:p>
         </p:txBody>
@@ -4251,7 +4252,7 @@
                 </a:solidFill>
                 <a:latin typeface="Arial"/>
               </a:rPr>
-              <a:t>技巧 6：高风险动作先确认</a:t>
+              <a:t>技巧 5：验证要求要写清楚</a:t>
             </a:r>
           </a:p>
         </p:txBody>
@@ -4352,7 +4353,7 @@
                 </a:solidFill>
                 <a:latin typeface="Arial"/>
               </a:rPr>
-              <a:t>高风险动作先确认，不是额外保守，而是 Claude Code 的默认安全边界。</a:t>
+              <a:t>不要默认 Claude Code 已经验证过，验证要求必须显式写出来。</a:t>
             </a:r>
           </a:p>
         </p:txBody>
@@ -4490,7 +4491,7 @@
                 </a:solidFill>
                 <a:latin typeface="Arial"/>
               </a:rPr>
-              <a:t>涉及 push、删除、覆盖、外部发送、破坏性 git 操作时</a:t>
+              <a:t>改完后跑相关测试</a:t>
             </a:r>
           </a:p>
           <a:p>
@@ -4506,7 +4507,7 @@
                 </a:solidFill>
                 <a:latin typeface="Arial"/>
               </a:rPr>
-              <a:t>先告诉我并确认</a:t>
+              <a:t>如果没跑，请明确说明没有跑</a:t>
             </a:r>
           </a:p>
         </p:txBody>
@@ -4644,7 +4645,7 @@
                 </a:solidFill>
                 <a:latin typeface="Arial"/>
               </a:rPr>
-              <a:t>难以回滚的动作需要更强边界</a:t>
+              <a:t>减少“看似完成、其实没验证”的风险</a:t>
             </a:r>
           </a:p>
           <a:p>
@@ -4660,7 +4661,7 @@
                 </a:solidFill>
                 <a:latin typeface="Arial"/>
               </a:rPr>
-              <a:t>能减少误执行带来的 blast radius</a:t>
+              <a:t>避免把未验证结果包装成完成状态</a:t>
             </a:r>
           </a:p>
         </p:txBody>
@@ -4798,7 +4799,7 @@
                 </a:solidFill>
                 <a:latin typeface="Arial"/>
               </a:rPr>
-              <a:t>prompt stack（提示词栈）先定义确认边界</a:t>
+              <a:t>prompt stack（提示词栈）明确要求 verify 和 faithful reporting</a:t>
             </a:r>
           </a:p>
           <a:p>
@@ -4814,7 +4815,7 @@
                 </a:solidFill>
                 <a:latin typeface="Arial"/>
               </a:rPr>
-              <a:t>tool pipeline（工具执行流水线）和 Bash 约束负责执行面收紧</a:t>
+              <a:t>turn loop（轮次循环）不会替用户假设“验证已经完成”</a:t>
             </a:r>
           </a:p>
         </p:txBody>
@@ -4868,9 +4869,8 @@
                 </a:solidFill>
                 <a:latin typeface="Courier New"/>
               </a:rPr>
-              <a:t>Carefully consider the reversibility and blast radius of actions.
-ask for confirmation before proceeding
-Only use destructive operations when they are truly the best approach.</a:t>
+              <a:t>Before reporting a task complete, verify it actually works.
+Never claim "all tests pass" when output shows failures.</a:t>
             </a:r>
           </a:p>
         </p:txBody>
@@ -4959,7 +4959,7 @@
                 </a:solidFill>
                 <a:latin typeface="Arial"/>
               </a:rPr>
-              <a:t>源码依据：prompts.ts#L258，BashTool prompt#L304</a:t>
+              <a:t>源码依据：prompts.ts#L211 / #L240</a:t>
             </a:r>
           </a:p>
         </p:txBody>
@@ -5019,7 +5019,7 @@
                 </a:solidFill>
                 <a:latin typeface="Arial"/>
               </a:rPr>
-              <a:t>两个进阶技巧：parallel 与 Plan Mode</a:t>
+              <a:t>技巧 6：高风险动作先确认</a:t>
             </a:r>
           </a:p>
         </p:txBody>
@@ -5075,7 +5075,7 @@
         </p:nvSpPr>
         <p:spPr>
           <a:xfrm>
-            <a:off x="658368" y="1536192"/>
+            <a:off x="658368" y="1481328"/>
             <a:ext cx="10972800" cy="658368"/>
           </a:xfrm>
           <a:prstGeom prst="roundRect">
@@ -5120,98 +5120,27 @@
                 </a:solidFill>
                 <a:latin typeface="Arial"/>
               </a:rPr>
-              <a:t>对彼此独立的查询，显式允许 parallel（并行），更贴近 Claude Code 的原生工作方式。</a:t>
-            </a:r>
-          </a:p>
-        </p:txBody>
-      </p:sp>
-      <p:sp>
-        <p:nvSpPr>
-          <p:cNvPr id="5" name="TextBox 4"/>
-          <p:cNvSpPr txBox="1"/>
-          <p:nvPr/>
-        </p:nvSpPr>
-        <p:spPr>
-          <a:xfrm>
-            <a:off x="749808" y="2450592"/>
-            <a:ext cx="5577840" cy="3063240"/>
-          </a:xfrm>
-          <a:prstGeom prst="rect">
-            <a:avLst/>
-          </a:prstGeom>
-          <a:noFill/>
-        </p:spPr>
-        <p:txBody>
-          <a:bodyPr wrap="square" tIns="50800" bIns="50800" lIns="101600" rIns="101600" anchor="t">
-            <a:spAutoFit/>
-          </a:bodyPr>
-          <a:lstStyle/>
-          <a:p>
-            <a:pPr>
-              <a:spcAft>
-                <a:spcPts val="800"/>
-              </a:spcAft>
-            </a:pPr>
-            <a:r>
-              <a:rPr sz="1700" b="0">
-                <a:solidFill>
-                  <a:srgbClr val="E2E8F0"/>
-                </a:solidFill>
-                <a:latin typeface="Arial"/>
-              </a:rPr>
-              <a:t>独立查询可以显式允许 parallel（并行）</a:t>
-            </a:r>
-          </a:p>
-          <a:p>
-            <a:pPr>
-              <a:spcAft>
-                <a:spcPts val="800"/>
-              </a:spcAft>
-            </a:pPr>
-            <a:r>
-              <a:rPr sz="1700" b="0">
-                <a:solidFill>
-                  <a:srgbClr val="E2E8F0"/>
-                </a:solidFill>
-                <a:latin typeface="Arial"/>
-              </a:rPr>
-              <a:t>做方案时，先走 Plan Mode workflow（规划模式工作流）</a:t>
-            </a:r>
-          </a:p>
-          <a:p>
-            <a:pPr>
-              <a:spcAft>
-                <a:spcPts val="800"/>
-              </a:spcAft>
-            </a:pPr>
-            <a:r>
-              <a:rPr sz="1700" b="0">
-                <a:solidFill>
-                  <a:srgbClr val="E2E8F0"/>
-                </a:solidFill>
-                <a:latin typeface="Arial"/>
-              </a:rPr>
-              <a:t>也就是：先 Explore，再规划，再实现</a:t>
-            </a:r>
-          </a:p>
-        </p:txBody>
-      </p:sp>
-      <p:sp>
-        <p:nvSpPr>
-          <p:cNvPr id="6" name="Rounded Rectangle 5"/>
+              <a:t>高风险动作先确认，不是额外保守，而是 Claude Code 的默认安全边界。</a:t>
+            </a:r>
+          </a:p>
+        </p:txBody>
+      </p:sp>
+      <p:sp>
+        <p:nvSpPr>
+          <p:cNvPr id="5" name="Rounded Rectangle 4"/>
           <p:cNvSpPr/>
           <p:nvPr/>
         </p:nvSpPr>
         <p:spPr>
           <a:xfrm>
-            <a:off x="6537960" y="2468880"/>
-            <a:ext cx="4800600" cy="2468880"/>
+            <a:off x="658368" y="2331720"/>
+            <a:ext cx="3246120" cy="1554480"/>
           </a:xfrm>
           <a:prstGeom prst="roundRect">
             <a:avLst/>
           </a:prstGeom>
           <a:solidFill>
-            <a:srgbClr val="030712"/>
+            <a:srgbClr val="0A1224"/>
           </a:solidFill>
           <a:ln>
             <a:solidFill>
@@ -5234,6 +5163,468 @@
           </a:fontRef>
         </p:style>
         <p:txBody>
+          <a:bodyPr rtlCol="0" anchor="ctr"/>
+          <a:lstStyle/>
+          <a:p>
+            <a:pPr algn="ctr"/>
+          </a:p>
+        </p:txBody>
+      </p:sp>
+      <p:sp>
+        <p:nvSpPr>
+          <p:cNvPr id="6" name="Rectangle 5"/>
+          <p:cNvSpPr/>
+          <p:nvPr/>
+        </p:nvSpPr>
+        <p:spPr>
+          <a:xfrm>
+            <a:off x="658368" y="2331720"/>
+            <a:ext cx="3246120" cy="347472"/>
+          </a:xfrm>
+          <a:prstGeom prst="rect">
+            <a:avLst/>
+          </a:prstGeom>
+          <a:solidFill>
+            <a:srgbClr val="0F172A"/>
+          </a:solidFill>
+          <a:ln>
+            <a:solidFill>
+              <a:srgbClr val="0F172A"/>
+            </a:solidFill>
+          </a:ln>
+        </p:spPr>
+        <p:style>
+          <a:lnRef idx="1">
+            <a:schemeClr val="accent1"/>
+          </a:lnRef>
+          <a:fillRef idx="3">
+            <a:schemeClr val="accent1"/>
+          </a:fillRef>
+          <a:effectRef idx="2">
+            <a:schemeClr val="accent1"/>
+          </a:effectRef>
+          <a:fontRef idx="minor">
+            <a:schemeClr val="lt1"/>
+          </a:fontRef>
+        </p:style>
+        <p:txBody>
+          <a:bodyPr rtlCol="0" anchor="t" wrap="square" tIns="25400" bIns="25400" lIns="76200" rIns="76200"/>
+          <a:lstStyle/>
+          <a:p>
+            <a:pPr algn="ctr"/>
+            <a:r>
+              <a:rPr sz="1200" b="1">
+                <a:solidFill>
+                  <a:srgbClr val="22D3EE"/>
+                </a:solidFill>
+                <a:latin typeface="Arial"/>
+              </a:rPr>
+              <a:t>示例提示词</a:t>
+            </a:r>
+          </a:p>
+        </p:txBody>
+      </p:sp>
+      <p:sp>
+        <p:nvSpPr>
+          <p:cNvPr id="7" name="TextBox 6"/>
+          <p:cNvSpPr txBox="1"/>
+          <p:nvPr/>
+        </p:nvSpPr>
+        <p:spPr>
+          <a:xfrm>
+            <a:off x="731519" y="2734056"/>
+            <a:ext cx="3099815" cy="1097280"/>
+          </a:xfrm>
+          <a:prstGeom prst="rect">
+            <a:avLst/>
+          </a:prstGeom>
+          <a:noFill/>
+        </p:spPr>
+        <p:txBody>
+          <a:bodyPr wrap="square" tIns="50800" bIns="50800" lIns="101600" rIns="101600" anchor="t">
+            <a:spAutoFit/>
+          </a:bodyPr>
+          <a:lstStyle/>
+          <a:p>
+            <a:pPr>
+              <a:spcAft>
+                <a:spcPts val="600"/>
+              </a:spcAft>
+            </a:pPr>
+            <a:r>
+              <a:rPr sz="1400" b="0">
+                <a:solidFill>
+                  <a:srgbClr val="E2E8F0"/>
+                </a:solidFill>
+                <a:latin typeface="Arial"/>
+              </a:rPr>
+              <a:t>涉及 push、删除、覆盖、外部发送、破坏性 git 操作时</a:t>
+            </a:r>
+          </a:p>
+          <a:p>
+            <a:pPr>
+              <a:spcAft>
+                <a:spcPts val="600"/>
+              </a:spcAft>
+            </a:pPr>
+            <a:r>
+              <a:rPr sz="1400" b="0">
+                <a:solidFill>
+                  <a:srgbClr val="E2E8F0"/>
+                </a:solidFill>
+                <a:latin typeface="Arial"/>
+              </a:rPr>
+              <a:t>先告诉我并确认</a:t>
+            </a:r>
+          </a:p>
+        </p:txBody>
+      </p:sp>
+      <p:sp>
+        <p:nvSpPr>
+          <p:cNvPr id="8" name="Rounded Rectangle 7"/>
+          <p:cNvSpPr/>
+          <p:nvPr/>
+        </p:nvSpPr>
+        <p:spPr>
+          <a:xfrm>
+            <a:off x="4133087" y="2331720"/>
+            <a:ext cx="3474720" cy="1554480"/>
+          </a:xfrm>
+          <a:prstGeom prst="roundRect">
+            <a:avLst/>
+          </a:prstGeom>
+          <a:solidFill>
+            <a:srgbClr val="0A1224"/>
+          </a:solidFill>
+          <a:ln>
+            <a:solidFill>
+              <a:srgbClr val="22D3EE"/>
+            </a:solidFill>
+          </a:ln>
+        </p:spPr>
+        <p:style>
+          <a:lnRef idx="1">
+            <a:schemeClr val="accent1"/>
+          </a:lnRef>
+          <a:fillRef idx="3">
+            <a:schemeClr val="accent1"/>
+          </a:fillRef>
+          <a:effectRef idx="2">
+            <a:schemeClr val="accent1"/>
+          </a:effectRef>
+          <a:fontRef idx="minor">
+            <a:schemeClr val="lt1"/>
+          </a:fontRef>
+        </p:style>
+        <p:txBody>
+          <a:bodyPr rtlCol="0" anchor="ctr"/>
+          <a:lstStyle/>
+          <a:p>
+            <a:pPr algn="ctr"/>
+          </a:p>
+        </p:txBody>
+      </p:sp>
+      <p:sp>
+        <p:nvSpPr>
+          <p:cNvPr id="9" name="Rectangle 8"/>
+          <p:cNvSpPr/>
+          <p:nvPr/>
+        </p:nvSpPr>
+        <p:spPr>
+          <a:xfrm>
+            <a:off x="4133087" y="2331720"/>
+            <a:ext cx="3474720" cy="347472"/>
+          </a:xfrm>
+          <a:prstGeom prst="rect">
+            <a:avLst/>
+          </a:prstGeom>
+          <a:solidFill>
+            <a:srgbClr val="0F172A"/>
+          </a:solidFill>
+          <a:ln>
+            <a:solidFill>
+              <a:srgbClr val="0F172A"/>
+            </a:solidFill>
+          </a:ln>
+        </p:spPr>
+        <p:style>
+          <a:lnRef idx="1">
+            <a:schemeClr val="accent1"/>
+          </a:lnRef>
+          <a:fillRef idx="3">
+            <a:schemeClr val="accent1"/>
+          </a:fillRef>
+          <a:effectRef idx="2">
+            <a:schemeClr val="accent1"/>
+          </a:effectRef>
+          <a:fontRef idx="minor">
+            <a:schemeClr val="lt1"/>
+          </a:fontRef>
+        </p:style>
+        <p:txBody>
+          <a:bodyPr rtlCol="0" anchor="t" wrap="square" tIns="25400" bIns="25400" lIns="76200" rIns="76200"/>
+          <a:lstStyle/>
+          <a:p>
+            <a:pPr algn="ctr"/>
+            <a:r>
+              <a:rPr sz="1200" b="1">
+                <a:solidFill>
+                  <a:srgbClr val="22D3EE"/>
+                </a:solidFill>
+                <a:latin typeface="Arial"/>
+              </a:rPr>
+              <a:t>源码解释</a:t>
+            </a:r>
+          </a:p>
+        </p:txBody>
+      </p:sp>
+      <p:sp>
+        <p:nvSpPr>
+          <p:cNvPr id="10" name="TextBox 9"/>
+          <p:cNvSpPr txBox="1"/>
+          <p:nvPr/>
+        </p:nvSpPr>
+        <p:spPr>
+          <a:xfrm>
+            <a:off x="4206240" y="2734056"/>
+            <a:ext cx="3328415" cy="1097280"/>
+          </a:xfrm>
+          <a:prstGeom prst="rect">
+            <a:avLst/>
+          </a:prstGeom>
+          <a:noFill/>
+        </p:spPr>
+        <p:txBody>
+          <a:bodyPr wrap="square" tIns="50800" bIns="50800" lIns="101600" rIns="101600" anchor="t">
+            <a:spAutoFit/>
+          </a:bodyPr>
+          <a:lstStyle/>
+          <a:p>
+            <a:pPr>
+              <a:spcAft>
+                <a:spcPts val="600"/>
+              </a:spcAft>
+            </a:pPr>
+            <a:r>
+              <a:rPr sz="1400" b="0">
+                <a:solidFill>
+                  <a:srgbClr val="E2E8F0"/>
+                </a:solidFill>
+                <a:latin typeface="Arial"/>
+              </a:rPr>
+              <a:t>难以回滚的动作需要更强边界</a:t>
+            </a:r>
+          </a:p>
+          <a:p>
+            <a:pPr>
+              <a:spcAft>
+                <a:spcPts val="600"/>
+              </a:spcAft>
+            </a:pPr>
+            <a:r>
+              <a:rPr sz="1400" b="0">
+                <a:solidFill>
+                  <a:srgbClr val="E2E8F0"/>
+                </a:solidFill>
+                <a:latin typeface="Arial"/>
+              </a:rPr>
+              <a:t>能减少误执行带来的 blast radius</a:t>
+            </a:r>
+          </a:p>
+        </p:txBody>
+      </p:sp>
+      <p:sp>
+        <p:nvSpPr>
+          <p:cNvPr id="11" name="Rounded Rectangle 10"/>
+          <p:cNvSpPr/>
+          <p:nvPr/>
+        </p:nvSpPr>
+        <p:spPr>
+          <a:xfrm>
+            <a:off x="7836408" y="2331720"/>
+            <a:ext cx="3794760" cy="1554480"/>
+          </a:xfrm>
+          <a:prstGeom prst="roundRect">
+            <a:avLst/>
+          </a:prstGeom>
+          <a:solidFill>
+            <a:srgbClr val="0A1224"/>
+          </a:solidFill>
+          <a:ln>
+            <a:solidFill>
+              <a:srgbClr val="22D3EE"/>
+            </a:solidFill>
+          </a:ln>
+        </p:spPr>
+        <p:style>
+          <a:lnRef idx="1">
+            <a:schemeClr val="accent1"/>
+          </a:lnRef>
+          <a:fillRef idx="3">
+            <a:schemeClr val="accent1"/>
+          </a:fillRef>
+          <a:effectRef idx="2">
+            <a:schemeClr val="accent1"/>
+          </a:effectRef>
+          <a:fontRef idx="minor">
+            <a:schemeClr val="lt1"/>
+          </a:fontRef>
+        </p:style>
+        <p:txBody>
+          <a:bodyPr rtlCol="0" anchor="ctr"/>
+          <a:lstStyle/>
+          <a:p>
+            <a:pPr algn="ctr"/>
+          </a:p>
+        </p:txBody>
+      </p:sp>
+      <p:sp>
+        <p:nvSpPr>
+          <p:cNvPr id="12" name="Rectangle 11"/>
+          <p:cNvSpPr/>
+          <p:nvPr/>
+        </p:nvSpPr>
+        <p:spPr>
+          <a:xfrm>
+            <a:off x="7836408" y="2331720"/>
+            <a:ext cx="3794760" cy="347472"/>
+          </a:xfrm>
+          <a:prstGeom prst="rect">
+            <a:avLst/>
+          </a:prstGeom>
+          <a:solidFill>
+            <a:srgbClr val="0F172A"/>
+          </a:solidFill>
+          <a:ln>
+            <a:solidFill>
+              <a:srgbClr val="0F172A"/>
+            </a:solidFill>
+          </a:ln>
+        </p:spPr>
+        <p:style>
+          <a:lnRef idx="1">
+            <a:schemeClr val="accent1"/>
+          </a:lnRef>
+          <a:fillRef idx="3">
+            <a:schemeClr val="accent1"/>
+          </a:fillRef>
+          <a:effectRef idx="2">
+            <a:schemeClr val="accent1"/>
+          </a:effectRef>
+          <a:fontRef idx="minor">
+            <a:schemeClr val="lt1"/>
+          </a:fontRef>
+        </p:style>
+        <p:txBody>
+          <a:bodyPr rtlCol="0" anchor="t" wrap="square" tIns="25400" bIns="25400" lIns="76200" rIns="76200"/>
+          <a:lstStyle/>
+          <a:p>
+            <a:pPr algn="ctr"/>
+            <a:r>
+              <a:rPr sz="1200" b="1">
+                <a:solidFill>
+                  <a:srgbClr val="22D3EE"/>
+                </a:solidFill>
+                <a:latin typeface="Arial"/>
+              </a:rPr>
+              <a:t>证据链</a:t>
+            </a:r>
+          </a:p>
+        </p:txBody>
+      </p:sp>
+      <p:sp>
+        <p:nvSpPr>
+          <p:cNvPr id="13" name="TextBox 12"/>
+          <p:cNvSpPr txBox="1"/>
+          <p:nvPr/>
+        </p:nvSpPr>
+        <p:spPr>
+          <a:xfrm>
+            <a:off x="7909560" y="2734056"/>
+            <a:ext cx="3648456" cy="1097280"/>
+          </a:xfrm>
+          <a:prstGeom prst="rect">
+            <a:avLst/>
+          </a:prstGeom>
+          <a:noFill/>
+        </p:spPr>
+        <p:txBody>
+          <a:bodyPr wrap="square" tIns="50800" bIns="50800" lIns="101600" rIns="101600" anchor="t">
+            <a:spAutoFit/>
+          </a:bodyPr>
+          <a:lstStyle/>
+          <a:p>
+            <a:pPr>
+              <a:spcAft>
+                <a:spcPts val="600"/>
+              </a:spcAft>
+            </a:pPr>
+            <a:r>
+              <a:rPr sz="1400" b="0">
+                <a:solidFill>
+                  <a:srgbClr val="E2E8F0"/>
+                </a:solidFill>
+                <a:latin typeface="Arial"/>
+              </a:rPr>
+              <a:t>prompt stack（提示词栈）先定义确认边界</a:t>
+            </a:r>
+          </a:p>
+          <a:p>
+            <a:pPr>
+              <a:spcAft>
+                <a:spcPts val="600"/>
+              </a:spcAft>
+            </a:pPr>
+            <a:r>
+              <a:rPr sz="1400" b="0">
+                <a:solidFill>
+                  <a:srgbClr val="E2E8F0"/>
+                </a:solidFill>
+                <a:latin typeface="Arial"/>
+              </a:rPr>
+              <a:t>tool pipeline（工具执行流水线）和 Bash 约束负责执行面收紧</a:t>
+            </a:r>
+          </a:p>
+        </p:txBody>
+      </p:sp>
+      <p:sp>
+        <p:nvSpPr>
+          <p:cNvPr id="14" name="Rounded Rectangle 13"/>
+          <p:cNvSpPr/>
+          <p:nvPr/>
+        </p:nvSpPr>
+        <p:spPr>
+          <a:xfrm>
+            <a:off x="658368" y="4160520"/>
+            <a:ext cx="10972800" cy="1234440"/>
+          </a:xfrm>
+          <a:prstGeom prst="roundRect">
+            <a:avLst/>
+          </a:prstGeom>
+          <a:solidFill>
+            <a:srgbClr val="030712"/>
+          </a:solidFill>
+          <a:ln>
+            <a:solidFill>
+              <a:srgbClr val="22D3EE"/>
+            </a:solidFill>
+          </a:ln>
+        </p:spPr>
+        <p:style>
+          <a:lnRef idx="1">
+            <a:schemeClr val="accent1"/>
+          </a:lnRef>
+          <a:fillRef idx="3">
+            <a:schemeClr val="accent1"/>
+          </a:fillRef>
+          <a:effectRef idx="2">
+            <a:schemeClr val="accent1"/>
+          </a:effectRef>
+          <a:fontRef idx="minor">
+            <a:schemeClr val="lt1"/>
+          </a:fontRef>
+        </p:style>
+        <p:txBody>
           <a:bodyPr rtlCol="0" anchor="t" wrap="square" tIns="203200" bIns="76200" lIns="127000" rIns="127000"/>
           <a:lstStyle/>
           <a:p>
@@ -5245,24 +5636,23 @@
                 </a:solidFill>
                 <a:latin typeface="Courier New"/>
               </a:rPr>
-              <a:t>make all independent tool calls in parallel
-1. Explore — Use read-only tools to read code.
-2. Update the plan file.
-3. Ask the user only what code cannot answer.</a:t>
-            </a:r>
-          </a:p>
-        </p:txBody>
-      </p:sp>
-      <p:sp>
-        <p:nvSpPr>
-          <p:cNvPr id="7" name="Rectangle 6"/>
+              <a:t>Carefully consider the reversibility and blast radius of actions.
+ask for confirmation before proceeding
+Only use destructive operations when they are truly the best approach.</a:t>
+            </a:r>
+          </a:p>
+        </p:txBody>
+      </p:sp>
+      <p:sp>
+        <p:nvSpPr>
+          <p:cNvPr id="15" name="Rectangle 14"/>
           <p:cNvSpPr/>
           <p:nvPr/>
         </p:nvSpPr>
         <p:spPr>
           <a:xfrm>
-            <a:off x="6537960" y="2468880"/>
-            <a:ext cx="4800600" cy="256032"/>
+            <a:off x="658368" y="4160520"/>
+            <a:ext cx="10972800" cy="256032"/>
           </a:xfrm>
           <a:prstGeom prst="rect">
             <a:avLst/>
@@ -5309,7 +5699,7 @@
       </p:sp>
       <p:sp>
         <p:nvSpPr>
-          <p:cNvPr id="8" name="TextBox 7"/>
+          <p:cNvPr id="16" name="TextBox 15"/>
           <p:cNvSpPr txBox="1"/>
           <p:nvPr/>
         </p:nvSpPr>
@@ -5337,7 +5727,7 @@
                 </a:solidFill>
                 <a:latin typeface="Arial"/>
               </a:rPr>
-              <a:t>源码依据：prompts.ts#L310，messages.ts#L3336 / #L3344，BashTool prompt#L298</a:t>
+              <a:t>源码依据：prompts.ts#L258，BashTool prompt#L304</a:t>
             </a:r>
           </a:p>
         </p:txBody>
@@ -5397,7 +5787,7 @@
                 </a:solidFill>
                 <a:latin typeface="Arial"/>
               </a:rPr>
-              <a:t>常见误区与注意事项</a:t>
+              <a:t>两个进阶技巧：parallel 与 Plan Mode</a:t>
             </a:r>
           </a:p>
         </p:txBody>
@@ -5498,7 +5888,7 @@
                 </a:solidFill>
                 <a:latin typeface="Arial"/>
               </a:rPr>
-              <a:t>大多数误用，本质上都在对抗 Claude Code 源码里的默认工作流。</a:t>
+              <a:t>对彼此独立的查询，显式允许 parallel（并行），更贴近 Claude Code 的原生工作方式。</a:t>
             </a:r>
           </a:p>
         </p:txBody>
@@ -5537,7 +5927,7 @@
                 </a:solidFill>
                 <a:latin typeface="Arial"/>
               </a:rPr>
-              <a:t>不要把 Claude Code 当自由聊天助手来用</a:t>
+              <a:t>独立查询可以显式允许 parallel（并行）</a:t>
             </a:r>
           </a:p>
           <a:p>
@@ -5553,7 +5943,7 @@
                 </a:solidFill>
                 <a:latin typeface="Arial"/>
               </a:rPr>
-              <a:t>不要一上来就让它“大改一遍”</a:t>
+              <a:t>做方案时，先走 Plan Mode workflow（规划模式工作流）</a:t>
             </a:r>
           </a:p>
           <a:p>
@@ -5569,23 +5959,7 @@
                 </a:solidFill>
                 <a:latin typeface="Arial"/>
               </a:rPr>
-              <a:t>不要默认它已经验证过</a:t>
-            </a:r>
-          </a:p>
-          <a:p>
-            <a:pPr>
-              <a:spcAft>
-                <a:spcPts val="800"/>
-              </a:spcAft>
-            </a:pPr>
-            <a:r>
-              <a:rPr sz="1700" b="0">
-                <a:solidFill>
-                  <a:srgbClr val="E2E8F0"/>
-                </a:solidFill>
-                <a:latin typeface="Arial"/>
-              </a:rPr>
-              <a:t>不要把高风险授权写得太模糊</a:t>
+              <a:t>也就是：先 Explore，再规划，再实现</a:t>
             </a:r>
           </a:p>
         </p:txBody>
@@ -5639,9 +6013,10 @@
                 </a:solidFill>
                 <a:latin typeface="Courier New"/>
               </a:rPr>
-              <a:t>The user will primarily request you to perform software engineering tasks.
-Don't add features, refactor code, or make "improvements" beyond what was asked.
-Report outcomes faithfully ...</a:t>
+              <a:t>make all independent tool calls in parallel
+1. Explore — Use read-only tools to read code.
+2. Update the plan file.
+3. Ask the user only what code cannot answer.</a:t>
             </a:r>
           </a:p>
         </p:txBody>
@@ -5730,7 +6105,7 @@
                 </a:solidFill>
                 <a:latin typeface="Arial"/>
               </a:rPr>
-              <a:t>源码依据：prompts.ts#L221 / #L200 / #L240 / #L258</a:t>
+              <a:t>源码依据：prompts.ts#L310，messages.ts#L3336 / #L3344，BashTool prompt#L298</a:t>
             </a:r>
           </a:p>
         </p:txBody>
@@ -5790,6 +6165,399 @@
                 </a:solidFill>
                 <a:latin typeface="Arial"/>
               </a:rPr>
+              <a:t>常见误区与注意事项</a:t>
+            </a:r>
+          </a:p>
+        </p:txBody>
+      </p:sp>
+      <p:sp>
+        <p:nvSpPr>
+          <p:cNvPr id="3" name="Rectangle 2"/>
+          <p:cNvSpPr/>
+          <p:nvPr/>
+        </p:nvSpPr>
+        <p:spPr>
+          <a:xfrm>
+            <a:off x="566928" y="1298448"/>
+            <a:ext cx="2194560" cy="18288"/>
+          </a:xfrm>
+          <a:prstGeom prst="rect">
+            <a:avLst/>
+          </a:prstGeom>
+          <a:solidFill>
+            <a:srgbClr val="22D3EE"/>
+          </a:solidFill>
+          <a:ln>
+            <a:noFill/>
+          </a:ln>
+        </p:spPr>
+        <p:style>
+          <a:lnRef idx="1">
+            <a:schemeClr val="accent1"/>
+          </a:lnRef>
+          <a:fillRef idx="3">
+            <a:schemeClr val="accent1"/>
+          </a:fillRef>
+          <a:effectRef idx="2">
+            <a:schemeClr val="accent1"/>
+          </a:effectRef>
+          <a:fontRef idx="minor">
+            <a:schemeClr val="lt1"/>
+          </a:fontRef>
+        </p:style>
+        <p:txBody>
+          <a:bodyPr rtlCol="0" anchor="ctr"/>
+          <a:lstStyle/>
+          <a:p>
+            <a:pPr algn="ctr"/>
+          </a:p>
+        </p:txBody>
+      </p:sp>
+      <p:sp>
+        <p:nvSpPr>
+          <p:cNvPr id="4" name="Rounded Rectangle 3"/>
+          <p:cNvSpPr/>
+          <p:nvPr/>
+        </p:nvSpPr>
+        <p:spPr>
+          <a:xfrm>
+            <a:off x="658368" y="1536192"/>
+            <a:ext cx="10972800" cy="658368"/>
+          </a:xfrm>
+          <a:prstGeom prst="roundRect">
+            <a:avLst/>
+          </a:prstGeom>
+          <a:solidFill>
+            <a:srgbClr val="0F172A"/>
+          </a:solidFill>
+          <a:ln>
+            <a:solidFill>
+              <a:srgbClr val="22D3EE"/>
+            </a:solidFill>
+          </a:ln>
+        </p:spPr>
+        <p:style>
+          <a:lnRef idx="1">
+            <a:schemeClr val="accent1"/>
+          </a:lnRef>
+          <a:fillRef idx="3">
+            <a:schemeClr val="accent1"/>
+          </a:fillRef>
+          <a:effectRef idx="2">
+            <a:schemeClr val="accent1"/>
+          </a:effectRef>
+          <a:fontRef idx="minor">
+            <a:schemeClr val="lt1"/>
+          </a:fontRef>
+        </p:style>
+        <p:txBody>
+          <a:bodyPr rtlCol="0" anchor="t" wrap="square" tIns="50800" bIns="50800" lIns="101600" rIns="101600"/>
+          <a:lstStyle/>
+          <a:p>
+            <a:pPr algn="ctr">
+              <a:spcAft>
+                <a:spcPts val="600"/>
+              </a:spcAft>
+            </a:pPr>
+            <a:r>
+              <a:rPr sz="1600" b="0">
+                <a:solidFill>
+                  <a:srgbClr val="E2E8F0"/>
+                </a:solidFill>
+                <a:latin typeface="Arial"/>
+              </a:rPr>
+              <a:t>大多数误用，本质上都在对抗 Claude Code 源码里的默认工作流。</a:t>
+            </a:r>
+          </a:p>
+        </p:txBody>
+      </p:sp>
+      <p:sp>
+        <p:nvSpPr>
+          <p:cNvPr id="5" name="TextBox 4"/>
+          <p:cNvSpPr txBox="1"/>
+          <p:nvPr/>
+        </p:nvSpPr>
+        <p:spPr>
+          <a:xfrm>
+            <a:off x="749808" y="2450592"/>
+            <a:ext cx="5577840" cy="3063240"/>
+          </a:xfrm>
+          <a:prstGeom prst="rect">
+            <a:avLst/>
+          </a:prstGeom>
+          <a:noFill/>
+        </p:spPr>
+        <p:txBody>
+          <a:bodyPr wrap="square" tIns="50800" bIns="50800" lIns="101600" rIns="101600" anchor="t">
+            <a:spAutoFit/>
+          </a:bodyPr>
+          <a:lstStyle/>
+          <a:p>
+            <a:pPr>
+              <a:spcAft>
+                <a:spcPts val="800"/>
+              </a:spcAft>
+            </a:pPr>
+            <a:r>
+              <a:rPr sz="1700" b="0">
+                <a:solidFill>
+                  <a:srgbClr val="E2E8F0"/>
+                </a:solidFill>
+                <a:latin typeface="Arial"/>
+              </a:rPr>
+              <a:t>不要把 Claude Code 当自由聊天助手来用</a:t>
+            </a:r>
+          </a:p>
+          <a:p>
+            <a:pPr>
+              <a:spcAft>
+                <a:spcPts val="800"/>
+              </a:spcAft>
+            </a:pPr>
+            <a:r>
+              <a:rPr sz="1700" b="0">
+                <a:solidFill>
+                  <a:srgbClr val="E2E8F0"/>
+                </a:solidFill>
+                <a:latin typeface="Arial"/>
+              </a:rPr>
+              <a:t>不要一上来就让它“大改一遍”</a:t>
+            </a:r>
+          </a:p>
+          <a:p>
+            <a:pPr>
+              <a:spcAft>
+                <a:spcPts val="800"/>
+              </a:spcAft>
+            </a:pPr>
+            <a:r>
+              <a:rPr sz="1700" b="0">
+                <a:solidFill>
+                  <a:srgbClr val="E2E8F0"/>
+                </a:solidFill>
+                <a:latin typeface="Arial"/>
+              </a:rPr>
+              <a:t>不要默认它已经验证过</a:t>
+            </a:r>
+          </a:p>
+          <a:p>
+            <a:pPr>
+              <a:spcAft>
+                <a:spcPts val="800"/>
+              </a:spcAft>
+            </a:pPr>
+            <a:r>
+              <a:rPr sz="1700" b="0">
+                <a:solidFill>
+                  <a:srgbClr val="E2E8F0"/>
+                </a:solidFill>
+                <a:latin typeface="Arial"/>
+              </a:rPr>
+              <a:t>不要把高风险授权写得太模糊</a:t>
+            </a:r>
+          </a:p>
+        </p:txBody>
+      </p:sp>
+      <p:sp>
+        <p:nvSpPr>
+          <p:cNvPr id="6" name="Rounded Rectangle 5"/>
+          <p:cNvSpPr/>
+          <p:nvPr/>
+        </p:nvSpPr>
+        <p:spPr>
+          <a:xfrm>
+            <a:off x="6537960" y="2468880"/>
+            <a:ext cx="4800600" cy="2468880"/>
+          </a:xfrm>
+          <a:prstGeom prst="roundRect">
+            <a:avLst/>
+          </a:prstGeom>
+          <a:solidFill>
+            <a:srgbClr val="030712"/>
+          </a:solidFill>
+          <a:ln>
+            <a:solidFill>
+              <a:srgbClr val="22D3EE"/>
+            </a:solidFill>
+          </a:ln>
+        </p:spPr>
+        <p:style>
+          <a:lnRef idx="1">
+            <a:schemeClr val="accent1"/>
+          </a:lnRef>
+          <a:fillRef idx="3">
+            <a:schemeClr val="accent1"/>
+          </a:fillRef>
+          <a:effectRef idx="2">
+            <a:schemeClr val="accent1"/>
+          </a:effectRef>
+          <a:fontRef idx="minor">
+            <a:schemeClr val="lt1"/>
+          </a:fontRef>
+        </p:style>
+        <p:txBody>
+          <a:bodyPr rtlCol="0" anchor="t" wrap="square" tIns="203200" bIns="76200" lIns="127000" rIns="127000"/>
+          <a:lstStyle/>
+          <a:p>
+            <a:pPr algn="ctr"/>
+            <a:r>
+              <a:rPr sz="1250" b="0">
+                <a:solidFill>
+                  <a:srgbClr val="C4FFEC"/>
+                </a:solidFill>
+                <a:latin typeface="Courier New"/>
+              </a:rPr>
+              <a:t>The user will primarily request you to perform software engineering tasks.
+Don't add features, refactor code, or make "improvements" beyond what was asked.
+Report outcomes faithfully ...</a:t>
+            </a:r>
+          </a:p>
+        </p:txBody>
+      </p:sp>
+      <p:sp>
+        <p:nvSpPr>
+          <p:cNvPr id="7" name="Rectangle 6"/>
+          <p:cNvSpPr/>
+          <p:nvPr/>
+        </p:nvSpPr>
+        <p:spPr>
+          <a:xfrm>
+            <a:off x="6537960" y="2468880"/>
+            <a:ext cx="4800600" cy="256032"/>
+          </a:xfrm>
+          <a:prstGeom prst="rect">
+            <a:avLst/>
+          </a:prstGeom>
+          <a:solidFill>
+            <a:srgbClr val="0D1426"/>
+          </a:solidFill>
+          <a:ln>
+            <a:solidFill>
+              <a:srgbClr val="0D1426"/>
+            </a:solidFill>
+          </a:ln>
+        </p:spPr>
+        <p:style>
+          <a:lnRef idx="1">
+            <a:schemeClr val="accent1"/>
+          </a:lnRef>
+          <a:fillRef idx="3">
+            <a:schemeClr val="accent1"/>
+          </a:fillRef>
+          <a:effectRef idx="2">
+            <a:schemeClr val="accent1"/>
+          </a:effectRef>
+          <a:fontRef idx="minor">
+            <a:schemeClr val="lt1"/>
+          </a:fontRef>
+        </p:style>
+        <p:txBody>
+          <a:bodyPr rtlCol="0" anchor="t" wrap="square" tIns="12700" bIns="12700" lIns="76200" rIns="76200"/>
+          <a:lstStyle/>
+          <a:p>
+            <a:pPr algn="ctr"/>
+            <a:r>
+              <a:rPr sz="1000" b="1">
+                <a:solidFill>
+                  <a:srgbClr val="22D3EE"/>
+                </a:solidFill>
+                <a:latin typeface="Courier New"/>
+              </a:rPr>
+              <a:t>code</a:t>
+            </a:r>
+          </a:p>
+        </p:txBody>
+      </p:sp>
+      <p:sp>
+        <p:nvSpPr>
+          <p:cNvPr id="8" name="TextBox 7"/>
+          <p:cNvSpPr txBox="1"/>
+          <p:nvPr/>
+        </p:nvSpPr>
+        <p:spPr>
+          <a:xfrm>
+            <a:off x="658368" y="6108192"/>
+            <a:ext cx="10881360" cy="320040"/>
+          </a:xfrm>
+          <a:prstGeom prst="rect">
+            <a:avLst/>
+          </a:prstGeom>
+          <a:noFill/>
+        </p:spPr>
+        <p:txBody>
+          <a:bodyPr wrap="square" tIns="12700" bIns="12700" lIns="12700" rIns="12700" anchor="t">
+            <a:spAutoFit/>
+          </a:bodyPr>
+          <a:lstStyle/>
+          <a:p>
+            <a:pPr algn="l"/>
+            <a:r>
+              <a:rPr sz="1100" b="0">
+                <a:solidFill>
+                  <a:srgbClr val="94A3B8"/>
+                </a:solidFill>
+                <a:latin typeface="Arial"/>
+              </a:rPr>
+              <a:t>源码依据：prompts.ts#L221 / #L200 / #L240 / #L258</a:t>
+            </a:r>
+          </a:p>
+        </p:txBody>
+      </p:sp>
+    </p:spTree>
+  </p:cSld>
+  <p:clrMapOvr>
+    <a:masterClrMapping/>
+  </p:clrMapOvr>
+</p:sld>
+</file>
+
+<file path=ppt/slides/slide15.xml><?xml version="1.0" encoding="utf-8"?>
+<p:sld xmlns:a="http://schemas.openxmlformats.org/drawingml/2006/main" xmlns:p="http://schemas.openxmlformats.org/presentationml/2006/main" xmlns:r="http://schemas.openxmlformats.org/officeDocument/2006/relationships">
+  <p:cSld>
+    <p:bg>
+      <p:bgPr>
+        <a:solidFill>
+          <a:srgbClr val="020617"/>
+        </a:solidFill>
+        <a:effectLst/>
+      </p:bgPr>
+    </p:bg>
+    <p:spTree>
+      <p:nvGrpSpPr>
+        <p:cNvPr id="1" name=""/>
+        <p:cNvGrpSpPr/>
+        <p:nvPr/>
+      </p:nvGrpSpPr>
+      <p:grpSpPr/>
+      <p:sp>
+        <p:nvSpPr>
+          <p:cNvPr id="2" name="TextBox 1"/>
+          <p:cNvSpPr txBox="1"/>
+          <p:nvPr/>
+        </p:nvSpPr>
+        <p:spPr>
+          <a:xfrm>
+            <a:off x="548640" y="347472"/>
+            <a:ext cx="11064240" cy="640080"/>
+          </a:xfrm>
+          <a:prstGeom prst="rect">
+            <a:avLst/>
+          </a:prstGeom>
+          <a:noFill/>
+        </p:spPr>
+        <p:txBody>
+          <a:bodyPr wrap="square" tIns="25400" bIns="25400" lIns="25400" rIns="25400" anchor="t">
+            <a:spAutoFit/>
+          </a:bodyPr>
+          <a:lstStyle/>
+          <a:p>
+            <a:r>
+              <a:rPr sz="2400" b="1">
+                <a:solidFill>
+                  <a:srgbClr val="F1F5F9"/>
+                </a:solidFill>
+                <a:latin typeface="Arial"/>
+              </a:rPr>
               <a:t>最小使用清单</a:t>
             </a:r>
           </a:p>
@@ -6105,7 +6873,7 @@
                 </a:solidFill>
                 <a:latin typeface="Arial"/>
               </a:rPr>
-              <a:t>总结构图：Claude Code 的主执行链</a:t>
+              <a:t>UML 总览图：Claude Code 的主执行链</a:t>
             </a:r>
           </a:p>
         </p:txBody>
@@ -9801,14 +10569,48 @@
                 </a:solidFill>
                 <a:latin typeface="Arial"/>
               </a:rPr>
-              <a:t>默认偏好的工作方式</a:t>
-            </a:r>
-          </a:p>
-        </p:txBody>
-      </p:sp>
-      <p:sp>
-        <p:nvSpPr>
-          <p:cNvPr id="3" name="Rectangle 2"/>
+              <a:t>时序图：一次请求如何流过 Claude Code</a:t>
+            </a:r>
+          </a:p>
+        </p:txBody>
+      </p:sp>
+      <p:sp>
+        <p:nvSpPr>
+          <p:cNvPr id="3" name="TextBox 2"/>
+          <p:cNvSpPr txBox="1"/>
+          <p:nvPr/>
+        </p:nvSpPr>
+        <p:spPr>
+          <a:xfrm>
+            <a:off x="585216" y="1005840"/>
+            <a:ext cx="10789920" cy="411480"/>
+          </a:xfrm>
+          <a:prstGeom prst="rect">
+            <a:avLst/>
+          </a:prstGeom>
+          <a:noFill/>
+        </p:spPr>
+        <p:txBody>
+          <a:bodyPr wrap="square" tIns="25400" bIns="25400" lIns="25400" rIns="25400" anchor="t">
+            <a:spAutoFit/>
+          </a:bodyPr>
+          <a:lstStyle/>
+          <a:p>
+            <a:r>
+              <a:rPr sz="1400" b="0">
+                <a:solidFill>
+                  <a:srgbClr val="94A3B8"/>
+                </a:solidFill>
+                <a:latin typeface="Arial"/>
+              </a:rPr>
+              <a:t>用一条 request → tool → result 链解释用户提示词为什么有效</a:t>
+            </a:r>
+          </a:p>
+        </p:txBody>
+      </p:sp>
+      <p:sp>
+        <p:nvSpPr>
+          <p:cNvPr id="4" name="Rectangle 3"/>
           <p:cNvSpPr/>
           <p:nvPr/>
         </p:nvSpPr>
@@ -9851,20 +10653,1003 @@
       </p:sp>
       <p:sp>
         <p:nvSpPr>
-          <p:cNvPr id="4" name="Rounded Rectangle 3"/>
+          <p:cNvPr id="5" name="Rounded Rectangle 4"/>
           <p:cNvSpPr/>
           <p:nvPr/>
         </p:nvSpPr>
         <p:spPr>
           <a:xfrm>
-            <a:off x="658368" y="1536192"/>
-            <a:ext cx="10972800" cy="658368"/>
+            <a:off x="731520" y="1463040"/>
+            <a:ext cx="1325880" cy="640080"/>
           </a:xfrm>
           <a:prstGeom prst="roundRect">
             <a:avLst/>
           </a:prstGeom>
           <a:solidFill>
-            <a:srgbClr val="0F172A"/>
+            <a:srgbClr val="0A1224"/>
+          </a:solidFill>
+          <a:ln>
+            <a:solidFill>
+              <a:srgbClr val="22D3EE"/>
+            </a:solidFill>
+          </a:ln>
+        </p:spPr>
+        <p:style>
+          <a:lnRef idx="1">
+            <a:schemeClr val="accent1"/>
+          </a:lnRef>
+          <a:fillRef idx="3">
+            <a:schemeClr val="accent1"/>
+          </a:fillRef>
+          <a:effectRef idx="2">
+            <a:schemeClr val="accent1"/>
+          </a:effectRef>
+          <a:fontRef idx="minor">
+            <a:schemeClr val="lt1"/>
+          </a:fontRef>
+        </p:style>
+        <p:txBody>
+          <a:bodyPr rtlCol="0" anchor="ctr"/>
+          <a:lstStyle/>
+          <a:p>
+            <a:pPr algn="ctr"/>
+          </a:p>
+        </p:txBody>
+      </p:sp>
+      <p:sp>
+        <p:nvSpPr>
+          <p:cNvPr id="6" name="Rectangle 5"/>
+          <p:cNvSpPr/>
+          <p:nvPr/>
+        </p:nvSpPr>
+        <p:spPr>
+          <a:xfrm>
+            <a:off x="731520" y="1463040"/>
+            <a:ext cx="1325880" cy="347472"/>
+          </a:xfrm>
+          <a:prstGeom prst="rect">
+            <a:avLst/>
+          </a:prstGeom>
+          <a:solidFill>
+            <a:srgbClr val="0C1E38"/>
+          </a:solidFill>
+          <a:ln>
+            <a:solidFill>
+              <a:srgbClr val="0C1E38"/>
+            </a:solidFill>
+          </a:ln>
+        </p:spPr>
+        <p:style>
+          <a:lnRef idx="1">
+            <a:schemeClr val="accent1"/>
+          </a:lnRef>
+          <a:fillRef idx="3">
+            <a:schemeClr val="accent1"/>
+          </a:fillRef>
+          <a:effectRef idx="2">
+            <a:schemeClr val="accent1"/>
+          </a:effectRef>
+          <a:fontRef idx="minor">
+            <a:schemeClr val="lt1"/>
+          </a:fontRef>
+        </p:style>
+        <p:txBody>
+          <a:bodyPr rtlCol="0" anchor="t" wrap="square" tIns="25400" bIns="25400" lIns="76200" rIns="76200"/>
+          <a:lstStyle/>
+          <a:p>
+            <a:pPr algn="ctr"/>
+            <a:r>
+              <a:rPr sz="1200" b="1">
+                <a:solidFill>
+                  <a:srgbClr val="22D3EE"/>
+                </a:solidFill>
+                <a:latin typeface="Arial"/>
+              </a:rPr>
+              <a:t>User</a:t>
+            </a:r>
+          </a:p>
+        </p:txBody>
+      </p:sp>
+      <p:sp>
+        <p:nvSpPr>
+          <p:cNvPr id="7" name="TextBox 6"/>
+          <p:cNvSpPr txBox="1"/>
+          <p:nvPr/>
+        </p:nvSpPr>
+        <p:spPr>
+          <a:xfrm>
+            <a:off x="804672" y="1865376"/>
+            <a:ext cx="1179576" cy="182879"/>
+          </a:xfrm>
+          <a:prstGeom prst="rect">
+            <a:avLst/>
+          </a:prstGeom>
+          <a:noFill/>
+        </p:spPr>
+        <p:txBody>
+          <a:bodyPr wrap="square" tIns="50800" bIns="50800" lIns="101600" rIns="101600" anchor="t">
+            <a:spAutoFit/>
+          </a:bodyPr>
+          <a:lstStyle/>
+          <a:p/>
+        </p:txBody>
+      </p:sp>
+      <p:cxnSp>
+        <p:nvCxnSpPr>
+          <p:cNvPr id="8" name="Connector 7"/>
+          <p:cNvCxnSpPr/>
+          <p:nvPr/>
+        </p:nvCxnSpPr>
+        <p:spPr>
+          <a:xfrm>
+            <a:off x="1389888" y="2084831"/>
+            <a:ext cx="0" cy="3355849"/>
+          </a:xfrm>
+          <a:prstGeom prst="line">
+            <a:avLst/>
+          </a:prstGeom>
+          <a:ln w="12700">
+            <a:solidFill>
+              <a:srgbClr val="1E293B"/>
+            </a:solidFill>
+          </a:ln>
+        </p:spPr>
+        <p:style>
+          <a:lnRef idx="2">
+            <a:schemeClr val="accent1"/>
+          </a:lnRef>
+          <a:fillRef idx="0">
+            <a:schemeClr val="accent1"/>
+          </a:fillRef>
+          <a:effectRef idx="1">
+            <a:schemeClr val="accent1"/>
+          </a:effectRef>
+          <a:fontRef idx="minor">
+            <a:schemeClr val="tx1"/>
+          </a:fontRef>
+        </p:style>
+      </p:cxnSp>
+      <p:sp>
+        <p:nvSpPr>
+          <p:cNvPr id="9" name="Rounded Rectangle 8"/>
+          <p:cNvSpPr/>
+          <p:nvPr/>
+        </p:nvSpPr>
+        <p:spPr>
+          <a:xfrm>
+            <a:off x="2743200" y="1463040"/>
+            <a:ext cx="1325880" cy="640080"/>
+          </a:xfrm>
+          <a:prstGeom prst="roundRect">
+            <a:avLst/>
+          </a:prstGeom>
+          <a:solidFill>
+            <a:srgbClr val="0A1224"/>
+          </a:solidFill>
+          <a:ln>
+            <a:solidFill>
+              <a:srgbClr val="22D3EE"/>
+            </a:solidFill>
+          </a:ln>
+        </p:spPr>
+        <p:style>
+          <a:lnRef idx="1">
+            <a:schemeClr val="accent1"/>
+          </a:lnRef>
+          <a:fillRef idx="3">
+            <a:schemeClr val="accent1"/>
+          </a:fillRef>
+          <a:effectRef idx="2">
+            <a:schemeClr val="accent1"/>
+          </a:effectRef>
+          <a:fontRef idx="minor">
+            <a:schemeClr val="lt1"/>
+          </a:fontRef>
+        </p:style>
+        <p:txBody>
+          <a:bodyPr rtlCol="0" anchor="ctr"/>
+          <a:lstStyle/>
+          <a:p>
+            <a:pPr algn="ctr"/>
+          </a:p>
+        </p:txBody>
+      </p:sp>
+      <p:sp>
+        <p:nvSpPr>
+          <p:cNvPr id="10" name="Rectangle 9"/>
+          <p:cNvSpPr/>
+          <p:nvPr/>
+        </p:nvSpPr>
+        <p:spPr>
+          <a:xfrm>
+            <a:off x="2743200" y="1463040"/>
+            <a:ext cx="1325880" cy="347472"/>
+          </a:xfrm>
+          <a:prstGeom prst="rect">
+            <a:avLst/>
+          </a:prstGeom>
+          <a:solidFill>
+            <a:srgbClr val="0C1E38"/>
+          </a:solidFill>
+          <a:ln>
+            <a:solidFill>
+              <a:srgbClr val="0C1E38"/>
+            </a:solidFill>
+          </a:ln>
+        </p:spPr>
+        <p:style>
+          <a:lnRef idx="1">
+            <a:schemeClr val="accent1"/>
+          </a:lnRef>
+          <a:fillRef idx="3">
+            <a:schemeClr val="accent1"/>
+          </a:fillRef>
+          <a:effectRef idx="2">
+            <a:schemeClr val="accent1"/>
+          </a:effectRef>
+          <a:fontRef idx="minor">
+            <a:schemeClr val="lt1"/>
+          </a:fontRef>
+        </p:style>
+        <p:txBody>
+          <a:bodyPr rtlCol="0" anchor="t" wrap="square" tIns="25400" bIns="25400" lIns="76200" rIns="76200"/>
+          <a:lstStyle/>
+          <a:p>
+            <a:pPr algn="ctr"/>
+            <a:r>
+              <a:rPr sz="1200" b="1">
+                <a:solidFill>
+                  <a:srgbClr val="22D3EE"/>
+                </a:solidFill>
+                <a:latin typeface="Arial"/>
+              </a:rPr>
+              <a:t>Prompt Stack</a:t>
+            </a:r>
+          </a:p>
+        </p:txBody>
+      </p:sp>
+      <p:sp>
+        <p:nvSpPr>
+          <p:cNvPr id="11" name="TextBox 10"/>
+          <p:cNvSpPr txBox="1"/>
+          <p:nvPr/>
+        </p:nvSpPr>
+        <p:spPr>
+          <a:xfrm>
+            <a:off x="2816352" y="1865376"/>
+            <a:ext cx="1179576" cy="182879"/>
+          </a:xfrm>
+          <a:prstGeom prst="rect">
+            <a:avLst/>
+          </a:prstGeom>
+          <a:noFill/>
+        </p:spPr>
+        <p:txBody>
+          <a:bodyPr wrap="square" tIns="50800" bIns="50800" lIns="101600" rIns="101600" anchor="t">
+            <a:spAutoFit/>
+          </a:bodyPr>
+          <a:lstStyle/>
+          <a:p/>
+        </p:txBody>
+      </p:sp>
+      <p:cxnSp>
+        <p:nvCxnSpPr>
+          <p:cNvPr id="12" name="Connector 11"/>
+          <p:cNvCxnSpPr/>
+          <p:nvPr/>
+        </p:nvCxnSpPr>
+        <p:spPr>
+          <a:xfrm>
+            <a:off x="3401568" y="2084831"/>
+            <a:ext cx="0" cy="3355849"/>
+          </a:xfrm>
+          <a:prstGeom prst="line">
+            <a:avLst/>
+          </a:prstGeom>
+          <a:ln w="12700">
+            <a:solidFill>
+              <a:srgbClr val="1E293B"/>
+            </a:solidFill>
+          </a:ln>
+        </p:spPr>
+        <p:style>
+          <a:lnRef idx="2">
+            <a:schemeClr val="accent1"/>
+          </a:lnRef>
+          <a:fillRef idx="0">
+            <a:schemeClr val="accent1"/>
+          </a:fillRef>
+          <a:effectRef idx="1">
+            <a:schemeClr val="accent1"/>
+          </a:effectRef>
+          <a:fontRef idx="minor">
+            <a:schemeClr val="tx1"/>
+          </a:fontRef>
+        </p:style>
+      </p:cxnSp>
+      <p:sp>
+        <p:nvSpPr>
+          <p:cNvPr id="13" name="Rounded Rectangle 12"/>
+          <p:cNvSpPr/>
+          <p:nvPr/>
+        </p:nvSpPr>
+        <p:spPr>
+          <a:xfrm>
+            <a:off x="4663440" y="1463040"/>
+            <a:ext cx="1325880" cy="640080"/>
+          </a:xfrm>
+          <a:prstGeom prst="roundRect">
+            <a:avLst/>
+          </a:prstGeom>
+          <a:solidFill>
+            <a:srgbClr val="0A1224"/>
+          </a:solidFill>
+          <a:ln>
+            <a:solidFill>
+              <a:srgbClr val="22D3EE"/>
+            </a:solidFill>
+          </a:ln>
+        </p:spPr>
+        <p:style>
+          <a:lnRef idx="1">
+            <a:schemeClr val="accent1"/>
+          </a:lnRef>
+          <a:fillRef idx="3">
+            <a:schemeClr val="accent1"/>
+          </a:fillRef>
+          <a:effectRef idx="2">
+            <a:schemeClr val="accent1"/>
+          </a:effectRef>
+          <a:fontRef idx="minor">
+            <a:schemeClr val="lt1"/>
+          </a:fontRef>
+        </p:style>
+        <p:txBody>
+          <a:bodyPr rtlCol="0" anchor="ctr"/>
+          <a:lstStyle/>
+          <a:p>
+            <a:pPr algn="ctr"/>
+          </a:p>
+        </p:txBody>
+      </p:sp>
+      <p:sp>
+        <p:nvSpPr>
+          <p:cNvPr id="14" name="Rectangle 13"/>
+          <p:cNvSpPr/>
+          <p:nvPr/>
+        </p:nvSpPr>
+        <p:spPr>
+          <a:xfrm>
+            <a:off x="4663440" y="1463040"/>
+            <a:ext cx="1325880" cy="347472"/>
+          </a:xfrm>
+          <a:prstGeom prst="rect">
+            <a:avLst/>
+          </a:prstGeom>
+          <a:solidFill>
+            <a:srgbClr val="0C1E38"/>
+          </a:solidFill>
+          <a:ln>
+            <a:solidFill>
+              <a:srgbClr val="0C1E38"/>
+            </a:solidFill>
+          </a:ln>
+        </p:spPr>
+        <p:style>
+          <a:lnRef idx="1">
+            <a:schemeClr val="accent1"/>
+          </a:lnRef>
+          <a:fillRef idx="3">
+            <a:schemeClr val="accent1"/>
+          </a:fillRef>
+          <a:effectRef idx="2">
+            <a:schemeClr val="accent1"/>
+          </a:effectRef>
+          <a:fontRef idx="minor">
+            <a:schemeClr val="lt1"/>
+          </a:fontRef>
+        </p:style>
+        <p:txBody>
+          <a:bodyPr rtlCol="0" anchor="t" wrap="square" tIns="25400" bIns="25400" lIns="76200" rIns="76200"/>
+          <a:lstStyle/>
+          <a:p>
+            <a:pPr algn="ctr"/>
+            <a:r>
+              <a:rPr sz="1200" b="1">
+                <a:solidFill>
+                  <a:srgbClr val="22D3EE"/>
+                </a:solidFill>
+                <a:latin typeface="Arial"/>
+              </a:rPr>
+              <a:t>QueryEngine</a:t>
+            </a:r>
+          </a:p>
+        </p:txBody>
+      </p:sp>
+      <p:sp>
+        <p:nvSpPr>
+          <p:cNvPr id="15" name="TextBox 14"/>
+          <p:cNvSpPr txBox="1"/>
+          <p:nvPr/>
+        </p:nvSpPr>
+        <p:spPr>
+          <a:xfrm>
+            <a:off x="4736592" y="1865376"/>
+            <a:ext cx="1179576" cy="182879"/>
+          </a:xfrm>
+          <a:prstGeom prst="rect">
+            <a:avLst/>
+          </a:prstGeom>
+          <a:noFill/>
+        </p:spPr>
+        <p:txBody>
+          <a:bodyPr wrap="square" tIns="50800" bIns="50800" lIns="101600" rIns="101600" anchor="t">
+            <a:spAutoFit/>
+          </a:bodyPr>
+          <a:lstStyle/>
+          <a:p/>
+        </p:txBody>
+      </p:sp>
+      <p:cxnSp>
+        <p:nvCxnSpPr>
+          <p:cNvPr id="16" name="Connector 15"/>
+          <p:cNvCxnSpPr/>
+          <p:nvPr/>
+        </p:nvCxnSpPr>
+        <p:spPr>
+          <a:xfrm>
+            <a:off x="5321807" y="2084831"/>
+            <a:ext cx="0" cy="3355849"/>
+          </a:xfrm>
+          <a:prstGeom prst="line">
+            <a:avLst/>
+          </a:prstGeom>
+          <a:ln w="12700">
+            <a:solidFill>
+              <a:srgbClr val="1E293B"/>
+            </a:solidFill>
+          </a:ln>
+        </p:spPr>
+        <p:style>
+          <a:lnRef idx="2">
+            <a:schemeClr val="accent1"/>
+          </a:lnRef>
+          <a:fillRef idx="0">
+            <a:schemeClr val="accent1"/>
+          </a:fillRef>
+          <a:effectRef idx="1">
+            <a:schemeClr val="accent1"/>
+          </a:effectRef>
+          <a:fontRef idx="minor">
+            <a:schemeClr val="tx1"/>
+          </a:fontRef>
+        </p:style>
+      </p:cxnSp>
+      <p:sp>
+        <p:nvSpPr>
+          <p:cNvPr id="17" name="Rounded Rectangle 16"/>
+          <p:cNvSpPr/>
+          <p:nvPr/>
+        </p:nvSpPr>
+        <p:spPr>
+          <a:xfrm>
+            <a:off x="6583680" y="1463040"/>
+            <a:ext cx="1325880" cy="640080"/>
+          </a:xfrm>
+          <a:prstGeom prst="roundRect">
+            <a:avLst/>
+          </a:prstGeom>
+          <a:solidFill>
+            <a:srgbClr val="0A1224"/>
+          </a:solidFill>
+          <a:ln>
+            <a:solidFill>
+              <a:srgbClr val="22D3EE"/>
+            </a:solidFill>
+          </a:ln>
+        </p:spPr>
+        <p:style>
+          <a:lnRef idx="1">
+            <a:schemeClr val="accent1"/>
+          </a:lnRef>
+          <a:fillRef idx="3">
+            <a:schemeClr val="accent1"/>
+          </a:fillRef>
+          <a:effectRef idx="2">
+            <a:schemeClr val="accent1"/>
+          </a:effectRef>
+          <a:fontRef idx="minor">
+            <a:schemeClr val="lt1"/>
+          </a:fontRef>
+        </p:style>
+        <p:txBody>
+          <a:bodyPr rtlCol="0" anchor="ctr"/>
+          <a:lstStyle/>
+          <a:p>
+            <a:pPr algn="ctr"/>
+          </a:p>
+        </p:txBody>
+      </p:sp>
+      <p:sp>
+        <p:nvSpPr>
+          <p:cNvPr id="18" name="Rectangle 17"/>
+          <p:cNvSpPr/>
+          <p:nvPr/>
+        </p:nvSpPr>
+        <p:spPr>
+          <a:xfrm>
+            <a:off x="6583680" y="1463040"/>
+            <a:ext cx="1325880" cy="347472"/>
+          </a:xfrm>
+          <a:prstGeom prst="rect">
+            <a:avLst/>
+          </a:prstGeom>
+          <a:solidFill>
+            <a:srgbClr val="0C1E38"/>
+          </a:solidFill>
+          <a:ln>
+            <a:solidFill>
+              <a:srgbClr val="0C1E38"/>
+            </a:solidFill>
+          </a:ln>
+        </p:spPr>
+        <p:style>
+          <a:lnRef idx="1">
+            <a:schemeClr val="accent1"/>
+          </a:lnRef>
+          <a:fillRef idx="3">
+            <a:schemeClr val="accent1"/>
+          </a:fillRef>
+          <a:effectRef idx="2">
+            <a:schemeClr val="accent1"/>
+          </a:effectRef>
+          <a:fontRef idx="minor">
+            <a:schemeClr val="lt1"/>
+          </a:fontRef>
+        </p:style>
+        <p:txBody>
+          <a:bodyPr rtlCol="0" anchor="t" wrap="square" tIns="25400" bIns="25400" lIns="76200" rIns="76200"/>
+          <a:lstStyle/>
+          <a:p>
+            <a:pPr algn="ctr"/>
+            <a:r>
+              <a:rPr sz="1200" b="1">
+                <a:solidFill>
+                  <a:srgbClr val="22D3EE"/>
+                </a:solidFill>
+                <a:latin typeface="Arial"/>
+              </a:rPr>
+              <a:t>query.ts</a:t>
+            </a:r>
+          </a:p>
+        </p:txBody>
+      </p:sp>
+      <p:sp>
+        <p:nvSpPr>
+          <p:cNvPr id="19" name="TextBox 18"/>
+          <p:cNvSpPr txBox="1"/>
+          <p:nvPr/>
+        </p:nvSpPr>
+        <p:spPr>
+          <a:xfrm>
+            <a:off x="6656832" y="1865376"/>
+            <a:ext cx="1179576" cy="182879"/>
+          </a:xfrm>
+          <a:prstGeom prst="rect">
+            <a:avLst/>
+          </a:prstGeom>
+          <a:noFill/>
+        </p:spPr>
+        <p:txBody>
+          <a:bodyPr wrap="square" tIns="50800" bIns="50800" lIns="101600" rIns="101600" anchor="t">
+            <a:spAutoFit/>
+          </a:bodyPr>
+          <a:lstStyle/>
+          <a:p/>
+        </p:txBody>
+      </p:sp>
+      <p:cxnSp>
+        <p:nvCxnSpPr>
+          <p:cNvPr id="20" name="Connector 19"/>
+          <p:cNvCxnSpPr/>
+          <p:nvPr/>
+        </p:nvCxnSpPr>
+        <p:spPr>
+          <a:xfrm>
+            <a:off x="7242048" y="2084831"/>
+            <a:ext cx="0" cy="3355849"/>
+          </a:xfrm>
+          <a:prstGeom prst="line">
+            <a:avLst/>
+          </a:prstGeom>
+          <a:ln w="12700">
+            <a:solidFill>
+              <a:srgbClr val="1E293B"/>
+            </a:solidFill>
+          </a:ln>
+        </p:spPr>
+        <p:style>
+          <a:lnRef idx="2">
+            <a:schemeClr val="accent1"/>
+          </a:lnRef>
+          <a:fillRef idx="0">
+            <a:schemeClr val="accent1"/>
+          </a:fillRef>
+          <a:effectRef idx="1">
+            <a:schemeClr val="accent1"/>
+          </a:effectRef>
+          <a:fontRef idx="minor">
+            <a:schemeClr val="tx1"/>
+          </a:fontRef>
+        </p:style>
+      </p:cxnSp>
+      <p:sp>
+        <p:nvSpPr>
+          <p:cNvPr id="21" name="Rounded Rectangle 20"/>
+          <p:cNvSpPr/>
+          <p:nvPr/>
+        </p:nvSpPr>
+        <p:spPr>
+          <a:xfrm>
+            <a:off x="8503920" y="1463040"/>
+            <a:ext cx="1325880" cy="640080"/>
+          </a:xfrm>
+          <a:prstGeom prst="roundRect">
+            <a:avLst/>
+          </a:prstGeom>
+          <a:solidFill>
+            <a:srgbClr val="0A1224"/>
+          </a:solidFill>
+          <a:ln>
+            <a:solidFill>
+              <a:srgbClr val="22D3EE"/>
+            </a:solidFill>
+          </a:ln>
+        </p:spPr>
+        <p:style>
+          <a:lnRef idx="1">
+            <a:schemeClr val="accent1"/>
+          </a:lnRef>
+          <a:fillRef idx="3">
+            <a:schemeClr val="accent1"/>
+          </a:fillRef>
+          <a:effectRef idx="2">
+            <a:schemeClr val="accent1"/>
+          </a:effectRef>
+          <a:fontRef idx="minor">
+            <a:schemeClr val="lt1"/>
+          </a:fontRef>
+        </p:style>
+        <p:txBody>
+          <a:bodyPr rtlCol="0" anchor="ctr"/>
+          <a:lstStyle/>
+          <a:p>
+            <a:pPr algn="ctr"/>
+          </a:p>
+        </p:txBody>
+      </p:sp>
+      <p:sp>
+        <p:nvSpPr>
+          <p:cNvPr id="22" name="Rectangle 21"/>
+          <p:cNvSpPr/>
+          <p:nvPr/>
+        </p:nvSpPr>
+        <p:spPr>
+          <a:xfrm>
+            <a:off x="8503920" y="1463040"/>
+            <a:ext cx="1325880" cy="347472"/>
+          </a:xfrm>
+          <a:prstGeom prst="rect">
+            <a:avLst/>
+          </a:prstGeom>
+          <a:solidFill>
+            <a:srgbClr val="0C1E38"/>
+          </a:solidFill>
+          <a:ln>
+            <a:solidFill>
+              <a:srgbClr val="0C1E38"/>
+            </a:solidFill>
+          </a:ln>
+        </p:spPr>
+        <p:style>
+          <a:lnRef idx="1">
+            <a:schemeClr val="accent1"/>
+          </a:lnRef>
+          <a:fillRef idx="3">
+            <a:schemeClr val="accent1"/>
+          </a:fillRef>
+          <a:effectRef idx="2">
+            <a:schemeClr val="accent1"/>
+          </a:effectRef>
+          <a:fontRef idx="minor">
+            <a:schemeClr val="lt1"/>
+          </a:fontRef>
+        </p:style>
+        <p:txBody>
+          <a:bodyPr rtlCol="0" anchor="t" wrap="square" tIns="25400" bIns="25400" lIns="76200" rIns="76200"/>
+          <a:lstStyle/>
+          <a:p>
+            <a:pPr algn="ctr"/>
+            <a:r>
+              <a:rPr sz="1200" b="1">
+                <a:solidFill>
+                  <a:srgbClr val="22D3EE"/>
+                </a:solidFill>
+                <a:latin typeface="Arial"/>
+              </a:rPr>
+              <a:t>Tool Pipeline</a:t>
+            </a:r>
+          </a:p>
+        </p:txBody>
+      </p:sp>
+      <p:sp>
+        <p:nvSpPr>
+          <p:cNvPr id="23" name="TextBox 22"/>
+          <p:cNvSpPr txBox="1"/>
+          <p:nvPr/>
+        </p:nvSpPr>
+        <p:spPr>
+          <a:xfrm>
+            <a:off x="8577072" y="1865376"/>
+            <a:ext cx="1179576" cy="182879"/>
+          </a:xfrm>
+          <a:prstGeom prst="rect">
+            <a:avLst/>
+          </a:prstGeom>
+          <a:noFill/>
+        </p:spPr>
+        <p:txBody>
+          <a:bodyPr wrap="square" tIns="50800" bIns="50800" lIns="101600" rIns="101600" anchor="t">
+            <a:spAutoFit/>
+          </a:bodyPr>
+          <a:lstStyle/>
+          <a:p/>
+        </p:txBody>
+      </p:sp>
+      <p:cxnSp>
+        <p:nvCxnSpPr>
+          <p:cNvPr id="24" name="Connector 23"/>
+          <p:cNvCxnSpPr/>
+          <p:nvPr/>
+        </p:nvCxnSpPr>
+        <p:spPr>
+          <a:xfrm>
+            <a:off x="9162288" y="2084831"/>
+            <a:ext cx="0" cy="3355849"/>
+          </a:xfrm>
+          <a:prstGeom prst="line">
+            <a:avLst/>
+          </a:prstGeom>
+          <a:ln w="12700">
+            <a:solidFill>
+              <a:srgbClr val="1E293B"/>
+            </a:solidFill>
+          </a:ln>
+        </p:spPr>
+        <p:style>
+          <a:lnRef idx="2">
+            <a:schemeClr val="accent1"/>
+          </a:lnRef>
+          <a:fillRef idx="0">
+            <a:schemeClr val="accent1"/>
+          </a:fillRef>
+          <a:effectRef idx="1">
+            <a:schemeClr val="accent1"/>
+          </a:effectRef>
+          <a:fontRef idx="minor">
+            <a:schemeClr val="tx1"/>
+          </a:fontRef>
+        </p:style>
+      </p:cxnSp>
+      <p:sp>
+        <p:nvSpPr>
+          <p:cNvPr id="25" name="Rounded Rectangle 24"/>
+          <p:cNvSpPr/>
+          <p:nvPr/>
+        </p:nvSpPr>
+        <p:spPr>
+          <a:xfrm>
+            <a:off x="10195560" y="1463040"/>
+            <a:ext cx="1325880" cy="640080"/>
+          </a:xfrm>
+          <a:prstGeom prst="roundRect">
+            <a:avLst/>
+          </a:prstGeom>
+          <a:solidFill>
+            <a:srgbClr val="0A1224"/>
+          </a:solidFill>
+          <a:ln>
+            <a:solidFill>
+              <a:srgbClr val="22D3EE"/>
+            </a:solidFill>
+          </a:ln>
+        </p:spPr>
+        <p:style>
+          <a:lnRef idx="1">
+            <a:schemeClr val="accent1"/>
+          </a:lnRef>
+          <a:fillRef idx="3">
+            <a:schemeClr val="accent1"/>
+          </a:fillRef>
+          <a:effectRef idx="2">
+            <a:schemeClr val="accent1"/>
+          </a:effectRef>
+          <a:fontRef idx="minor">
+            <a:schemeClr val="lt1"/>
+          </a:fontRef>
+        </p:style>
+        <p:txBody>
+          <a:bodyPr rtlCol="0" anchor="ctr"/>
+          <a:lstStyle/>
+          <a:p>
+            <a:pPr algn="ctr"/>
+          </a:p>
+        </p:txBody>
+      </p:sp>
+      <p:sp>
+        <p:nvSpPr>
+          <p:cNvPr id="26" name="Rectangle 25"/>
+          <p:cNvSpPr/>
+          <p:nvPr/>
+        </p:nvSpPr>
+        <p:spPr>
+          <a:xfrm>
+            <a:off x="10195560" y="1463040"/>
+            <a:ext cx="1325880" cy="347472"/>
+          </a:xfrm>
+          <a:prstGeom prst="rect">
+            <a:avLst/>
+          </a:prstGeom>
+          <a:solidFill>
+            <a:srgbClr val="0C1E38"/>
+          </a:solidFill>
+          <a:ln>
+            <a:solidFill>
+              <a:srgbClr val="0C1E38"/>
+            </a:solidFill>
+          </a:ln>
+        </p:spPr>
+        <p:style>
+          <a:lnRef idx="1">
+            <a:schemeClr val="accent1"/>
+          </a:lnRef>
+          <a:fillRef idx="3">
+            <a:schemeClr val="accent1"/>
+          </a:fillRef>
+          <a:effectRef idx="2">
+            <a:schemeClr val="accent1"/>
+          </a:effectRef>
+          <a:fontRef idx="minor">
+            <a:schemeClr val="lt1"/>
+          </a:fontRef>
+        </p:style>
+        <p:txBody>
+          <a:bodyPr rtlCol="0" anchor="t" wrap="square" tIns="25400" bIns="25400" lIns="76200" rIns="76200"/>
+          <a:lstStyle/>
+          <a:p>
+            <a:pPr algn="ctr"/>
+            <a:r>
+              <a:rPr sz="1200" b="1">
+                <a:solidFill>
+                  <a:srgbClr val="22D3EE"/>
+                </a:solidFill>
+                <a:latin typeface="Arial"/>
+              </a:rPr>
+              <a:t>Tools</a:t>
+            </a:r>
+          </a:p>
+        </p:txBody>
+      </p:sp>
+      <p:sp>
+        <p:nvSpPr>
+          <p:cNvPr id="27" name="TextBox 26"/>
+          <p:cNvSpPr txBox="1"/>
+          <p:nvPr/>
+        </p:nvSpPr>
+        <p:spPr>
+          <a:xfrm>
+            <a:off x="10268712" y="1865376"/>
+            <a:ext cx="1179576" cy="182879"/>
+          </a:xfrm>
+          <a:prstGeom prst="rect">
+            <a:avLst/>
+          </a:prstGeom>
+          <a:noFill/>
+        </p:spPr>
+        <p:txBody>
+          <a:bodyPr wrap="square" tIns="50800" bIns="50800" lIns="101600" rIns="101600" anchor="t">
+            <a:spAutoFit/>
+          </a:bodyPr>
+          <a:lstStyle/>
+          <a:p/>
+        </p:txBody>
+      </p:sp>
+      <p:cxnSp>
+        <p:nvCxnSpPr>
+          <p:cNvPr id="28" name="Connector 27"/>
+          <p:cNvCxnSpPr/>
+          <p:nvPr/>
+        </p:nvCxnSpPr>
+        <p:spPr>
+          <a:xfrm>
+            <a:off x="10853928" y="2084831"/>
+            <a:ext cx="0" cy="3355849"/>
+          </a:xfrm>
+          <a:prstGeom prst="line">
+            <a:avLst/>
+          </a:prstGeom>
+          <a:ln w="12700">
+            <a:solidFill>
+              <a:srgbClr val="1E293B"/>
+            </a:solidFill>
+          </a:ln>
+        </p:spPr>
+        <p:style>
+          <a:lnRef idx="2">
+            <a:schemeClr val="accent1"/>
+          </a:lnRef>
+          <a:fillRef idx="0">
+            <a:schemeClr val="accent1"/>
+          </a:fillRef>
+          <a:effectRef idx="1">
+            <a:schemeClr val="accent1"/>
+          </a:effectRef>
+          <a:fontRef idx="minor">
+            <a:schemeClr val="tx1"/>
+          </a:fontRef>
+        </p:style>
+      </p:cxnSp>
+      <p:cxnSp>
+        <p:nvCxnSpPr>
+          <p:cNvPr id="29" name="Connector 28"/>
+          <p:cNvCxnSpPr/>
+          <p:nvPr/>
+        </p:nvCxnSpPr>
+        <p:spPr>
+          <a:xfrm>
+            <a:off x="1389888" y="2468880"/>
+            <a:ext cx="2011680" cy="0"/>
+          </a:xfrm>
+          <a:prstGeom prst="line">
+            <a:avLst/>
+          </a:prstGeom>
+          <a:ln w="15875">
+            <a:solidFill>
+              <a:srgbClr val="22D3EE"/>
+            </a:solidFill>
+          </a:ln>
+        </p:spPr>
+        <p:style>
+          <a:lnRef idx="2">
+            <a:schemeClr val="accent1"/>
+          </a:lnRef>
+          <a:fillRef idx="0">
+            <a:schemeClr val="accent1"/>
+          </a:fillRef>
+          <a:effectRef idx="1">
+            <a:schemeClr val="accent1"/>
+          </a:effectRef>
+          <a:fontRef idx="minor">
+            <a:schemeClr val="tx1"/>
+          </a:fontRef>
+        </p:style>
+      </p:cxnSp>
+      <p:sp>
+        <p:nvSpPr>
+          <p:cNvPr id="30" name="Rounded Rectangle 29"/>
+          <p:cNvSpPr/>
+          <p:nvPr/>
+        </p:nvSpPr>
+        <p:spPr>
+          <a:xfrm>
+            <a:off x="1499616" y="2322576"/>
+            <a:ext cx="1792224" cy="292608"/>
+          </a:xfrm>
+          <a:prstGeom prst="roundRect">
+            <a:avLst/>
+          </a:prstGeom>
+          <a:solidFill>
+            <a:srgbClr val="0C1E38"/>
           </a:solidFill>
           <a:ln>
             <a:solidFill>
@@ -9896,136 +11681,68 @@
               </a:spcAft>
             </a:pPr>
             <a:r>
-              <a:rPr sz="1600" b="0">
+              <a:rPr sz="1100" b="0">
                 <a:solidFill>
                   <a:srgbClr val="E2E8F0"/>
                 </a:solidFill>
                 <a:latin typeface="Arial"/>
               </a:rPr>
-              <a:t>后面的所有使用技巧，都是把源码里的默认偏好显式写进用户提示里。</a:t>
-            </a:r>
-          </a:p>
-        </p:txBody>
-      </p:sp>
-      <p:sp>
-        <p:nvSpPr>
-          <p:cNvPr id="5" name="TextBox 4"/>
-          <p:cNvSpPr txBox="1"/>
-          <p:nvPr/>
-        </p:nvSpPr>
-        <p:spPr>
-          <a:xfrm>
-            <a:off x="749808" y="2450592"/>
-            <a:ext cx="5577840" cy="3063240"/>
-          </a:xfrm>
-          <a:prstGeom prst="rect">
-            <a:avLst/>
-          </a:prstGeom>
-          <a:noFill/>
-        </p:spPr>
-        <p:txBody>
-          <a:bodyPr wrap="square" tIns="50800" bIns="50800" lIns="101600" rIns="101600" anchor="t">
-            <a:spAutoFit/>
-          </a:bodyPr>
-          <a:lstStyle/>
-          <a:p>
-            <a:pPr>
-              <a:spcAft>
-                <a:spcPts val="800"/>
-              </a:spcAft>
-            </a:pPr>
-            <a:r>
-              <a:rPr sz="1700" b="0">
-                <a:solidFill>
-                  <a:srgbClr val="E2E8F0"/>
-                </a:solidFill>
-                <a:latin typeface="Arial"/>
-              </a:rPr>
-              <a:t>先读代码，再改代码</a:t>
-            </a:r>
-          </a:p>
-          <a:p>
-            <a:pPr>
-              <a:spcAft>
-                <a:spcPts val="800"/>
-              </a:spcAft>
-            </a:pPr>
-            <a:r>
-              <a:rPr sz="1700" b="0">
-                <a:solidFill>
-                  <a:srgbClr val="E2E8F0"/>
-                </a:solidFill>
-                <a:latin typeface="Arial"/>
-              </a:rPr>
-              <a:t>最小必要改动，优先复用</a:t>
-            </a:r>
-          </a:p>
-          <a:p>
-            <a:pPr>
-              <a:spcAft>
-                <a:spcPts val="800"/>
-              </a:spcAft>
-            </a:pPr>
-            <a:r>
-              <a:rPr sz="1700" b="0">
-                <a:solidFill>
-                  <a:srgbClr val="E2E8F0"/>
-                </a:solidFill>
-                <a:latin typeface="Arial"/>
-              </a:rPr>
-              <a:t>优先 dedicated tools（专用工具）</a:t>
-            </a:r>
-          </a:p>
-          <a:p>
-            <a:pPr>
-              <a:spcAft>
-                <a:spcPts val="800"/>
-              </a:spcAft>
-            </a:pPr>
-            <a:r>
-              <a:rPr sz="1700" b="0">
-                <a:solidFill>
-                  <a:srgbClr val="E2E8F0"/>
-                </a:solidFill>
-                <a:latin typeface="Arial"/>
-              </a:rPr>
-              <a:t>验证后如实汇报</a:t>
-            </a:r>
-          </a:p>
-          <a:p>
-            <a:pPr>
-              <a:spcAft>
-                <a:spcPts val="800"/>
-              </a:spcAft>
-            </a:pPr>
-            <a:r>
-              <a:rPr sz="1700" b="0">
-                <a:solidFill>
-                  <a:srgbClr val="E2E8F0"/>
-                </a:solidFill>
-                <a:latin typeface="Arial"/>
-              </a:rPr>
-              <a:t>高风险动作先确认</a:t>
-            </a:r>
-          </a:p>
-        </p:txBody>
-      </p:sp>
-      <p:sp>
-        <p:nvSpPr>
-          <p:cNvPr id="6" name="Rounded Rectangle 5"/>
+              <a:t>任务输入 / 约束</a:t>
+            </a:r>
+          </a:p>
+        </p:txBody>
+      </p:sp>
+      <p:cxnSp>
+        <p:nvCxnSpPr>
+          <p:cNvPr id="31" name="Connector 30"/>
+          <p:cNvCxnSpPr/>
+          <p:nvPr/>
+        </p:nvCxnSpPr>
+        <p:spPr>
+          <a:xfrm>
+            <a:off x="3401568" y="2880360"/>
+            <a:ext cx="1920240" cy="0"/>
+          </a:xfrm>
+          <a:prstGeom prst="line">
+            <a:avLst/>
+          </a:prstGeom>
+          <a:ln w="15875">
+            <a:solidFill>
+              <a:srgbClr val="22D3EE"/>
+            </a:solidFill>
+          </a:ln>
+        </p:spPr>
+        <p:style>
+          <a:lnRef idx="2">
+            <a:schemeClr val="accent1"/>
+          </a:lnRef>
+          <a:fillRef idx="0">
+            <a:schemeClr val="accent1"/>
+          </a:fillRef>
+          <a:effectRef idx="1">
+            <a:schemeClr val="accent1"/>
+          </a:effectRef>
+          <a:fontRef idx="minor">
+            <a:schemeClr val="tx1"/>
+          </a:fontRef>
+        </p:style>
+      </p:cxnSp>
+      <p:sp>
+        <p:nvSpPr>
+          <p:cNvPr id="32" name="Rounded Rectangle 31"/>
           <p:cNvSpPr/>
           <p:nvPr/>
         </p:nvSpPr>
         <p:spPr>
           <a:xfrm>
-            <a:off x="6537960" y="2468880"/>
-            <a:ext cx="4800600" cy="2468880"/>
+            <a:off x="3511296" y="2734056"/>
+            <a:ext cx="1700784" cy="292608"/>
           </a:xfrm>
           <a:prstGeom prst="roundRect">
             <a:avLst/>
           </a:prstGeom>
           <a:solidFill>
-            <a:srgbClr val="030712"/>
+            <a:srgbClr val="0C1E38"/>
           </a:solidFill>
           <a:ln>
             <a:solidFill>
@@ -10048,44 +11765,81 @@
           </a:fontRef>
         </p:style>
         <p:txBody>
-          <a:bodyPr rtlCol="0" anchor="t" wrap="square" tIns="203200" bIns="76200" lIns="127000" rIns="127000"/>
-          <a:lstStyle/>
-          <a:p>
-            <a:pPr algn="ctr"/>
-            <a:r>
-              <a:rPr sz="1250" b="0">
-                <a:solidFill>
-                  <a:srgbClr val="C4FFEC"/>
-                </a:solidFill>
-                <a:latin typeface="Courier New"/>
-              </a:rPr>
-              <a:t>In general, do not propose changes to code you haven't read.
-Do NOT use the Bash tool to run commands when a relevant dedicated tool is provided.
-Report outcomes faithfully: if tests fail, say so ...</a:t>
-            </a:r>
-          </a:p>
-        </p:txBody>
-      </p:sp>
-      <p:sp>
-        <p:nvSpPr>
-          <p:cNvPr id="7" name="Rectangle 6"/>
+          <a:bodyPr rtlCol="0" anchor="t" wrap="square" tIns="50800" bIns="50800" lIns="101600" rIns="101600"/>
+          <a:lstStyle/>
+          <a:p>
+            <a:pPr algn="ctr">
+              <a:spcAft>
+                <a:spcPts val="600"/>
+              </a:spcAft>
+            </a:pPr>
+            <a:r>
+              <a:rPr sz="1100" b="0">
+                <a:solidFill>
+                  <a:srgbClr val="E2E8F0"/>
+                </a:solidFill>
+                <a:latin typeface="Arial"/>
+              </a:rPr>
+              <a:t>组装 prompt 与 context</a:t>
+            </a:r>
+          </a:p>
+        </p:txBody>
+      </p:sp>
+      <p:cxnSp>
+        <p:nvCxnSpPr>
+          <p:cNvPr id="33" name="Connector 32"/>
+          <p:cNvCxnSpPr/>
+          <p:nvPr/>
+        </p:nvCxnSpPr>
+        <p:spPr>
+          <a:xfrm>
+            <a:off x="5321808" y="3291840"/>
+            <a:ext cx="1920240" cy="0"/>
+          </a:xfrm>
+          <a:prstGeom prst="line">
+            <a:avLst/>
+          </a:prstGeom>
+          <a:ln w="15875">
+            <a:solidFill>
+              <a:srgbClr val="22D3EE"/>
+            </a:solidFill>
+          </a:ln>
+        </p:spPr>
+        <p:style>
+          <a:lnRef idx="2">
+            <a:schemeClr val="accent1"/>
+          </a:lnRef>
+          <a:fillRef idx="0">
+            <a:schemeClr val="accent1"/>
+          </a:fillRef>
+          <a:effectRef idx="1">
+            <a:schemeClr val="accent1"/>
+          </a:effectRef>
+          <a:fontRef idx="minor">
+            <a:schemeClr val="tx1"/>
+          </a:fontRef>
+        </p:style>
+      </p:cxnSp>
+      <p:sp>
+        <p:nvSpPr>
+          <p:cNvPr id="34" name="Rounded Rectangle 33"/>
           <p:cNvSpPr/>
           <p:nvPr/>
         </p:nvSpPr>
         <p:spPr>
           <a:xfrm>
-            <a:off x="6537960" y="2468880"/>
-            <a:ext cx="4800600" cy="256032"/>
-          </a:xfrm>
-          <a:prstGeom prst="rect">
-            <a:avLst/>
-          </a:prstGeom>
-          <a:solidFill>
-            <a:srgbClr val="0D1426"/>
+            <a:off x="5431536" y="3145536"/>
+            <a:ext cx="1700783" cy="292608"/>
+          </a:xfrm>
+          <a:prstGeom prst="roundRect">
+            <a:avLst/>
+          </a:prstGeom>
+          <a:solidFill>
+            <a:srgbClr val="0C1E38"/>
           </a:solidFill>
           <a:ln>
             <a:solidFill>
-              <a:srgbClr val="0D1426"/>
+              <a:srgbClr val="22D3EE"/>
             </a:solidFill>
           </a:ln>
         </p:spPr>
@@ -10104,53 +11858,452 @@
           </a:fontRef>
         </p:style>
         <p:txBody>
-          <a:bodyPr rtlCol="0" anchor="t" wrap="square" tIns="12700" bIns="12700" lIns="76200" rIns="76200"/>
-          <a:lstStyle/>
-          <a:p>
-            <a:pPr algn="ctr"/>
-            <a:r>
-              <a:rPr sz="1000" b="1">
-                <a:solidFill>
-                  <a:srgbClr val="22D3EE"/>
-                </a:solidFill>
-                <a:latin typeface="Courier New"/>
-              </a:rPr>
-              <a:t>code</a:t>
-            </a:r>
-          </a:p>
-        </p:txBody>
-      </p:sp>
-      <p:sp>
-        <p:nvSpPr>
-          <p:cNvPr id="8" name="TextBox 7"/>
-          <p:cNvSpPr txBox="1"/>
-          <p:nvPr/>
-        </p:nvSpPr>
-        <p:spPr>
-          <a:xfrm>
-            <a:off x="658368" y="6108192"/>
-            <a:ext cx="10881360" cy="320040"/>
-          </a:xfrm>
-          <a:prstGeom prst="rect">
-            <a:avLst/>
-          </a:prstGeom>
-          <a:noFill/>
-        </p:spPr>
-        <p:txBody>
-          <a:bodyPr wrap="square" tIns="12700" bIns="12700" lIns="12700" rIns="12700" anchor="t">
-            <a:spAutoFit/>
-          </a:bodyPr>
-          <a:lstStyle/>
-          <a:p>
-            <a:pPr algn="l"/>
+          <a:bodyPr rtlCol="0" anchor="t" wrap="square" tIns="50800" bIns="50800" lIns="101600" rIns="101600"/>
+          <a:lstStyle/>
+          <a:p>
+            <a:pPr algn="ctr">
+              <a:spcAft>
+                <a:spcPts val="600"/>
+              </a:spcAft>
+            </a:pPr>
             <a:r>
               <a:rPr sz="1100" b="0">
                 <a:solidFill>
-                  <a:srgbClr val="94A3B8"/>
-                </a:solidFill>
-                <a:latin typeface="Arial"/>
-              </a:rPr>
-              <a:t>源码依据：prompts.ts#L230 / #L203 / #L305 / #L240 / #L258</a:t>
+                  <a:srgbClr val="E2E8F0"/>
+                </a:solidFill>
+                <a:latin typeface="Arial"/>
+              </a:rPr>
+              <a:t>启动 turn loop</a:t>
+            </a:r>
+          </a:p>
+        </p:txBody>
+      </p:sp>
+      <p:cxnSp>
+        <p:nvCxnSpPr>
+          <p:cNvPr id="35" name="Connector 34"/>
+          <p:cNvCxnSpPr/>
+          <p:nvPr/>
+        </p:nvCxnSpPr>
+        <p:spPr>
+          <a:xfrm>
+            <a:off x="7242048" y="3703320"/>
+            <a:ext cx="1920240" cy="0"/>
+          </a:xfrm>
+          <a:prstGeom prst="line">
+            <a:avLst/>
+          </a:prstGeom>
+          <a:ln w="15875">
+            <a:solidFill>
+              <a:srgbClr val="22D3EE"/>
+            </a:solidFill>
+          </a:ln>
+        </p:spPr>
+        <p:style>
+          <a:lnRef idx="2">
+            <a:schemeClr val="accent1"/>
+          </a:lnRef>
+          <a:fillRef idx="0">
+            <a:schemeClr val="accent1"/>
+          </a:fillRef>
+          <a:effectRef idx="1">
+            <a:schemeClr val="accent1"/>
+          </a:effectRef>
+          <a:fontRef idx="minor">
+            <a:schemeClr val="tx1"/>
+          </a:fontRef>
+        </p:style>
+      </p:cxnSp>
+      <p:sp>
+        <p:nvSpPr>
+          <p:cNvPr id="36" name="Rounded Rectangle 35"/>
+          <p:cNvSpPr/>
+          <p:nvPr/>
+        </p:nvSpPr>
+        <p:spPr>
+          <a:xfrm>
+            <a:off x="7351775" y="3557015"/>
+            <a:ext cx="1700783" cy="292608"/>
+          </a:xfrm>
+          <a:prstGeom prst="roundRect">
+            <a:avLst/>
+          </a:prstGeom>
+          <a:solidFill>
+            <a:srgbClr val="0C1E38"/>
+          </a:solidFill>
+          <a:ln>
+            <a:solidFill>
+              <a:srgbClr val="22D3EE"/>
+            </a:solidFill>
+          </a:ln>
+        </p:spPr>
+        <p:style>
+          <a:lnRef idx="1">
+            <a:schemeClr val="accent1"/>
+          </a:lnRef>
+          <a:fillRef idx="3">
+            <a:schemeClr val="accent1"/>
+          </a:fillRef>
+          <a:effectRef idx="2">
+            <a:schemeClr val="accent1"/>
+          </a:effectRef>
+          <a:fontRef idx="minor">
+            <a:schemeClr val="lt1"/>
+          </a:fontRef>
+        </p:style>
+        <p:txBody>
+          <a:bodyPr rtlCol="0" anchor="t" wrap="square" tIns="50800" bIns="50800" lIns="101600" rIns="101600"/>
+          <a:lstStyle/>
+          <a:p>
+            <a:pPr algn="ctr">
+              <a:spcAft>
+                <a:spcPts val="600"/>
+              </a:spcAft>
+            </a:pPr>
+            <a:r>
+              <a:rPr sz="1100" b="0">
+                <a:solidFill>
+                  <a:srgbClr val="E2E8F0"/>
+                </a:solidFill>
+                <a:latin typeface="Arial"/>
+              </a:rPr>
+              <a:t>决定是否调用工具</a:t>
+            </a:r>
+          </a:p>
+        </p:txBody>
+      </p:sp>
+      <p:cxnSp>
+        <p:nvCxnSpPr>
+          <p:cNvPr id="37" name="Connector 36"/>
+          <p:cNvCxnSpPr/>
+          <p:nvPr/>
+        </p:nvCxnSpPr>
+        <p:spPr>
+          <a:xfrm>
+            <a:off x="9162288" y="4114800"/>
+            <a:ext cx="1691640" cy="0"/>
+          </a:xfrm>
+          <a:prstGeom prst="line">
+            <a:avLst/>
+          </a:prstGeom>
+          <a:ln w="15875">
+            <a:solidFill>
+              <a:srgbClr val="22D3EE"/>
+            </a:solidFill>
+          </a:ln>
+        </p:spPr>
+        <p:style>
+          <a:lnRef idx="2">
+            <a:schemeClr val="accent1"/>
+          </a:lnRef>
+          <a:fillRef idx="0">
+            <a:schemeClr val="accent1"/>
+          </a:fillRef>
+          <a:effectRef idx="1">
+            <a:schemeClr val="accent1"/>
+          </a:effectRef>
+          <a:fontRef idx="minor">
+            <a:schemeClr val="tx1"/>
+          </a:fontRef>
+        </p:style>
+      </p:cxnSp>
+      <p:sp>
+        <p:nvSpPr>
+          <p:cNvPr id="38" name="Rounded Rectangle 37"/>
+          <p:cNvSpPr/>
+          <p:nvPr/>
+        </p:nvSpPr>
+        <p:spPr>
+          <a:xfrm>
+            <a:off x="9272015" y="3968496"/>
+            <a:ext cx="1472183" cy="292608"/>
+          </a:xfrm>
+          <a:prstGeom prst="roundRect">
+            <a:avLst/>
+          </a:prstGeom>
+          <a:solidFill>
+            <a:srgbClr val="0C1E38"/>
+          </a:solidFill>
+          <a:ln>
+            <a:solidFill>
+              <a:srgbClr val="22D3EE"/>
+            </a:solidFill>
+          </a:ln>
+        </p:spPr>
+        <p:style>
+          <a:lnRef idx="1">
+            <a:schemeClr val="accent1"/>
+          </a:lnRef>
+          <a:fillRef idx="3">
+            <a:schemeClr val="accent1"/>
+          </a:fillRef>
+          <a:effectRef idx="2">
+            <a:schemeClr val="accent1"/>
+          </a:effectRef>
+          <a:fontRef idx="minor">
+            <a:schemeClr val="lt1"/>
+          </a:fontRef>
+        </p:style>
+        <p:txBody>
+          <a:bodyPr rtlCol="0" anchor="t" wrap="square" tIns="50800" bIns="50800" lIns="101600" rIns="101600"/>
+          <a:lstStyle/>
+          <a:p>
+            <a:pPr algn="ctr">
+              <a:spcAft>
+                <a:spcPts val="600"/>
+              </a:spcAft>
+            </a:pPr>
+            <a:r>
+              <a:rPr sz="1100" b="0">
+                <a:solidFill>
+                  <a:srgbClr val="E2E8F0"/>
+                </a:solidFill>
+                <a:latin typeface="Arial"/>
+              </a:rPr>
+              <a:t>执行 tool</a:t>
+            </a:r>
+          </a:p>
+        </p:txBody>
+      </p:sp>
+      <p:cxnSp>
+        <p:nvCxnSpPr>
+          <p:cNvPr id="39" name="Connector 38"/>
+          <p:cNvCxnSpPr/>
+          <p:nvPr/>
+        </p:nvCxnSpPr>
+        <p:spPr>
+          <a:xfrm flipH="1">
+            <a:off x="9162288" y="4526280"/>
+            <a:ext cx="1691640" cy="0"/>
+          </a:xfrm>
+          <a:prstGeom prst="line">
+            <a:avLst/>
+          </a:prstGeom>
+          <a:ln w="15875">
+            <a:solidFill>
+              <a:srgbClr val="22D3EE"/>
+            </a:solidFill>
+          </a:ln>
+        </p:spPr>
+        <p:style>
+          <a:lnRef idx="2">
+            <a:schemeClr val="accent1"/>
+          </a:lnRef>
+          <a:fillRef idx="0">
+            <a:schemeClr val="accent1"/>
+          </a:fillRef>
+          <a:effectRef idx="1">
+            <a:schemeClr val="accent1"/>
+          </a:effectRef>
+          <a:fontRef idx="minor">
+            <a:schemeClr val="tx1"/>
+          </a:fontRef>
+        </p:style>
+      </p:cxnSp>
+      <p:sp>
+        <p:nvSpPr>
+          <p:cNvPr id="40" name="Rounded Rectangle 39"/>
+          <p:cNvSpPr/>
+          <p:nvPr/>
+        </p:nvSpPr>
+        <p:spPr>
+          <a:xfrm>
+            <a:off x="9272015" y="4379976"/>
+            <a:ext cx="1472183" cy="292608"/>
+          </a:xfrm>
+          <a:prstGeom prst="roundRect">
+            <a:avLst/>
+          </a:prstGeom>
+          <a:solidFill>
+            <a:srgbClr val="0C1E38"/>
+          </a:solidFill>
+          <a:ln>
+            <a:solidFill>
+              <a:srgbClr val="22D3EE"/>
+            </a:solidFill>
+          </a:ln>
+        </p:spPr>
+        <p:style>
+          <a:lnRef idx="1">
+            <a:schemeClr val="accent1"/>
+          </a:lnRef>
+          <a:fillRef idx="3">
+            <a:schemeClr val="accent1"/>
+          </a:fillRef>
+          <a:effectRef idx="2">
+            <a:schemeClr val="accent1"/>
+          </a:effectRef>
+          <a:fontRef idx="minor">
+            <a:schemeClr val="lt1"/>
+          </a:fontRef>
+        </p:style>
+        <p:txBody>
+          <a:bodyPr rtlCol="0" anchor="t" wrap="square" tIns="50800" bIns="50800" lIns="101600" rIns="101600"/>
+          <a:lstStyle/>
+          <a:p>
+            <a:pPr algn="ctr">
+              <a:spcAft>
+                <a:spcPts val="600"/>
+              </a:spcAft>
+            </a:pPr>
+            <a:r>
+              <a:rPr sz="1100" b="0">
+                <a:solidFill>
+                  <a:srgbClr val="E2E8F0"/>
+                </a:solidFill>
+                <a:latin typeface="Arial"/>
+              </a:rPr>
+              <a:t>tool result</a:t>
+            </a:r>
+          </a:p>
+        </p:txBody>
+      </p:sp>
+      <p:cxnSp>
+        <p:nvCxnSpPr>
+          <p:cNvPr id="41" name="Connector 40"/>
+          <p:cNvCxnSpPr/>
+          <p:nvPr/>
+        </p:nvCxnSpPr>
+        <p:spPr>
+          <a:xfrm flipH="1">
+            <a:off x="7242048" y="4937760"/>
+            <a:ext cx="1920240" cy="0"/>
+          </a:xfrm>
+          <a:prstGeom prst="line">
+            <a:avLst/>
+          </a:prstGeom>
+          <a:ln w="15875">
+            <a:solidFill>
+              <a:srgbClr val="22D3EE"/>
+            </a:solidFill>
+          </a:ln>
+        </p:spPr>
+        <p:style>
+          <a:lnRef idx="2">
+            <a:schemeClr val="accent1"/>
+          </a:lnRef>
+          <a:fillRef idx="0">
+            <a:schemeClr val="accent1"/>
+          </a:fillRef>
+          <a:effectRef idx="1">
+            <a:schemeClr val="accent1"/>
+          </a:effectRef>
+          <a:fontRef idx="minor">
+            <a:schemeClr val="tx1"/>
+          </a:fontRef>
+        </p:style>
+      </p:cxnSp>
+      <p:sp>
+        <p:nvSpPr>
+          <p:cNvPr id="42" name="Rounded Rectangle 41"/>
+          <p:cNvSpPr/>
+          <p:nvPr/>
+        </p:nvSpPr>
+        <p:spPr>
+          <a:xfrm>
+            <a:off x="7351775" y="4791456"/>
+            <a:ext cx="1700783" cy="292608"/>
+          </a:xfrm>
+          <a:prstGeom prst="roundRect">
+            <a:avLst/>
+          </a:prstGeom>
+          <a:solidFill>
+            <a:srgbClr val="0C1E38"/>
+          </a:solidFill>
+          <a:ln>
+            <a:solidFill>
+              <a:srgbClr val="22D3EE"/>
+            </a:solidFill>
+          </a:ln>
+        </p:spPr>
+        <p:style>
+          <a:lnRef idx="1">
+            <a:schemeClr val="accent1"/>
+          </a:lnRef>
+          <a:fillRef idx="3">
+            <a:schemeClr val="accent1"/>
+          </a:fillRef>
+          <a:effectRef idx="2">
+            <a:schemeClr val="accent1"/>
+          </a:effectRef>
+          <a:fontRef idx="minor">
+            <a:schemeClr val="lt1"/>
+          </a:fontRef>
+        </p:style>
+        <p:txBody>
+          <a:bodyPr rtlCol="0" anchor="t" wrap="square" tIns="50800" bIns="50800" lIns="101600" rIns="101600"/>
+          <a:lstStyle/>
+          <a:p>
+            <a:pPr algn="ctr">
+              <a:spcAft>
+                <a:spcPts val="600"/>
+              </a:spcAft>
+            </a:pPr>
+            <a:r>
+              <a:rPr sz="1100" b="0">
+                <a:solidFill>
+                  <a:srgbClr val="E2E8F0"/>
+                </a:solidFill>
+                <a:latin typeface="Arial"/>
+              </a:rPr>
+              <a:t>回灌 messages</a:t>
+            </a:r>
+          </a:p>
+        </p:txBody>
+      </p:sp>
+      <p:sp>
+        <p:nvSpPr>
+          <p:cNvPr id="43" name="Rounded Rectangle 42"/>
+          <p:cNvSpPr/>
+          <p:nvPr/>
+        </p:nvSpPr>
+        <p:spPr>
+          <a:xfrm>
+            <a:off x="1097280" y="5650992"/>
+            <a:ext cx="10058400" cy="512064"/>
+          </a:xfrm>
+          <a:prstGeom prst="roundRect">
+            <a:avLst/>
+          </a:prstGeom>
+          <a:solidFill>
+            <a:srgbClr val="0F172A"/>
+          </a:solidFill>
+          <a:ln>
+            <a:solidFill>
+              <a:srgbClr val="22D3EE"/>
+            </a:solidFill>
+          </a:ln>
+        </p:spPr>
+        <p:style>
+          <a:lnRef idx="1">
+            <a:schemeClr val="accent1"/>
+          </a:lnRef>
+          <a:fillRef idx="3">
+            <a:schemeClr val="accent1"/>
+          </a:fillRef>
+          <a:effectRef idx="2">
+            <a:schemeClr val="accent1"/>
+          </a:effectRef>
+          <a:fontRef idx="minor">
+            <a:schemeClr val="lt1"/>
+          </a:fontRef>
+        </p:style>
+        <p:txBody>
+          <a:bodyPr rtlCol="0" anchor="t" wrap="square" tIns="50800" bIns="50800" lIns="101600" rIns="101600"/>
+          <a:lstStyle/>
+          <a:p>
+            <a:pPr algn="ctr">
+              <a:spcAft>
+                <a:spcPts val="600"/>
+              </a:spcAft>
+            </a:pPr>
+            <a:r>
+              <a:rPr sz="1400" b="0">
+                <a:solidFill>
+                  <a:srgbClr val="E2E8F0"/>
+                </a:solidFill>
+                <a:latin typeface="Arial"/>
+              </a:rPr>
+              <a:t>结论：目标、范围、约束、验证写得越清楚，越能稳定影响 prompt stack、turn loop 和 tool pipeline 的每一步。</a:t>
             </a:r>
           </a:p>
         </p:txBody>
@@ -10210,7 +12363,7 @@
                 </a:solidFill>
                 <a:latin typeface="Arial"/>
               </a:rPr>
-              <a:t>技巧 1：目标 + 范围 + 约束 + 验证</a:t>
+              <a:t>默认偏好的工作方式</a:t>
             </a:r>
           </a:p>
         </p:txBody>
@@ -10266,7 +12419,7 @@
         </p:nvSpPr>
         <p:spPr>
           <a:xfrm>
-            <a:off x="658368" y="1481328"/>
+            <a:off x="658368" y="1536192"/>
             <a:ext cx="10972800" cy="658368"/>
           </a:xfrm>
           <a:prstGeom prst="roundRect">
@@ -10311,27 +12464,130 @@
                 </a:solidFill>
                 <a:latin typeface="Arial"/>
               </a:rPr>
-              <a:t>最稳定的输入方式，是把任务写成“目标 + 范围 + 约束 + 验证”。</a:t>
-            </a:r>
-          </a:p>
-        </p:txBody>
-      </p:sp>
-      <p:sp>
-        <p:nvSpPr>
-          <p:cNvPr id="5" name="Rounded Rectangle 4"/>
+              <a:t>后面的所有使用技巧，都是把源码里的默认偏好显式写进用户提示里。</a:t>
+            </a:r>
+          </a:p>
+        </p:txBody>
+      </p:sp>
+      <p:sp>
+        <p:nvSpPr>
+          <p:cNvPr id="5" name="TextBox 4"/>
+          <p:cNvSpPr txBox="1"/>
+          <p:nvPr/>
+        </p:nvSpPr>
+        <p:spPr>
+          <a:xfrm>
+            <a:off x="749808" y="2450592"/>
+            <a:ext cx="5577840" cy="3063240"/>
+          </a:xfrm>
+          <a:prstGeom prst="rect">
+            <a:avLst/>
+          </a:prstGeom>
+          <a:noFill/>
+        </p:spPr>
+        <p:txBody>
+          <a:bodyPr wrap="square" tIns="50800" bIns="50800" lIns="101600" rIns="101600" anchor="t">
+            <a:spAutoFit/>
+          </a:bodyPr>
+          <a:lstStyle/>
+          <a:p>
+            <a:pPr>
+              <a:spcAft>
+                <a:spcPts val="800"/>
+              </a:spcAft>
+            </a:pPr>
+            <a:r>
+              <a:rPr sz="1700" b="0">
+                <a:solidFill>
+                  <a:srgbClr val="E2E8F0"/>
+                </a:solidFill>
+                <a:latin typeface="Arial"/>
+              </a:rPr>
+              <a:t>先读代码，再改代码</a:t>
+            </a:r>
+          </a:p>
+          <a:p>
+            <a:pPr>
+              <a:spcAft>
+                <a:spcPts val="800"/>
+              </a:spcAft>
+            </a:pPr>
+            <a:r>
+              <a:rPr sz="1700" b="0">
+                <a:solidFill>
+                  <a:srgbClr val="E2E8F0"/>
+                </a:solidFill>
+                <a:latin typeface="Arial"/>
+              </a:rPr>
+              <a:t>最小必要改动，优先复用</a:t>
+            </a:r>
+          </a:p>
+          <a:p>
+            <a:pPr>
+              <a:spcAft>
+                <a:spcPts val="800"/>
+              </a:spcAft>
+            </a:pPr>
+            <a:r>
+              <a:rPr sz="1700" b="0">
+                <a:solidFill>
+                  <a:srgbClr val="E2E8F0"/>
+                </a:solidFill>
+                <a:latin typeface="Arial"/>
+              </a:rPr>
+              <a:t>优先 dedicated tools（专用工具）</a:t>
+            </a:r>
+          </a:p>
+          <a:p>
+            <a:pPr>
+              <a:spcAft>
+                <a:spcPts val="800"/>
+              </a:spcAft>
+            </a:pPr>
+            <a:r>
+              <a:rPr sz="1700" b="0">
+                <a:solidFill>
+                  <a:srgbClr val="E2E8F0"/>
+                </a:solidFill>
+                <a:latin typeface="Arial"/>
+              </a:rPr>
+              <a:t>验证后如实汇报</a:t>
+            </a:r>
+          </a:p>
+          <a:p>
+            <a:pPr>
+              <a:spcAft>
+                <a:spcPts val="800"/>
+              </a:spcAft>
+            </a:pPr>
+            <a:r>
+              <a:rPr sz="1700" b="0">
+                <a:solidFill>
+                  <a:srgbClr val="E2E8F0"/>
+                </a:solidFill>
+                <a:latin typeface="Arial"/>
+              </a:rPr>
+              <a:t>高风险动作先确认</a:t>
+            </a:r>
+          </a:p>
+        </p:txBody>
+      </p:sp>
+      <p:sp>
+        <p:nvSpPr>
+          <p:cNvPr id="6" name="Rounded Rectangle 5"/>
           <p:cNvSpPr/>
           <p:nvPr/>
         </p:nvSpPr>
         <p:spPr>
           <a:xfrm>
-            <a:off x="658368" y="2331720"/>
-            <a:ext cx="3246120" cy="1554480"/>
+            <a:off x="6537960" y="2468880"/>
+            <a:ext cx="4800600" cy="2468880"/>
           </a:xfrm>
           <a:prstGeom prst="roundRect">
             <a:avLst/>
           </a:prstGeom>
           <a:solidFill>
-            <a:srgbClr val="0A1224"/>
+            <a:srgbClr val="030712"/>
           </a:solidFill>
           <a:ln>
             <a:solidFill>
@@ -10354,528 +12610,34 @@
           </a:fontRef>
         </p:style>
         <p:txBody>
-          <a:bodyPr rtlCol="0" anchor="ctr"/>
+          <a:bodyPr rtlCol="0" anchor="t" wrap="square" tIns="203200" bIns="76200" lIns="127000" rIns="127000"/>
           <a:lstStyle/>
           <a:p>
             <a:pPr algn="ctr"/>
-          </a:p>
-        </p:txBody>
-      </p:sp>
-      <p:sp>
-        <p:nvSpPr>
-          <p:cNvPr id="6" name="Rectangle 5"/>
+            <a:r>
+              <a:rPr sz="1250" b="0">
+                <a:solidFill>
+                  <a:srgbClr val="C4FFEC"/>
+                </a:solidFill>
+                <a:latin typeface="Courier New"/>
+              </a:rPr>
+              <a:t>In general, do not propose changes to code you haven't read.
+Do NOT use the Bash tool to run commands when a relevant dedicated tool is provided.
+Report outcomes faithfully: if tests fail, say so ...</a:t>
+            </a:r>
+          </a:p>
+        </p:txBody>
+      </p:sp>
+      <p:sp>
+        <p:nvSpPr>
+          <p:cNvPr id="7" name="Rectangle 6"/>
           <p:cNvSpPr/>
           <p:nvPr/>
         </p:nvSpPr>
         <p:spPr>
           <a:xfrm>
-            <a:off x="658368" y="2331720"/>
-            <a:ext cx="3246120" cy="347472"/>
-          </a:xfrm>
-          <a:prstGeom prst="rect">
-            <a:avLst/>
-          </a:prstGeom>
-          <a:solidFill>
-            <a:srgbClr val="0F172A"/>
-          </a:solidFill>
-          <a:ln>
-            <a:solidFill>
-              <a:srgbClr val="0F172A"/>
-            </a:solidFill>
-          </a:ln>
-        </p:spPr>
-        <p:style>
-          <a:lnRef idx="1">
-            <a:schemeClr val="accent1"/>
-          </a:lnRef>
-          <a:fillRef idx="3">
-            <a:schemeClr val="accent1"/>
-          </a:fillRef>
-          <a:effectRef idx="2">
-            <a:schemeClr val="accent1"/>
-          </a:effectRef>
-          <a:fontRef idx="minor">
-            <a:schemeClr val="lt1"/>
-          </a:fontRef>
-        </p:style>
-        <p:txBody>
-          <a:bodyPr rtlCol="0" anchor="t" wrap="square" tIns="25400" bIns="25400" lIns="76200" rIns="76200"/>
-          <a:lstStyle/>
-          <a:p>
-            <a:pPr algn="ctr"/>
-            <a:r>
-              <a:rPr sz="1200" b="1">
-                <a:solidFill>
-                  <a:srgbClr val="22D3EE"/>
-                </a:solidFill>
-                <a:latin typeface="Arial"/>
-              </a:rPr>
-              <a:t>示例提示词</a:t>
-            </a:r>
-          </a:p>
-        </p:txBody>
-      </p:sp>
-      <p:sp>
-        <p:nvSpPr>
-          <p:cNvPr id="7" name="TextBox 6"/>
-          <p:cNvSpPr txBox="1"/>
-          <p:nvPr/>
-        </p:nvSpPr>
-        <p:spPr>
-          <a:xfrm>
-            <a:off x="731519" y="2734056"/>
-            <a:ext cx="3099815" cy="1097280"/>
-          </a:xfrm>
-          <a:prstGeom prst="rect">
-            <a:avLst/>
-          </a:prstGeom>
-          <a:noFill/>
-        </p:spPr>
-        <p:txBody>
-          <a:bodyPr wrap="square" tIns="50800" bIns="50800" lIns="101600" rIns="101600" anchor="t">
-            <a:spAutoFit/>
-          </a:bodyPr>
-          <a:lstStyle/>
-          <a:p>
-            <a:pPr>
-              <a:spcAft>
-                <a:spcPts val="600"/>
-              </a:spcAft>
-            </a:pPr>
-            <a:r>
-              <a:rPr sz="1400" b="0">
-                <a:solidFill>
-                  <a:srgbClr val="E2E8F0"/>
-                </a:solidFill>
-                <a:latin typeface="Arial"/>
-              </a:rPr>
-              <a:t>目标：修复/实现……</a:t>
-            </a:r>
-          </a:p>
-          <a:p>
-            <a:pPr>
-              <a:spcAft>
-                <a:spcPts val="600"/>
-              </a:spcAft>
-            </a:pPr>
-            <a:r>
-              <a:rPr sz="1400" b="0">
-                <a:solidFill>
-                  <a:srgbClr val="E2E8F0"/>
-                </a:solidFill>
-                <a:latin typeface="Arial"/>
-              </a:rPr>
-              <a:t>范围：只改……相关代码</a:t>
-            </a:r>
-          </a:p>
-          <a:p>
-            <a:pPr>
-              <a:spcAft>
-                <a:spcPts val="600"/>
-              </a:spcAft>
-            </a:pPr>
-            <a:r>
-              <a:rPr sz="1400" b="0">
-                <a:solidFill>
-                  <a:srgbClr val="E2E8F0"/>
-                </a:solidFill>
-                <a:latin typeface="Arial"/>
-              </a:rPr>
-              <a:t>约束：不要做无关重构</a:t>
-            </a:r>
-          </a:p>
-          <a:p>
-            <a:pPr>
-              <a:spcAft>
-                <a:spcPts val="600"/>
-              </a:spcAft>
-            </a:pPr>
-            <a:r>
-              <a:rPr sz="1400" b="0">
-                <a:solidFill>
-                  <a:srgbClr val="E2E8F0"/>
-                </a:solidFill>
-                <a:latin typeface="Arial"/>
-              </a:rPr>
-              <a:t>验证：跑测试并说明结果</a:t>
-            </a:r>
-          </a:p>
-        </p:txBody>
-      </p:sp>
-      <p:sp>
-        <p:nvSpPr>
-          <p:cNvPr id="8" name="Rounded Rectangle 7"/>
-          <p:cNvSpPr/>
-          <p:nvPr/>
-        </p:nvSpPr>
-        <p:spPr>
-          <a:xfrm>
-            <a:off x="4133087" y="2331720"/>
-            <a:ext cx="3474720" cy="1554480"/>
-          </a:xfrm>
-          <a:prstGeom prst="roundRect">
-            <a:avLst/>
-          </a:prstGeom>
-          <a:solidFill>
-            <a:srgbClr val="0A1224"/>
-          </a:solidFill>
-          <a:ln>
-            <a:solidFill>
-              <a:srgbClr val="22D3EE"/>
-            </a:solidFill>
-          </a:ln>
-        </p:spPr>
-        <p:style>
-          <a:lnRef idx="1">
-            <a:schemeClr val="accent1"/>
-          </a:lnRef>
-          <a:fillRef idx="3">
-            <a:schemeClr val="accent1"/>
-          </a:fillRef>
-          <a:effectRef idx="2">
-            <a:schemeClr val="accent1"/>
-          </a:effectRef>
-          <a:fontRef idx="minor">
-            <a:schemeClr val="lt1"/>
-          </a:fontRef>
-        </p:style>
-        <p:txBody>
-          <a:bodyPr rtlCol="0" anchor="ctr"/>
-          <a:lstStyle/>
-          <a:p>
-            <a:pPr algn="ctr"/>
-          </a:p>
-        </p:txBody>
-      </p:sp>
-      <p:sp>
-        <p:nvSpPr>
-          <p:cNvPr id="9" name="Rectangle 8"/>
-          <p:cNvSpPr/>
-          <p:nvPr/>
-        </p:nvSpPr>
-        <p:spPr>
-          <a:xfrm>
-            <a:off x="4133087" y="2331720"/>
-            <a:ext cx="3474720" cy="347472"/>
-          </a:xfrm>
-          <a:prstGeom prst="rect">
-            <a:avLst/>
-          </a:prstGeom>
-          <a:solidFill>
-            <a:srgbClr val="0F172A"/>
-          </a:solidFill>
-          <a:ln>
-            <a:solidFill>
-              <a:srgbClr val="0F172A"/>
-            </a:solidFill>
-          </a:ln>
-        </p:spPr>
-        <p:style>
-          <a:lnRef idx="1">
-            <a:schemeClr val="accent1"/>
-          </a:lnRef>
-          <a:fillRef idx="3">
-            <a:schemeClr val="accent1"/>
-          </a:fillRef>
-          <a:effectRef idx="2">
-            <a:schemeClr val="accent1"/>
-          </a:effectRef>
-          <a:fontRef idx="minor">
-            <a:schemeClr val="lt1"/>
-          </a:fontRef>
-        </p:style>
-        <p:txBody>
-          <a:bodyPr rtlCol="0" anchor="t" wrap="square" tIns="25400" bIns="25400" lIns="76200" rIns="76200"/>
-          <a:lstStyle/>
-          <a:p>
-            <a:pPr algn="ctr"/>
-            <a:r>
-              <a:rPr sz="1200" b="1">
-                <a:solidFill>
-                  <a:srgbClr val="22D3EE"/>
-                </a:solidFill>
-                <a:latin typeface="Arial"/>
-              </a:rPr>
-              <a:t>源码解释</a:t>
-            </a:r>
-          </a:p>
-        </p:txBody>
-      </p:sp>
-      <p:sp>
-        <p:nvSpPr>
-          <p:cNvPr id="10" name="TextBox 9"/>
-          <p:cNvSpPr txBox="1"/>
-          <p:nvPr/>
-        </p:nvSpPr>
-        <p:spPr>
-          <a:xfrm>
-            <a:off x="4206240" y="2734056"/>
-            <a:ext cx="3328415" cy="1097280"/>
-          </a:xfrm>
-          <a:prstGeom prst="rect">
-            <a:avLst/>
-          </a:prstGeom>
-          <a:noFill/>
-        </p:spPr>
-        <p:txBody>
-          <a:bodyPr wrap="square" tIns="50800" bIns="50800" lIns="101600" rIns="101600" anchor="t">
-            <a:spAutoFit/>
-          </a:bodyPr>
-          <a:lstStyle/>
-          <a:p>
-            <a:pPr>
-              <a:spcAft>
-                <a:spcPts val="600"/>
-              </a:spcAft>
-            </a:pPr>
-            <a:r>
-              <a:rPr sz="1400" b="0">
-                <a:solidFill>
-                  <a:srgbClr val="E2E8F0"/>
-                </a:solidFill>
-                <a:latin typeface="Arial"/>
-              </a:rPr>
-              <a:t>减少分析 / 实现 / 顺手优化之间的歧义</a:t>
-            </a:r>
-          </a:p>
-          <a:p>
-            <a:pPr>
-              <a:spcAft>
-                <a:spcPts val="600"/>
-              </a:spcAft>
-            </a:pPr>
-            <a:r>
-              <a:rPr sz="1400" b="0">
-                <a:solidFill>
-                  <a:srgbClr val="E2E8F0"/>
-                </a:solidFill>
-                <a:latin typeface="Arial"/>
-              </a:rPr>
-              <a:t>让 turn loop（轮次循环）围绕明确目标推进</a:t>
-            </a:r>
-          </a:p>
-        </p:txBody>
-      </p:sp>
-      <p:sp>
-        <p:nvSpPr>
-          <p:cNvPr id="11" name="Rounded Rectangle 10"/>
-          <p:cNvSpPr/>
-          <p:nvPr/>
-        </p:nvSpPr>
-        <p:spPr>
-          <a:xfrm>
-            <a:off x="7836408" y="2331720"/>
-            <a:ext cx="3794760" cy="1554480"/>
-          </a:xfrm>
-          <a:prstGeom prst="roundRect">
-            <a:avLst/>
-          </a:prstGeom>
-          <a:solidFill>
-            <a:srgbClr val="0A1224"/>
-          </a:solidFill>
-          <a:ln>
-            <a:solidFill>
-              <a:srgbClr val="22D3EE"/>
-            </a:solidFill>
-          </a:ln>
-        </p:spPr>
-        <p:style>
-          <a:lnRef idx="1">
-            <a:schemeClr val="accent1"/>
-          </a:lnRef>
-          <a:fillRef idx="3">
-            <a:schemeClr val="accent1"/>
-          </a:fillRef>
-          <a:effectRef idx="2">
-            <a:schemeClr val="accent1"/>
-          </a:effectRef>
-          <a:fontRef idx="minor">
-            <a:schemeClr val="lt1"/>
-          </a:fontRef>
-        </p:style>
-        <p:txBody>
-          <a:bodyPr rtlCol="0" anchor="ctr"/>
-          <a:lstStyle/>
-          <a:p>
-            <a:pPr algn="ctr"/>
-          </a:p>
-        </p:txBody>
-      </p:sp>
-      <p:sp>
-        <p:nvSpPr>
-          <p:cNvPr id="12" name="Rectangle 11"/>
-          <p:cNvSpPr/>
-          <p:nvPr/>
-        </p:nvSpPr>
-        <p:spPr>
-          <a:xfrm>
-            <a:off x="7836408" y="2331720"/>
-            <a:ext cx="3794760" cy="347472"/>
-          </a:xfrm>
-          <a:prstGeom prst="rect">
-            <a:avLst/>
-          </a:prstGeom>
-          <a:solidFill>
-            <a:srgbClr val="0F172A"/>
-          </a:solidFill>
-          <a:ln>
-            <a:solidFill>
-              <a:srgbClr val="0F172A"/>
-            </a:solidFill>
-          </a:ln>
-        </p:spPr>
-        <p:style>
-          <a:lnRef idx="1">
-            <a:schemeClr val="accent1"/>
-          </a:lnRef>
-          <a:fillRef idx="3">
-            <a:schemeClr val="accent1"/>
-          </a:fillRef>
-          <a:effectRef idx="2">
-            <a:schemeClr val="accent1"/>
-          </a:effectRef>
-          <a:fontRef idx="minor">
-            <a:schemeClr val="lt1"/>
-          </a:fontRef>
-        </p:style>
-        <p:txBody>
-          <a:bodyPr rtlCol="0" anchor="t" wrap="square" tIns="25400" bIns="25400" lIns="76200" rIns="76200"/>
-          <a:lstStyle/>
-          <a:p>
-            <a:pPr algn="ctr"/>
-            <a:r>
-              <a:rPr sz="1200" b="1">
-                <a:solidFill>
-                  <a:srgbClr val="22D3EE"/>
-                </a:solidFill>
-                <a:latin typeface="Arial"/>
-              </a:rPr>
-              <a:t>证据链</a:t>
-            </a:r>
-          </a:p>
-        </p:txBody>
-      </p:sp>
-      <p:sp>
-        <p:nvSpPr>
-          <p:cNvPr id="13" name="TextBox 12"/>
-          <p:cNvSpPr txBox="1"/>
-          <p:nvPr/>
-        </p:nvSpPr>
-        <p:spPr>
-          <a:xfrm>
-            <a:off x="7909560" y="2734056"/>
-            <a:ext cx="3648456" cy="1097280"/>
-          </a:xfrm>
-          <a:prstGeom prst="rect">
-            <a:avLst/>
-          </a:prstGeom>
-          <a:noFill/>
-        </p:spPr>
-        <p:txBody>
-          <a:bodyPr wrap="square" tIns="50800" bIns="50800" lIns="101600" rIns="101600" anchor="t">
-            <a:spAutoFit/>
-          </a:bodyPr>
-          <a:lstStyle/>
-          <a:p>
-            <a:pPr>
-              <a:spcAft>
-                <a:spcPts val="600"/>
-              </a:spcAft>
-            </a:pPr>
-            <a:r>
-              <a:rPr sz="1400" b="0">
-                <a:solidFill>
-                  <a:srgbClr val="E2E8F0"/>
-                </a:solidFill>
-                <a:latin typeface="Arial"/>
-              </a:rPr>
-              <a:t>prompt stack（提示词栈）默认把请求理解成软件工程任务</a:t>
-            </a:r>
-          </a:p>
-          <a:p>
-            <a:pPr>
-              <a:spcAft>
-                <a:spcPts val="600"/>
-              </a:spcAft>
-            </a:pPr>
-            <a:r>
-              <a:rPr sz="1400" b="0">
-                <a:solidFill>
-                  <a:srgbClr val="E2E8F0"/>
-                </a:solidFill>
-                <a:latin typeface="Arial"/>
-              </a:rPr>
-              <a:t>turn loop（轮次循环）会围绕目标、范围和验证持续推进</a:t>
-            </a:r>
-          </a:p>
-        </p:txBody>
-      </p:sp>
-      <p:sp>
-        <p:nvSpPr>
-          <p:cNvPr id="14" name="Rounded Rectangle 13"/>
-          <p:cNvSpPr/>
-          <p:nvPr/>
-        </p:nvSpPr>
-        <p:spPr>
-          <a:xfrm>
-            <a:off x="658368" y="4160520"/>
-            <a:ext cx="10972800" cy="1234440"/>
-          </a:xfrm>
-          <a:prstGeom prst="roundRect">
-            <a:avLst/>
-          </a:prstGeom>
-          <a:solidFill>
-            <a:srgbClr val="030712"/>
-          </a:solidFill>
-          <a:ln>
-            <a:solidFill>
-              <a:srgbClr val="22D3EE"/>
-            </a:solidFill>
-          </a:ln>
-        </p:spPr>
-        <p:style>
-          <a:lnRef idx="1">
-            <a:schemeClr val="accent1"/>
-          </a:lnRef>
-          <a:fillRef idx="3">
-            <a:schemeClr val="accent1"/>
-          </a:fillRef>
-          <a:effectRef idx="2">
-            <a:schemeClr val="accent1"/>
-          </a:effectRef>
-          <a:fontRef idx="minor">
-            <a:schemeClr val="lt1"/>
-          </a:fontRef>
-        </p:style>
-        <p:txBody>
-          <a:bodyPr rtlCol="0" anchor="t" wrap="square" tIns="203200" bIns="76200" lIns="127000" rIns="127000"/>
-          <a:lstStyle/>
-          <a:p>
-            <a:pPr algn="ctr"/>
-            <a:r>
-              <a:rPr sz="1250" b="0">
-                <a:solidFill>
-                  <a:srgbClr val="C4FFEC"/>
-                </a:solidFill>
-                <a:latin typeface="Courier New"/>
-              </a:rPr>
-              <a:t>The user will primarily request you to perform software engineering tasks.
-In general, do not propose changes to code you haven't read.
-Report outcomes faithfully: if tests fail, say so ...</a:t>
-            </a:r>
-          </a:p>
-        </p:txBody>
-      </p:sp>
-      <p:sp>
-        <p:nvSpPr>
-          <p:cNvPr id="15" name="Rectangle 14"/>
-          <p:cNvSpPr/>
-          <p:nvPr/>
-        </p:nvSpPr>
-        <p:spPr>
-          <a:xfrm>
-            <a:off x="658368" y="4160520"/>
-            <a:ext cx="10972800" cy="256032"/>
+            <a:off x="6537960" y="2468880"/>
+            <a:ext cx="4800600" cy="256032"/>
           </a:xfrm>
           <a:prstGeom prst="rect">
             <a:avLst/>
@@ -10922,7 +12684,7 @@
       </p:sp>
       <p:sp>
         <p:nvSpPr>
-          <p:cNvPr id="16" name="TextBox 15"/>
+          <p:cNvPr id="8" name="TextBox 7"/>
           <p:cNvSpPr txBox="1"/>
           <p:nvPr/>
         </p:nvSpPr>
@@ -10950,7 +12712,7 @@
                 </a:solidFill>
                 <a:latin typeface="Arial"/>
               </a:rPr>
-              <a:t>源码依据：prompts.ts#L221 / #L230 / #L240</a:t>
+              <a:t>源码依据：prompts.ts#L230 / #L203 / #L305 / #L240 / #L258</a:t>
             </a:r>
           </a:p>
         </p:txBody>
@@ -11010,7 +12772,7 @@
                 </a:solidFill>
                 <a:latin typeface="Arial"/>
               </a:rPr>
-              <a:t>技巧 2：先读代码，再改代码</a:t>
+              <a:t>技巧 1：目标 + 范围 + 约束 + 验证</a:t>
             </a:r>
           </a:p>
         </p:txBody>
@@ -11111,7 +12873,7 @@
                 </a:solidFill>
                 <a:latin typeface="Arial"/>
               </a:rPr>
-              <a:t>“先读代码，再改代码”不是建议项，而是源码里的默认工作顺序。</a:t>
+              <a:t>最稳定的输入方式，是把任务写成“目标 + 范围 + 约束 + 验证”。</a:t>
             </a:r>
           </a:p>
         </p:txBody>
@@ -11249,7 +13011,7 @@
                 </a:solidFill>
                 <a:latin typeface="Arial"/>
               </a:rPr>
-              <a:t>先看 src/foo.ts 和 src/bar.ts</a:t>
+              <a:t>目标：修复/实现……</a:t>
             </a:r>
           </a:p>
           <a:p>
@@ -11265,131 +13027,9 @@
                 </a:solidFill>
                 <a:latin typeface="Arial"/>
               </a:rPr>
-              <a:t>再决定改法</a:t>
-            </a:r>
-          </a:p>
-        </p:txBody>
-      </p:sp>
-      <p:sp>
-        <p:nvSpPr>
-          <p:cNvPr id="8" name="Rounded Rectangle 7"/>
-          <p:cNvSpPr/>
-          <p:nvPr/>
-        </p:nvSpPr>
-        <p:spPr>
-          <a:xfrm>
-            <a:off x="4133087" y="2331720"/>
-            <a:ext cx="3474720" cy="1554480"/>
-          </a:xfrm>
-          <a:prstGeom prst="roundRect">
-            <a:avLst/>
-          </a:prstGeom>
-          <a:solidFill>
-            <a:srgbClr val="0A1224"/>
-          </a:solidFill>
-          <a:ln>
-            <a:solidFill>
-              <a:srgbClr val="22D3EE"/>
-            </a:solidFill>
-          </a:ln>
-        </p:spPr>
-        <p:style>
-          <a:lnRef idx="1">
-            <a:schemeClr val="accent1"/>
-          </a:lnRef>
-          <a:fillRef idx="3">
-            <a:schemeClr val="accent1"/>
-          </a:fillRef>
-          <a:effectRef idx="2">
-            <a:schemeClr val="accent1"/>
-          </a:effectRef>
-          <a:fontRef idx="minor">
-            <a:schemeClr val="lt1"/>
-          </a:fontRef>
-        </p:style>
-        <p:txBody>
-          <a:bodyPr rtlCol="0" anchor="ctr"/>
-          <a:lstStyle/>
-          <a:p>
-            <a:pPr algn="ctr"/>
-          </a:p>
-        </p:txBody>
-      </p:sp>
-      <p:sp>
-        <p:nvSpPr>
-          <p:cNvPr id="9" name="Rectangle 8"/>
-          <p:cNvSpPr/>
-          <p:nvPr/>
-        </p:nvSpPr>
-        <p:spPr>
-          <a:xfrm>
-            <a:off x="4133087" y="2331720"/>
-            <a:ext cx="3474720" cy="347472"/>
-          </a:xfrm>
-          <a:prstGeom prst="rect">
-            <a:avLst/>
-          </a:prstGeom>
-          <a:solidFill>
-            <a:srgbClr val="0F172A"/>
-          </a:solidFill>
-          <a:ln>
-            <a:solidFill>
-              <a:srgbClr val="0F172A"/>
-            </a:solidFill>
-          </a:ln>
-        </p:spPr>
-        <p:style>
-          <a:lnRef idx="1">
-            <a:schemeClr val="accent1"/>
-          </a:lnRef>
-          <a:fillRef idx="3">
-            <a:schemeClr val="accent1"/>
-          </a:fillRef>
-          <a:effectRef idx="2">
-            <a:schemeClr val="accent1"/>
-          </a:effectRef>
-          <a:fontRef idx="minor">
-            <a:schemeClr val="lt1"/>
-          </a:fontRef>
-        </p:style>
-        <p:txBody>
-          <a:bodyPr rtlCol="0" anchor="t" wrap="square" tIns="25400" bIns="25400" lIns="76200" rIns="76200"/>
-          <a:lstStyle/>
-          <a:p>
-            <a:pPr algn="ctr"/>
-            <a:r>
-              <a:rPr sz="1200" b="1">
-                <a:solidFill>
-                  <a:srgbClr val="22D3EE"/>
-                </a:solidFill>
-                <a:latin typeface="Arial"/>
-              </a:rPr>
-              <a:t>源码解释</a:t>
-            </a:r>
-          </a:p>
-        </p:txBody>
-      </p:sp>
-      <p:sp>
-        <p:nvSpPr>
-          <p:cNvPr id="10" name="TextBox 9"/>
-          <p:cNvSpPr txBox="1"/>
-          <p:nvPr/>
-        </p:nvSpPr>
-        <p:spPr>
-          <a:xfrm>
-            <a:off x="4206240" y="2734056"/>
-            <a:ext cx="3328415" cy="1097280"/>
-          </a:xfrm>
-          <a:prstGeom prst="rect">
-            <a:avLst/>
-          </a:prstGeom>
-          <a:noFill/>
-        </p:spPr>
-        <p:txBody>
-          <a:bodyPr wrap="square" tIns="50800" bIns="50800" lIns="101600" rIns="101600" anchor="t">
-            <a:spAutoFit/>
-          </a:bodyPr>
-          <a:lstStyle/>
+              <a:t>范围：只改……相关代码</a:t>
+            </a:r>
+          </a:p>
           <a:p>
             <a:pPr>
               <a:spcAft>
@@ -11403,7 +13043,7 @@
                 </a:solidFill>
                 <a:latin typeface="Arial"/>
               </a:rPr>
-              <a:t>减少无关探索和上下文噪音</a:t>
+              <a:t>约束：不要做无关重构</a:t>
             </a:r>
           </a:p>
           <a:p>
@@ -11419,21 +13059,21 @@
                 </a:solidFill>
                 <a:latin typeface="Arial"/>
               </a:rPr>
-              <a:t>更容易沿用现有实现</a:t>
-            </a:r>
-          </a:p>
-        </p:txBody>
-      </p:sp>
-      <p:sp>
-        <p:nvSpPr>
-          <p:cNvPr id="11" name="Rounded Rectangle 10"/>
+              <a:t>验证：跑测试并说明结果</a:t>
+            </a:r>
+          </a:p>
+        </p:txBody>
+      </p:sp>
+      <p:sp>
+        <p:nvSpPr>
+          <p:cNvPr id="8" name="Rounded Rectangle 7"/>
           <p:cNvSpPr/>
           <p:nvPr/>
         </p:nvSpPr>
         <p:spPr>
           <a:xfrm>
-            <a:off x="7836408" y="2331720"/>
-            <a:ext cx="3794760" cy="1554480"/>
+            <a:off x="4133087" y="2331720"/>
+            <a:ext cx="3474720" cy="1554480"/>
           </a:xfrm>
           <a:prstGeom prst="roundRect">
             <a:avLst/>
@@ -11471,14 +13111,14 @@
       </p:sp>
       <p:sp>
         <p:nvSpPr>
-          <p:cNvPr id="12" name="Rectangle 11"/>
+          <p:cNvPr id="9" name="Rectangle 8"/>
           <p:cNvSpPr/>
           <p:nvPr/>
         </p:nvSpPr>
         <p:spPr>
           <a:xfrm>
-            <a:off x="7836408" y="2331720"/>
-            <a:ext cx="3794760" cy="347472"/>
+            <a:off x="4133087" y="2331720"/>
+            <a:ext cx="3474720" cy="347472"/>
           </a:xfrm>
           <a:prstGeom prst="rect">
             <a:avLst/>
@@ -11518,21 +13158,21 @@
                 </a:solidFill>
                 <a:latin typeface="Arial"/>
               </a:rPr>
-              <a:t>证据链</a:t>
-            </a:r>
-          </a:p>
-        </p:txBody>
-      </p:sp>
-      <p:sp>
-        <p:nvSpPr>
-          <p:cNvPr id="13" name="TextBox 12"/>
+              <a:t>源码解释</a:t>
+            </a:r>
+          </a:p>
+        </p:txBody>
+      </p:sp>
+      <p:sp>
+        <p:nvSpPr>
+          <p:cNvPr id="10" name="TextBox 9"/>
           <p:cNvSpPr txBox="1"/>
           <p:nvPr/>
         </p:nvSpPr>
         <p:spPr>
           <a:xfrm>
-            <a:off x="7909560" y="2734056"/>
-            <a:ext cx="3648456" cy="1097280"/>
+            <a:off x="4206240" y="2734056"/>
+            <a:ext cx="3328415" cy="1097280"/>
           </a:xfrm>
           <a:prstGeom prst="rect">
             <a:avLst/>
@@ -11557,7 +13197,7 @@
                 </a:solidFill>
                 <a:latin typeface="Arial"/>
               </a:rPr>
-              <a:t>prompt stack（提示词栈）明确要求先读代码</a:t>
+              <a:t>减少分析 / 实现 / 顺手优化之间的歧义</a:t>
             </a:r>
           </a:p>
           <a:p>
@@ -11573,27 +13213,27 @@
                 </a:solidFill>
                 <a:latin typeface="Arial"/>
               </a:rPr>
-              <a:t>Plan Mode workflow（规划模式工作流）先 Explore 再规划</a:t>
-            </a:r>
-          </a:p>
-        </p:txBody>
-      </p:sp>
-      <p:sp>
-        <p:nvSpPr>
-          <p:cNvPr id="14" name="Rounded Rectangle 13"/>
+              <a:t>让 turn loop（轮次循环）围绕明确目标推进</a:t>
+            </a:r>
+          </a:p>
+        </p:txBody>
+      </p:sp>
+      <p:sp>
+        <p:nvSpPr>
+          <p:cNvPr id="11" name="Rounded Rectangle 10"/>
           <p:cNvSpPr/>
           <p:nvPr/>
         </p:nvSpPr>
         <p:spPr>
           <a:xfrm>
-            <a:off x="658368" y="4160520"/>
-            <a:ext cx="10972800" cy="1234440"/>
+            <a:off x="7836408" y="2331720"/>
+            <a:ext cx="3794760" cy="1554480"/>
           </a:xfrm>
           <a:prstGeom prst="roundRect">
             <a:avLst/>
           </a:prstGeom>
           <a:solidFill>
-            <a:srgbClr val="030712"/>
+            <a:srgbClr val="0A1224"/>
           </a:solidFill>
           <a:ln>
             <a:solidFill>
@@ -11616,6 +13256,160 @@
           </a:fontRef>
         </p:style>
         <p:txBody>
+          <a:bodyPr rtlCol="0" anchor="ctr"/>
+          <a:lstStyle/>
+          <a:p>
+            <a:pPr algn="ctr"/>
+          </a:p>
+        </p:txBody>
+      </p:sp>
+      <p:sp>
+        <p:nvSpPr>
+          <p:cNvPr id="12" name="Rectangle 11"/>
+          <p:cNvSpPr/>
+          <p:nvPr/>
+        </p:nvSpPr>
+        <p:spPr>
+          <a:xfrm>
+            <a:off x="7836408" y="2331720"/>
+            <a:ext cx="3794760" cy="347472"/>
+          </a:xfrm>
+          <a:prstGeom prst="rect">
+            <a:avLst/>
+          </a:prstGeom>
+          <a:solidFill>
+            <a:srgbClr val="0F172A"/>
+          </a:solidFill>
+          <a:ln>
+            <a:solidFill>
+              <a:srgbClr val="0F172A"/>
+            </a:solidFill>
+          </a:ln>
+        </p:spPr>
+        <p:style>
+          <a:lnRef idx="1">
+            <a:schemeClr val="accent1"/>
+          </a:lnRef>
+          <a:fillRef idx="3">
+            <a:schemeClr val="accent1"/>
+          </a:fillRef>
+          <a:effectRef idx="2">
+            <a:schemeClr val="accent1"/>
+          </a:effectRef>
+          <a:fontRef idx="minor">
+            <a:schemeClr val="lt1"/>
+          </a:fontRef>
+        </p:style>
+        <p:txBody>
+          <a:bodyPr rtlCol="0" anchor="t" wrap="square" tIns="25400" bIns="25400" lIns="76200" rIns="76200"/>
+          <a:lstStyle/>
+          <a:p>
+            <a:pPr algn="ctr"/>
+            <a:r>
+              <a:rPr sz="1200" b="1">
+                <a:solidFill>
+                  <a:srgbClr val="22D3EE"/>
+                </a:solidFill>
+                <a:latin typeface="Arial"/>
+              </a:rPr>
+              <a:t>证据链</a:t>
+            </a:r>
+          </a:p>
+        </p:txBody>
+      </p:sp>
+      <p:sp>
+        <p:nvSpPr>
+          <p:cNvPr id="13" name="TextBox 12"/>
+          <p:cNvSpPr txBox="1"/>
+          <p:nvPr/>
+        </p:nvSpPr>
+        <p:spPr>
+          <a:xfrm>
+            <a:off x="7909560" y="2734056"/>
+            <a:ext cx="3648456" cy="1097280"/>
+          </a:xfrm>
+          <a:prstGeom prst="rect">
+            <a:avLst/>
+          </a:prstGeom>
+          <a:noFill/>
+        </p:spPr>
+        <p:txBody>
+          <a:bodyPr wrap="square" tIns="50800" bIns="50800" lIns="101600" rIns="101600" anchor="t">
+            <a:spAutoFit/>
+          </a:bodyPr>
+          <a:lstStyle/>
+          <a:p>
+            <a:pPr>
+              <a:spcAft>
+                <a:spcPts val="600"/>
+              </a:spcAft>
+            </a:pPr>
+            <a:r>
+              <a:rPr sz="1400" b="0">
+                <a:solidFill>
+                  <a:srgbClr val="E2E8F0"/>
+                </a:solidFill>
+                <a:latin typeface="Arial"/>
+              </a:rPr>
+              <a:t>prompt stack（提示词栈）默认把请求理解成软件工程任务</a:t>
+            </a:r>
+          </a:p>
+          <a:p>
+            <a:pPr>
+              <a:spcAft>
+                <a:spcPts val="600"/>
+              </a:spcAft>
+            </a:pPr>
+            <a:r>
+              <a:rPr sz="1400" b="0">
+                <a:solidFill>
+                  <a:srgbClr val="E2E8F0"/>
+                </a:solidFill>
+                <a:latin typeface="Arial"/>
+              </a:rPr>
+              <a:t>turn loop（轮次循环）会围绕目标、范围和验证持续推进</a:t>
+            </a:r>
+          </a:p>
+        </p:txBody>
+      </p:sp>
+      <p:sp>
+        <p:nvSpPr>
+          <p:cNvPr id="14" name="Rounded Rectangle 13"/>
+          <p:cNvSpPr/>
+          <p:nvPr/>
+        </p:nvSpPr>
+        <p:spPr>
+          <a:xfrm>
+            <a:off x="658368" y="4160520"/>
+            <a:ext cx="10972800" cy="1234440"/>
+          </a:xfrm>
+          <a:prstGeom prst="roundRect">
+            <a:avLst/>
+          </a:prstGeom>
+          <a:solidFill>
+            <a:srgbClr val="030712"/>
+          </a:solidFill>
+          <a:ln>
+            <a:solidFill>
+              <a:srgbClr val="22D3EE"/>
+            </a:solidFill>
+          </a:ln>
+        </p:spPr>
+        <p:style>
+          <a:lnRef idx="1">
+            <a:schemeClr val="accent1"/>
+          </a:lnRef>
+          <a:fillRef idx="3">
+            <a:schemeClr val="accent1"/>
+          </a:fillRef>
+          <a:effectRef idx="2">
+            <a:schemeClr val="accent1"/>
+          </a:effectRef>
+          <a:fontRef idx="minor">
+            <a:schemeClr val="lt1"/>
+          </a:fontRef>
+        </p:style>
+        <p:txBody>
           <a:bodyPr rtlCol="0" anchor="t" wrap="square" tIns="203200" bIns="76200" lIns="127000" rIns="127000"/>
           <a:lstStyle/>
           <a:p>
@@ -11627,10 +13421,9 @@
                 </a:solidFill>
                 <a:latin typeface="Courier New"/>
               </a:rPr>
-              <a:t>In general, do not propose changes to code you haven't read.
-If a user asks about or wants you to modify a file, read it first.
-1. Explore — Use read-only tools to read code.
-Look for existing functions, utilities, and patterns to reuse.</a:t>
+              <a:t>The user will primarily request you to perform software engineering tasks.
+In general, do not propose changes to code you haven't read.
+Report outcomes faithfully: if tests fail, say so ...</a:t>
             </a:r>
           </a:p>
         </p:txBody>
@@ -11719,7 +13512,7 @@
                 </a:solidFill>
                 <a:latin typeface="Arial"/>
               </a:rPr>
-              <a:t>源码依据：prompts.ts#L230，messages.ts#L3344</a:t>
+              <a:t>源码依据：prompts.ts#L221 / #L230 / #L240</a:t>
             </a:r>
           </a:p>
         </p:txBody>
@@ -11779,7 +13572,7 @@
                 </a:solidFill>
                 <a:latin typeface="Arial"/>
               </a:rPr>
-              <a:t>技巧 3：最小改动、优先复用</a:t>
+              <a:t>技巧 2：先读代码，再改代码</a:t>
             </a:r>
           </a:p>
         </p:txBody>
@@ -11880,7 +13673,7 @@
                 </a:solidFill>
                 <a:latin typeface="Arial"/>
               </a:rPr>
-              <a:t>把“最小改动、优先复用”写出来，能明显降低顺手重构和过早抽象。</a:t>
+              <a:t>“先读代码，再改代码”不是建议项，而是源码里的默认工作顺序。</a:t>
             </a:r>
           </a:p>
         </p:txBody>
@@ -12018,7 +13811,7 @@
                 </a:solidFill>
                 <a:latin typeface="Arial"/>
               </a:rPr>
-              <a:t>做最小必要改动</a:t>
+              <a:t>先看 src/foo.ts 和 src/bar.ts</a:t>
             </a:r>
           </a:p>
           <a:p>
@@ -12034,9 +13827,131 @@
                 </a:solidFill>
                 <a:latin typeface="Arial"/>
               </a:rPr>
-              <a:t>优先复用现有函数、工具和模式</a:t>
-            </a:r>
-          </a:p>
+              <a:t>再决定改法</a:t>
+            </a:r>
+          </a:p>
+        </p:txBody>
+      </p:sp>
+      <p:sp>
+        <p:nvSpPr>
+          <p:cNvPr id="8" name="Rounded Rectangle 7"/>
+          <p:cNvSpPr/>
+          <p:nvPr/>
+        </p:nvSpPr>
+        <p:spPr>
+          <a:xfrm>
+            <a:off x="4133087" y="2331720"/>
+            <a:ext cx="3474720" cy="1554480"/>
+          </a:xfrm>
+          <a:prstGeom prst="roundRect">
+            <a:avLst/>
+          </a:prstGeom>
+          <a:solidFill>
+            <a:srgbClr val="0A1224"/>
+          </a:solidFill>
+          <a:ln>
+            <a:solidFill>
+              <a:srgbClr val="22D3EE"/>
+            </a:solidFill>
+          </a:ln>
+        </p:spPr>
+        <p:style>
+          <a:lnRef idx="1">
+            <a:schemeClr val="accent1"/>
+          </a:lnRef>
+          <a:fillRef idx="3">
+            <a:schemeClr val="accent1"/>
+          </a:fillRef>
+          <a:effectRef idx="2">
+            <a:schemeClr val="accent1"/>
+          </a:effectRef>
+          <a:fontRef idx="minor">
+            <a:schemeClr val="lt1"/>
+          </a:fontRef>
+        </p:style>
+        <p:txBody>
+          <a:bodyPr rtlCol="0" anchor="ctr"/>
+          <a:lstStyle/>
+          <a:p>
+            <a:pPr algn="ctr"/>
+          </a:p>
+        </p:txBody>
+      </p:sp>
+      <p:sp>
+        <p:nvSpPr>
+          <p:cNvPr id="9" name="Rectangle 8"/>
+          <p:cNvSpPr/>
+          <p:nvPr/>
+        </p:nvSpPr>
+        <p:spPr>
+          <a:xfrm>
+            <a:off x="4133087" y="2331720"/>
+            <a:ext cx="3474720" cy="347472"/>
+          </a:xfrm>
+          <a:prstGeom prst="rect">
+            <a:avLst/>
+          </a:prstGeom>
+          <a:solidFill>
+            <a:srgbClr val="0F172A"/>
+          </a:solidFill>
+          <a:ln>
+            <a:solidFill>
+              <a:srgbClr val="0F172A"/>
+            </a:solidFill>
+          </a:ln>
+        </p:spPr>
+        <p:style>
+          <a:lnRef idx="1">
+            <a:schemeClr val="accent1"/>
+          </a:lnRef>
+          <a:fillRef idx="3">
+            <a:schemeClr val="accent1"/>
+          </a:fillRef>
+          <a:effectRef idx="2">
+            <a:schemeClr val="accent1"/>
+          </a:effectRef>
+          <a:fontRef idx="minor">
+            <a:schemeClr val="lt1"/>
+          </a:fontRef>
+        </p:style>
+        <p:txBody>
+          <a:bodyPr rtlCol="0" anchor="t" wrap="square" tIns="25400" bIns="25400" lIns="76200" rIns="76200"/>
+          <a:lstStyle/>
+          <a:p>
+            <a:pPr algn="ctr"/>
+            <a:r>
+              <a:rPr sz="1200" b="1">
+                <a:solidFill>
+                  <a:srgbClr val="22D3EE"/>
+                </a:solidFill>
+                <a:latin typeface="Arial"/>
+              </a:rPr>
+              <a:t>源码解释</a:t>
+            </a:r>
+          </a:p>
+        </p:txBody>
+      </p:sp>
+      <p:sp>
+        <p:nvSpPr>
+          <p:cNvPr id="10" name="TextBox 9"/>
+          <p:cNvSpPr txBox="1"/>
+          <p:nvPr/>
+        </p:nvSpPr>
+        <p:spPr>
+          <a:xfrm>
+            <a:off x="4206240" y="2734056"/>
+            <a:ext cx="3328415" cy="1097280"/>
+          </a:xfrm>
+          <a:prstGeom prst="rect">
+            <a:avLst/>
+          </a:prstGeom>
+          <a:noFill/>
+        </p:spPr>
+        <p:txBody>
+          <a:bodyPr wrap="square" tIns="50800" bIns="50800" lIns="101600" rIns="101600" anchor="t">
+            <a:spAutoFit/>
+          </a:bodyPr>
+          <a:lstStyle/>
           <a:p>
             <a:pPr>
               <a:spcAft>
@@ -12050,131 +13965,9 @@
                 </a:solidFill>
                 <a:latin typeface="Arial"/>
               </a:rPr>
-              <a:t>不要新造一层抽象</a:t>
-            </a:r>
-          </a:p>
-        </p:txBody>
-      </p:sp>
-      <p:sp>
-        <p:nvSpPr>
-          <p:cNvPr id="8" name="Rounded Rectangle 7"/>
-          <p:cNvSpPr/>
-          <p:nvPr/>
-        </p:nvSpPr>
-        <p:spPr>
-          <a:xfrm>
-            <a:off x="4133087" y="2331720"/>
-            <a:ext cx="3474720" cy="1554480"/>
-          </a:xfrm>
-          <a:prstGeom prst="roundRect">
-            <a:avLst/>
-          </a:prstGeom>
-          <a:solidFill>
-            <a:srgbClr val="0A1224"/>
-          </a:solidFill>
-          <a:ln>
-            <a:solidFill>
-              <a:srgbClr val="22D3EE"/>
-            </a:solidFill>
-          </a:ln>
-        </p:spPr>
-        <p:style>
-          <a:lnRef idx="1">
-            <a:schemeClr val="accent1"/>
-          </a:lnRef>
-          <a:fillRef idx="3">
-            <a:schemeClr val="accent1"/>
-          </a:fillRef>
-          <a:effectRef idx="2">
-            <a:schemeClr val="accent1"/>
-          </a:effectRef>
-          <a:fontRef idx="minor">
-            <a:schemeClr val="lt1"/>
-          </a:fontRef>
-        </p:style>
-        <p:txBody>
-          <a:bodyPr rtlCol="0" anchor="ctr"/>
-          <a:lstStyle/>
-          <a:p>
-            <a:pPr algn="ctr"/>
-          </a:p>
-        </p:txBody>
-      </p:sp>
-      <p:sp>
-        <p:nvSpPr>
-          <p:cNvPr id="9" name="Rectangle 8"/>
-          <p:cNvSpPr/>
-          <p:nvPr/>
-        </p:nvSpPr>
-        <p:spPr>
-          <a:xfrm>
-            <a:off x="4133087" y="2331720"/>
-            <a:ext cx="3474720" cy="347472"/>
-          </a:xfrm>
-          <a:prstGeom prst="rect">
-            <a:avLst/>
-          </a:prstGeom>
-          <a:solidFill>
-            <a:srgbClr val="0F172A"/>
-          </a:solidFill>
-          <a:ln>
-            <a:solidFill>
-              <a:srgbClr val="0F172A"/>
-            </a:solidFill>
-          </a:ln>
-        </p:spPr>
-        <p:style>
-          <a:lnRef idx="1">
-            <a:schemeClr val="accent1"/>
-          </a:lnRef>
-          <a:fillRef idx="3">
-            <a:schemeClr val="accent1"/>
-          </a:fillRef>
-          <a:effectRef idx="2">
-            <a:schemeClr val="accent1"/>
-          </a:effectRef>
-          <a:fontRef idx="minor">
-            <a:schemeClr val="lt1"/>
-          </a:fontRef>
-        </p:style>
-        <p:txBody>
-          <a:bodyPr rtlCol="0" anchor="t" wrap="square" tIns="25400" bIns="25400" lIns="76200" rIns="76200"/>
-          <a:lstStyle/>
-          <a:p>
-            <a:pPr algn="ctr"/>
-            <a:r>
-              <a:rPr sz="1200" b="1">
-                <a:solidFill>
-                  <a:srgbClr val="22D3EE"/>
-                </a:solidFill>
-                <a:latin typeface="Arial"/>
-              </a:rPr>
-              <a:t>源码解释</a:t>
-            </a:r>
-          </a:p>
-        </p:txBody>
-      </p:sp>
-      <p:sp>
-        <p:nvSpPr>
-          <p:cNvPr id="10" name="TextBox 9"/>
-          <p:cNvSpPr txBox="1"/>
-          <p:nvPr/>
-        </p:nvSpPr>
-        <p:spPr>
-          <a:xfrm>
-            <a:off x="4206240" y="2734056"/>
-            <a:ext cx="3328415" cy="1097280"/>
-          </a:xfrm>
-          <a:prstGeom prst="rect">
-            <a:avLst/>
-          </a:prstGeom>
-          <a:noFill/>
-        </p:spPr>
-        <p:txBody>
-          <a:bodyPr wrap="square" tIns="50800" bIns="50800" lIns="101600" rIns="101600" anchor="t">
-            <a:spAutoFit/>
-          </a:bodyPr>
-          <a:lstStyle/>
+              <a:t>减少无关探索和上下文噪音</a:t>
+            </a:r>
+          </a:p>
           <a:p>
             <a:pPr>
               <a:spcAft>
@@ -12188,9 +13981,131 @@
                 </a:solidFill>
                 <a:latin typeface="Arial"/>
               </a:rPr>
-              <a:t>抑制范围漂移</a:t>
-            </a:r>
-          </a:p>
+              <a:t>更容易沿用现有实现</a:t>
+            </a:r>
+          </a:p>
+        </p:txBody>
+      </p:sp>
+      <p:sp>
+        <p:nvSpPr>
+          <p:cNvPr id="11" name="Rounded Rectangle 10"/>
+          <p:cNvSpPr/>
+          <p:nvPr/>
+        </p:nvSpPr>
+        <p:spPr>
+          <a:xfrm>
+            <a:off x="7836408" y="2331720"/>
+            <a:ext cx="3794760" cy="1554480"/>
+          </a:xfrm>
+          <a:prstGeom prst="roundRect">
+            <a:avLst/>
+          </a:prstGeom>
+          <a:solidFill>
+            <a:srgbClr val="0A1224"/>
+          </a:solidFill>
+          <a:ln>
+            <a:solidFill>
+              <a:srgbClr val="22D3EE"/>
+            </a:solidFill>
+          </a:ln>
+        </p:spPr>
+        <p:style>
+          <a:lnRef idx="1">
+            <a:schemeClr val="accent1"/>
+          </a:lnRef>
+          <a:fillRef idx="3">
+            <a:schemeClr val="accent1"/>
+          </a:fillRef>
+          <a:effectRef idx="2">
+            <a:schemeClr val="accent1"/>
+          </a:effectRef>
+          <a:fontRef idx="minor">
+            <a:schemeClr val="lt1"/>
+          </a:fontRef>
+        </p:style>
+        <p:txBody>
+          <a:bodyPr rtlCol="0" anchor="ctr"/>
+          <a:lstStyle/>
+          <a:p>
+            <a:pPr algn="ctr"/>
+          </a:p>
+        </p:txBody>
+      </p:sp>
+      <p:sp>
+        <p:nvSpPr>
+          <p:cNvPr id="12" name="Rectangle 11"/>
+          <p:cNvSpPr/>
+          <p:nvPr/>
+        </p:nvSpPr>
+        <p:spPr>
+          <a:xfrm>
+            <a:off x="7836408" y="2331720"/>
+            <a:ext cx="3794760" cy="347472"/>
+          </a:xfrm>
+          <a:prstGeom prst="rect">
+            <a:avLst/>
+          </a:prstGeom>
+          <a:solidFill>
+            <a:srgbClr val="0F172A"/>
+          </a:solidFill>
+          <a:ln>
+            <a:solidFill>
+              <a:srgbClr val="0F172A"/>
+            </a:solidFill>
+          </a:ln>
+        </p:spPr>
+        <p:style>
+          <a:lnRef idx="1">
+            <a:schemeClr val="accent1"/>
+          </a:lnRef>
+          <a:fillRef idx="3">
+            <a:schemeClr val="accent1"/>
+          </a:fillRef>
+          <a:effectRef idx="2">
+            <a:schemeClr val="accent1"/>
+          </a:effectRef>
+          <a:fontRef idx="minor">
+            <a:schemeClr val="lt1"/>
+          </a:fontRef>
+        </p:style>
+        <p:txBody>
+          <a:bodyPr rtlCol="0" anchor="t" wrap="square" tIns="25400" bIns="25400" lIns="76200" rIns="76200"/>
+          <a:lstStyle/>
+          <a:p>
+            <a:pPr algn="ctr"/>
+            <a:r>
+              <a:rPr sz="1200" b="1">
+                <a:solidFill>
+                  <a:srgbClr val="22D3EE"/>
+                </a:solidFill>
+                <a:latin typeface="Arial"/>
+              </a:rPr>
+              <a:t>证据链</a:t>
+            </a:r>
+          </a:p>
+        </p:txBody>
+      </p:sp>
+      <p:sp>
+        <p:nvSpPr>
+          <p:cNvPr id="13" name="TextBox 12"/>
+          <p:cNvSpPr txBox="1"/>
+          <p:nvPr/>
+        </p:nvSpPr>
+        <p:spPr>
+          <a:xfrm>
+            <a:off x="7909560" y="2734056"/>
+            <a:ext cx="3648456" cy="1097280"/>
+          </a:xfrm>
+          <a:prstGeom prst="rect">
+            <a:avLst/>
+          </a:prstGeom>
+          <a:noFill/>
+        </p:spPr>
+        <p:txBody>
+          <a:bodyPr wrap="square" tIns="50800" bIns="50800" lIns="101600" rIns="101600" anchor="t">
+            <a:spAutoFit/>
+          </a:bodyPr>
+          <a:lstStyle/>
           <a:p>
             <a:pPr>
               <a:spcAft>
@@ -12204,131 +14119,9 @@
                 </a:solidFill>
                 <a:latin typeface="Arial"/>
               </a:rPr>
-              <a:t>避免 one-time helper 和过早抽象</a:t>
-            </a:r>
-          </a:p>
-        </p:txBody>
-      </p:sp>
-      <p:sp>
-        <p:nvSpPr>
-          <p:cNvPr id="11" name="Rounded Rectangle 10"/>
-          <p:cNvSpPr/>
-          <p:nvPr/>
-        </p:nvSpPr>
-        <p:spPr>
-          <a:xfrm>
-            <a:off x="7836408" y="2331720"/>
-            <a:ext cx="3794760" cy="1554480"/>
-          </a:xfrm>
-          <a:prstGeom prst="roundRect">
-            <a:avLst/>
-          </a:prstGeom>
-          <a:solidFill>
-            <a:srgbClr val="0A1224"/>
-          </a:solidFill>
-          <a:ln>
-            <a:solidFill>
-              <a:srgbClr val="22D3EE"/>
-            </a:solidFill>
-          </a:ln>
-        </p:spPr>
-        <p:style>
-          <a:lnRef idx="1">
-            <a:schemeClr val="accent1"/>
-          </a:lnRef>
-          <a:fillRef idx="3">
-            <a:schemeClr val="accent1"/>
-          </a:fillRef>
-          <a:effectRef idx="2">
-            <a:schemeClr val="accent1"/>
-          </a:effectRef>
-          <a:fontRef idx="minor">
-            <a:schemeClr val="lt1"/>
-          </a:fontRef>
-        </p:style>
-        <p:txBody>
-          <a:bodyPr rtlCol="0" anchor="ctr"/>
-          <a:lstStyle/>
-          <a:p>
-            <a:pPr algn="ctr"/>
-          </a:p>
-        </p:txBody>
-      </p:sp>
-      <p:sp>
-        <p:nvSpPr>
-          <p:cNvPr id="12" name="Rectangle 11"/>
-          <p:cNvSpPr/>
-          <p:nvPr/>
-        </p:nvSpPr>
-        <p:spPr>
-          <a:xfrm>
-            <a:off x="7836408" y="2331720"/>
-            <a:ext cx="3794760" cy="347472"/>
-          </a:xfrm>
-          <a:prstGeom prst="rect">
-            <a:avLst/>
-          </a:prstGeom>
-          <a:solidFill>
-            <a:srgbClr val="0F172A"/>
-          </a:solidFill>
-          <a:ln>
-            <a:solidFill>
-              <a:srgbClr val="0F172A"/>
-            </a:solidFill>
-          </a:ln>
-        </p:spPr>
-        <p:style>
-          <a:lnRef idx="1">
-            <a:schemeClr val="accent1"/>
-          </a:lnRef>
-          <a:fillRef idx="3">
-            <a:schemeClr val="accent1"/>
-          </a:fillRef>
-          <a:effectRef idx="2">
-            <a:schemeClr val="accent1"/>
-          </a:effectRef>
-          <a:fontRef idx="minor">
-            <a:schemeClr val="lt1"/>
-          </a:fontRef>
-        </p:style>
-        <p:txBody>
-          <a:bodyPr rtlCol="0" anchor="t" wrap="square" tIns="25400" bIns="25400" lIns="76200" rIns="76200"/>
-          <a:lstStyle/>
-          <a:p>
-            <a:pPr algn="ctr"/>
-            <a:r>
-              <a:rPr sz="1200" b="1">
-                <a:solidFill>
-                  <a:srgbClr val="22D3EE"/>
-                </a:solidFill>
-                <a:latin typeface="Arial"/>
-              </a:rPr>
-              <a:t>证据链</a:t>
-            </a:r>
-          </a:p>
-        </p:txBody>
-      </p:sp>
-      <p:sp>
-        <p:nvSpPr>
-          <p:cNvPr id="13" name="TextBox 12"/>
-          <p:cNvSpPr txBox="1"/>
-          <p:nvPr/>
-        </p:nvSpPr>
-        <p:spPr>
-          <a:xfrm>
-            <a:off x="7909560" y="2734056"/>
-            <a:ext cx="3648456" cy="1097280"/>
-          </a:xfrm>
-          <a:prstGeom prst="rect">
-            <a:avLst/>
-          </a:prstGeom>
-          <a:noFill/>
-        </p:spPr>
-        <p:txBody>
-          <a:bodyPr wrap="square" tIns="50800" bIns="50800" lIns="101600" rIns="101600" anchor="t">
-            <a:spAutoFit/>
-          </a:bodyPr>
-          <a:lstStyle/>
+              <a:t>prompt stack（提示词栈）明确要求先读代码</a:t>
+            </a:r>
+          </a:p>
           <a:p>
             <a:pPr>
               <a:spcAft>
@@ -12342,23 +14135,7 @@
                 </a:solidFill>
                 <a:latin typeface="Arial"/>
               </a:rPr>
-              <a:t>prompt stack（提示词栈）本身就在压制不必要改动</a:t>
-            </a:r>
-          </a:p>
-          <a:p>
-            <a:pPr>
-              <a:spcAft>
-                <a:spcPts val="600"/>
-              </a:spcAft>
-            </a:pPr>
-            <a:r>
-              <a:rPr sz="1400" b="0">
-                <a:solidFill>
-                  <a:srgbClr val="E2E8F0"/>
-                </a:solidFill>
-                <a:latin typeface="Arial"/>
-              </a:rPr>
-              <a:t>tool pipeline（工具执行流水线）更适合局部、清晰、可验证的改动</a:t>
+              <a:t>Plan Mode workflow（规划模式工作流）先 Explore 再规划</a:t>
             </a:r>
           </a:p>
         </p:txBody>
@@ -12412,8 +14189,10 @@
                 </a:solidFill>
                 <a:latin typeface="Courier New"/>
               </a:rPr>
-              <a:t>Don't add features, refactor code, or make "improvements" beyond what was asked.
-Don't create helpers, utilities, or abstractions for one-time operations.</a:t>
+              <a:t>In general, do not propose changes to code you haven't read.
+If a user asks about or wants you to modify a file, read it first.
+1. Explore — Use read-only tools to read code.
+Look for existing functions, utilities, and patterns to reuse.</a:t>
             </a:r>
           </a:p>
         </p:txBody>
@@ -12502,7 +14281,7 @@
                 </a:solidFill>
                 <a:latin typeface="Arial"/>
               </a:rPr>
-              <a:t>源码依据：prompts.ts#L200 / #L203</a:t>
+              <a:t>源码依据：prompts.ts#L230，messages.ts#L3344</a:t>
             </a:r>
           </a:p>
         </p:txBody>
@@ -12562,7 +14341,7 @@
                 </a:solidFill>
                 <a:latin typeface="Arial"/>
               </a:rPr>
-              <a:t>技巧 4：优先 dedicated tools（专用工具）</a:t>
+              <a:t>技巧 3：最小改动、优先复用</a:t>
             </a:r>
           </a:p>
         </p:txBody>
@@ -12663,7 +14442,7 @@
                 </a:solidFill>
                 <a:latin typeface="Arial"/>
               </a:rPr>
-              <a:t>Claude Code 更偏好 dedicated tools（专用工具），Bash 在源码里是 fallback，不是首选。</a:t>
+              <a:t>把“最小改动、优先复用”写出来，能明显降低顺手重构和过早抽象。</a:t>
             </a:r>
           </a:p>
         </p:txBody>
@@ -12801,7 +14580,7 @@
                 </a:solidFill>
                 <a:latin typeface="Arial"/>
               </a:rPr>
-              <a:t>优先直接读写文件</a:t>
+              <a:t>做最小必要改动</a:t>
             </a:r>
           </a:p>
           <a:p>
@@ -12817,131 +14596,9 @@
                 </a:solidFill>
                 <a:latin typeface="Arial"/>
               </a:rPr>
-              <a:t>不要用 Bash 做本可由专用工具完成的事情</a:t>
-            </a:r>
-          </a:p>
-        </p:txBody>
-      </p:sp>
-      <p:sp>
-        <p:nvSpPr>
-          <p:cNvPr id="8" name="Rounded Rectangle 7"/>
-          <p:cNvSpPr/>
-          <p:nvPr/>
-        </p:nvSpPr>
-        <p:spPr>
-          <a:xfrm>
-            <a:off x="4133087" y="2331720"/>
-            <a:ext cx="3474720" cy="1554480"/>
-          </a:xfrm>
-          <a:prstGeom prst="roundRect">
-            <a:avLst/>
-          </a:prstGeom>
-          <a:solidFill>
-            <a:srgbClr val="0A1224"/>
-          </a:solidFill>
-          <a:ln>
-            <a:solidFill>
-              <a:srgbClr val="22D3EE"/>
-            </a:solidFill>
-          </a:ln>
-        </p:spPr>
-        <p:style>
-          <a:lnRef idx="1">
-            <a:schemeClr val="accent1"/>
-          </a:lnRef>
-          <a:fillRef idx="3">
-            <a:schemeClr val="accent1"/>
-          </a:fillRef>
-          <a:effectRef idx="2">
-            <a:schemeClr val="accent1"/>
-          </a:effectRef>
-          <a:fontRef idx="minor">
-            <a:schemeClr val="lt1"/>
-          </a:fontRef>
-        </p:style>
-        <p:txBody>
-          <a:bodyPr rtlCol="0" anchor="ctr"/>
-          <a:lstStyle/>
-          <a:p>
-            <a:pPr algn="ctr"/>
-          </a:p>
-        </p:txBody>
-      </p:sp>
-      <p:sp>
-        <p:nvSpPr>
-          <p:cNvPr id="9" name="Rectangle 8"/>
-          <p:cNvSpPr/>
-          <p:nvPr/>
-        </p:nvSpPr>
-        <p:spPr>
-          <a:xfrm>
-            <a:off x="4133087" y="2331720"/>
-            <a:ext cx="3474720" cy="347472"/>
-          </a:xfrm>
-          <a:prstGeom prst="rect">
-            <a:avLst/>
-          </a:prstGeom>
-          <a:solidFill>
-            <a:srgbClr val="0F172A"/>
-          </a:solidFill>
-          <a:ln>
-            <a:solidFill>
-              <a:srgbClr val="0F172A"/>
-            </a:solidFill>
-          </a:ln>
-        </p:spPr>
-        <p:style>
-          <a:lnRef idx="1">
-            <a:schemeClr val="accent1"/>
-          </a:lnRef>
-          <a:fillRef idx="3">
-            <a:schemeClr val="accent1"/>
-          </a:fillRef>
-          <a:effectRef idx="2">
-            <a:schemeClr val="accent1"/>
-          </a:effectRef>
-          <a:fontRef idx="minor">
-            <a:schemeClr val="lt1"/>
-          </a:fontRef>
-        </p:style>
-        <p:txBody>
-          <a:bodyPr rtlCol="0" anchor="t" wrap="square" tIns="25400" bIns="25400" lIns="76200" rIns="76200"/>
-          <a:lstStyle/>
-          <a:p>
-            <a:pPr algn="ctr"/>
-            <a:r>
-              <a:rPr sz="1200" b="1">
-                <a:solidFill>
-                  <a:srgbClr val="22D3EE"/>
-                </a:solidFill>
-                <a:latin typeface="Arial"/>
-              </a:rPr>
-              <a:t>源码解释</a:t>
-            </a:r>
-          </a:p>
-        </p:txBody>
-      </p:sp>
-      <p:sp>
-        <p:nvSpPr>
-          <p:cNvPr id="10" name="TextBox 9"/>
-          <p:cNvSpPr txBox="1"/>
-          <p:nvPr/>
-        </p:nvSpPr>
-        <p:spPr>
-          <a:xfrm>
-            <a:off x="4206240" y="2734056"/>
-            <a:ext cx="3328415" cy="1097280"/>
-          </a:xfrm>
-          <a:prstGeom prst="rect">
-            <a:avLst/>
-          </a:prstGeom>
-          <a:noFill/>
-        </p:spPr>
-        <p:txBody>
-          <a:bodyPr wrap="square" tIns="50800" bIns="50800" lIns="101600" rIns="101600" anchor="t">
-            <a:spAutoFit/>
-          </a:bodyPr>
-          <a:lstStyle/>
+              <a:t>优先复用现有函数、工具和模式</a:t>
+            </a:r>
+          </a:p>
           <a:p>
             <a:pPr>
               <a:spcAft>
@@ -12955,9 +14612,131 @@
                 </a:solidFill>
                 <a:latin typeface="Arial"/>
               </a:rPr>
-              <a:t>专用工具更容易被解释和审查</a:t>
-            </a:r>
-          </a:p>
+              <a:t>不要新造一层抽象</a:t>
+            </a:r>
+          </a:p>
+        </p:txBody>
+      </p:sp>
+      <p:sp>
+        <p:nvSpPr>
+          <p:cNvPr id="8" name="Rounded Rectangle 7"/>
+          <p:cNvSpPr/>
+          <p:nvPr/>
+        </p:nvSpPr>
+        <p:spPr>
+          <a:xfrm>
+            <a:off x="4133087" y="2331720"/>
+            <a:ext cx="3474720" cy="1554480"/>
+          </a:xfrm>
+          <a:prstGeom prst="roundRect">
+            <a:avLst/>
+          </a:prstGeom>
+          <a:solidFill>
+            <a:srgbClr val="0A1224"/>
+          </a:solidFill>
+          <a:ln>
+            <a:solidFill>
+              <a:srgbClr val="22D3EE"/>
+            </a:solidFill>
+          </a:ln>
+        </p:spPr>
+        <p:style>
+          <a:lnRef idx="1">
+            <a:schemeClr val="accent1"/>
+          </a:lnRef>
+          <a:fillRef idx="3">
+            <a:schemeClr val="accent1"/>
+          </a:fillRef>
+          <a:effectRef idx="2">
+            <a:schemeClr val="accent1"/>
+          </a:effectRef>
+          <a:fontRef idx="minor">
+            <a:schemeClr val="lt1"/>
+          </a:fontRef>
+        </p:style>
+        <p:txBody>
+          <a:bodyPr rtlCol="0" anchor="ctr"/>
+          <a:lstStyle/>
+          <a:p>
+            <a:pPr algn="ctr"/>
+          </a:p>
+        </p:txBody>
+      </p:sp>
+      <p:sp>
+        <p:nvSpPr>
+          <p:cNvPr id="9" name="Rectangle 8"/>
+          <p:cNvSpPr/>
+          <p:nvPr/>
+        </p:nvSpPr>
+        <p:spPr>
+          <a:xfrm>
+            <a:off x="4133087" y="2331720"/>
+            <a:ext cx="3474720" cy="347472"/>
+          </a:xfrm>
+          <a:prstGeom prst="rect">
+            <a:avLst/>
+          </a:prstGeom>
+          <a:solidFill>
+            <a:srgbClr val="0F172A"/>
+          </a:solidFill>
+          <a:ln>
+            <a:solidFill>
+              <a:srgbClr val="0F172A"/>
+            </a:solidFill>
+          </a:ln>
+        </p:spPr>
+        <p:style>
+          <a:lnRef idx="1">
+            <a:schemeClr val="accent1"/>
+          </a:lnRef>
+          <a:fillRef idx="3">
+            <a:schemeClr val="accent1"/>
+          </a:fillRef>
+          <a:effectRef idx="2">
+            <a:schemeClr val="accent1"/>
+          </a:effectRef>
+          <a:fontRef idx="minor">
+            <a:schemeClr val="lt1"/>
+          </a:fontRef>
+        </p:style>
+        <p:txBody>
+          <a:bodyPr rtlCol="0" anchor="t" wrap="square" tIns="25400" bIns="25400" lIns="76200" rIns="76200"/>
+          <a:lstStyle/>
+          <a:p>
+            <a:pPr algn="ctr"/>
+            <a:r>
+              <a:rPr sz="1200" b="1">
+                <a:solidFill>
+                  <a:srgbClr val="22D3EE"/>
+                </a:solidFill>
+                <a:latin typeface="Arial"/>
+              </a:rPr>
+              <a:t>源码解释</a:t>
+            </a:r>
+          </a:p>
+        </p:txBody>
+      </p:sp>
+      <p:sp>
+        <p:nvSpPr>
+          <p:cNvPr id="10" name="TextBox 9"/>
+          <p:cNvSpPr txBox="1"/>
+          <p:nvPr/>
+        </p:nvSpPr>
+        <p:spPr>
+          <a:xfrm>
+            <a:off x="4206240" y="2734056"/>
+            <a:ext cx="3328415" cy="1097280"/>
+          </a:xfrm>
+          <a:prstGeom prst="rect">
+            <a:avLst/>
+          </a:prstGeom>
+          <a:noFill/>
+        </p:spPr>
+        <p:txBody>
+          <a:bodyPr wrap="square" tIns="50800" bIns="50800" lIns="101600" rIns="101600" anchor="t">
+            <a:spAutoFit/>
+          </a:bodyPr>
+          <a:lstStyle/>
           <a:p>
             <a:pPr>
               <a:spcAft>
@@ -12971,131 +14750,9 @@
                 </a:solidFill>
                 <a:latin typeface="Arial"/>
               </a:rPr>
-              <a:t>也更容易受权限和执行链约束</a:t>
-            </a:r>
-          </a:p>
-        </p:txBody>
-      </p:sp>
-      <p:sp>
-        <p:nvSpPr>
-          <p:cNvPr id="11" name="Rounded Rectangle 10"/>
-          <p:cNvSpPr/>
-          <p:nvPr/>
-        </p:nvSpPr>
-        <p:spPr>
-          <a:xfrm>
-            <a:off x="7836408" y="2331720"/>
-            <a:ext cx="3794760" cy="1554480"/>
-          </a:xfrm>
-          <a:prstGeom prst="roundRect">
-            <a:avLst/>
-          </a:prstGeom>
-          <a:solidFill>
-            <a:srgbClr val="0A1224"/>
-          </a:solidFill>
-          <a:ln>
-            <a:solidFill>
-              <a:srgbClr val="22D3EE"/>
-            </a:solidFill>
-          </a:ln>
-        </p:spPr>
-        <p:style>
-          <a:lnRef idx="1">
-            <a:schemeClr val="accent1"/>
-          </a:lnRef>
-          <a:fillRef idx="3">
-            <a:schemeClr val="accent1"/>
-          </a:fillRef>
-          <a:effectRef idx="2">
-            <a:schemeClr val="accent1"/>
-          </a:effectRef>
-          <a:fontRef idx="minor">
-            <a:schemeClr val="lt1"/>
-          </a:fontRef>
-        </p:style>
-        <p:txBody>
-          <a:bodyPr rtlCol="0" anchor="ctr"/>
-          <a:lstStyle/>
-          <a:p>
-            <a:pPr algn="ctr"/>
-          </a:p>
-        </p:txBody>
-      </p:sp>
-      <p:sp>
-        <p:nvSpPr>
-          <p:cNvPr id="12" name="Rectangle 11"/>
-          <p:cNvSpPr/>
-          <p:nvPr/>
-        </p:nvSpPr>
-        <p:spPr>
-          <a:xfrm>
-            <a:off x="7836408" y="2331720"/>
-            <a:ext cx="3794760" cy="347472"/>
-          </a:xfrm>
-          <a:prstGeom prst="rect">
-            <a:avLst/>
-          </a:prstGeom>
-          <a:solidFill>
-            <a:srgbClr val="0F172A"/>
-          </a:solidFill>
-          <a:ln>
-            <a:solidFill>
-              <a:srgbClr val="0F172A"/>
-            </a:solidFill>
-          </a:ln>
-        </p:spPr>
-        <p:style>
-          <a:lnRef idx="1">
-            <a:schemeClr val="accent1"/>
-          </a:lnRef>
-          <a:fillRef idx="3">
-            <a:schemeClr val="accent1"/>
-          </a:fillRef>
-          <a:effectRef idx="2">
-            <a:schemeClr val="accent1"/>
-          </a:effectRef>
-          <a:fontRef idx="minor">
-            <a:schemeClr val="lt1"/>
-          </a:fontRef>
-        </p:style>
-        <p:txBody>
-          <a:bodyPr rtlCol="0" anchor="t" wrap="square" tIns="25400" bIns="25400" lIns="76200" rIns="76200"/>
-          <a:lstStyle/>
-          <a:p>
-            <a:pPr algn="ctr"/>
-            <a:r>
-              <a:rPr sz="1200" b="1">
-                <a:solidFill>
-                  <a:srgbClr val="22D3EE"/>
-                </a:solidFill>
-                <a:latin typeface="Arial"/>
-              </a:rPr>
-              <a:t>证据链</a:t>
-            </a:r>
-          </a:p>
-        </p:txBody>
-      </p:sp>
-      <p:sp>
-        <p:nvSpPr>
-          <p:cNvPr id="13" name="TextBox 12"/>
-          <p:cNvSpPr txBox="1"/>
-          <p:nvPr/>
-        </p:nvSpPr>
-        <p:spPr>
-          <a:xfrm>
-            <a:off x="7909560" y="2734056"/>
-            <a:ext cx="3648456" cy="1097280"/>
-          </a:xfrm>
-          <a:prstGeom prst="rect">
-            <a:avLst/>
-          </a:prstGeom>
-          <a:noFill/>
-        </p:spPr>
-        <p:txBody>
-          <a:bodyPr wrap="square" tIns="50800" bIns="50800" lIns="101600" rIns="101600" anchor="t">
-            <a:spAutoFit/>
-          </a:bodyPr>
-          <a:lstStyle/>
+              <a:t>抑制范围漂移</a:t>
+            </a:r>
+          </a:p>
           <a:p>
             <a:pPr>
               <a:spcAft>
@@ -13109,9 +14766,131 @@
                 </a:solidFill>
                 <a:latin typeface="Arial"/>
               </a:rPr>
-              <a:t>tool pipeline（工具执行流水线）里，dedicated tools 是一等能力面</a:t>
-            </a:r>
-          </a:p>
+              <a:t>避免 one-time helper 和过早抽象</a:t>
+            </a:r>
+          </a:p>
+        </p:txBody>
+      </p:sp>
+      <p:sp>
+        <p:nvSpPr>
+          <p:cNvPr id="11" name="Rounded Rectangle 10"/>
+          <p:cNvSpPr/>
+          <p:nvPr/>
+        </p:nvSpPr>
+        <p:spPr>
+          <a:xfrm>
+            <a:off x="7836408" y="2331720"/>
+            <a:ext cx="3794760" cy="1554480"/>
+          </a:xfrm>
+          <a:prstGeom prst="roundRect">
+            <a:avLst/>
+          </a:prstGeom>
+          <a:solidFill>
+            <a:srgbClr val="0A1224"/>
+          </a:solidFill>
+          <a:ln>
+            <a:solidFill>
+              <a:srgbClr val="22D3EE"/>
+            </a:solidFill>
+          </a:ln>
+        </p:spPr>
+        <p:style>
+          <a:lnRef idx="1">
+            <a:schemeClr val="accent1"/>
+          </a:lnRef>
+          <a:fillRef idx="3">
+            <a:schemeClr val="accent1"/>
+          </a:fillRef>
+          <a:effectRef idx="2">
+            <a:schemeClr val="accent1"/>
+          </a:effectRef>
+          <a:fontRef idx="minor">
+            <a:schemeClr val="lt1"/>
+          </a:fontRef>
+        </p:style>
+        <p:txBody>
+          <a:bodyPr rtlCol="0" anchor="ctr"/>
+          <a:lstStyle/>
+          <a:p>
+            <a:pPr algn="ctr"/>
+          </a:p>
+        </p:txBody>
+      </p:sp>
+      <p:sp>
+        <p:nvSpPr>
+          <p:cNvPr id="12" name="Rectangle 11"/>
+          <p:cNvSpPr/>
+          <p:nvPr/>
+        </p:nvSpPr>
+        <p:spPr>
+          <a:xfrm>
+            <a:off x="7836408" y="2331720"/>
+            <a:ext cx="3794760" cy="347472"/>
+          </a:xfrm>
+          <a:prstGeom prst="rect">
+            <a:avLst/>
+          </a:prstGeom>
+          <a:solidFill>
+            <a:srgbClr val="0F172A"/>
+          </a:solidFill>
+          <a:ln>
+            <a:solidFill>
+              <a:srgbClr val="0F172A"/>
+            </a:solidFill>
+          </a:ln>
+        </p:spPr>
+        <p:style>
+          <a:lnRef idx="1">
+            <a:schemeClr val="accent1"/>
+          </a:lnRef>
+          <a:fillRef idx="3">
+            <a:schemeClr val="accent1"/>
+          </a:fillRef>
+          <a:effectRef idx="2">
+            <a:schemeClr val="accent1"/>
+          </a:effectRef>
+          <a:fontRef idx="minor">
+            <a:schemeClr val="lt1"/>
+          </a:fontRef>
+        </p:style>
+        <p:txBody>
+          <a:bodyPr rtlCol="0" anchor="t" wrap="square" tIns="25400" bIns="25400" lIns="76200" rIns="76200"/>
+          <a:lstStyle/>
+          <a:p>
+            <a:pPr algn="ctr"/>
+            <a:r>
+              <a:rPr sz="1200" b="1">
+                <a:solidFill>
+                  <a:srgbClr val="22D3EE"/>
+                </a:solidFill>
+                <a:latin typeface="Arial"/>
+              </a:rPr>
+              <a:t>证据链</a:t>
+            </a:r>
+          </a:p>
+        </p:txBody>
+      </p:sp>
+      <p:sp>
+        <p:nvSpPr>
+          <p:cNvPr id="13" name="TextBox 12"/>
+          <p:cNvSpPr txBox="1"/>
+          <p:nvPr/>
+        </p:nvSpPr>
+        <p:spPr>
+          <a:xfrm>
+            <a:off x="7909560" y="2734056"/>
+            <a:ext cx="3648456" cy="1097280"/>
+          </a:xfrm>
+          <a:prstGeom prst="rect">
+            <a:avLst/>
+          </a:prstGeom>
+          <a:noFill/>
+        </p:spPr>
+        <p:txBody>
+          <a:bodyPr wrap="square" tIns="50800" bIns="50800" lIns="101600" rIns="101600" anchor="t">
+            <a:spAutoFit/>
+          </a:bodyPr>
+          <a:lstStyle/>
           <a:p>
             <a:pPr>
               <a:spcAft>
@@ -13125,7 +14904,23 @@
                 </a:solidFill>
                 <a:latin typeface="Arial"/>
               </a:rPr>
-              <a:t>Bash 是更自由也更高风险的 fallback</a:t>
+              <a:t>prompt stack（提示词栈）本身就在压制不必要改动</a:t>
+            </a:r>
+          </a:p>
+          <a:p>
+            <a:pPr>
+              <a:spcAft>
+                <a:spcPts val="600"/>
+              </a:spcAft>
+            </a:pPr>
+            <a:r>
+              <a:rPr sz="1400" b="0">
+                <a:solidFill>
+                  <a:srgbClr val="E2E8F0"/>
+                </a:solidFill>
+                <a:latin typeface="Arial"/>
+              </a:rPr>
+              <a:t>tool pipeline（工具执行流水线）更适合局部、清晰、可验证的改动</a:t>
             </a:r>
           </a:p>
         </p:txBody>
@@ -13179,8 +14974,8 @@
                 </a:solidFill>
                 <a:latin typeface="Courier New"/>
               </a:rPr>
-              <a:t>default to using the dedicated tool and only fallback on using the Bash tool ...
-Do NOT use the Bash tool to run commands when a relevant dedicated tool is provided.</a:t>
+              <a:t>Don't add features, refactor code, or make "improvements" beyond what was asked.
+Don't create helpers, utilities, or abstractions for one-time operations.</a:t>
             </a:r>
           </a:p>
         </p:txBody>
@@ -13269,7 +15064,7 @@
                 </a:solidFill>
                 <a:latin typeface="Arial"/>
               </a:rPr>
-              <a:t>源码依据：prompts.ts#L301 / #L305，BashTool prompt#L297</a:t>
+              <a:t>源码依据：prompts.ts#L200 / #L203</a:t>
             </a:r>
           </a:p>
         </p:txBody>
